--- a/La-Vallee-de-la-Vision-Etude-biblique.pptx
+++ b/La-Vallee-de-la-Vision-Etude-biblique.pptx
@@ -5,21 +5,23 @@
     <p:sldMasterId id="2147483648" r:id="rId1"/>
   </p:sldMasterIdLst>
   <p:notesMasterIdLst>
-    <p:notesMasterId r:id="rId14"/>
+    <p:notesMasterId r:id="rId16"/>
   </p:notesMasterIdLst>
   <p:sldIdLst>
     <p:sldId id="256" r:id="rId2"/>
-    <p:sldId id="269" r:id="rId3"/>
-    <p:sldId id="289" r:id="rId4"/>
-    <p:sldId id="290" r:id="rId5"/>
-    <p:sldId id="291" r:id="rId6"/>
-    <p:sldId id="292" r:id="rId7"/>
-    <p:sldId id="293" r:id="rId8"/>
-    <p:sldId id="294" r:id="rId9"/>
-    <p:sldId id="295" r:id="rId10"/>
-    <p:sldId id="296" r:id="rId11"/>
-    <p:sldId id="297" r:id="rId12"/>
-    <p:sldId id="279" r:id="rId13"/>
+    <p:sldId id="306" r:id="rId3"/>
+    <p:sldId id="305" r:id="rId4"/>
+    <p:sldId id="307" r:id="rId5"/>
+    <p:sldId id="308" r:id="rId6"/>
+    <p:sldId id="318" r:id="rId7"/>
+    <p:sldId id="310" r:id="rId8"/>
+    <p:sldId id="311" r:id="rId9"/>
+    <p:sldId id="312" r:id="rId10"/>
+    <p:sldId id="321" r:id="rId11"/>
+    <p:sldId id="314" r:id="rId12"/>
+    <p:sldId id="319" r:id="rId13"/>
+    <p:sldId id="320" r:id="rId14"/>
+    <p:sldId id="279" r:id="rId15"/>
   </p:sldIdLst>
   <p:sldSz cx="12188825" cy="6858000"/>
   <p:notesSz cx="6858000" cy="12188825"/>
@@ -126,7 +128,7 @@
 <file path=ppt/revisionInfo.xml><?xml version="1.0" encoding="utf-8"?>
 <p1510:revInfo xmlns:a="http://schemas.openxmlformats.org/drawingml/2006/main" xmlns:r="http://schemas.openxmlformats.org/officeDocument/2006/relationships" xmlns:p1510="http://schemas.microsoft.com/office/powerpoint/2015/10/main">
   <p1510:revLst>
-    <p1510:client id="{806F9150-0F49-40D7-BCCA-1C0152742B58}" v="5" dt="2026-06-25T12:48:36.335"/>
+    <p1510:client id="{806F9150-0F49-40D7-BCCA-1C0152742B58}" v="16" dt="2026-06-27T23:34:53"/>
   </p1510:revLst>
 </p1510:revInfo>
 </file>
@@ -136,18 +138,18 @@
   <pc:docChgLst>
     <pc:chgData name="André-Guy Bruneau" userId="c9f3b82d5570fc32" providerId="LiveId" clId="{C4496A7D-9A64-4B82-9835-F710A7718518}"/>
     <pc:docChg chg="undo custSel addSld delSld modSld">
-      <pc:chgData name="André-Guy Bruneau" userId="c9f3b82d5570fc32" providerId="LiveId" clId="{C4496A7D-9A64-4B82-9835-F710A7718518}" dt="2026-06-25T12:55:55.639" v="783" actId="20577"/>
+      <pc:chgData name="André-Guy Bruneau" userId="c9f3b82d5570fc32" providerId="LiveId" clId="{C4496A7D-9A64-4B82-9835-F710A7718518}" dt="2026-06-27T23:34:53" v="1883"/>
       <pc:docMkLst>
         <pc:docMk/>
       </pc:docMkLst>
       <pc:sldChg chg="modSp mod">
-        <pc:chgData name="André-Guy Bruneau" userId="c9f3b82d5570fc32" providerId="LiveId" clId="{C4496A7D-9A64-4B82-9835-F710A7718518}" dt="2026-06-25T12:18:22.201" v="284" actId="6549"/>
+        <pc:chgData name="André-Guy Bruneau" userId="c9f3b82d5570fc32" providerId="LiveId" clId="{C4496A7D-9A64-4B82-9835-F710A7718518}" dt="2026-06-27T11:34:51.821" v="1026" actId="6549"/>
         <pc:sldMkLst>
           <pc:docMk/>
           <pc:sldMk cId="0" sldId="256"/>
         </pc:sldMkLst>
         <pc:spChg chg="mod">
-          <ac:chgData name="André-Guy Bruneau" userId="c9f3b82d5570fc32" providerId="LiveId" clId="{C4496A7D-9A64-4B82-9835-F710A7718518}" dt="2026-06-25T12:18:22.201" v="284" actId="6549"/>
+          <ac:chgData name="André-Guy Bruneau" userId="c9f3b82d5570fc32" providerId="LiveId" clId="{C4496A7D-9A64-4B82-9835-F710A7718518}" dt="2026-06-27T10:41:55.548" v="821" actId="6549"/>
           <ac:spMkLst>
             <pc:docMk/>
             <pc:sldMk cId="0" sldId="256"/>
@@ -155,7 +157,7 @@
           </ac:spMkLst>
         </pc:spChg>
         <pc:spChg chg="mod">
-          <ac:chgData name="André-Guy Bruneau" userId="c9f3b82d5570fc32" providerId="LiveId" clId="{C4496A7D-9A64-4B82-9835-F710A7718518}" dt="2026-06-25T11:17:28.719" v="6" actId="6549"/>
+          <ac:chgData name="André-Guy Bruneau" userId="c9f3b82d5570fc32" providerId="LiveId" clId="{C4496A7D-9A64-4B82-9835-F710A7718518}" dt="2026-06-27T11:34:51.821" v="1026" actId="6549"/>
           <ac:spMkLst>
             <pc:docMk/>
             <pc:sldMk cId="0" sldId="256"/>
@@ -163,98 +165,22 @@
           </ac:spMkLst>
         </pc:spChg>
       </pc:sldChg>
-      <pc:sldChg chg="del">
-        <pc:chgData name="André-Guy Bruneau" userId="c9f3b82d5570fc32" providerId="LiveId" clId="{C4496A7D-9A64-4B82-9835-F710A7718518}" dt="2026-06-25T11:22:36.387" v="10"/>
-        <pc:sldMkLst>
-          <pc:docMk/>
-          <pc:sldMk cId="0" sldId="257"/>
-        </pc:sldMkLst>
-      </pc:sldChg>
-      <pc:sldChg chg="del">
-        <pc:chgData name="André-Guy Bruneau" userId="c9f3b82d5570fc32" providerId="LiveId" clId="{C4496A7D-9A64-4B82-9835-F710A7718518}" dt="2026-06-25T11:18:15.204" v="8"/>
-        <pc:sldMkLst>
-          <pc:docMk/>
-          <pc:sldMk cId="0" sldId="258"/>
-        </pc:sldMkLst>
-      </pc:sldChg>
-      <pc:sldChg chg="del">
-        <pc:chgData name="André-Guy Bruneau" userId="c9f3b82d5570fc32" providerId="LiveId" clId="{C4496A7D-9A64-4B82-9835-F710A7718518}" dt="2026-06-25T11:22:45.901" v="14"/>
-        <pc:sldMkLst>
-          <pc:docMk/>
-          <pc:sldMk cId="0" sldId="259"/>
-        </pc:sldMkLst>
-      </pc:sldChg>
-      <pc:sldChg chg="del">
-        <pc:chgData name="André-Guy Bruneau" userId="c9f3b82d5570fc32" providerId="LiveId" clId="{C4496A7D-9A64-4B82-9835-F710A7718518}" dt="2026-06-25T11:22:48.928" v="16"/>
-        <pc:sldMkLst>
-          <pc:docMk/>
-          <pc:sldMk cId="0" sldId="260"/>
-        </pc:sldMkLst>
-      </pc:sldChg>
-      <pc:sldChg chg="del">
-        <pc:chgData name="André-Guy Bruneau" userId="c9f3b82d5570fc32" providerId="LiveId" clId="{C4496A7D-9A64-4B82-9835-F710A7718518}" dt="2026-06-25T11:22:52.023" v="18"/>
-        <pc:sldMkLst>
-          <pc:docMk/>
-          <pc:sldMk cId="0" sldId="261"/>
-        </pc:sldMkLst>
-      </pc:sldChg>
-      <pc:sldChg chg="del">
-        <pc:chgData name="André-Guy Bruneau" userId="c9f3b82d5570fc32" providerId="LiveId" clId="{C4496A7D-9A64-4B82-9835-F710A7718518}" dt="2026-06-25T11:22:54.867" v="20"/>
-        <pc:sldMkLst>
-          <pc:docMk/>
-          <pc:sldMk cId="0" sldId="262"/>
-        </pc:sldMkLst>
-      </pc:sldChg>
-      <pc:sldChg chg="del">
-        <pc:chgData name="André-Guy Bruneau" userId="c9f3b82d5570fc32" providerId="LiveId" clId="{C4496A7D-9A64-4B82-9835-F710A7718518}" dt="2026-06-25T11:22:58.195" v="22"/>
-        <pc:sldMkLst>
-          <pc:docMk/>
-          <pc:sldMk cId="0" sldId="263"/>
-        </pc:sldMkLst>
-      </pc:sldChg>
-      <pc:sldChg chg="del">
-        <pc:chgData name="André-Guy Bruneau" userId="c9f3b82d5570fc32" providerId="LiveId" clId="{C4496A7D-9A64-4B82-9835-F710A7718518}" dt="2026-06-25T11:23:00.991" v="24"/>
-        <pc:sldMkLst>
-          <pc:docMk/>
-          <pc:sldMk cId="0" sldId="264"/>
-        </pc:sldMkLst>
-      </pc:sldChg>
-      <pc:sldChg chg="del">
-        <pc:chgData name="André-Guy Bruneau" userId="c9f3b82d5570fc32" providerId="LiveId" clId="{C4496A7D-9A64-4B82-9835-F710A7718518}" dt="2026-06-25T11:23:04.349" v="26"/>
-        <pc:sldMkLst>
-          <pc:docMk/>
-          <pc:sldMk cId="0" sldId="265"/>
-        </pc:sldMkLst>
-      </pc:sldChg>
-      <pc:sldChg chg="del">
-        <pc:chgData name="André-Guy Bruneau" userId="c9f3b82d5570fc32" providerId="LiveId" clId="{C4496A7D-9A64-4B82-9835-F710A7718518}" dt="2026-06-25T11:23:07.156" v="28"/>
-        <pc:sldMkLst>
-          <pc:docMk/>
-          <pc:sldMk cId="0" sldId="266"/>
-        </pc:sldMkLst>
-      </pc:sldChg>
-      <pc:sldChg chg="del">
-        <pc:chgData name="André-Guy Bruneau" userId="c9f3b82d5570fc32" providerId="LiveId" clId="{C4496A7D-9A64-4B82-9835-F710A7718518}" dt="2026-06-25T11:23:09.974" v="30"/>
-        <pc:sldMkLst>
-          <pc:docMk/>
-          <pc:sldMk cId="0" sldId="267"/>
-        </pc:sldMkLst>
-      </pc:sldChg>
-      <pc:sldChg chg="add del">
-        <pc:chgData name="André-Guy Bruneau" userId="c9f3b82d5570fc32" providerId="LiveId" clId="{C4496A7D-9A64-4B82-9835-F710A7718518}" dt="2026-06-25T11:22:39.268" v="12"/>
-        <pc:sldMkLst>
-          <pc:docMk/>
-          <pc:sldMk cId="3595397500" sldId="268"/>
-        </pc:sldMkLst>
-      </pc:sldChg>
-      <pc:sldChg chg="modSp add mod">
-        <pc:chgData name="André-Guy Bruneau" userId="c9f3b82d5570fc32" providerId="LiveId" clId="{C4496A7D-9A64-4B82-9835-F710A7718518}" dt="2026-06-25T12:28:32.844" v="467" actId="20577"/>
+      <pc:sldChg chg="modSp add del mod">
+        <pc:chgData name="André-Guy Bruneau" userId="c9f3b82d5570fc32" providerId="LiveId" clId="{C4496A7D-9A64-4B82-9835-F710A7718518}" dt="2026-06-27T15:16:05.978" v="1781"/>
         <pc:sldMkLst>
           <pc:docMk/>
           <pc:sldMk cId="394863053" sldId="269"/>
         </pc:sldMkLst>
         <pc:spChg chg="mod">
-          <ac:chgData name="André-Guy Bruneau" userId="c9f3b82d5570fc32" providerId="LiveId" clId="{C4496A7D-9A64-4B82-9835-F710A7718518}" dt="2026-06-25T12:28:26.664" v="464" actId="20577"/>
+          <ac:chgData name="André-Guy Bruneau" userId="c9f3b82d5570fc32" providerId="LiveId" clId="{C4496A7D-9A64-4B82-9835-F710A7718518}" dt="2026-06-27T11:37:42.716" v="1069" actId="20577"/>
+          <ac:spMkLst>
+            <pc:docMk/>
+            <pc:sldMk cId="394863053" sldId="269"/>
+            <ac:spMk id="2" creationId="{00000000-0000-0000-0000-000000000000}"/>
+          </ac:spMkLst>
+        </pc:spChg>
+        <pc:spChg chg="mod">
+          <ac:chgData name="André-Guy Bruneau" userId="c9f3b82d5570fc32" providerId="LiveId" clId="{C4496A7D-9A64-4B82-9835-F710A7718518}" dt="2026-06-27T11:37:49.606" v="1073" actId="20577"/>
           <ac:spMkLst>
             <pc:docMk/>
             <pc:sldMk cId="394863053" sldId="269"/>
@@ -262,84 +188,21 @@
           </ac:spMkLst>
         </pc:spChg>
         <pc:spChg chg="mod">
-          <ac:chgData name="André-Guy Bruneau" userId="c9f3b82d5570fc32" providerId="LiveId" clId="{C4496A7D-9A64-4B82-9835-F710A7718518}" dt="2026-06-25T12:28:24.247" v="460" actId="122"/>
+          <ac:chgData name="André-Guy Bruneau" userId="c9f3b82d5570fc32" providerId="LiveId" clId="{C4496A7D-9A64-4B82-9835-F710A7718518}" dt="2026-06-27T11:36:35.192" v="1058" actId="20577"/>
+          <ac:spMkLst>
+            <pc:docMk/>
+            <pc:sldMk cId="394863053" sldId="269"/>
+            <ac:spMk id="8" creationId="{00000000-0000-0000-0000-000000000000}"/>
+          </ac:spMkLst>
+        </pc:spChg>
+        <pc:spChg chg="mod">
+          <ac:chgData name="André-Guy Bruneau" userId="c9f3b82d5570fc32" providerId="LiveId" clId="{C4496A7D-9A64-4B82-9835-F710A7718518}" dt="2026-06-27T11:38:11.378" v="1117" actId="20577"/>
           <ac:spMkLst>
             <pc:docMk/>
             <pc:sldMk cId="394863053" sldId="269"/>
             <ac:spMk id="13" creationId="{00000000-0000-0000-0000-000000000000}"/>
           </ac:spMkLst>
         </pc:spChg>
-        <pc:spChg chg="mod">
-          <ac:chgData name="André-Guy Bruneau" userId="c9f3b82d5570fc32" providerId="LiveId" clId="{C4496A7D-9A64-4B82-9835-F710A7718518}" dt="2026-06-25T12:28:32.844" v="467" actId="20577"/>
-          <ac:spMkLst>
-            <pc:docMk/>
-            <pc:sldMk cId="394863053" sldId="269"/>
-            <ac:spMk id="19" creationId="{00000000-0000-0000-0000-000000000000}"/>
-          </ac:spMkLst>
-        </pc:spChg>
-      </pc:sldChg>
-      <pc:sldChg chg="add del">
-        <pc:chgData name="André-Guy Bruneau" userId="c9f3b82d5570fc32" providerId="LiveId" clId="{C4496A7D-9A64-4B82-9835-F710A7718518}" dt="2026-06-25T11:48:19.286" v="32"/>
-        <pc:sldMkLst>
-          <pc:docMk/>
-          <pc:sldMk cId="1261791224" sldId="270"/>
-        </pc:sldMkLst>
-      </pc:sldChg>
-      <pc:sldChg chg="add del">
-        <pc:chgData name="André-Guy Bruneau" userId="c9f3b82d5570fc32" providerId="LiveId" clId="{C4496A7D-9A64-4B82-9835-F710A7718518}" dt="2026-06-25T11:48:24.952" v="34"/>
-        <pc:sldMkLst>
-          <pc:docMk/>
-          <pc:sldMk cId="1192326940" sldId="271"/>
-        </pc:sldMkLst>
-      </pc:sldChg>
-      <pc:sldChg chg="add del">
-        <pc:chgData name="André-Guy Bruneau" userId="c9f3b82d5570fc32" providerId="LiveId" clId="{C4496A7D-9A64-4B82-9835-F710A7718518}" dt="2026-06-25T11:48:30.483" v="36"/>
-        <pc:sldMkLst>
-          <pc:docMk/>
-          <pc:sldMk cId="2725324400" sldId="272"/>
-        </pc:sldMkLst>
-      </pc:sldChg>
-      <pc:sldChg chg="add del">
-        <pc:chgData name="André-Guy Bruneau" userId="c9f3b82d5570fc32" providerId="LiveId" clId="{C4496A7D-9A64-4B82-9835-F710A7718518}" dt="2026-06-25T11:48:50.688" v="38"/>
-        <pc:sldMkLst>
-          <pc:docMk/>
-          <pc:sldMk cId="997212324" sldId="273"/>
-        </pc:sldMkLst>
-      </pc:sldChg>
-      <pc:sldChg chg="add del">
-        <pc:chgData name="André-Guy Bruneau" userId="c9f3b82d5570fc32" providerId="LiveId" clId="{C4496A7D-9A64-4B82-9835-F710A7718518}" dt="2026-06-25T11:48:56.735" v="40"/>
-        <pc:sldMkLst>
-          <pc:docMk/>
-          <pc:sldMk cId="1272647892" sldId="274"/>
-        </pc:sldMkLst>
-      </pc:sldChg>
-      <pc:sldChg chg="add del">
-        <pc:chgData name="André-Guy Bruneau" userId="c9f3b82d5570fc32" providerId="LiveId" clId="{C4496A7D-9A64-4B82-9835-F710A7718518}" dt="2026-06-25T11:49:02.005" v="42"/>
-        <pc:sldMkLst>
-          <pc:docMk/>
-          <pc:sldMk cId="1607424747" sldId="275"/>
-        </pc:sldMkLst>
-      </pc:sldChg>
-      <pc:sldChg chg="add del">
-        <pc:chgData name="André-Guy Bruneau" userId="c9f3b82d5570fc32" providerId="LiveId" clId="{C4496A7D-9A64-4B82-9835-F710A7718518}" dt="2026-06-25T11:49:06.939" v="44"/>
-        <pc:sldMkLst>
-          <pc:docMk/>
-          <pc:sldMk cId="3922767143" sldId="276"/>
-        </pc:sldMkLst>
-      </pc:sldChg>
-      <pc:sldChg chg="add del">
-        <pc:chgData name="André-Guy Bruneau" userId="c9f3b82d5570fc32" providerId="LiveId" clId="{C4496A7D-9A64-4B82-9835-F710A7718518}" dt="2026-06-25T11:49:28.732" v="46"/>
-        <pc:sldMkLst>
-          <pc:docMk/>
-          <pc:sldMk cId="344985286" sldId="277"/>
-        </pc:sldMkLst>
-      </pc:sldChg>
-      <pc:sldChg chg="add del">
-        <pc:chgData name="André-Guy Bruneau" userId="c9f3b82d5570fc32" providerId="LiveId" clId="{C4496A7D-9A64-4B82-9835-F710A7718518}" dt="2026-06-25T11:49:35.053" v="48"/>
-        <pc:sldMkLst>
-          <pc:docMk/>
-          <pc:sldMk cId="901957569" sldId="278"/>
-        </pc:sldMkLst>
       </pc:sldChg>
       <pc:sldChg chg="add">
         <pc:chgData name="André-Guy Bruneau" userId="c9f3b82d5570fc32" providerId="LiveId" clId="{C4496A7D-9A64-4B82-9835-F710A7718518}" dt="2026-06-25T11:23:09.973" v="29"/>
@@ -349,92 +212,13 @@
         </pc:sldMkLst>
       </pc:sldChg>
       <pc:sldChg chg="modSp add del mod">
-        <pc:chgData name="André-Guy Bruneau" userId="c9f3b82d5570fc32" providerId="LiveId" clId="{C4496A7D-9A64-4B82-9835-F710A7718518}" dt="2026-06-25T12:09:30.230" v="108"/>
-        <pc:sldMkLst>
-          <pc:docMk/>
-          <pc:sldMk cId="1500044496" sldId="280"/>
-        </pc:sldMkLst>
-        <pc:spChg chg="mod">
-          <ac:chgData name="André-Guy Bruneau" userId="c9f3b82d5570fc32" providerId="LiveId" clId="{C4496A7D-9A64-4B82-9835-F710A7718518}" dt="2026-06-25T12:08:30.238" v="86" actId="122"/>
-          <ac:spMkLst>
-            <pc:docMk/>
-            <pc:sldMk cId="1500044496" sldId="280"/>
-            <ac:spMk id="9" creationId="{00000000-0000-0000-0000-000000000000}"/>
-          </ac:spMkLst>
-        </pc:spChg>
-      </pc:sldChg>
-      <pc:sldChg chg="add del">
-        <pc:chgData name="André-Guy Bruneau" userId="c9f3b82d5570fc32" providerId="LiveId" clId="{C4496A7D-9A64-4B82-9835-F710A7718518}" dt="2026-06-25T12:09:31.639" v="119"/>
-        <pc:sldMkLst>
-          <pc:docMk/>
-          <pc:sldMk cId="3310853887" sldId="281"/>
-        </pc:sldMkLst>
-      </pc:sldChg>
-      <pc:sldChg chg="add del">
-        <pc:chgData name="André-Guy Bruneau" userId="c9f3b82d5570fc32" providerId="LiveId" clId="{C4496A7D-9A64-4B82-9835-F710A7718518}" dt="2026-06-25T12:09:34.464" v="121"/>
-        <pc:sldMkLst>
-          <pc:docMk/>
-          <pc:sldMk cId="2564871252" sldId="282"/>
-        </pc:sldMkLst>
-      </pc:sldChg>
-      <pc:sldChg chg="add del">
-        <pc:chgData name="André-Guy Bruneau" userId="c9f3b82d5570fc32" providerId="LiveId" clId="{C4496A7D-9A64-4B82-9835-F710A7718518}" dt="2026-06-25T12:09:36.823" v="123"/>
-        <pc:sldMkLst>
-          <pc:docMk/>
-          <pc:sldMk cId="3298234930" sldId="283"/>
-        </pc:sldMkLst>
-      </pc:sldChg>
-      <pc:sldChg chg="add del">
-        <pc:chgData name="André-Guy Bruneau" userId="c9f3b82d5570fc32" providerId="LiveId" clId="{C4496A7D-9A64-4B82-9835-F710A7718518}" dt="2026-06-25T12:09:40.139" v="125"/>
-        <pc:sldMkLst>
-          <pc:docMk/>
-          <pc:sldMk cId="2562996077" sldId="284"/>
-        </pc:sldMkLst>
-      </pc:sldChg>
-      <pc:sldChg chg="add del">
-        <pc:chgData name="André-Guy Bruneau" userId="c9f3b82d5570fc32" providerId="LiveId" clId="{C4496A7D-9A64-4B82-9835-F710A7718518}" dt="2026-06-25T12:09:42.256" v="133"/>
-        <pc:sldMkLst>
-          <pc:docMk/>
-          <pc:sldMk cId="2129594775" sldId="285"/>
-        </pc:sldMkLst>
-      </pc:sldChg>
-      <pc:sldChg chg="add del">
-        <pc:chgData name="André-Guy Bruneau" userId="c9f3b82d5570fc32" providerId="LiveId" clId="{C4496A7D-9A64-4B82-9835-F710A7718518}" dt="2026-06-25T12:09:44.909" v="137"/>
-        <pc:sldMkLst>
-          <pc:docMk/>
-          <pc:sldMk cId="3390687217" sldId="286"/>
-        </pc:sldMkLst>
-      </pc:sldChg>
-      <pc:sldChg chg="add del">
-        <pc:chgData name="André-Guy Bruneau" userId="c9f3b82d5570fc32" providerId="LiveId" clId="{C4496A7D-9A64-4B82-9835-F710A7718518}" dt="2026-06-25T12:09:47.184" v="139"/>
-        <pc:sldMkLst>
-          <pc:docMk/>
-          <pc:sldMk cId="2630992016" sldId="287"/>
-        </pc:sldMkLst>
-      </pc:sldChg>
-      <pc:sldChg chg="add del">
-        <pc:chgData name="André-Guy Bruneau" userId="c9f3b82d5570fc32" providerId="LiveId" clId="{C4496A7D-9A64-4B82-9835-F710A7718518}" dt="2026-06-25T12:09:49.672" v="141"/>
-        <pc:sldMkLst>
-          <pc:docMk/>
-          <pc:sldMk cId="38219719" sldId="288"/>
-        </pc:sldMkLst>
-      </pc:sldChg>
-      <pc:sldChg chg="modSp add mod">
-        <pc:chgData name="André-Guy Bruneau" userId="c9f3b82d5570fc32" providerId="LiveId" clId="{C4496A7D-9A64-4B82-9835-F710A7718518}" dt="2026-06-25T12:29:48.137" v="521" actId="20577"/>
+        <pc:chgData name="André-Guy Bruneau" userId="c9f3b82d5570fc32" providerId="LiveId" clId="{C4496A7D-9A64-4B82-9835-F710A7718518}" dt="2026-06-27T15:00:38.726" v="1777"/>
         <pc:sldMkLst>
           <pc:docMk/>
           <pc:sldMk cId="1014915409" sldId="289"/>
         </pc:sldMkLst>
         <pc:spChg chg="mod">
-          <ac:chgData name="André-Guy Bruneau" userId="c9f3b82d5570fc32" providerId="LiveId" clId="{C4496A7D-9A64-4B82-9835-F710A7718518}" dt="2026-06-25T12:19:31.689" v="329" actId="122"/>
-          <ac:spMkLst>
-            <pc:docMk/>
-            <pc:sldMk cId="1014915409" sldId="289"/>
-            <ac:spMk id="8" creationId="{00000000-0000-0000-0000-000000000000}"/>
-          </ac:spMkLst>
-        </pc:spChg>
-        <pc:spChg chg="mod">
-          <ac:chgData name="André-Guy Bruneau" userId="c9f3b82d5570fc32" providerId="LiveId" clId="{C4496A7D-9A64-4B82-9835-F710A7718518}" dt="2026-06-25T12:26:46.413" v="395" actId="20577"/>
+          <ac:chgData name="André-Guy Bruneau" userId="c9f3b82d5570fc32" providerId="LiveId" clId="{C4496A7D-9A64-4B82-9835-F710A7718518}" dt="2026-06-27T11:40:35.737" v="1133" actId="20577"/>
           <ac:spMkLst>
             <pc:docMk/>
             <pc:sldMk cId="1014915409" sldId="289"/>
@@ -442,15 +226,7 @@
           </ac:spMkLst>
         </pc:spChg>
         <pc:spChg chg="mod">
-          <ac:chgData name="André-Guy Bruneau" userId="c9f3b82d5570fc32" providerId="LiveId" clId="{C4496A7D-9A64-4B82-9835-F710A7718518}" dt="2026-06-25T12:19:29.336" v="328" actId="122"/>
-          <ac:spMkLst>
-            <pc:docMk/>
-            <pc:sldMk cId="1014915409" sldId="289"/>
-            <ac:spMk id="14" creationId="{00000000-0000-0000-0000-000000000000}"/>
-          </ac:spMkLst>
-        </pc:spChg>
-        <pc:spChg chg="mod">
-          <ac:chgData name="André-Guy Bruneau" userId="c9f3b82d5570fc32" providerId="LiveId" clId="{C4496A7D-9A64-4B82-9835-F710A7718518}" dt="2026-06-25T12:27:20.374" v="421" actId="20577"/>
+          <ac:chgData name="André-Guy Bruneau" userId="c9f3b82d5570fc32" providerId="LiveId" clId="{C4496A7D-9A64-4B82-9835-F710A7718518}" dt="2026-06-27T11:52:22.514" v="1631" actId="20577"/>
           <ac:spMkLst>
             <pc:docMk/>
             <pc:sldMk cId="1014915409" sldId="289"/>
@@ -458,15 +234,7 @@
           </ac:spMkLst>
         </pc:spChg>
         <pc:spChg chg="mod">
-          <ac:chgData name="André-Guy Bruneau" userId="c9f3b82d5570fc32" providerId="LiveId" clId="{C4496A7D-9A64-4B82-9835-F710A7718518}" dt="2026-06-25T12:19:37.670" v="335" actId="122"/>
-          <ac:spMkLst>
-            <pc:docMk/>
-            <pc:sldMk cId="1014915409" sldId="289"/>
-            <ac:spMk id="20" creationId="{00000000-0000-0000-0000-000000000000}"/>
-          </ac:spMkLst>
-        </pc:spChg>
-        <pc:spChg chg="mod">
-          <ac:chgData name="André-Guy Bruneau" userId="c9f3b82d5570fc32" providerId="LiveId" clId="{C4496A7D-9A64-4B82-9835-F710A7718518}" dt="2026-06-25T12:29:48.137" v="521" actId="20577"/>
+          <ac:chgData name="André-Guy Bruneau" userId="c9f3b82d5570fc32" providerId="LiveId" clId="{C4496A7D-9A64-4B82-9835-F710A7718518}" dt="2026-06-27T11:57:51.944" v="1775" actId="20577"/>
           <ac:spMkLst>
             <pc:docMk/>
             <pc:sldMk cId="1014915409" sldId="289"/>
@@ -474,156 +242,432 @@
           </ac:spMkLst>
         </pc:spChg>
       </pc:sldChg>
-      <pc:sldChg chg="modSp add mod">
-        <pc:chgData name="André-Guy Bruneau" userId="c9f3b82d5570fc32" providerId="LiveId" clId="{C4496A7D-9A64-4B82-9835-F710A7718518}" dt="2026-06-25T12:32:51.320" v="527" actId="20577"/>
+      <pc:sldChg chg="modSp add del mod">
+        <pc:chgData name="André-Guy Bruneau" userId="c9f3b82d5570fc32" providerId="LiveId" clId="{C4496A7D-9A64-4B82-9835-F710A7718518}" dt="2026-06-27T15:17:41.324" v="1787"/>
         <pc:sldMkLst>
           <pc:docMk/>
           <pc:sldMk cId="3304258000" sldId="290"/>
         </pc:sldMkLst>
-        <pc:spChg chg="mod">
-          <ac:chgData name="André-Guy Bruneau" userId="c9f3b82d5570fc32" providerId="LiveId" clId="{C4496A7D-9A64-4B82-9835-F710A7718518}" dt="2026-06-25T12:32:10.699" v="523" actId="20577"/>
-          <ac:spMkLst>
-            <pc:docMk/>
-            <pc:sldMk cId="3304258000" sldId="290"/>
-            <ac:spMk id="2" creationId="{00000000-0000-0000-0000-000000000000}"/>
-          </ac:spMkLst>
-        </pc:spChg>
-        <pc:spChg chg="mod">
-          <ac:chgData name="André-Guy Bruneau" userId="c9f3b82d5570fc32" providerId="LiveId" clId="{C4496A7D-9A64-4B82-9835-F710A7718518}" dt="2026-06-25T12:28:03.510" v="442" actId="20577"/>
-          <ac:spMkLst>
-            <pc:docMk/>
-            <pc:sldMk cId="3304258000" sldId="290"/>
-            <ac:spMk id="8" creationId="{00000000-0000-0000-0000-000000000000}"/>
-          </ac:spMkLst>
-        </pc:spChg>
-        <pc:spChg chg="mod">
-          <ac:chgData name="André-Guy Bruneau" userId="c9f3b82d5570fc32" providerId="LiveId" clId="{C4496A7D-9A64-4B82-9835-F710A7718518}" dt="2026-06-25T12:32:51.320" v="527" actId="20577"/>
-          <ac:spMkLst>
-            <pc:docMk/>
-            <pc:sldMk cId="3304258000" sldId="290"/>
-            <ac:spMk id="13" creationId="{00000000-0000-0000-0000-000000000000}"/>
-          </ac:spMkLst>
-        </pc:spChg>
       </pc:sldChg>
-      <pc:sldChg chg="modSp add mod">
-        <pc:chgData name="André-Guy Bruneau" userId="c9f3b82d5570fc32" providerId="LiveId" clId="{C4496A7D-9A64-4B82-9835-F710A7718518}" dt="2026-06-25T12:41:41.091" v="608" actId="6549"/>
+      <pc:sldChg chg="modSp add del mod">
+        <pc:chgData name="André-Guy Bruneau" userId="c9f3b82d5570fc32" providerId="LiveId" clId="{C4496A7D-9A64-4B82-9835-F710A7718518}" dt="2026-06-27T15:18:02.090" v="1789"/>
         <pc:sldMkLst>
           <pc:docMk/>
           <pc:sldMk cId="2732842191" sldId="291"/>
         </pc:sldMkLst>
-        <pc:spChg chg="mod">
-          <ac:chgData name="André-Guy Bruneau" userId="c9f3b82d5570fc32" providerId="LiveId" clId="{C4496A7D-9A64-4B82-9835-F710A7718518}" dt="2026-06-25T12:35:40.173" v="528" actId="1076"/>
-          <ac:spMkLst>
-            <pc:docMk/>
-            <pc:sldMk cId="2732842191" sldId="291"/>
-            <ac:spMk id="3" creationId="{00000000-0000-0000-0000-000000000000}"/>
-          </ac:spMkLst>
-        </pc:spChg>
-        <pc:spChg chg="mod">
-          <ac:chgData name="André-Guy Bruneau" userId="c9f3b82d5570fc32" providerId="LiveId" clId="{C4496A7D-9A64-4B82-9835-F710A7718518}" dt="2026-06-25T12:38:00.258" v="570" actId="6549"/>
-          <ac:spMkLst>
-            <pc:docMk/>
-            <pc:sldMk cId="2732842191" sldId="291"/>
-            <ac:spMk id="4" creationId="{00000000-0000-0000-0000-000000000000}"/>
-          </ac:spMkLst>
-        </pc:spChg>
-        <pc:spChg chg="mod">
-          <ac:chgData name="André-Guy Bruneau" userId="c9f3b82d5570fc32" providerId="LiveId" clId="{C4496A7D-9A64-4B82-9835-F710A7718518}" dt="2026-06-25T12:41:30.593" v="599" actId="6549"/>
-          <ac:spMkLst>
-            <pc:docMk/>
-            <pc:sldMk cId="2732842191" sldId="291"/>
-            <ac:spMk id="6" creationId="{00000000-0000-0000-0000-000000000000}"/>
-          </ac:spMkLst>
-        </pc:spChg>
-        <pc:spChg chg="mod">
-          <ac:chgData name="André-Guy Bruneau" userId="c9f3b82d5570fc32" providerId="LiveId" clId="{C4496A7D-9A64-4B82-9835-F710A7718518}" dt="2026-06-25T12:41:41.091" v="608" actId="6549"/>
-          <ac:spMkLst>
-            <pc:docMk/>
-            <pc:sldMk cId="2732842191" sldId="291"/>
-            <ac:spMk id="8" creationId="{00000000-0000-0000-0000-000000000000}"/>
-          </ac:spMkLst>
-        </pc:spChg>
       </pc:sldChg>
-      <pc:sldChg chg="modSp add mod">
-        <pc:chgData name="André-Guy Bruneau" userId="c9f3b82d5570fc32" providerId="LiveId" clId="{C4496A7D-9A64-4B82-9835-F710A7718518}" dt="2026-06-25T12:51:27.549" v="709" actId="20577"/>
+      <pc:sldChg chg="modSp add del mod">
+        <pc:chgData name="André-Guy Bruneau" userId="c9f3b82d5570fc32" providerId="LiveId" clId="{C4496A7D-9A64-4B82-9835-F710A7718518}" dt="2026-06-27T15:18:55.718" v="1791"/>
         <pc:sldMkLst>
           <pc:docMk/>
           <pc:sldMk cId="3373682352" sldId="292"/>
         </pc:sldMkLst>
-        <pc:spChg chg="mod">
-          <ac:chgData name="André-Guy Bruneau" userId="c9f3b82d5570fc32" providerId="LiveId" clId="{C4496A7D-9A64-4B82-9835-F710A7718518}" dt="2026-06-25T12:42:22.663" v="620" actId="20577"/>
-          <ac:spMkLst>
-            <pc:docMk/>
-            <pc:sldMk cId="3373682352" sldId="292"/>
-            <ac:spMk id="4" creationId="{00000000-0000-0000-0000-000000000000}"/>
-          </ac:spMkLst>
-        </pc:spChg>
-        <pc:spChg chg="mod">
-          <ac:chgData name="André-Guy Bruneau" userId="c9f3b82d5570fc32" providerId="LiveId" clId="{C4496A7D-9A64-4B82-9835-F710A7718518}" dt="2026-06-25T12:47:50.508" v="655" actId="20577"/>
-          <ac:spMkLst>
-            <pc:docMk/>
-            <pc:sldMk cId="3373682352" sldId="292"/>
-            <ac:spMk id="6" creationId="{00000000-0000-0000-0000-000000000000}"/>
-          </ac:spMkLst>
-        </pc:spChg>
-        <pc:spChg chg="mod">
-          <ac:chgData name="André-Guy Bruneau" userId="c9f3b82d5570fc32" providerId="LiveId" clId="{C4496A7D-9A64-4B82-9835-F710A7718518}" dt="2026-06-25T12:51:27.549" v="709" actId="20577"/>
-          <ac:spMkLst>
-            <pc:docMk/>
-            <pc:sldMk cId="3373682352" sldId="292"/>
-            <ac:spMk id="9" creationId="{00000000-0000-0000-0000-000000000000}"/>
-          </ac:spMkLst>
-        </pc:spChg>
       </pc:sldChg>
-      <pc:sldChg chg="modSp add mod">
-        <pc:chgData name="André-Guy Bruneau" userId="c9f3b82d5570fc32" providerId="LiveId" clId="{C4496A7D-9A64-4B82-9835-F710A7718518}" dt="2026-06-25T12:55:55.639" v="783" actId="20577"/>
+      <pc:sldChg chg="modSp add del mod">
+        <pc:chgData name="André-Guy Bruneau" userId="c9f3b82d5570fc32" providerId="LiveId" clId="{C4496A7D-9A64-4B82-9835-F710A7718518}" dt="2026-06-27T15:19:09.080" v="1793"/>
         <pc:sldMkLst>
           <pc:docMk/>
           <pc:sldMk cId="70202141" sldId="293"/>
         </pc:sldMkLst>
-        <pc:spChg chg="mod">
-          <ac:chgData name="André-Guy Bruneau" userId="c9f3b82d5570fc32" providerId="LiveId" clId="{C4496A7D-9A64-4B82-9835-F710A7718518}" dt="2026-06-25T12:50:07.952" v="699" actId="20577"/>
-          <ac:spMkLst>
-            <pc:docMk/>
-            <pc:sldMk cId="70202141" sldId="293"/>
-            <ac:spMk id="6" creationId="{00000000-0000-0000-0000-000000000000}"/>
-          </ac:spMkLst>
-        </pc:spChg>
-        <pc:spChg chg="mod">
-          <ac:chgData name="André-Guy Bruneau" userId="c9f3b82d5570fc32" providerId="LiveId" clId="{C4496A7D-9A64-4B82-9835-F710A7718518}" dt="2026-06-25T12:55:55.639" v="783" actId="20577"/>
-          <ac:spMkLst>
-            <pc:docMk/>
-            <pc:sldMk cId="70202141" sldId="293"/>
-            <ac:spMk id="9" creationId="{00000000-0000-0000-0000-000000000000}"/>
-          </ac:spMkLst>
-        </pc:spChg>
       </pc:sldChg>
-      <pc:sldChg chg="add">
-        <pc:chgData name="André-Guy Bruneau" userId="c9f3b82d5570fc32" providerId="LiveId" clId="{C4496A7D-9A64-4B82-9835-F710A7718518}" dt="2026-06-25T12:09:42.256" v="132"/>
+      <pc:sldChg chg="modSp add del mod">
+        <pc:chgData name="André-Guy Bruneau" userId="c9f3b82d5570fc32" providerId="LiveId" clId="{C4496A7D-9A64-4B82-9835-F710A7718518}" dt="2026-06-27T15:19:15.624" v="1795"/>
         <pc:sldMkLst>
           <pc:docMk/>
           <pc:sldMk cId="362923616" sldId="294"/>
         </pc:sldMkLst>
+        <pc:spChg chg="mod">
+          <ac:chgData name="André-Guy Bruneau" userId="c9f3b82d5570fc32" providerId="LiveId" clId="{C4496A7D-9A64-4B82-9835-F710A7718518}" dt="2026-06-26T11:16:36.993" v="784" actId="255"/>
+          <ac:spMkLst>
+            <pc:docMk/>
+            <pc:sldMk cId="362923616" sldId="294"/>
+            <ac:spMk id="6" creationId="{00000000-0000-0000-0000-000000000000}"/>
+          </ac:spMkLst>
+        </pc:spChg>
       </pc:sldChg>
-      <pc:sldChg chg="add">
-        <pc:chgData name="André-Guy Bruneau" userId="c9f3b82d5570fc32" providerId="LiveId" clId="{C4496A7D-9A64-4B82-9835-F710A7718518}" dt="2026-06-25T12:09:44.907" v="136"/>
+      <pc:sldChg chg="add del">
+        <pc:chgData name="André-Guy Bruneau" userId="c9f3b82d5570fc32" providerId="LiveId" clId="{C4496A7D-9A64-4B82-9835-F710A7718518}" dt="2026-06-27T15:19:22.228" v="1797"/>
         <pc:sldMkLst>
           <pc:docMk/>
           <pc:sldMk cId="2082676983" sldId="295"/>
         </pc:sldMkLst>
       </pc:sldChg>
-      <pc:sldChg chg="add">
-        <pc:chgData name="André-Guy Bruneau" userId="c9f3b82d5570fc32" providerId="LiveId" clId="{C4496A7D-9A64-4B82-9835-F710A7718518}" dt="2026-06-25T12:09:47.180" v="138"/>
+      <pc:sldChg chg="add del">
+        <pc:chgData name="André-Guy Bruneau" userId="c9f3b82d5570fc32" providerId="LiveId" clId="{C4496A7D-9A64-4B82-9835-F710A7718518}" dt="2026-06-27T15:19:51.355" v="1799"/>
         <pc:sldMkLst>
           <pc:docMk/>
           <pc:sldMk cId="4144892426" sldId="296"/>
         </pc:sldMkLst>
       </pc:sldChg>
-      <pc:sldChg chg="add">
-        <pc:chgData name="André-Guy Bruneau" userId="c9f3b82d5570fc32" providerId="LiveId" clId="{C4496A7D-9A64-4B82-9835-F710A7718518}" dt="2026-06-25T12:09:49.669" v="140"/>
+      <pc:sldChg chg="add del">
+        <pc:chgData name="André-Guy Bruneau" userId="c9f3b82d5570fc32" providerId="LiveId" clId="{C4496A7D-9A64-4B82-9835-F710A7718518}" dt="2026-06-27T15:19:59.353" v="1801"/>
         <pc:sldMkLst>
           <pc:docMk/>
           <pc:sldMk cId="4122083313" sldId="297"/>
+        </pc:sldMkLst>
+      </pc:sldChg>
+      <pc:sldChg chg="add del">
+        <pc:chgData name="André-Guy Bruneau" userId="c9f3b82d5570fc32" providerId="LiveId" clId="{C4496A7D-9A64-4B82-9835-F710A7718518}" dt="2026-06-27T10:38:51.134" v="798"/>
+        <pc:sldMkLst>
+          <pc:docMk/>
+          <pc:sldMk cId="1429210052" sldId="298"/>
+        </pc:sldMkLst>
+      </pc:sldChg>
+      <pc:sldChg chg="add del">
+        <pc:chgData name="André-Guy Bruneau" userId="c9f3b82d5570fc32" providerId="LiveId" clId="{C4496A7D-9A64-4B82-9835-F710A7718518}" dt="2026-06-27T10:33:25.496" v="792" actId="47"/>
+        <pc:sldMkLst>
+          <pc:docMk/>
+          <pc:sldMk cId="3481345228" sldId="298"/>
+        </pc:sldMkLst>
+      </pc:sldChg>
+      <pc:sldChg chg="add del">
+        <pc:chgData name="André-Guy Bruneau" userId="c9f3b82d5570fc32" providerId="LiveId" clId="{C4496A7D-9A64-4B82-9835-F710A7718518}" dt="2026-06-27T10:34:03.117" v="795" actId="47"/>
+        <pc:sldMkLst>
+          <pc:docMk/>
+          <pc:sldMk cId="3186657740" sldId="299"/>
+        </pc:sldMkLst>
+      </pc:sldChg>
+      <pc:sldChg chg="add del">
+        <pc:chgData name="André-Guy Bruneau" userId="c9f3b82d5570fc32" providerId="LiveId" clId="{C4496A7D-9A64-4B82-9835-F710A7718518}" dt="2026-06-27T10:43:12.052" v="823"/>
+        <pc:sldMkLst>
+          <pc:docMk/>
+          <pc:sldMk cId="3335174641" sldId="299"/>
+        </pc:sldMkLst>
+      </pc:sldChg>
+      <pc:sldChg chg="add del">
+        <pc:chgData name="André-Guy Bruneau" userId="c9f3b82d5570fc32" providerId="LiveId" clId="{C4496A7D-9A64-4B82-9835-F710A7718518}" dt="2026-06-27T10:40:33.837" v="801"/>
+        <pc:sldMkLst>
+          <pc:docMk/>
+          <pc:sldMk cId="3329028927" sldId="300"/>
+        </pc:sldMkLst>
+      </pc:sldChg>
+      <pc:sldChg chg="add del">
+        <pc:chgData name="André-Guy Bruneau" userId="c9f3b82d5570fc32" providerId="LiveId" clId="{C4496A7D-9A64-4B82-9835-F710A7718518}" dt="2026-06-27T10:44:36.734" v="825"/>
+        <pc:sldMkLst>
+          <pc:docMk/>
+          <pc:sldMk cId="2840570395" sldId="301"/>
+        </pc:sldMkLst>
+      </pc:sldChg>
+      <pc:sldChg chg="modSp add del mod">
+        <pc:chgData name="André-Guy Bruneau" userId="c9f3b82d5570fc32" providerId="LiveId" clId="{C4496A7D-9A64-4B82-9835-F710A7718518}" dt="2026-06-27T15:16:50.384" v="1783"/>
+        <pc:sldMkLst>
+          <pc:docMk/>
+          <pc:sldMk cId="3878747934" sldId="302"/>
+        </pc:sldMkLst>
+        <pc:spChg chg="mod">
+          <ac:chgData name="André-Guy Bruneau" userId="c9f3b82d5570fc32" providerId="LiveId" clId="{C4496A7D-9A64-4B82-9835-F710A7718518}" dt="2026-06-27T11:25:12.220" v="873" actId="20577"/>
+          <ac:spMkLst>
+            <pc:docMk/>
+            <pc:sldMk cId="3878747934" sldId="302"/>
+            <ac:spMk id="204" creationId="{00000000-0000-0000-0000-000000000000}"/>
+          </ac:spMkLst>
+        </pc:spChg>
+        <pc:spChg chg="mod">
+          <ac:chgData name="André-Guy Bruneau" userId="c9f3b82d5570fc32" providerId="LiveId" clId="{C4496A7D-9A64-4B82-9835-F710A7718518}" dt="2026-06-27T11:25:32.329" v="891" actId="20577"/>
+          <ac:spMkLst>
+            <pc:docMk/>
+            <pc:sldMk cId="3878747934" sldId="302"/>
+            <ac:spMk id="209" creationId="{00000000-0000-0000-0000-000000000000}"/>
+          </ac:spMkLst>
+        </pc:spChg>
+        <pc:spChg chg="mod">
+          <ac:chgData name="André-Guy Bruneau" userId="c9f3b82d5570fc32" providerId="LiveId" clId="{C4496A7D-9A64-4B82-9835-F710A7718518}" dt="2026-06-27T11:25:48.673" v="904" actId="20577"/>
+          <ac:spMkLst>
+            <pc:docMk/>
+            <pc:sldMk cId="3878747934" sldId="302"/>
+            <ac:spMk id="214" creationId="{00000000-0000-0000-0000-000000000000}"/>
+          </ac:spMkLst>
+        </pc:spChg>
+        <pc:spChg chg="mod">
+          <ac:chgData name="André-Guy Bruneau" userId="c9f3b82d5570fc32" providerId="LiveId" clId="{C4496A7D-9A64-4B82-9835-F710A7718518}" dt="2026-06-27T11:26:06.863" v="914" actId="20577"/>
+          <ac:spMkLst>
+            <pc:docMk/>
+            <pc:sldMk cId="3878747934" sldId="302"/>
+            <ac:spMk id="219" creationId="{00000000-0000-0000-0000-000000000000}"/>
+          </ac:spMkLst>
+        </pc:spChg>
+        <pc:spChg chg="mod">
+          <ac:chgData name="André-Guy Bruneau" userId="c9f3b82d5570fc32" providerId="LiveId" clId="{C4496A7D-9A64-4B82-9835-F710A7718518}" dt="2026-06-27T11:26:48.207" v="928" actId="20577"/>
+          <ac:spMkLst>
+            <pc:docMk/>
+            <pc:sldMk cId="3878747934" sldId="302"/>
+            <ac:spMk id="224" creationId="{00000000-0000-0000-0000-000000000000}"/>
+          </ac:spMkLst>
+        </pc:spChg>
+      </pc:sldChg>
+      <pc:sldChg chg="modSp add del mod">
+        <pc:chgData name="André-Guy Bruneau" userId="c9f3b82d5570fc32" providerId="LiveId" clId="{C4496A7D-9A64-4B82-9835-F710A7718518}" dt="2026-06-27T15:17:13.589" v="1785"/>
+        <pc:sldMkLst>
+          <pc:docMk/>
+          <pc:sldMk cId="4194183058" sldId="303"/>
+        </pc:sldMkLst>
+        <pc:spChg chg="mod">
+          <ac:chgData name="André-Guy Bruneau" userId="c9f3b82d5570fc32" providerId="LiveId" clId="{C4496A7D-9A64-4B82-9835-F710A7718518}" dt="2026-06-27T11:27:41.187" v="943" actId="20577"/>
+          <ac:spMkLst>
+            <pc:docMk/>
+            <pc:sldMk cId="4194183058" sldId="303"/>
+            <ac:spMk id="204" creationId="{00000000-0000-0000-0000-000000000000}"/>
+          </ac:spMkLst>
+        </pc:spChg>
+        <pc:spChg chg="mod">
+          <ac:chgData name="André-Guy Bruneau" userId="c9f3b82d5570fc32" providerId="LiveId" clId="{C4496A7D-9A64-4B82-9835-F710A7718518}" dt="2026-06-27T11:27:51.636" v="959" actId="20577"/>
+          <ac:spMkLst>
+            <pc:docMk/>
+            <pc:sldMk cId="4194183058" sldId="303"/>
+            <ac:spMk id="209" creationId="{00000000-0000-0000-0000-000000000000}"/>
+          </ac:spMkLst>
+        </pc:spChg>
+        <pc:spChg chg="mod">
+          <ac:chgData name="André-Guy Bruneau" userId="c9f3b82d5570fc32" providerId="LiveId" clId="{C4496A7D-9A64-4B82-9835-F710A7718518}" dt="2026-06-27T11:28:29.985" v="975" actId="20577"/>
+          <ac:spMkLst>
+            <pc:docMk/>
+            <pc:sldMk cId="4194183058" sldId="303"/>
+            <ac:spMk id="214" creationId="{00000000-0000-0000-0000-000000000000}"/>
+          </ac:spMkLst>
+        </pc:spChg>
+        <pc:spChg chg="mod">
+          <ac:chgData name="André-Guy Bruneau" userId="c9f3b82d5570fc32" providerId="LiveId" clId="{C4496A7D-9A64-4B82-9835-F710A7718518}" dt="2026-06-27T11:28:51.643" v="988" actId="20577"/>
+          <ac:spMkLst>
+            <pc:docMk/>
+            <pc:sldMk cId="4194183058" sldId="303"/>
+            <ac:spMk id="219" creationId="{00000000-0000-0000-0000-000000000000}"/>
+          </ac:spMkLst>
+        </pc:spChg>
+        <pc:spChg chg="mod">
+          <ac:chgData name="André-Guy Bruneau" userId="c9f3b82d5570fc32" providerId="LiveId" clId="{C4496A7D-9A64-4B82-9835-F710A7718518}" dt="2026-06-27T11:29:13.697" v="1006" actId="20577"/>
+          <ac:spMkLst>
+            <pc:docMk/>
+            <pc:sldMk cId="4194183058" sldId="303"/>
+            <ac:spMk id="224" creationId="{00000000-0000-0000-0000-000000000000}"/>
+          </ac:spMkLst>
+        </pc:spChg>
+      </pc:sldChg>
+      <pc:sldChg chg="add del">
+        <pc:chgData name="André-Guy Bruneau" userId="c9f3b82d5570fc32" providerId="LiveId" clId="{C4496A7D-9A64-4B82-9835-F710A7718518}" dt="2026-06-27T15:11:50.527" v="1779"/>
+        <pc:sldMkLst>
+          <pc:docMk/>
+          <pc:sldMk cId="1977854363" sldId="304"/>
+        </pc:sldMkLst>
+      </pc:sldChg>
+      <pc:sldChg chg="modSp add mod">
+        <pc:chgData name="André-Guy Bruneau" userId="c9f3b82d5570fc32" providerId="LiveId" clId="{C4496A7D-9A64-4B82-9835-F710A7718518}" dt="2026-06-27T23:23:23.467" v="1817" actId="14100"/>
+        <pc:sldMkLst>
+          <pc:docMk/>
+          <pc:sldMk cId="1865463153" sldId="305"/>
+        </pc:sldMkLst>
+        <pc:spChg chg="mod">
+          <ac:chgData name="André-Guy Bruneau" userId="c9f3b82d5570fc32" providerId="LiveId" clId="{C4496A7D-9A64-4B82-9835-F710A7718518}" dt="2026-06-27T23:23:23.467" v="1817" actId="14100"/>
+          <ac:spMkLst>
+            <pc:docMk/>
+            <pc:sldMk cId="1865463153" sldId="305"/>
+            <ac:spMk id="8" creationId="{00000000-0000-0000-0000-000000000000}"/>
+          </ac:spMkLst>
+        </pc:spChg>
+      </pc:sldChg>
+      <pc:sldChg chg="add">
+        <pc:chgData name="André-Guy Bruneau" userId="c9f3b82d5570fc32" providerId="LiveId" clId="{C4496A7D-9A64-4B82-9835-F710A7718518}" dt="2026-06-27T15:16:05.976" v="1780"/>
+        <pc:sldMkLst>
+          <pc:docMk/>
+          <pc:sldMk cId="1750828263" sldId="306"/>
+        </pc:sldMkLst>
+      </pc:sldChg>
+      <pc:sldChg chg="add">
+        <pc:chgData name="André-Guy Bruneau" userId="c9f3b82d5570fc32" providerId="LiveId" clId="{C4496A7D-9A64-4B82-9835-F710A7718518}" dt="2026-06-27T15:16:50.381" v="1782"/>
+        <pc:sldMkLst>
+          <pc:docMk/>
+          <pc:sldMk cId="4009307610" sldId="307"/>
+        </pc:sldMkLst>
+      </pc:sldChg>
+      <pc:sldChg chg="modSp add mod">
+        <pc:chgData name="André-Guy Bruneau" userId="c9f3b82d5570fc32" providerId="LiveId" clId="{C4496A7D-9A64-4B82-9835-F710A7718518}" dt="2026-06-27T23:24:28.591" v="1852" actId="20577"/>
+        <pc:sldMkLst>
+          <pc:docMk/>
+          <pc:sldMk cId="3082900950" sldId="308"/>
+        </pc:sldMkLst>
+        <pc:spChg chg="mod">
+          <ac:chgData name="André-Guy Bruneau" userId="c9f3b82d5570fc32" providerId="LiveId" clId="{C4496A7D-9A64-4B82-9835-F710A7718518}" dt="2026-06-27T23:23:45.520" v="1818" actId="20577"/>
+          <ac:spMkLst>
+            <pc:docMk/>
+            <pc:sldMk cId="3082900950" sldId="308"/>
+            <ac:spMk id="204" creationId="{00000000-0000-0000-0000-000000000000}"/>
+          </ac:spMkLst>
+        </pc:spChg>
+        <pc:spChg chg="mod">
+          <ac:chgData name="André-Guy Bruneau" userId="c9f3b82d5570fc32" providerId="LiveId" clId="{C4496A7D-9A64-4B82-9835-F710A7718518}" dt="2026-06-27T23:23:48.369" v="1819" actId="20577"/>
+          <ac:spMkLst>
+            <pc:docMk/>
+            <pc:sldMk cId="3082900950" sldId="308"/>
+            <ac:spMk id="209" creationId="{00000000-0000-0000-0000-000000000000}"/>
+          </ac:spMkLst>
+        </pc:spChg>
+        <pc:spChg chg="mod">
+          <ac:chgData name="André-Guy Bruneau" userId="c9f3b82d5570fc32" providerId="LiveId" clId="{C4496A7D-9A64-4B82-9835-F710A7718518}" dt="2026-06-27T23:24:28.591" v="1852" actId="20577"/>
+          <ac:spMkLst>
+            <pc:docMk/>
+            <pc:sldMk cId="3082900950" sldId="308"/>
+            <ac:spMk id="214" creationId="{00000000-0000-0000-0000-000000000000}"/>
+          </ac:spMkLst>
+        </pc:spChg>
+        <pc:spChg chg="mod">
+          <ac:chgData name="André-Guy Bruneau" userId="c9f3b82d5570fc32" providerId="LiveId" clId="{C4496A7D-9A64-4B82-9835-F710A7718518}" dt="2026-06-27T23:23:53.703" v="1821" actId="20577"/>
+          <ac:spMkLst>
+            <pc:docMk/>
+            <pc:sldMk cId="3082900950" sldId="308"/>
+            <ac:spMk id="219" creationId="{00000000-0000-0000-0000-000000000000}"/>
+          </ac:spMkLst>
+        </pc:spChg>
+        <pc:spChg chg="mod">
+          <ac:chgData name="André-Guy Bruneau" userId="c9f3b82d5570fc32" providerId="LiveId" clId="{C4496A7D-9A64-4B82-9835-F710A7718518}" dt="2026-06-27T23:23:57.008" v="1822" actId="20577"/>
+          <ac:spMkLst>
+            <pc:docMk/>
+            <pc:sldMk cId="3082900950" sldId="308"/>
+            <ac:spMk id="224" creationId="{00000000-0000-0000-0000-000000000000}"/>
+          </ac:spMkLst>
+        </pc:spChg>
+      </pc:sldChg>
+      <pc:sldChg chg="add del">
+        <pc:chgData name="André-Guy Bruneau" userId="c9f3b82d5570fc32" providerId="LiveId" clId="{C4496A7D-9A64-4B82-9835-F710A7718518}" dt="2026-06-27T15:24:28.509" v="1803"/>
+        <pc:sldMkLst>
+          <pc:docMk/>
+          <pc:sldMk cId="3848680304" sldId="309"/>
+        </pc:sldMkLst>
+      </pc:sldChg>
+      <pc:sldChg chg="add">
+        <pc:chgData name="André-Guy Bruneau" userId="c9f3b82d5570fc32" providerId="LiveId" clId="{C4496A7D-9A64-4B82-9835-F710A7718518}" dt="2026-06-27T15:18:02.088" v="1788"/>
+        <pc:sldMkLst>
+          <pc:docMk/>
+          <pc:sldMk cId="2377755880" sldId="310"/>
+        </pc:sldMkLst>
+      </pc:sldChg>
+      <pc:sldChg chg="add">
+        <pc:chgData name="André-Guy Bruneau" userId="c9f3b82d5570fc32" providerId="LiveId" clId="{C4496A7D-9A64-4B82-9835-F710A7718518}" dt="2026-06-27T15:18:55.716" v="1790"/>
+        <pc:sldMkLst>
+          <pc:docMk/>
+          <pc:sldMk cId="1566204714" sldId="311"/>
+        </pc:sldMkLst>
+      </pc:sldChg>
+      <pc:sldChg chg="add">
+        <pc:chgData name="André-Guy Bruneau" userId="c9f3b82d5570fc32" providerId="LiveId" clId="{C4496A7D-9A64-4B82-9835-F710A7718518}" dt="2026-06-27T15:19:09.077" v="1792"/>
+        <pc:sldMkLst>
+          <pc:docMk/>
+          <pc:sldMk cId="3837644013" sldId="312"/>
+        </pc:sldMkLst>
+      </pc:sldChg>
+      <pc:sldChg chg="add del">
+        <pc:chgData name="André-Guy Bruneau" userId="c9f3b82d5570fc32" providerId="LiveId" clId="{C4496A7D-9A64-4B82-9835-F710A7718518}" dt="2026-06-27T23:32:39.725" v="1872"/>
+        <pc:sldMkLst>
+          <pc:docMk/>
+          <pc:sldMk cId="980874350" sldId="313"/>
+        </pc:sldMkLst>
+      </pc:sldChg>
+      <pc:sldChg chg="modSp add mod">
+        <pc:chgData name="André-Guy Bruneau" userId="c9f3b82d5570fc32" providerId="LiveId" clId="{C4496A7D-9A64-4B82-9835-F710A7718518}" dt="2026-06-27T23:34:37.906" v="1879" actId="20577"/>
+        <pc:sldMkLst>
+          <pc:docMk/>
+          <pc:sldMk cId="3328085537" sldId="314"/>
+        </pc:sldMkLst>
+        <pc:spChg chg="mod">
+          <ac:chgData name="André-Guy Bruneau" userId="c9f3b82d5570fc32" providerId="LiveId" clId="{C4496A7D-9A64-4B82-9835-F710A7718518}" dt="2026-06-27T23:34:37.906" v="1879" actId="20577"/>
+          <ac:spMkLst>
+            <pc:docMk/>
+            <pc:sldMk cId="3328085537" sldId="314"/>
+            <ac:spMk id="6" creationId="{00000000-0000-0000-0000-000000000000}"/>
+          </ac:spMkLst>
+        </pc:spChg>
+      </pc:sldChg>
+      <pc:sldChg chg="add del">
+        <pc:chgData name="André-Guy Bruneau" userId="c9f3b82d5570fc32" providerId="LiveId" clId="{C4496A7D-9A64-4B82-9835-F710A7718518}" dt="2026-06-27T15:25:50.549" v="1812"/>
+        <pc:sldMkLst>
+          <pc:docMk/>
+          <pc:sldMk cId="320719922" sldId="315"/>
+        </pc:sldMkLst>
+      </pc:sldChg>
+      <pc:sldChg chg="add del">
+        <pc:chgData name="André-Guy Bruneau" userId="c9f3b82d5570fc32" providerId="LiveId" clId="{C4496A7D-9A64-4B82-9835-F710A7718518}" dt="2026-06-27T15:26:31.595" v="1814"/>
+        <pc:sldMkLst>
+          <pc:docMk/>
+          <pc:sldMk cId="1764144630" sldId="316"/>
+        </pc:sldMkLst>
+      </pc:sldChg>
+      <pc:sldChg chg="modSp add del mod">
+        <pc:chgData name="André-Guy Bruneau" userId="c9f3b82d5570fc32" providerId="LiveId" clId="{C4496A7D-9A64-4B82-9835-F710A7718518}" dt="2026-06-27T15:25:08.865" v="1810"/>
+        <pc:sldMkLst>
+          <pc:docMk/>
+          <pc:sldMk cId="3294387290" sldId="317"/>
+        </pc:sldMkLst>
+        <pc:spChg chg="mod">
+          <ac:chgData name="André-Guy Bruneau" userId="c9f3b82d5570fc32" providerId="LiveId" clId="{C4496A7D-9A64-4B82-9835-F710A7718518}" dt="2026-06-27T15:25:06.073" v="1808" actId="1036"/>
+          <ac:spMkLst>
+            <pc:docMk/>
+            <pc:sldMk cId="3294387290" sldId="317"/>
+            <ac:spMk id="440" creationId="{00000000-0000-0000-0000-000000000000}"/>
+          </ac:spMkLst>
+        </pc:spChg>
+      </pc:sldChg>
+      <pc:sldChg chg="add">
+        <pc:chgData name="André-Guy Bruneau" userId="c9f3b82d5570fc32" providerId="LiveId" clId="{C4496A7D-9A64-4B82-9835-F710A7718518}" dt="2026-06-27T15:25:08.854" v="1809"/>
+        <pc:sldMkLst>
+          <pc:docMk/>
+          <pc:sldMk cId="3476847461" sldId="318"/>
+        </pc:sldMkLst>
+      </pc:sldChg>
+      <pc:sldChg chg="modSp add mod">
+        <pc:chgData name="André-Guy Bruneau" userId="c9f3b82d5570fc32" providerId="LiveId" clId="{C4496A7D-9A64-4B82-9835-F710A7718518}" dt="2026-06-27T23:30:23.685" v="1870" actId="6549"/>
+        <pc:sldMkLst>
+          <pc:docMk/>
+          <pc:sldMk cId="684586775" sldId="319"/>
+        </pc:sldMkLst>
+        <pc:spChg chg="mod">
+          <ac:chgData name="André-Guy Bruneau" userId="c9f3b82d5570fc32" providerId="LiveId" clId="{C4496A7D-9A64-4B82-9835-F710A7718518}" dt="2026-06-27T23:30:23.685" v="1870" actId="6549"/>
+          <ac:spMkLst>
+            <pc:docMk/>
+            <pc:sldMk cId="684586775" sldId="319"/>
+            <ac:spMk id="4" creationId="{00000000-0000-0000-0000-000000000000}"/>
+          </ac:spMkLst>
+        </pc:spChg>
+      </pc:sldChg>
+      <pc:sldChg chg="add">
+        <pc:chgData name="André-Guy Bruneau" userId="c9f3b82d5570fc32" providerId="LiveId" clId="{C4496A7D-9A64-4B82-9835-F710A7718518}" dt="2026-06-27T15:26:31.593" v="1813"/>
+        <pc:sldMkLst>
+          <pc:docMk/>
+          <pc:sldMk cId="1614462470" sldId="320"/>
+        </pc:sldMkLst>
+      </pc:sldChg>
+      <pc:sldChg chg="modSp add mod">
+        <pc:chgData name="André-Guy Bruneau" userId="c9f3b82d5570fc32" providerId="LiveId" clId="{C4496A7D-9A64-4B82-9835-F710A7718518}" dt="2026-06-27T23:32:45.733" v="1874"/>
+        <pc:sldMkLst>
+          <pc:docMk/>
+          <pc:sldMk cId="1402530145" sldId="321"/>
+        </pc:sldMkLst>
+        <pc:spChg chg="mod">
+          <ac:chgData name="André-Guy Bruneau" userId="c9f3b82d5570fc32" providerId="LiveId" clId="{C4496A7D-9A64-4B82-9835-F710A7718518}" dt="2026-06-27T23:32:45.733" v="1873"/>
+          <ac:spMkLst>
+            <pc:docMk/>
+            <pc:sldMk cId="1402530145" sldId="321"/>
+            <ac:spMk id="6" creationId="{00000000-0000-0000-0000-000000000000}"/>
+          </ac:spMkLst>
+        </pc:spChg>
+        <pc:spChg chg="mod">
+          <ac:chgData name="André-Guy Bruneau" userId="c9f3b82d5570fc32" providerId="LiveId" clId="{C4496A7D-9A64-4B82-9835-F710A7718518}" dt="2026-06-27T23:32:45.733" v="1874"/>
+          <ac:spMkLst>
+            <pc:docMk/>
+            <pc:sldMk cId="1402530145" sldId="321"/>
+            <ac:spMk id="9" creationId="{00000000-0000-0000-0000-000000000000}"/>
+          </ac:spMkLst>
+        </pc:spChg>
+      </pc:sldChg>
+      <pc:sldChg chg="add del setBg">
+        <pc:chgData name="André-Guy Bruneau" userId="c9f3b82d5570fc32" providerId="LiveId" clId="{C4496A7D-9A64-4B82-9835-F710A7718518}" dt="2026-06-27T23:34:45.675" v="1881"/>
+        <pc:sldMkLst>
+          <pc:docMk/>
+          <pc:sldMk cId="986193394" sldId="322"/>
+        </pc:sldMkLst>
+      </pc:sldChg>
+      <pc:sldChg chg="add del setBg">
+        <pc:chgData name="André-Guy Bruneau" userId="c9f3b82d5570fc32" providerId="LiveId" clId="{C4496A7D-9A64-4B82-9835-F710A7718518}" dt="2026-06-27T23:34:53" v="1883"/>
+        <pc:sldMkLst>
+          <pc:docMk/>
+          <pc:sldMk cId="1560432167" sldId="322"/>
         </pc:sldMkLst>
       </pc:sldChg>
     </pc:docChg>
@@ -1074,6 +1118,174 @@
             <a:fld id="{F7021451-1387-4CA6-816F-3879F97B5CBC}" type="slidenum">
               <a:rPr lang="en-US"/>
               <a:t>12</a:t>
+            </a:fld>
+            <a:endParaRPr lang="en-US"/>
+          </a:p>
+        </p:txBody>
+      </p:sp>
+    </p:spTree>
+    <p:extLst>
+      <p:ext uri="{BB962C8B-B14F-4D97-AF65-F5344CB8AC3E}">
+        <p14:creationId xmlns:p14="http://schemas.microsoft.com/office/powerpoint/2010/main" val="1024086991"/>
+      </p:ext>
+    </p:extLst>
+  </p:cSld>
+  <p:clrMapOvr>
+    <a:masterClrMapping/>
+  </p:clrMapOvr>
+</p:notes>
+</file>
+
+<file path=ppt/notesSlides/notesSlide13.xml><?xml version="1.0" encoding="utf-8"?>
+<p:notes xmlns:a="http://schemas.openxmlformats.org/drawingml/2006/main" xmlns:r="http://schemas.openxmlformats.org/officeDocument/2006/relationships" xmlns:p="http://schemas.openxmlformats.org/presentationml/2006/main">
+  <p:cSld>
+    <p:spTree>
+      <p:nvGrpSpPr>
+        <p:cNvPr id="1" name=""/>
+        <p:cNvGrpSpPr/>
+        <p:nvPr/>
+      </p:nvGrpSpPr>
+      <p:grpSpPr>
+        <a:xfrm>
+          <a:off x="0" y="0"/>
+          <a:ext cx="0" cy="0"/>
+          <a:chOff x="0" y="0"/>
+          <a:chExt cx="0" cy="0"/>
+        </a:xfrm>
+      </p:grpSpPr>
+      <p:sp>
+        <p:nvSpPr>
+          <p:cNvPr id="2" name="Slide Image Placeholder 1"/>
+          <p:cNvSpPr>
+            <a:spLocks noGrp="1" noRot="1" noChangeAspect="1"/>
+          </p:cNvSpPr>
+          <p:nvPr>
+            <p:ph type="sldImg"/>
+          </p:nvPr>
+        </p:nvSpPr>
+        <p:spPr/>
+      </p:sp>
+      <p:sp>
+        <p:nvSpPr>
+          <p:cNvPr id="3" name="Notes Placeholder 2"/>
+          <p:cNvSpPr>
+            <a:spLocks noGrp="1"/>
+          </p:cNvSpPr>
+          <p:nvPr>
+            <p:ph type="body" idx="1"/>
+          </p:nvPr>
+        </p:nvSpPr>
+        <p:spPr/>
+        <p:txBody>
+          <a:bodyPr/>
+          <a:lstStyle/>
+          <a:p>
+            <a:endParaRPr lang="en-US" dirty="0"/>
+          </a:p>
+        </p:txBody>
+      </p:sp>
+      <p:sp>
+        <p:nvSpPr>
+          <p:cNvPr id="4" name="Slide Number Placeholder 3"/>
+          <p:cNvSpPr>
+            <a:spLocks noGrp="1"/>
+          </p:cNvSpPr>
+          <p:nvPr>
+            <p:ph type="sldNum" sz="quarter" idx="10"/>
+          </p:nvPr>
+        </p:nvSpPr>
+        <p:spPr/>
+        <p:txBody>
+          <a:bodyPr/>
+          <a:lstStyle/>
+          <a:p>
+            <a:fld id="{F7021451-1387-4CA6-816F-3879F97B5CBC}" type="slidenum">
+              <a:rPr lang="en-US"/>
+              <a:t>13</a:t>
+            </a:fld>
+            <a:endParaRPr lang="en-US"/>
+          </a:p>
+        </p:txBody>
+      </p:sp>
+    </p:spTree>
+    <p:extLst>
+      <p:ext uri="{BB962C8B-B14F-4D97-AF65-F5344CB8AC3E}">
+        <p14:creationId xmlns:p14="http://schemas.microsoft.com/office/powerpoint/2010/main" val="1024086991"/>
+      </p:ext>
+    </p:extLst>
+  </p:cSld>
+  <p:clrMapOvr>
+    <a:masterClrMapping/>
+  </p:clrMapOvr>
+</p:notes>
+</file>
+
+<file path=ppt/notesSlides/notesSlide14.xml><?xml version="1.0" encoding="utf-8"?>
+<p:notes xmlns:a="http://schemas.openxmlformats.org/drawingml/2006/main" xmlns:r="http://schemas.openxmlformats.org/officeDocument/2006/relationships" xmlns:p="http://schemas.openxmlformats.org/presentationml/2006/main">
+  <p:cSld>
+    <p:spTree>
+      <p:nvGrpSpPr>
+        <p:cNvPr id="1" name=""/>
+        <p:cNvGrpSpPr/>
+        <p:nvPr/>
+      </p:nvGrpSpPr>
+      <p:grpSpPr>
+        <a:xfrm>
+          <a:off x="0" y="0"/>
+          <a:ext cx="0" cy="0"/>
+          <a:chOff x="0" y="0"/>
+          <a:chExt cx="0" cy="0"/>
+        </a:xfrm>
+      </p:grpSpPr>
+      <p:sp>
+        <p:nvSpPr>
+          <p:cNvPr id="2" name="Slide Image Placeholder 1"/>
+          <p:cNvSpPr>
+            <a:spLocks noGrp="1" noRot="1" noChangeAspect="1"/>
+          </p:cNvSpPr>
+          <p:nvPr>
+            <p:ph type="sldImg"/>
+          </p:nvPr>
+        </p:nvSpPr>
+        <p:spPr/>
+      </p:sp>
+      <p:sp>
+        <p:nvSpPr>
+          <p:cNvPr id="3" name="Notes Placeholder 2"/>
+          <p:cNvSpPr>
+            <a:spLocks noGrp="1"/>
+          </p:cNvSpPr>
+          <p:nvPr>
+            <p:ph type="body" idx="1"/>
+          </p:nvPr>
+        </p:nvSpPr>
+        <p:spPr/>
+        <p:txBody>
+          <a:bodyPr/>
+          <a:lstStyle/>
+          <a:p>
+            <a:endParaRPr lang="en-US" dirty="0"/>
+          </a:p>
+        </p:txBody>
+      </p:sp>
+      <p:sp>
+        <p:nvSpPr>
+          <p:cNvPr id="4" name="Slide Number Placeholder 3"/>
+          <p:cNvSpPr>
+            <a:spLocks noGrp="1"/>
+          </p:cNvSpPr>
+          <p:nvPr>
+            <p:ph type="sldNum" sz="quarter" idx="10"/>
+          </p:nvPr>
+        </p:nvSpPr>
+        <p:spPr/>
+        <p:txBody>
+          <a:bodyPr/>
+          <a:lstStyle/>
+          <a:p>
+            <a:fld id="{F7021451-1387-4CA6-816F-3879F97B5CBC}" type="slidenum">
+              <a:rPr lang="en-US"/>
+              <a:t>14</a:t>
             </a:fld>
             <a:endParaRPr lang="en-US"/>
           </a:p>
@@ -2337,27 +2549,7 @@
                 <a:latin typeface="Cambria" pitchFamily="34" charset="0"/>
                 <a:ea typeface="Cambria" pitchFamily="34" charset="-122"/>
               </a:rPr>
-              <a:t> 4.6 – Bennett/</a:t>
-            </a:r>
-            <a:r>
-              <a:rPr lang="en-US" sz="2100" i="1" dirty="0" err="1">
-                <a:solidFill>
-                  <a:srgbClr val="F2A24E"/>
-                </a:solidFill>
-                <a:latin typeface="Cambria" pitchFamily="34" charset="0"/>
-                <a:ea typeface="Cambria" pitchFamily="34" charset="-122"/>
-              </a:rPr>
-              <a:t>puritains</a:t>
-            </a:r>
-            <a:r>
-              <a:rPr lang="en-US" sz="2100" i="1" dirty="0">
-                <a:solidFill>
-                  <a:srgbClr val="F2A24E"/>
-                </a:solidFill>
-                <a:latin typeface="Cambria" pitchFamily="34" charset="0"/>
-                <a:ea typeface="Cambria" pitchFamily="34" charset="-122"/>
-              </a:rPr>
-              <a:t> – Lieu de la </a:t>
+              <a:t> 4.6 – Lieu de la </a:t>
             </a:r>
             <a:r>
               <a:rPr lang="en-US" sz="2100" i="1" dirty="0" err="1">
@@ -2444,23 +2636,31 @@
             <a:endParaRPr lang="en-US" sz="1300" dirty="0"/>
           </a:p>
           <a:p>
+            <a:pPr algn="ctr">
+              <a:lnSpc>
+                <a:spcPts val="2000"/>
+              </a:lnSpc>
+            </a:pPr>
+            <a:r>
+              <a:rPr lang="en-US" sz="1300" dirty="0">
+                <a:solidFill>
+                  <a:srgbClr val="A89F90"/>
+                </a:solidFill>
+                <a:latin typeface="Cambria" pitchFamily="34" charset="0"/>
+                <a:ea typeface="Cambria" pitchFamily="34" charset="-122"/>
+                <a:cs typeface="Cambria" pitchFamily="34" charset="-120"/>
+              </a:rPr>
+              <a:t>Pasteur Simon Ouellette  · EBC · NEG 1979</a:t>
+            </a:r>
+            <a:endParaRPr lang="en-US" sz="1300" dirty="0"/>
+          </a:p>
+          <a:p>
             <a:pPr marL="0" indent="0" algn="ctr">
               <a:lnSpc>
                 <a:spcPts val="2000"/>
               </a:lnSpc>
               <a:buNone/>
             </a:pPr>
-            <a:r>
-              <a:rPr lang="en-US" sz="1300" dirty="0">
-                <a:solidFill>
-                  <a:srgbClr val="A89F90"/>
-                </a:solidFill>
-                <a:latin typeface="Cambria" pitchFamily="34" charset="0"/>
-                <a:ea typeface="Cambria" pitchFamily="34" charset="-122"/>
-                <a:cs typeface="Cambria" pitchFamily="34" charset="-120"/>
-              </a:rPr>
-              <a:t>Pasteur Simon Ouellette  · EBC</a:t>
-            </a:r>
             <a:endParaRPr lang="en-US" sz="1300" dirty="0"/>
           </a:p>
         </p:txBody>
@@ -2474,6 +2674,1403 @@
 </file>
 
 <file path=ppt/slides/slide10.xml><?xml version="1.0" encoding="utf-8"?>
+<p:sld xmlns:a="http://schemas.openxmlformats.org/drawingml/2006/main" xmlns:r="http://schemas.openxmlformats.org/officeDocument/2006/relationships" xmlns:p="http://schemas.openxmlformats.org/presentationml/2006/main">
+  <p:cSld name="Slide 8">
+    <p:bg>
+      <p:bgPr>
+        <a:solidFill>
+          <a:srgbClr val="121212"/>
+        </a:solidFill>
+        <a:effectLst/>
+      </p:bgPr>
+    </p:bg>
+    <p:spTree>
+      <p:nvGrpSpPr>
+        <p:cNvPr id="1" name=""/>
+        <p:cNvGrpSpPr/>
+        <p:nvPr/>
+      </p:nvGrpSpPr>
+      <p:grpSpPr>
+        <a:xfrm>
+          <a:off x="0" y="0"/>
+          <a:ext cx="0" cy="0"/>
+          <a:chOff x="0" y="0"/>
+          <a:chExt cx="0" cy="0"/>
+        </a:xfrm>
+      </p:grpSpPr>
+      <p:sp>
+        <p:nvSpPr>
+          <p:cNvPr id="2" name="Shape 0"/>
+          <p:cNvSpPr/>
+          <p:nvPr/>
+        </p:nvSpPr>
+        <p:spPr>
+          <a:xfrm>
+            <a:off x="548640" y="411480"/>
+            <a:ext cx="713232" cy="713232"/>
+          </a:xfrm>
+          <a:prstGeom prst="ellipse">
+            <a:avLst/>
+          </a:prstGeom>
+          <a:solidFill>
+            <a:srgbClr val="E8821E"/>
+          </a:solidFill>
+          <a:ln/>
+        </p:spPr>
+        <p:txBody>
+          <a:bodyPr/>
+          <a:lstStyle/>
+          <a:p>
+            <a:endParaRPr lang="fr-CA"/>
+          </a:p>
+        </p:txBody>
+      </p:sp>
+      <p:pic>
+        <p:nvPicPr>
+          <p:cNvPr id="3" name="Image 0" descr="preencoded.png"/>
+          <p:cNvPicPr>
+            <a:picLocks noChangeAspect="1"/>
+          </p:cNvPicPr>
+          <p:nvPr/>
+        </p:nvPicPr>
+        <p:blipFill>
+          <a:blip r:embed="rId3"/>
+          <a:stretch>
+            <a:fillRect/>
+          </a:stretch>
+        </p:blipFill>
+        <p:spPr>
+          <a:xfrm>
+            <a:off x="741213" y="604053"/>
+            <a:ext cx="328087" cy="328087"/>
+          </a:xfrm>
+          <a:prstGeom prst="rect">
+            <a:avLst/>
+          </a:prstGeom>
+        </p:spPr>
+      </p:pic>
+      <p:sp>
+        <p:nvSpPr>
+          <p:cNvPr id="4" name="Text 1"/>
+          <p:cNvSpPr/>
+          <p:nvPr/>
+        </p:nvSpPr>
+        <p:spPr>
+          <a:xfrm>
+            <a:off x="1417320" y="411480"/>
+            <a:ext cx="10149840" cy="713232"/>
+          </a:xfrm>
+          <a:prstGeom prst="rect">
+            <a:avLst/>
+          </a:prstGeom>
+          <a:noFill/>
+          <a:ln/>
+        </p:spPr>
+        <p:txBody>
+          <a:bodyPr wrap="square" lIns="0" tIns="0" rIns="0" bIns="0" rtlCol="0" anchor="ctr"/>
+          <a:lstStyle/>
+          <a:p>
+            <a:pPr marL="0" indent="0">
+              <a:buNone/>
+            </a:pPr>
+            <a:r>
+              <a:rPr lang="en-US" sz="2700" b="1" dirty="0">
+                <a:solidFill>
+                  <a:srgbClr val="F5EFE4"/>
+                </a:solidFill>
+                <a:latin typeface="Cambria" pitchFamily="34" charset="0"/>
+                <a:ea typeface="Cambria" pitchFamily="34" charset="-122"/>
+                <a:cs typeface="Cambria" pitchFamily="34" charset="-120"/>
+              </a:rPr>
+              <a:t>3.  « Les étoiles, du fond du puits »</a:t>
+            </a:r>
+            <a:endParaRPr lang="en-US" sz="2700" dirty="0"/>
+          </a:p>
+        </p:txBody>
+      </p:sp>
+      <p:sp>
+        <p:nvSpPr>
+          <p:cNvPr id="5" name="Shape 2"/>
+          <p:cNvSpPr/>
+          <p:nvPr/>
+        </p:nvSpPr>
+        <p:spPr>
+          <a:xfrm>
+            <a:off x="548640" y="1417320"/>
+            <a:ext cx="5943600" cy="4617720"/>
+          </a:xfrm>
+          <a:prstGeom prst="roundRect">
+            <a:avLst>
+              <a:gd name="adj" fmla="val 1782"/>
+            </a:avLst>
+          </a:prstGeom>
+          <a:solidFill>
+            <a:srgbClr val="2A2419"/>
+          </a:solidFill>
+          <a:ln w="12700">
+            <a:solidFill>
+              <a:srgbClr val="332C22"/>
+            </a:solidFill>
+            <a:prstDash val="solid"/>
+          </a:ln>
+          <a:effectLst>
+            <a:outerShdw blurRad="114300" dist="38100" dir="5400000" algn="bl" rotWithShape="0">
+              <a:srgbClr val="000000">
+                <a:alpha val="40000"/>
+              </a:srgbClr>
+            </a:outerShdw>
+          </a:effectLst>
+        </p:spPr>
+        <p:txBody>
+          <a:bodyPr/>
+          <a:lstStyle/>
+          <a:p>
+            <a:endParaRPr lang="fr-CA" dirty="0"/>
+          </a:p>
+        </p:txBody>
+      </p:sp>
+      <p:sp>
+        <p:nvSpPr>
+          <p:cNvPr id="6" name="Text 3"/>
+          <p:cNvSpPr/>
+          <p:nvPr/>
+        </p:nvSpPr>
+        <p:spPr>
+          <a:xfrm>
+            <a:off x="868680" y="1783080"/>
+            <a:ext cx="5349240" cy="4114800"/>
+          </a:xfrm>
+          <a:prstGeom prst="rect">
+            <a:avLst/>
+          </a:prstGeom>
+          <a:noFill/>
+          <a:ln/>
+        </p:spPr>
+        <p:txBody>
+          <a:bodyPr wrap="square" rtlCol="0" anchor="ctr" anchorCtr="0"/>
+          <a:lstStyle/>
+          <a:p>
+            <a:pPr marL="0" indent="0" algn="l">
+              <a:lnSpc>
+                <a:spcPts val="2278"/>
+              </a:lnSpc>
+              <a:spcAft>
+                <a:spcPts val="500"/>
+              </a:spcAft>
+              <a:buNone/>
+            </a:pPr>
+            <a:r>
+              <a:rPr lang="en-US" sz="2000" i="1" dirty="0">
+                <a:solidFill>
+                  <a:srgbClr val="F5EFE4"/>
+                </a:solidFill>
+                <a:latin typeface="Cambria" pitchFamily="34" charset="0"/>
+                <a:ea typeface="Cambria" pitchFamily="34" charset="-122"/>
+                <a:cs typeface="Cambria" pitchFamily="34" charset="-120"/>
+              </a:rPr>
+              <a:t>Seigneur, pendant le jour,</a:t>
+            </a:r>
+            <a:endParaRPr lang="en-US" sz="2000" dirty="0"/>
+          </a:p>
+          <a:p>
+            <a:pPr marL="0" indent="0" algn="l">
+              <a:lnSpc>
+                <a:spcPts val="2278"/>
+              </a:lnSpc>
+              <a:spcAft>
+                <a:spcPts val="500"/>
+              </a:spcAft>
+              <a:buNone/>
+            </a:pPr>
+            <a:r>
+              <a:rPr lang="en-US" sz="2000" i="1" dirty="0">
+                <a:solidFill>
+                  <a:srgbClr val="F5EFE4"/>
+                </a:solidFill>
+                <a:latin typeface="Cambria" pitchFamily="34" charset="0"/>
+                <a:ea typeface="Cambria" pitchFamily="34" charset="-122"/>
+                <a:cs typeface="Cambria" pitchFamily="34" charset="-120"/>
+              </a:rPr>
+              <a:t>les étoiles sont visibles</a:t>
+            </a:r>
+            <a:endParaRPr lang="en-US" sz="2000" dirty="0"/>
+          </a:p>
+          <a:p>
+            <a:pPr marL="0" indent="0" algn="l">
+              <a:lnSpc>
+                <a:spcPts val="2278"/>
+              </a:lnSpc>
+              <a:spcAft>
+                <a:spcPts val="500"/>
+              </a:spcAft>
+              <a:buNone/>
+            </a:pPr>
+            <a:r>
+              <a:rPr lang="en-US" sz="2000" i="1" dirty="0">
+                <a:solidFill>
+                  <a:srgbClr val="F5EFE4"/>
+                </a:solidFill>
+                <a:latin typeface="Cambria" pitchFamily="34" charset="0"/>
+                <a:ea typeface="Cambria" pitchFamily="34" charset="-122"/>
+                <a:cs typeface="Cambria" pitchFamily="34" charset="-120"/>
+              </a:rPr>
+              <a:t>des puits les plus profonds,</a:t>
+            </a:r>
+            <a:endParaRPr lang="en-US" sz="2000" dirty="0"/>
+          </a:p>
+          <a:p>
+            <a:pPr marL="0" indent="0" algn="l">
+              <a:lnSpc>
+                <a:spcPts val="2278"/>
+              </a:lnSpc>
+              <a:spcAft>
+                <a:spcPts val="500"/>
+              </a:spcAft>
+              <a:buNone/>
+            </a:pPr>
+            <a:r>
+              <a:rPr lang="en-US" sz="2000" i="1" dirty="0">
+                <a:solidFill>
+                  <a:srgbClr val="F5EFE4"/>
+                </a:solidFill>
+                <a:latin typeface="Cambria" pitchFamily="34" charset="0"/>
+                <a:ea typeface="Cambria" pitchFamily="34" charset="-122"/>
+                <a:cs typeface="Cambria" pitchFamily="34" charset="-120"/>
+              </a:rPr>
+              <a:t>et plus profond est le puits,</a:t>
+            </a:r>
+            <a:endParaRPr lang="en-US" sz="2000" dirty="0"/>
+          </a:p>
+          <a:p>
+            <a:pPr marL="0" indent="0" algn="l">
+              <a:lnSpc>
+                <a:spcPts val="2278"/>
+              </a:lnSpc>
+              <a:spcAft>
+                <a:spcPts val="500"/>
+              </a:spcAft>
+              <a:buNone/>
+            </a:pPr>
+            <a:r>
+              <a:rPr lang="en-US" sz="2000" i="1" dirty="0">
+                <a:solidFill>
+                  <a:srgbClr val="F5EFE4"/>
+                </a:solidFill>
+                <a:latin typeface="Cambria" pitchFamily="34" charset="0"/>
+                <a:ea typeface="Cambria" pitchFamily="34" charset="-122"/>
+                <a:cs typeface="Cambria" pitchFamily="34" charset="-120"/>
+              </a:rPr>
+              <a:t>plus resplendissent tes étoiles.</a:t>
+            </a:r>
+            <a:endParaRPr lang="en-US" sz="2000" dirty="0"/>
+          </a:p>
+        </p:txBody>
+      </p:sp>
+      <p:sp>
+        <p:nvSpPr>
+          <p:cNvPr id="7" name="Shape 4"/>
+          <p:cNvSpPr/>
+          <p:nvPr/>
+        </p:nvSpPr>
+        <p:spPr>
+          <a:xfrm>
+            <a:off x="6720840" y="1417320"/>
+            <a:ext cx="4919472" cy="4617720"/>
+          </a:xfrm>
+          <a:prstGeom prst="roundRect">
+            <a:avLst>
+              <a:gd name="adj" fmla="val 1782"/>
+            </a:avLst>
+          </a:prstGeom>
+          <a:solidFill>
+            <a:srgbClr val="1E1A14"/>
+          </a:solidFill>
+          <a:ln w="12700">
+            <a:solidFill>
+              <a:srgbClr val="332C22"/>
+            </a:solidFill>
+            <a:prstDash val="solid"/>
+          </a:ln>
+          <a:effectLst>
+            <a:outerShdw blurRad="114300" dist="38100" dir="5400000" algn="bl" rotWithShape="0">
+              <a:srgbClr val="000000">
+                <a:alpha val="40000"/>
+              </a:srgbClr>
+            </a:outerShdw>
+          </a:effectLst>
+        </p:spPr>
+        <p:txBody>
+          <a:bodyPr/>
+          <a:lstStyle/>
+          <a:p>
+            <a:endParaRPr lang="fr-CA"/>
+          </a:p>
+        </p:txBody>
+      </p:sp>
+      <p:sp>
+        <p:nvSpPr>
+          <p:cNvPr id="8" name="Text 5"/>
+          <p:cNvSpPr/>
+          <p:nvPr/>
+        </p:nvSpPr>
+        <p:spPr>
+          <a:xfrm>
+            <a:off x="6995160" y="1600200"/>
+            <a:ext cx="4389120" cy="411480"/>
+          </a:xfrm>
+          <a:prstGeom prst="rect">
+            <a:avLst/>
+          </a:prstGeom>
+          <a:noFill/>
+          <a:ln/>
+        </p:spPr>
+        <p:txBody>
+          <a:bodyPr wrap="square" rtlCol="0" anchor="ctr"/>
+          <a:lstStyle/>
+          <a:p>
+            <a:pPr marL="0" indent="0">
+              <a:buNone/>
+            </a:pPr>
+            <a:r>
+              <a:rPr lang="en-US" sz="1600" b="1" dirty="0">
+                <a:solidFill>
+                  <a:srgbClr val="E8821E"/>
+                </a:solidFill>
+                <a:latin typeface="Cambria" pitchFamily="34" charset="0"/>
+                <a:ea typeface="Cambria" pitchFamily="34" charset="-122"/>
+                <a:cs typeface="Cambria" pitchFamily="34" charset="-120"/>
+              </a:rPr>
+              <a:t>Éclairage</a:t>
+            </a:r>
+            <a:endParaRPr lang="en-US" sz="1600" dirty="0"/>
+          </a:p>
+        </p:txBody>
+      </p:sp>
+      <p:sp>
+        <p:nvSpPr>
+          <p:cNvPr id="9" name="Text 6"/>
+          <p:cNvSpPr/>
+          <p:nvPr/>
+        </p:nvSpPr>
+        <p:spPr>
+          <a:xfrm>
+            <a:off x="6995160" y="2148840"/>
+            <a:ext cx="4389120" cy="3703320"/>
+          </a:xfrm>
+          <a:prstGeom prst="rect">
+            <a:avLst/>
+          </a:prstGeom>
+          <a:noFill/>
+          <a:ln/>
+        </p:spPr>
+        <p:txBody>
+          <a:bodyPr wrap="square" rtlCol="0" anchor="ctr" anchorCtr="0"/>
+          <a:lstStyle/>
+          <a:p>
+            <a:pPr marL="0" indent="0" algn="ctr">
+              <a:lnSpc>
+                <a:spcPts val="1848"/>
+              </a:lnSpc>
+              <a:buNone/>
+            </a:pPr>
+            <a:r>
+              <a:rPr lang="fr-CA" sz="1400" b="1" dirty="0">
+                <a:solidFill>
+                  <a:srgbClr val="E8821E"/>
+                </a:solidFill>
+                <a:latin typeface="Cambria" pitchFamily="34" charset="0"/>
+                <a:ea typeface="Cambria" pitchFamily="34" charset="-122"/>
+                <a:cs typeface="Cambria" pitchFamily="34" charset="-120"/>
+              </a:rPr>
+              <a:t>Sens — </a:t>
+            </a:r>
+            <a:r>
+              <a:rPr lang="fr-CA" sz="1400" dirty="0">
+                <a:solidFill>
+                  <a:srgbClr val="F5EFE4"/>
+                </a:solidFill>
+                <a:latin typeface="Cambria" pitchFamily="34" charset="0"/>
+                <a:ea typeface="Cambria" pitchFamily="34" charset="-122"/>
+                <a:cs typeface="Cambria" pitchFamily="34" charset="-120"/>
+              </a:rPr>
+              <a:t>image ancienne : du fond d'un puits, on aperçoit les étoiles en plein jour. Plus l'épreuve est profonde, plus la grâce de Dieu resplendit.</a:t>
+            </a:r>
+          </a:p>
+          <a:p>
+            <a:pPr marL="0" indent="0" algn="ctr">
+              <a:lnSpc>
+                <a:spcPts val="1848"/>
+              </a:lnSpc>
+              <a:buNone/>
+            </a:pPr>
+            <a:endParaRPr lang="fr-CA" sz="1400" b="1" dirty="0">
+              <a:solidFill>
+                <a:srgbClr val="E8821E"/>
+              </a:solidFill>
+              <a:latin typeface="Cambria" pitchFamily="34" charset="0"/>
+            </a:endParaRPr>
+          </a:p>
+          <a:p>
+            <a:pPr marL="0" indent="0" algn="ctr">
+              <a:lnSpc>
+                <a:spcPts val="1848"/>
+              </a:lnSpc>
+              <a:buNone/>
+            </a:pPr>
+            <a:r>
+              <a:rPr lang="fr-CA" sz="1400" b="1" dirty="0">
+                <a:solidFill>
+                  <a:srgbClr val="E8821E"/>
+                </a:solidFill>
+                <a:latin typeface="Cambria" pitchFamily="34" charset="0"/>
+                <a:ea typeface="Cambria" pitchFamily="34" charset="-122"/>
+                <a:cs typeface="Cambria" pitchFamily="34" charset="-120"/>
+              </a:rPr>
+              <a:t>Locus — </a:t>
+            </a:r>
+            <a:r>
+              <a:rPr lang="fr-CA" sz="1400" dirty="0">
+                <a:solidFill>
+                  <a:srgbClr val="F5EFE4"/>
+                </a:solidFill>
+                <a:latin typeface="Cambria" pitchFamily="34" charset="0"/>
+                <a:ea typeface="Cambria" pitchFamily="34" charset="-122"/>
+                <a:cs typeface="Cambria" pitchFamily="34" charset="-120"/>
+              </a:rPr>
+              <a:t>le trésor est porté dans des vases d'argile, afin que la puissance soit de Dieu et non de nous.</a:t>
+            </a:r>
+          </a:p>
+          <a:p>
+            <a:pPr marL="0" indent="0" algn="ctr">
+              <a:lnSpc>
+                <a:spcPts val="1848"/>
+              </a:lnSpc>
+              <a:buNone/>
+            </a:pPr>
+            <a:r>
+              <a:rPr lang="fr-CA" sz="1400" dirty="0">
+                <a:solidFill>
+                  <a:srgbClr val="F5EFE4"/>
+                </a:solidFill>
+                <a:latin typeface="Cambria" pitchFamily="34" charset="0"/>
+                <a:ea typeface="Cambria" pitchFamily="34" charset="-122"/>
+                <a:cs typeface="Cambria" pitchFamily="34" charset="-120"/>
+              </a:rPr>
+              <a:t>(2 Co 4.6-11)</a:t>
+            </a:r>
+          </a:p>
+          <a:p>
+            <a:pPr marL="0" indent="0" algn="ctr">
+              <a:lnSpc>
+                <a:spcPts val="1848"/>
+              </a:lnSpc>
+              <a:buNone/>
+            </a:pPr>
+            <a:endParaRPr lang="fr-CA" sz="1400" b="1" dirty="0">
+              <a:solidFill>
+                <a:srgbClr val="E8821E"/>
+              </a:solidFill>
+              <a:latin typeface="Cambria" pitchFamily="34" charset="0"/>
+            </a:endParaRPr>
+          </a:p>
+          <a:p>
+            <a:pPr marL="0" indent="0" algn="ctr">
+              <a:lnSpc>
+                <a:spcPts val="1848"/>
+              </a:lnSpc>
+              <a:buNone/>
+            </a:pPr>
+            <a:r>
+              <a:rPr lang="fr-CA" sz="1400" b="1" dirty="0">
+                <a:solidFill>
+                  <a:srgbClr val="E8821E"/>
+                </a:solidFill>
+                <a:latin typeface="Cambria" pitchFamily="34" charset="0"/>
+                <a:ea typeface="Cambria" pitchFamily="34" charset="-122"/>
+                <a:cs typeface="Cambria" pitchFamily="34" charset="-120"/>
+              </a:rPr>
+              <a:t>Pour l'assemblée — </a:t>
+            </a:r>
+            <a:r>
+              <a:rPr lang="fr-CA" sz="1400" dirty="0">
+                <a:solidFill>
+                  <a:srgbClr val="F5EFE4"/>
+                </a:solidFill>
+                <a:latin typeface="Cambria" pitchFamily="34" charset="0"/>
+                <a:ea typeface="Cambria" pitchFamily="34" charset="-122"/>
+                <a:cs typeface="Cambria" pitchFamily="34" charset="-120"/>
+              </a:rPr>
+              <a:t>la profondeur de la détresse n'éteint pas la vision : elle la révèle. Sa grâce suffit.</a:t>
+            </a:r>
+          </a:p>
+          <a:p>
+            <a:pPr marL="0" indent="0" algn="ctr">
+              <a:lnSpc>
+                <a:spcPts val="1848"/>
+              </a:lnSpc>
+              <a:buNone/>
+            </a:pPr>
+            <a:r>
+              <a:rPr lang="fr-CA" sz="1400" dirty="0">
+                <a:solidFill>
+                  <a:srgbClr val="F5EFE4"/>
+                </a:solidFill>
+                <a:latin typeface="Cambria" pitchFamily="34" charset="0"/>
+                <a:ea typeface="Cambria" pitchFamily="34" charset="-122"/>
+                <a:cs typeface="Cambria" pitchFamily="34" charset="-120"/>
+              </a:rPr>
+              <a:t>(2 Co 12.9-10)</a:t>
+            </a:r>
+          </a:p>
+        </p:txBody>
+      </p:sp>
+      <p:sp>
+        <p:nvSpPr>
+          <p:cNvPr id="10" name="Text 7"/>
+          <p:cNvSpPr/>
+          <p:nvPr/>
+        </p:nvSpPr>
+        <p:spPr>
+          <a:xfrm>
+            <a:off x="548640" y="6437376"/>
+            <a:ext cx="10515600" cy="274320"/>
+          </a:xfrm>
+          <a:prstGeom prst="rect">
+            <a:avLst/>
+          </a:prstGeom>
+          <a:noFill/>
+          <a:ln/>
+        </p:spPr>
+        <p:txBody>
+          <a:bodyPr wrap="square" lIns="0" tIns="0" rIns="0" bIns="0" rtlCol="0" anchor="ctr"/>
+          <a:lstStyle/>
+          <a:p>
+            <a:pPr marL="0" indent="0" algn="l">
+              <a:buNone/>
+            </a:pPr>
+            <a:r>
+              <a:rPr lang="en-US" sz="900" dirty="0">
+                <a:solidFill>
+                  <a:srgbClr val="A89F90"/>
+                </a:solidFill>
+                <a:latin typeface="Cambria" pitchFamily="34" charset="0"/>
+                <a:ea typeface="Cambria" pitchFamily="34" charset="-122"/>
+                <a:cs typeface="Cambria" pitchFamily="34" charset="-120"/>
+              </a:rPr>
+              <a:t>Église Baptiste de Charlesbourg</a:t>
+            </a:r>
+            <a:r>
+              <a:rPr lang="en-US" sz="900" dirty="0">
+                <a:solidFill>
+                  <a:srgbClr val="6E665A"/>
+                </a:solidFill>
+                <a:latin typeface="Cambria" pitchFamily="34" charset="0"/>
+                <a:ea typeface="Cambria" pitchFamily="34" charset="-122"/>
+                <a:cs typeface="Cambria" pitchFamily="34" charset="-120"/>
+              </a:rPr>
+              <a:t>   ·   Pasteur Simon Ouellette   ·   EBC   ·   NEG 1979</a:t>
+            </a:r>
+            <a:endParaRPr lang="en-US" sz="900" dirty="0"/>
+          </a:p>
+        </p:txBody>
+      </p:sp>
+      <p:sp>
+        <p:nvSpPr>
+          <p:cNvPr id="11" name="Text 8"/>
+          <p:cNvSpPr/>
+          <p:nvPr/>
+        </p:nvSpPr>
+        <p:spPr>
+          <a:xfrm>
+            <a:off x="11430000" y="6400800"/>
+            <a:ext cx="502920" cy="292608"/>
+          </a:xfrm>
+          <a:prstGeom prst="rect">
+            <a:avLst/>
+          </a:prstGeom>
+          <a:noFill/>
+          <a:ln/>
+        </p:spPr>
+        <p:txBody>
+          <a:bodyPr wrap="square" rtlCol="0" anchor="ctr"/>
+          <a:lstStyle/>
+          <a:p>
+            <a:pPr marL="0" indent="0" algn="r">
+              <a:buNone/>
+            </a:pPr>
+            <a:r>
+              <a:rPr lang="en-US" sz="1000" dirty="0">
+                <a:solidFill>
+                  <a:srgbClr val="A89F90"/>
+                </a:solidFill>
+                <a:latin typeface="Cambria" pitchFamily="34" charset="0"/>
+                <a:ea typeface="Cambria" pitchFamily="34" charset="-122"/>
+                <a:cs typeface="Cambria" pitchFamily="34" charset="-120"/>
+              </a:rPr>
+              <a:t>8</a:t>
+            </a:r>
+            <a:endParaRPr lang="en-US" sz="1000" dirty="0"/>
+          </a:p>
+        </p:txBody>
+      </p:sp>
+      <p:sp>
+        <p:nvSpPr>
+          <p:cNvPr id="401" name="eyebrow"/>
+          <p:cNvSpPr txBox="1"/>
+          <p:nvPr/>
+        </p:nvSpPr>
+        <p:spPr>
+          <a:xfrm>
+            <a:off x="1422400" y="127000"/>
+            <a:ext cx="8890000" cy="228600"/>
+          </a:xfrm>
+          <a:prstGeom prst="rect">
+            <a:avLst/>
+          </a:prstGeom>
+          <a:noFill/>
+        </p:spPr>
+        <p:txBody>
+          <a:bodyPr wrap="none" lIns="0" tIns="0" rIns="0" bIns="0" anchor="t"/>
+          <a:lstStyle/>
+          <a:p>
+            <a:pPr algn="l">
+              <a:buNone/>
+            </a:pPr>
+            <a:r>
+              <a:rPr lang="fr-CA" sz="1400" b="1" spc="320" dirty="0">
+                <a:solidFill>
+                  <a:srgbClr val="F2A24E"/>
+                </a:solidFill>
+                <a:latin typeface="Cambria" pitchFamily="34" charset="0"/>
+              </a:rPr>
+              <a:t>10 · MOUVEMENT III</a:t>
+            </a:r>
+          </a:p>
+        </p:txBody>
+      </p:sp>
+    </p:spTree>
+    <p:extLst>
+      <p:ext uri="{BB962C8B-B14F-4D97-AF65-F5344CB8AC3E}">
+        <p14:creationId xmlns:p14="http://schemas.microsoft.com/office/powerpoint/2010/main" val="1402530145"/>
+      </p:ext>
+    </p:extLst>
+  </p:cSld>
+  <p:clrMapOvr>
+    <a:masterClrMapping/>
+  </p:clrMapOvr>
+</p:sld>
+</file>
+
+<file path=ppt/slides/slide11.xml><?xml version="1.0" encoding="utf-8"?>
+<p:sld xmlns:a="http://schemas.openxmlformats.org/drawingml/2006/main" xmlns:r="http://schemas.openxmlformats.org/officeDocument/2006/relationships" xmlns:p="http://schemas.openxmlformats.org/presentationml/2006/main">
+  <p:cSld name="Slide 9">
+    <p:bg>
+      <p:bgPr>
+        <a:solidFill>
+          <a:srgbClr val="121212"/>
+        </a:solidFill>
+        <a:effectLst/>
+      </p:bgPr>
+    </p:bg>
+    <p:spTree>
+      <p:nvGrpSpPr>
+        <p:cNvPr id="1" name=""/>
+        <p:cNvGrpSpPr/>
+        <p:nvPr/>
+      </p:nvGrpSpPr>
+      <p:grpSpPr>
+        <a:xfrm>
+          <a:off x="0" y="0"/>
+          <a:ext cx="0" cy="0"/>
+          <a:chOff x="0" y="0"/>
+          <a:chExt cx="0" cy="0"/>
+        </a:xfrm>
+      </p:grpSpPr>
+      <p:sp>
+        <p:nvSpPr>
+          <p:cNvPr id="2" name="Shape 0"/>
+          <p:cNvSpPr/>
+          <p:nvPr/>
+        </p:nvSpPr>
+        <p:spPr>
+          <a:xfrm>
+            <a:off x="548640" y="411480"/>
+            <a:ext cx="713232" cy="713232"/>
+          </a:xfrm>
+          <a:prstGeom prst="ellipse">
+            <a:avLst/>
+          </a:prstGeom>
+          <a:solidFill>
+            <a:srgbClr val="E8821E"/>
+          </a:solidFill>
+          <a:ln/>
+        </p:spPr>
+        <p:txBody>
+          <a:bodyPr/>
+          <a:lstStyle/>
+          <a:p>
+            <a:endParaRPr lang="fr-CA"/>
+          </a:p>
+        </p:txBody>
+      </p:sp>
+      <p:pic>
+        <p:nvPicPr>
+          <p:cNvPr id="3" name="Image 0" descr="preencoded.png"/>
+          <p:cNvPicPr>
+            <a:picLocks noChangeAspect="1"/>
+          </p:cNvPicPr>
+          <p:nvPr/>
+        </p:nvPicPr>
+        <p:blipFill>
+          <a:blip r:embed="rId3"/>
+          <a:stretch>
+            <a:fillRect/>
+          </a:stretch>
+        </p:blipFill>
+        <p:spPr>
+          <a:xfrm>
+            <a:off x="741213" y="604053"/>
+            <a:ext cx="328087" cy="328087"/>
+          </a:xfrm>
+          <a:prstGeom prst="rect">
+            <a:avLst/>
+          </a:prstGeom>
+        </p:spPr>
+      </p:pic>
+      <p:sp>
+        <p:nvSpPr>
+          <p:cNvPr id="4" name="Text 1"/>
+          <p:cNvSpPr/>
+          <p:nvPr/>
+        </p:nvSpPr>
+        <p:spPr>
+          <a:xfrm>
+            <a:off x="1417320" y="411480"/>
+            <a:ext cx="10149840" cy="713232"/>
+          </a:xfrm>
+          <a:prstGeom prst="rect">
+            <a:avLst/>
+          </a:prstGeom>
+          <a:noFill/>
+          <a:ln/>
+        </p:spPr>
+        <p:txBody>
+          <a:bodyPr wrap="square" lIns="0" tIns="0" rIns="0" bIns="0" rtlCol="0" anchor="ctr"/>
+          <a:lstStyle/>
+          <a:p>
+            <a:pPr marL="0" indent="0">
+              <a:buNone/>
+            </a:pPr>
+            <a:r>
+              <a:rPr lang="en-US" sz="2700" b="1" dirty="0">
+                <a:solidFill>
+                  <a:srgbClr val="F5EFE4"/>
+                </a:solidFill>
+                <a:latin typeface="Cambria" pitchFamily="34" charset="0"/>
+                <a:ea typeface="Cambria" pitchFamily="34" charset="-122"/>
+                <a:cs typeface="Cambria" pitchFamily="34" charset="-120"/>
+              </a:rPr>
+              <a:t>4.  « Donne-moi de trouver »</a:t>
+            </a:r>
+            <a:endParaRPr lang="en-US" sz="2700" dirty="0"/>
+          </a:p>
+        </p:txBody>
+      </p:sp>
+      <p:sp>
+        <p:nvSpPr>
+          <p:cNvPr id="5" name="Shape 2"/>
+          <p:cNvSpPr/>
+          <p:nvPr/>
+        </p:nvSpPr>
+        <p:spPr>
+          <a:xfrm>
+            <a:off x="548640" y="1417320"/>
+            <a:ext cx="5943600" cy="4617720"/>
+          </a:xfrm>
+          <a:prstGeom prst="roundRect">
+            <a:avLst>
+              <a:gd name="adj" fmla="val 1782"/>
+            </a:avLst>
+          </a:prstGeom>
+          <a:solidFill>
+            <a:srgbClr val="2A2419"/>
+          </a:solidFill>
+          <a:ln w="12700">
+            <a:solidFill>
+              <a:srgbClr val="332C22"/>
+            </a:solidFill>
+            <a:prstDash val="solid"/>
+          </a:ln>
+          <a:effectLst>
+            <a:outerShdw blurRad="114300" dist="38100" dir="5400000" algn="bl" rotWithShape="0">
+              <a:srgbClr val="000000">
+                <a:alpha val="40000"/>
+              </a:srgbClr>
+            </a:outerShdw>
+          </a:effectLst>
+        </p:spPr>
+        <p:txBody>
+          <a:bodyPr/>
+          <a:lstStyle/>
+          <a:p>
+            <a:endParaRPr lang="fr-CA"/>
+          </a:p>
+        </p:txBody>
+      </p:sp>
+      <p:sp>
+        <p:nvSpPr>
+          <p:cNvPr id="6" name="Text 3"/>
+          <p:cNvSpPr/>
+          <p:nvPr/>
+        </p:nvSpPr>
+        <p:spPr>
+          <a:xfrm>
+            <a:off x="868680" y="1783080"/>
+            <a:ext cx="5349240" cy="4114800"/>
+          </a:xfrm>
+          <a:prstGeom prst="rect">
+            <a:avLst/>
+          </a:prstGeom>
+          <a:noFill/>
+          <a:ln/>
+        </p:spPr>
+        <p:txBody>
+          <a:bodyPr wrap="square" rtlCol="0" anchor="t"/>
+          <a:lstStyle/>
+          <a:p>
+            <a:pPr marL="0" indent="0" algn="l">
+              <a:lnSpc>
+                <a:spcPts val="2144"/>
+              </a:lnSpc>
+              <a:spcAft>
+                <a:spcPts val="500"/>
+              </a:spcAft>
+              <a:buNone/>
+            </a:pPr>
+            <a:endParaRPr lang="en-US" sz="2000" i="1" dirty="0">
+              <a:solidFill>
+                <a:srgbClr val="F5EFE4"/>
+              </a:solidFill>
+              <a:latin typeface="Cambria" pitchFamily="34" charset="0"/>
+              <a:ea typeface="Cambria" pitchFamily="34" charset="-122"/>
+              <a:cs typeface="Cambria" pitchFamily="34" charset="-120"/>
+            </a:endParaRPr>
+          </a:p>
+          <a:p>
+            <a:pPr marL="0" indent="0" algn="l">
+              <a:lnSpc>
+                <a:spcPts val="2144"/>
+              </a:lnSpc>
+              <a:spcAft>
+                <a:spcPts val="500"/>
+              </a:spcAft>
+              <a:buNone/>
+            </a:pPr>
+            <a:endParaRPr lang="en-US" sz="2000" i="1" dirty="0">
+              <a:solidFill>
+                <a:srgbClr val="F5EFE4"/>
+              </a:solidFill>
+              <a:latin typeface="Cambria" pitchFamily="34" charset="0"/>
+              <a:ea typeface="Cambria" pitchFamily="34" charset="-122"/>
+              <a:cs typeface="Cambria" pitchFamily="34" charset="-120"/>
+            </a:endParaRPr>
+          </a:p>
+          <a:p>
+            <a:pPr marL="0" indent="0" algn="l">
+              <a:lnSpc>
+                <a:spcPts val="2144"/>
+              </a:lnSpc>
+              <a:spcAft>
+                <a:spcPts val="500"/>
+              </a:spcAft>
+              <a:buNone/>
+            </a:pPr>
+            <a:r>
+              <a:rPr lang="en-US" sz="2000" i="1" dirty="0">
+                <a:solidFill>
+                  <a:srgbClr val="F5EFE4"/>
+                </a:solidFill>
+                <a:latin typeface="Cambria" pitchFamily="34" charset="0"/>
+                <a:ea typeface="Cambria" pitchFamily="34" charset="-122"/>
+                <a:cs typeface="Cambria" pitchFamily="34" charset="-120"/>
+              </a:rPr>
+              <a:t>Donne-moi de trouver</a:t>
+            </a:r>
+            <a:endParaRPr lang="en-US" sz="2000" dirty="0"/>
+          </a:p>
+          <a:p>
+            <a:pPr marL="0" indent="0" algn="l">
+              <a:lnSpc>
+                <a:spcPts val="2144"/>
+              </a:lnSpc>
+              <a:spcAft>
+                <a:spcPts val="500"/>
+              </a:spcAft>
+              <a:buNone/>
+            </a:pPr>
+            <a:r>
+              <a:rPr lang="en-US" sz="2000" i="1" dirty="0">
+                <a:solidFill>
+                  <a:srgbClr val="F5EFE4"/>
+                </a:solidFill>
+                <a:latin typeface="Cambria" pitchFamily="34" charset="0"/>
+                <a:ea typeface="Cambria" pitchFamily="34" charset="-122"/>
+                <a:cs typeface="Cambria" pitchFamily="34" charset="-120"/>
+              </a:rPr>
+              <a:t>ta lumière dans mes ténèbres,</a:t>
+            </a:r>
+            <a:endParaRPr lang="en-US" sz="2000" dirty="0"/>
+          </a:p>
+          <a:p>
+            <a:pPr marL="0" indent="0" algn="l">
+              <a:lnSpc>
+                <a:spcPts val="2144"/>
+              </a:lnSpc>
+              <a:spcAft>
+                <a:spcPts val="500"/>
+              </a:spcAft>
+              <a:buNone/>
+            </a:pPr>
+            <a:r>
+              <a:rPr lang="en-US" sz="2000" i="1" dirty="0">
+                <a:solidFill>
+                  <a:srgbClr val="F5EFE4"/>
+                </a:solidFill>
+                <a:latin typeface="Cambria" pitchFamily="34" charset="0"/>
+                <a:ea typeface="Cambria" pitchFamily="34" charset="-122"/>
+                <a:cs typeface="Cambria" pitchFamily="34" charset="-120"/>
+              </a:rPr>
+              <a:t>ta vie dans ma mort,</a:t>
+            </a:r>
+            <a:endParaRPr lang="en-US" sz="2000" dirty="0"/>
+          </a:p>
+          <a:p>
+            <a:pPr marL="0" indent="0" algn="l">
+              <a:lnSpc>
+                <a:spcPts val="2144"/>
+              </a:lnSpc>
+              <a:spcAft>
+                <a:spcPts val="500"/>
+              </a:spcAft>
+              <a:buNone/>
+            </a:pPr>
+            <a:r>
+              <a:rPr lang="en-US" sz="2000" i="1" dirty="0">
+                <a:solidFill>
+                  <a:srgbClr val="F5EFE4"/>
+                </a:solidFill>
+                <a:latin typeface="Cambria" pitchFamily="34" charset="0"/>
+                <a:ea typeface="Cambria" pitchFamily="34" charset="-122"/>
+                <a:cs typeface="Cambria" pitchFamily="34" charset="-120"/>
+              </a:rPr>
+              <a:t>ta joie dans mes peines,</a:t>
+            </a:r>
+            <a:endParaRPr lang="en-US" sz="2000" dirty="0"/>
+          </a:p>
+          <a:p>
+            <a:pPr marL="0" indent="0" algn="l">
+              <a:lnSpc>
+                <a:spcPts val="2144"/>
+              </a:lnSpc>
+              <a:spcAft>
+                <a:spcPts val="500"/>
+              </a:spcAft>
+              <a:buNone/>
+            </a:pPr>
+            <a:r>
+              <a:rPr lang="en-US" sz="2000" i="1" dirty="0">
+                <a:solidFill>
+                  <a:srgbClr val="F5EFE4"/>
+                </a:solidFill>
+                <a:latin typeface="Cambria" pitchFamily="34" charset="0"/>
+                <a:ea typeface="Cambria" pitchFamily="34" charset="-122"/>
+                <a:cs typeface="Cambria" pitchFamily="34" charset="-120"/>
+              </a:rPr>
+              <a:t>ta grâce dans mon péché,</a:t>
+            </a:r>
+            <a:endParaRPr lang="en-US" sz="2000" dirty="0"/>
+          </a:p>
+          <a:p>
+            <a:pPr marL="0" indent="0" algn="l">
+              <a:lnSpc>
+                <a:spcPts val="2144"/>
+              </a:lnSpc>
+              <a:spcAft>
+                <a:spcPts val="500"/>
+              </a:spcAft>
+              <a:buNone/>
+            </a:pPr>
+            <a:r>
+              <a:rPr lang="en-US" sz="2000" i="1" dirty="0">
+                <a:solidFill>
+                  <a:srgbClr val="F5EFE4"/>
+                </a:solidFill>
+                <a:latin typeface="Cambria" pitchFamily="34" charset="0"/>
+                <a:ea typeface="Cambria" pitchFamily="34" charset="-122"/>
+                <a:cs typeface="Cambria" pitchFamily="34" charset="-120"/>
+              </a:rPr>
+              <a:t>tes richesses dans ma pauvreté,</a:t>
+            </a:r>
+            <a:endParaRPr lang="en-US" sz="2000" dirty="0"/>
+          </a:p>
+          <a:p>
+            <a:pPr marL="0" indent="0" algn="l">
+              <a:lnSpc>
+                <a:spcPts val="2144"/>
+              </a:lnSpc>
+              <a:spcAft>
+                <a:spcPts val="500"/>
+              </a:spcAft>
+              <a:buNone/>
+            </a:pPr>
+            <a:r>
+              <a:rPr lang="en-US" sz="2000" i="1" dirty="0">
+                <a:solidFill>
+                  <a:srgbClr val="F5EFE4"/>
+                </a:solidFill>
+                <a:latin typeface="Cambria" pitchFamily="34" charset="0"/>
+                <a:ea typeface="Cambria" pitchFamily="34" charset="-122"/>
+                <a:cs typeface="Cambria" pitchFamily="34" charset="-120"/>
+              </a:rPr>
+              <a:t>ta gloire dans ma vallée.</a:t>
+            </a:r>
+            <a:endParaRPr lang="en-US" sz="2000" dirty="0"/>
+          </a:p>
+        </p:txBody>
+      </p:sp>
+      <p:sp>
+        <p:nvSpPr>
+          <p:cNvPr id="7" name="Shape 4"/>
+          <p:cNvSpPr/>
+          <p:nvPr/>
+        </p:nvSpPr>
+        <p:spPr>
+          <a:xfrm>
+            <a:off x="6720840" y="1417320"/>
+            <a:ext cx="4919472" cy="4617720"/>
+          </a:xfrm>
+          <a:prstGeom prst="roundRect">
+            <a:avLst>
+              <a:gd name="adj" fmla="val 1782"/>
+            </a:avLst>
+          </a:prstGeom>
+          <a:solidFill>
+            <a:srgbClr val="1E1A14"/>
+          </a:solidFill>
+          <a:ln w="12700">
+            <a:solidFill>
+              <a:srgbClr val="332C22"/>
+            </a:solidFill>
+            <a:prstDash val="solid"/>
+          </a:ln>
+          <a:effectLst>
+            <a:outerShdw blurRad="114300" dist="38100" dir="5400000" algn="bl" rotWithShape="0">
+              <a:srgbClr val="000000">
+                <a:alpha val="40000"/>
+              </a:srgbClr>
+            </a:outerShdw>
+          </a:effectLst>
+        </p:spPr>
+        <p:txBody>
+          <a:bodyPr/>
+          <a:lstStyle/>
+          <a:p>
+            <a:endParaRPr lang="fr-CA"/>
+          </a:p>
+        </p:txBody>
+      </p:sp>
+      <p:sp>
+        <p:nvSpPr>
+          <p:cNvPr id="8" name="Text 5"/>
+          <p:cNvSpPr/>
+          <p:nvPr/>
+        </p:nvSpPr>
+        <p:spPr>
+          <a:xfrm>
+            <a:off x="6995160" y="1600200"/>
+            <a:ext cx="4389120" cy="411480"/>
+          </a:xfrm>
+          <a:prstGeom prst="rect">
+            <a:avLst/>
+          </a:prstGeom>
+          <a:noFill/>
+          <a:ln/>
+        </p:spPr>
+        <p:txBody>
+          <a:bodyPr wrap="square" rtlCol="0" anchor="ctr"/>
+          <a:lstStyle/>
+          <a:p>
+            <a:pPr marL="0" indent="0">
+              <a:buNone/>
+            </a:pPr>
+            <a:r>
+              <a:rPr lang="en-US" sz="1600" b="1" dirty="0">
+                <a:solidFill>
+                  <a:srgbClr val="E8821E"/>
+                </a:solidFill>
+                <a:latin typeface="Cambria" pitchFamily="34" charset="0"/>
+                <a:ea typeface="Cambria" pitchFamily="34" charset="-122"/>
+                <a:cs typeface="Cambria" pitchFamily="34" charset="-120"/>
+              </a:rPr>
+              <a:t>Éclairage</a:t>
+            </a:r>
+            <a:endParaRPr lang="en-US" sz="1600" dirty="0"/>
+          </a:p>
+        </p:txBody>
+      </p:sp>
+      <p:sp>
+        <p:nvSpPr>
+          <p:cNvPr id="9" name="Text 6"/>
+          <p:cNvSpPr/>
+          <p:nvPr/>
+        </p:nvSpPr>
+        <p:spPr>
+          <a:xfrm>
+            <a:off x="6995160" y="2148840"/>
+            <a:ext cx="4389120" cy="3703320"/>
+          </a:xfrm>
+          <a:prstGeom prst="rect">
+            <a:avLst/>
+          </a:prstGeom>
+          <a:noFill/>
+          <a:ln/>
+        </p:spPr>
+        <p:txBody>
+          <a:bodyPr wrap="square" rtlCol="0" anchor="t"/>
+          <a:lstStyle/>
+          <a:p>
+            <a:pPr marL="0" indent="0" algn="ctr">
+              <a:lnSpc>
+                <a:spcPts val="1848"/>
+              </a:lnSpc>
+              <a:buNone/>
+            </a:pPr>
+            <a:r>
+              <a:rPr lang="en-US" sz="1400" b="1" dirty="0">
+                <a:solidFill>
+                  <a:srgbClr val="E8821E"/>
+                </a:solidFill>
+                <a:latin typeface="Cambria" pitchFamily="34" charset="0"/>
+                <a:ea typeface="Cambria" pitchFamily="34" charset="-122"/>
+                <a:cs typeface="Cambria" pitchFamily="34" charset="-120"/>
+              </a:rPr>
+              <a:t>Sens — </a:t>
+            </a:r>
+            <a:r>
+              <a:rPr lang="en-US" sz="1400" dirty="0">
+                <a:solidFill>
+                  <a:srgbClr val="F5EFE4"/>
+                </a:solidFill>
+                <a:latin typeface="Cambria" pitchFamily="34" charset="0"/>
+                <a:ea typeface="Cambria" pitchFamily="34" charset="-122"/>
+                <a:cs typeface="Cambria" pitchFamily="34" charset="-120"/>
+              </a:rPr>
+              <a:t>six antithèses qui résument l'échange de la grâce : de riche qu'il était, Christ s'est fait pauvre afin de nous enrichir (2 Co 8.9).</a:t>
+            </a:r>
+            <a:endParaRPr lang="en-US" sz="1400" dirty="0"/>
+          </a:p>
+          <a:p>
+            <a:pPr marL="0" indent="0" algn="ctr">
+              <a:lnSpc>
+                <a:spcPts val="1848"/>
+              </a:lnSpc>
+              <a:buNone/>
+            </a:pPr>
+            <a:r>
+              <a:rPr lang="en-US" sz="1400" b="1" dirty="0">
+                <a:solidFill>
+                  <a:srgbClr val="E8821E"/>
+                </a:solidFill>
+                <a:latin typeface="Cambria" pitchFamily="34" charset="0"/>
+                <a:ea typeface="Cambria" pitchFamily="34" charset="-122"/>
+                <a:cs typeface="Cambria" pitchFamily="34" charset="-120"/>
+              </a:rPr>
+              <a:t>« Donne-moi » — </a:t>
+            </a:r>
+            <a:r>
+              <a:rPr lang="en-US" sz="1400" dirty="0">
+                <a:solidFill>
+                  <a:srgbClr val="F5EFE4"/>
+                </a:solidFill>
+                <a:latin typeface="Cambria" pitchFamily="34" charset="0"/>
+                <a:ea typeface="Cambria" pitchFamily="34" charset="-122"/>
+                <a:cs typeface="Cambria" pitchFamily="34" charset="-120"/>
+              </a:rPr>
+              <a:t>tout est don. La grâce ne se mérite pas, elle se reçoit (Ép 2.8). C'est le monergisme de la grâce.</a:t>
+            </a:r>
+            <a:endParaRPr lang="en-US" sz="1400" dirty="0"/>
+          </a:p>
+          <a:p>
+            <a:pPr marL="0" indent="0" algn="ctr">
+              <a:lnSpc>
+                <a:spcPts val="1848"/>
+              </a:lnSpc>
+              <a:buNone/>
+            </a:pPr>
+            <a:r>
+              <a:rPr lang="en-US" sz="1400" b="1" dirty="0">
+                <a:solidFill>
+                  <a:srgbClr val="E8821E"/>
+                </a:solidFill>
+                <a:latin typeface="Cambria" pitchFamily="34" charset="0"/>
+                <a:ea typeface="Cambria" pitchFamily="34" charset="-122"/>
+                <a:cs typeface="Cambria" pitchFamily="34" charset="-120"/>
+              </a:rPr>
+              <a:t>« Dans mon péché » — </a:t>
+            </a:r>
+            <a:r>
+              <a:rPr lang="en-US" sz="1400" dirty="0">
+                <a:solidFill>
+                  <a:srgbClr val="F5EFE4"/>
+                </a:solidFill>
+                <a:latin typeface="Cambria" pitchFamily="34" charset="0"/>
+                <a:ea typeface="Cambria" pitchFamily="34" charset="-122"/>
+                <a:cs typeface="Cambria" pitchFamily="34" charset="-120"/>
+              </a:rPr>
+              <a:t>non pas malgré, mais dans : là où le péché a abondé, la grâce a surabondé (Rm 5.20). Jamais une licence pour pécher.</a:t>
+            </a:r>
+            <a:endParaRPr lang="en-US" sz="1400" dirty="0"/>
+          </a:p>
+        </p:txBody>
+      </p:sp>
+      <p:sp>
+        <p:nvSpPr>
+          <p:cNvPr id="10" name="Text 7"/>
+          <p:cNvSpPr/>
+          <p:nvPr/>
+        </p:nvSpPr>
+        <p:spPr>
+          <a:xfrm>
+            <a:off x="548640" y="6437376"/>
+            <a:ext cx="10515600" cy="274320"/>
+          </a:xfrm>
+          <a:prstGeom prst="rect">
+            <a:avLst/>
+          </a:prstGeom>
+          <a:noFill/>
+          <a:ln/>
+        </p:spPr>
+        <p:txBody>
+          <a:bodyPr wrap="square" lIns="0" tIns="0" rIns="0" bIns="0" rtlCol="0" anchor="ctr"/>
+          <a:lstStyle/>
+          <a:p>
+            <a:pPr marL="0" indent="0" algn="l">
+              <a:buNone/>
+            </a:pPr>
+            <a:r>
+              <a:rPr lang="en-US" sz="900" dirty="0">
+                <a:solidFill>
+                  <a:srgbClr val="A89F90"/>
+                </a:solidFill>
+                <a:latin typeface="Cambria" pitchFamily="34" charset="0"/>
+                <a:ea typeface="Cambria" pitchFamily="34" charset="-122"/>
+                <a:cs typeface="Cambria" pitchFamily="34" charset="-120"/>
+              </a:rPr>
+              <a:t>Église Baptiste de Charlesbourg</a:t>
+            </a:r>
+            <a:r>
+              <a:rPr lang="en-US" sz="900" dirty="0">
+                <a:solidFill>
+                  <a:srgbClr val="6E665A"/>
+                </a:solidFill>
+                <a:latin typeface="Cambria" pitchFamily="34" charset="0"/>
+                <a:ea typeface="Cambria" pitchFamily="34" charset="-122"/>
+                <a:cs typeface="Cambria" pitchFamily="34" charset="-120"/>
+              </a:rPr>
+              <a:t>   ·   Pasteur Simon Ouellette   ·   EBC   ·   NEG 1979</a:t>
+            </a:r>
+            <a:endParaRPr lang="en-US" sz="900" dirty="0"/>
+          </a:p>
+        </p:txBody>
+      </p:sp>
+      <p:sp>
+        <p:nvSpPr>
+          <p:cNvPr id="11" name="Text 8"/>
+          <p:cNvSpPr/>
+          <p:nvPr/>
+        </p:nvSpPr>
+        <p:spPr>
+          <a:xfrm>
+            <a:off x="11430000" y="6400800"/>
+            <a:ext cx="502920" cy="292608"/>
+          </a:xfrm>
+          <a:prstGeom prst="rect">
+            <a:avLst/>
+          </a:prstGeom>
+          <a:noFill/>
+          <a:ln/>
+        </p:spPr>
+        <p:txBody>
+          <a:bodyPr wrap="square" rtlCol="0" anchor="ctr"/>
+          <a:lstStyle/>
+          <a:p>
+            <a:pPr marL="0" indent="0" algn="r">
+              <a:buNone/>
+            </a:pPr>
+            <a:r>
+              <a:rPr lang="en-US" sz="1000" dirty="0">
+                <a:solidFill>
+                  <a:srgbClr val="A89F90"/>
+                </a:solidFill>
+                <a:latin typeface="Cambria" pitchFamily="34" charset="0"/>
+                <a:ea typeface="Cambria" pitchFamily="34" charset="-122"/>
+                <a:cs typeface="Cambria" pitchFamily="34" charset="-120"/>
+              </a:rPr>
+              <a:t>9</a:t>
+            </a:r>
+            <a:endParaRPr lang="en-US" sz="1000" dirty="0"/>
+          </a:p>
+        </p:txBody>
+      </p:sp>
+      <p:sp>
+        <p:nvSpPr>
+          <p:cNvPr id="401" name="eyebrow"/>
+          <p:cNvSpPr txBox="1"/>
+          <p:nvPr/>
+        </p:nvSpPr>
+        <p:spPr>
+          <a:xfrm>
+            <a:off x="1422400" y="127000"/>
+            <a:ext cx="8890000" cy="228600"/>
+          </a:xfrm>
+          <a:prstGeom prst="rect">
+            <a:avLst/>
+          </a:prstGeom>
+          <a:noFill/>
+        </p:spPr>
+        <p:txBody>
+          <a:bodyPr wrap="none" lIns="0" tIns="0" rIns="0" bIns="0" anchor="t"/>
+          <a:lstStyle/>
+          <a:p>
+            <a:pPr algn="l">
+              <a:buNone/>
+            </a:pPr>
+            <a:r>
+              <a:rPr lang="fr-CA" sz="1400" b="1" spc="320" dirty="0">
+                <a:solidFill>
+                  <a:srgbClr val="F2A24E"/>
+                </a:solidFill>
+                <a:latin typeface="Cambria" pitchFamily="34" charset="0"/>
+              </a:rPr>
+              <a:t>11 · MOUVEMENT IV</a:t>
+            </a:r>
+          </a:p>
+        </p:txBody>
+      </p:sp>
+    </p:spTree>
+    <p:extLst>
+      <p:ext uri="{BB962C8B-B14F-4D97-AF65-F5344CB8AC3E}">
+        <p14:creationId xmlns:p14="http://schemas.microsoft.com/office/powerpoint/2010/main" val="3328085537"/>
+      </p:ext>
+    </p:extLst>
+  </p:cSld>
+  <p:clrMapOvr>
+    <a:masterClrMapping/>
+  </p:clrMapOvr>
+</p:sld>
+</file>
+
+<file path=ppt/slides/slide12.xml><?xml version="1.0" encoding="utf-8"?>
 <p:sld xmlns:a="http://schemas.openxmlformats.org/drawingml/2006/main" xmlns:r="http://schemas.openxmlformats.org/officeDocument/2006/relationships" xmlns:p="http://schemas.openxmlformats.org/presentationml/2006/main">
   <p:cSld name="Slide 10">
     <p:bg>
@@ -2531,7 +4128,18 @@
                 <a:ea typeface="Cambria" pitchFamily="34" charset="-122"/>
                 <a:cs typeface="Cambria" pitchFamily="34" charset="-120"/>
               </a:rPr>
-              <a:t>La théologie de la croix</a:t>
+              <a:t>La théologie de la </a:t>
+            </a:r>
+            <a:r>
+              <a:rPr lang="en-US" sz="3200" b="1" i="1" dirty="0">
+                <a:solidFill>
+                  <a:srgbClr val="F5EFE4"/>
+                </a:solidFill>
+                <a:latin typeface="Cambria" pitchFamily="34" charset="0"/>
+                <a:ea typeface="Cambria" pitchFamily="34" charset="-122"/>
+                <a:cs typeface="Cambria" pitchFamily="34" charset="-120"/>
+              </a:rPr>
+              <a:t>croix</a:t>
             </a:r>
             <a:endParaRPr lang="en-US" sz="3200" dirty="0"/>
           </a:p>
@@ -2614,7 +4222,29 @@
                 <a:ea typeface="Cambria" pitchFamily="34" charset="-122"/>
                 <a:cs typeface="Cambria" pitchFamily="34" charset="-120"/>
               </a:rPr>
-              <a:t>La Vallée de la Vision n'exalte pas la souffrance pour elle-même. Elle confesse que Dieu agit à rebours des attentes humaines : il élève en abaissant, enrichit en dépouillant, illumine par la nuit. C'est la théologie de la croix (theologia crucis) contre la théologie de la gloire.</a:t>
+              <a:t>La Vallée de la Vision n'exalte pas la souffrance pour elle-même. Elle confesse que Dieu agit à rebours des attentes humaines : il élève en abaissant, enrichit en dépouillant, illumine par la nuit. C'est la théologie de la </a:t>
+            </a:r>
+            <a:r>
+              <a:rPr lang="en-US" sz="1650" dirty="0" err="1">
+                <a:solidFill>
+                  <a:srgbClr val="F5EFE4"/>
+                </a:solidFill>
+                <a:latin typeface="Cambria" pitchFamily="34" charset="0"/>
+                <a:ea typeface="Cambria" pitchFamily="34" charset="-122"/>
+                <a:cs typeface="Cambria" pitchFamily="34" charset="-120"/>
+              </a:rPr>
+              <a:t>croix</a:t>
+            </a:r>
+            <a:r>
+              <a:rPr lang="en-US" sz="1650" dirty="0">
+                <a:solidFill>
+                  <a:srgbClr val="F5EFE4"/>
+                </a:solidFill>
+                <a:latin typeface="Cambria" pitchFamily="34" charset="0"/>
+                <a:ea typeface="Cambria" pitchFamily="34" charset="-122"/>
+                <a:cs typeface="Cambria" pitchFamily="34" charset="-120"/>
+              </a:rPr>
+              <a:t>  contre la théologie de la gloire.</a:t>
             </a:r>
             <a:endParaRPr lang="en-US" sz="1650" dirty="0"/>
           </a:p>
@@ -2663,65 +4293,14 @@
       </p:sp>
       <p:sp>
         <p:nvSpPr>
-          <p:cNvPr id="6" name="Shape 4"/>
-          <p:cNvSpPr/>
-          <p:nvPr/>
-        </p:nvSpPr>
-        <p:spPr>
-          <a:xfrm>
-            <a:off x="868680" y="3657600"/>
-            <a:ext cx="685800" cy="685800"/>
-          </a:xfrm>
-          <a:prstGeom prst="ellipse">
-            <a:avLst/>
-          </a:prstGeom>
-          <a:solidFill>
-            <a:srgbClr val="E8821E"/>
-          </a:solidFill>
-          <a:ln/>
-        </p:spPr>
-        <p:txBody>
-          <a:bodyPr/>
-          <a:lstStyle/>
-          <a:p>
-            <a:endParaRPr lang="fr-CA"/>
-          </a:p>
-        </p:txBody>
-      </p:sp>
-      <p:pic>
-        <p:nvPicPr>
-          <p:cNvPr id="7" name="Image 0" descr="preencoded.png"/>
-          <p:cNvPicPr>
-            <a:picLocks noChangeAspect="1"/>
-          </p:cNvPicPr>
-          <p:nvPr/>
-        </p:nvPicPr>
-        <p:blipFill>
-          <a:blip r:embed="rId3"/>
-          <a:stretch>
-            <a:fillRect/>
-          </a:stretch>
-        </p:blipFill>
-        <p:spPr>
-          <a:xfrm>
-            <a:off x="1053846" y="3842766"/>
-            <a:ext cx="315468" cy="315468"/>
-          </a:xfrm>
-          <a:prstGeom prst="rect">
-            <a:avLst/>
-          </a:prstGeom>
-        </p:spPr>
-      </p:pic>
-      <p:sp>
-        <p:nvSpPr>
           <p:cNvPr id="8" name="Text 5"/>
           <p:cNvSpPr/>
           <p:nvPr/>
         </p:nvSpPr>
         <p:spPr>
           <a:xfrm>
-            <a:off x="1691640" y="3657600"/>
-            <a:ext cx="2066544" cy="685800"/>
+            <a:off x="850900" y="3962400"/>
+            <a:ext cx="2870200" cy="279400"/>
           </a:xfrm>
           <a:prstGeom prst="rect">
             <a:avLst/>
@@ -2733,21 +4312,18 @@
           <a:bodyPr wrap="square" rtlCol="0" anchor="ctr"/>
           <a:lstStyle/>
           <a:p>
-            <a:pPr marL="0" indent="0">
-              <a:buNone/>
-            </a:pPr>
-            <a:r>
-              <a:rPr lang="en-US" sz="1550" b="1" dirty="0">
-                <a:solidFill>
-                  <a:srgbClr val="F2A24E"/>
-                </a:solidFill>
-                <a:latin typeface="Cambria" pitchFamily="34" charset="0"/>
-                <a:ea typeface="Cambria" pitchFamily="34" charset="-122"/>
-                <a:cs typeface="Cambria" pitchFamily="34" charset="-120"/>
+            <a:pPr marL="0" indent="0" algn="l">
+              <a:buNone/>
+            </a:pPr>
+            <a:r>
+              <a:rPr lang="fr-CA" sz="1550" b="1" dirty="0">
+                <a:solidFill>
+                  <a:srgbClr val="F5EFE4"/>
+                </a:solidFill>
+                <a:latin typeface="Cambria" pitchFamily="34" charset="0"/>
               </a:rPr>
               <a:t>Contre la prospérité</a:t>
             </a:r>
-            <a:endParaRPr lang="en-US" sz="1550" dirty="0"/>
           </a:p>
         </p:txBody>
       </p:sp>
@@ -2759,8 +4335,8 @@
         </p:nvSpPr>
         <p:spPr>
           <a:xfrm>
-            <a:off x="868680" y="4526280"/>
-            <a:ext cx="2843784" cy="1371600"/>
+            <a:off x="850900" y="4368800"/>
+            <a:ext cx="2870200" cy="1600200"/>
           </a:xfrm>
           <a:prstGeom prst="rect">
             <a:avLst/>
@@ -2772,7 +4348,7 @@
           <a:bodyPr wrap="square" rtlCol="0" anchor="t"/>
           <a:lstStyle/>
           <a:p>
-            <a:pPr marL="0" indent="0">
+            <a:pPr marL="0" indent="0" algn="l">
               <a:lnSpc>
                 <a:spcPts val="1800"/>
               </a:lnSpc>
@@ -2836,65 +4412,14 @@
       </p:sp>
       <p:sp>
         <p:nvSpPr>
-          <p:cNvPr id="11" name="Shape 8"/>
-          <p:cNvSpPr/>
-          <p:nvPr/>
-        </p:nvSpPr>
-        <p:spPr>
-          <a:xfrm>
-            <a:off x="4672584" y="3657600"/>
-            <a:ext cx="685800" cy="685800"/>
-          </a:xfrm>
-          <a:prstGeom prst="ellipse">
-            <a:avLst/>
-          </a:prstGeom>
-          <a:solidFill>
-            <a:srgbClr val="E8821E"/>
-          </a:solidFill>
-          <a:ln/>
-        </p:spPr>
-        <p:txBody>
-          <a:bodyPr/>
-          <a:lstStyle/>
-          <a:p>
-            <a:endParaRPr lang="fr-CA"/>
-          </a:p>
-        </p:txBody>
-      </p:sp>
-      <p:pic>
-        <p:nvPicPr>
-          <p:cNvPr id="12" name="Image 1" descr="preencoded.png"/>
-          <p:cNvPicPr>
-            <a:picLocks noChangeAspect="1"/>
-          </p:cNvPicPr>
-          <p:nvPr/>
-        </p:nvPicPr>
-        <p:blipFill>
-          <a:blip r:embed="rId4"/>
-          <a:stretch>
-            <a:fillRect/>
-          </a:stretch>
-        </p:blipFill>
-        <p:spPr>
-          <a:xfrm>
-            <a:off x="4857750" y="3842766"/>
-            <a:ext cx="315468" cy="315468"/>
-          </a:xfrm>
-          <a:prstGeom prst="rect">
-            <a:avLst/>
-          </a:prstGeom>
-        </p:spPr>
-      </p:pic>
-      <p:sp>
-        <p:nvSpPr>
           <p:cNvPr id="13" name="Text 9"/>
           <p:cNvSpPr/>
           <p:nvPr/>
         </p:nvSpPr>
         <p:spPr>
           <a:xfrm>
-            <a:off x="5495544" y="3657600"/>
-            <a:ext cx="2066544" cy="685800"/>
+            <a:off x="4660900" y="3962400"/>
+            <a:ext cx="2870200" cy="279400"/>
           </a:xfrm>
           <a:prstGeom prst="rect">
             <a:avLst/>
@@ -2906,21 +4431,18 @@
           <a:bodyPr wrap="square" rtlCol="0" anchor="ctr"/>
           <a:lstStyle/>
           <a:p>
-            <a:pPr marL="0" indent="0">
-              <a:buNone/>
-            </a:pPr>
-            <a:r>
-              <a:rPr lang="en-US" sz="1550" b="1" dirty="0">
-                <a:solidFill>
-                  <a:srgbClr val="F2A24E"/>
-                </a:solidFill>
-                <a:latin typeface="Cambria" pitchFamily="34" charset="0"/>
-                <a:ea typeface="Cambria" pitchFamily="34" charset="-122"/>
-                <a:cs typeface="Cambria" pitchFamily="34" charset="-120"/>
+            <a:pPr marL="0" indent="0" algn="l">
+              <a:buNone/>
+            </a:pPr>
+            <a:r>
+              <a:rPr lang="fr-CA" sz="1550" b="1" dirty="0">
+                <a:solidFill>
+                  <a:srgbClr val="F5EFE4"/>
+                </a:solidFill>
+                <a:latin typeface="Cambria" pitchFamily="34" charset="0"/>
               </a:rPr>
               <a:t>Sécurité du croyant</a:t>
             </a:r>
-            <a:endParaRPr lang="en-US" sz="1550" dirty="0"/>
           </a:p>
         </p:txBody>
       </p:sp>
@@ -2932,8 +4454,8 @@
         </p:nvSpPr>
         <p:spPr>
           <a:xfrm>
-            <a:off x="4672584" y="4526280"/>
-            <a:ext cx="2843784" cy="1371600"/>
+            <a:off x="4660900" y="4368800"/>
+            <a:ext cx="2870200" cy="1600200"/>
           </a:xfrm>
           <a:prstGeom prst="rect">
             <a:avLst/>
@@ -2945,7 +4467,7 @@
           <a:bodyPr wrap="square" rtlCol="0" anchor="t"/>
           <a:lstStyle/>
           <a:p>
-            <a:pPr marL="0" indent="0">
+            <a:pPr marL="0" indent="0" algn="l">
               <a:lnSpc>
                 <a:spcPts val="1800"/>
               </a:lnSpc>
@@ -3009,65 +4531,14 @@
       </p:sp>
       <p:sp>
         <p:nvSpPr>
-          <p:cNvPr id="16" name="Shape 12"/>
-          <p:cNvSpPr/>
-          <p:nvPr/>
-        </p:nvSpPr>
-        <p:spPr>
-          <a:xfrm>
-            <a:off x="8476488" y="3657600"/>
-            <a:ext cx="685800" cy="685800"/>
-          </a:xfrm>
-          <a:prstGeom prst="ellipse">
-            <a:avLst/>
-          </a:prstGeom>
-          <a:solidFill>
-            <a:srgbClr val="E8821E"/>
-          </a:solidFill>
-          <a:ln/>
-        </p:spPr>
-        <p:txBody>
-          <a:bodyPr/>
-          <a:lstStyle/>
-          <a:p>
-            <a:endParaRPr lang="fr-CA"/>
-          </a:p>
-        </p:txBody>
-      </p:sp>
-      <p:pic>
-        <p:nvPicPr>
-          <p:cNvPr id="17" name="Image 2" descr="preencoded.png"/>
-          <p:cNvPicPr>
-            <a:picLocks noChangeAspect="1"/>
-          </p:cNvPicPr>
-          <p:nvPr/>
-        </p:nvPicPr>
-        <p:blipFill>
-          <a:blip r:embed="rId5"/>
-          <a:stretch>
-            <a:fillRect/>
-          </a:stretch>
-        </p:blipFill>
-        <p:spPr>
-          <a:xfrm>
-            <a:off x="8661654" y="3842766"/>
-            <a:ext cx="315468" cy="315468"/>
-          </a:xfrm>
-          <a:prstGeom prst="rect">
-            <a:avLst/>
-          </a:prstGeom>
-        </p:spPr>
-      </p:pic>
-      <p:sp>
-        <p:nvSpPr>
           <p:cNvPr id="18" name="Text 13"/>
           <p:cNvSpPr/>
           <p:nvPr/>
         </p:nvSpPr>
         <p:spPr>
           <a:xfrm>
-            <a:off x="9299448" y="3657600"/>
-            <a:ext cx="2066544" cy="685800"/>
+            <a:off x="8458200" y="3962400"/>
+            <a:ext cx="2870200" cy="279400"/>
           </a:xfrm>
           <a:prstGeom prst="rect">
             <a:avLst/>
@@ -3079,21 +4550,18 @@
           <a:bodyPr wrap="square" rtlCol="0" anchor="ctr"/>
           <a:lstStyle/>
           <a:p>
-            <a:pPr marL="0" indent="0">
-              <a:buNone/>
-            </a:pPr>
-            <a:r>
-              <a:rPr lang="en-US" sz="1550" b="1" dirty="0">
-                <a:solidFill>
-                  <a:srgbClr val="F2A24E"/>
-                </a:solidFill>
-                <a:latin typeface="Cambria" pitchFamily="34" charset="0"/>
-                <a:ea typeface="Cambria" pitchFamily="34" charset="-122"/>
-                <a:cs typeface="Cambria" pitchFamily="34" charset="-120"/>
+            <a:pPr marL="0" indent="0" algn="l">
+              <a:buNone/>
+            </a:pPr>
+            <a:r>
+              <a:rPr lang="fr-CA" sz="1550" b="1" dirty="0">
+                <a:solidFill>
+                  <a:srgbClr val="F5EFE4"/>
+                </a:solidFill>
+                <a:latin typeface="Cambria" pitchFamily="34" charset="0"/>
               </a:rPr>
               <a:t>Sanctification (Lordship)</a:t>
             </a:r>
-            <a:endParaRPr lang="en-US" sz="1550" dirty="0"/>
           </a:p>
         </p:txBody>
       </p:sp>
@@ -3105,8 +4573,8 @@
         </p:nvSpPr>
         <p:spPr>
           <a:xfrm>
-            <a:off x="8476488" y="4526280"/>
-            <a:ext cx="2843784" cy="1371600"/>
+            <a:off x="8458200" y="4368800"/>
+            <a:ext cx="2870200" cy="1600200"/>
           </a:xfrm>
           <a:prstGeom prst="rect">
             <a:avLst/>
@@ -3118,7 +4586,7 @@
           <a:bodyPr wrap="square" rtlCol="0" anchor="t"/>
           <a:lstStyle/>
           <a:p>
-            <a:pPr marL="0" indent="0">
+            <a:pPr marL="0" indent="0" algn="l">
               <a:lnSpc>
                 <a:spcPts val="1800"/>
               </a:lnSpc>
@@ -3228,10 +4696,266 @@
           </a:p>
         </p:txBody>
       </p:sp>
+      <p:sp>
+        <p:nvSpPr>
+          <p:cNvPr id="400" name="accentBar"/>
+          <p:cNvSpPr/>
+          <p:nvPr/>
+        </p:nvSpPr>
+        <p:spPr>
+          <a:xfrm>
+            <a:off x="457200" y="203200"/>
+            <a:ext cx="50800" cy="787400"/>
+          </a:xfrm>
+          <a:prstGeom prst="rect">
+            <a:avLst/>
+          </a:prstGeom>
+          <a:solidFill>
+            <a:srgbClr val="F2A24E"/>
+          </a:solidFill>
+          <a:ln>
+            <a:noFill/>
+          </a:ln>
+        </p:spPr>
+        <p:txBody>
+          <a:bodyPr/>
+          <a:lstStyle/>
+          <a:p>
+            <a:endParaRPr/>
+          </a:p>
+        </p:txBody>
+      </p:sp>
+      <p:sp>
+        <p:nvSpPr>
+          <p:cNvPr id="401" name="eyebrow"/>
+          <p:cNvSpPr txBox="1"/>
+          <p:nvPr/>
+        </p:nvSpPr>
+        <p:spPr>
+          <a:xfrm>
+            <a:off x="546100" y="165100"/>
+            <a:ext cx="8890000" cy="228600"/>
+          </a:xfrm>
+          <a:prstGeom prst="rect">
+            <a:avLst/>
+          </a:prstGeom>
+          <a:noFill/>
+        </p:spPr>
+        <p:txBody>
+          <a:bodyPr wrap="none" lIns="0" tIns="0" rIns="0" bIns="0" anchor="t"/>
+          <a:lstStyle/>
+          <a:p>
+            <a:pPr algn="l">
+              <a:buNone/>
+            </a:pPr>
+            <a:r>
+              <a:rPr lang="fr-CA" sz="1400" b="1" spc="320" dirty="0">
+                <a:solidFill>
+                  <a:srgbClr val="F2A24E"/>
+                </a:solidFill>
+                <a:latin typeface="Cambria" pitchFamily="34" charset="0"/>
+              </a:rPr>
+              <a:t>12 · THÉOLOGIE DE LA CROIX</a:t>
+            </a:r>
+          </a:p>
+        </p:txBody>
+      </p:sp>
+      <p:sp>
+        <p:nvSpPr>
+          <p:cNvPr id="450" name="num1"/>
+          <p:cNvSpPr txBox="1"/>
+          <p:nvPr/>
+        </p:nvSpPr>
+        <p:spPr>
+          <a:xfrm>
+            <a:off x="850900" y="3403600"/>
+            <a:ext cx="1016000" cy="533400"/>
+          </a:xfrm>
+          <a:prstGeom prst="rect">
+            <a:avLst/>
+          </a:prstGeom>
+          <a:noFill/>
+        </p:spPr>
+        <p:txBody>
+          <a:bodyPr wrap="square" lIns="0" tIns="0" rIns="0" bIns="0" anchor="t"/>
+          <a:lstStyle/>
+          <a:p>
+            <a:pPr algn="l">
+              <a:buNone/>
+            </a:pPr>
+            <a:r>
+              <a:rPr lang="fr-CA" sz="3000" b="1" dirty="0">
+                <a:solidFill>
+                  <a:srgbClr val="F2A24E"/>
+                </a:solidFill>
+                <a:latin typeface="Cambria" pitchFamily="34" charset="0"/>
+              </a:rPr>
+              <a:t>1</a:t>
+            </a:r>
+          </a:p>
+        </p:txBody>
+      </p:sp>
+      <p:sp>
+        <p:nvSpPr>
+          <p:cNvPr id="460" name="rule1"/>
+          <p:cNvSpPr/>
+          <p:nvPr/>
+        </p:nvSpPr>
+        <p:spPr>
+          <a:xfrm>
+            <a:off x="876300" y="4254500"/>
+            <a:ext cx="584200" cy="25400"/>
+          </a:xfrm>
+          <a:prstGeom prst="rect">
+            <a:avLst/>
+          </a:prstGeom>
+          <a:solidFill>
+            <a:srgbClr val="F2A24E"/>
+          </a:solidFill>
+          <a:ln>
+            <a:noFill/>
+          </a:ln>
+        </p:spPr>
+        <p:txBody>
+          <a:bodyPr/>
+          <a:lstStyle/>
+          <a:p>
+            <a:endParaRPr/>
+          </a:p>
+        </p:txBody>
+      </p:sp>
+      <p:sp>
+        <p:nvSpPr>
+          <p:cNvPr id="451" name="num2"/>
+          <p:cNvSpPr txBox="1"/>
+          <p:nvPr/>
+        </p:nvSpPr>
+        <p:spPr>
+          <a:xfrm>
+            <a:off x="4660900" y="3403600"/>
+            <a:ext cx="1016000" cy="533400"/>
+          </a:xfrm>
+          <a:prstGeom prst="rect">
+            <a:avLst/>
+          </a:prstGeom>
+          <a:noFill/>
+        </p:spPr>
+        <p:txBody>
+          <a:bodyPr wrap="square" lIns="0" tIns="0" rIns="0" bIns="0" anchor="t"/>
+          <a:lstStyle/>
+          <a:p>
+            <a:pPr algn="l">
+              <a:buNone/>
+            </a:pPr>
+            <a:r>
+              <a:rPr lang="fr-CA" sz="3000" b="1" dirty="0">
+                <a:solidFill>
+                  <a:srgbClr val="F2A24E"/>
+                </a:solidFill>
+                <a:latin typeface="Cambria" pitchFamily="34" charset="0"/>
+              </a:rPr>
+              <a:t>2</a:t>
+            </a:r>
+          </a:p>
+        </p:txBody>
+      </p:sp>
+      <p:sp>
+        <p:nvSpPr>
+          <p:cNvPr id="461" name="rule2"/>
+          <p:cNvSpPr/>
+          <p:nvPr/>
+        </p:nvSpPr>
+        <p:spPr>
+          <a:xfrm>
+            <a:off x="4686300" y="4254500"/>
+            <a:ext cx="584200" cy="25400"/>
+          </a:xfrm>
+          <a:prstGeom prst="rect">
+            <a:avLst/>
+          </a:prstGeom>
+          <a:solidFill>
+            <a:srgbClr val="F2A24E"/>
+          </a:solidFill>
+          <a:ln>
+            <a:noFill/>
+          </a:ln>
+        </p:spPr>
+        <p:txBody>
+          <a:bodyPr/>
+          <a:lstStyle/>
+          <a:p>
+            <a:endParaRPr/>
+          </a:p>
+        </p:txBody>
+      </p:sp>
+      <p:sp>
+        <p:nvSpPr>
+          <p:cNvPr id="452" name="num3"/>
+          <p:cNvSpPr txBox="1"/>
+          <p:nvPr/>
+        </p:nvSpPr>
+        <p:spPr>
+          <a:xfrm>
+            <a:off x="8458200" y="3403600"/>
+            <a:ext cx="1016000" cy="533400"/>
+          </a:xfrm>
+          <a:prstGeom prst="rect">
+            <a:avLst/>
+          </a:prstGeom>
+          <a:noFill/>
+        </p:spPr>
+        <p:txBody>
+          <a:bodyPr wrap="square" lIns="0" tIns="0" rIns="0" bIns="0" anchor="t"/>
+          <a:lstStyle/>
+          <a:p>
+            <a:pPr algn="l">
+              <a:buNone/>
+            </a:pPr>
+            <a:r>
+              <a:rPr lang="fr-CA" sz="3000" b="1" dirty="0">
+                <a:solidFill>
+                  <a:srgbClr val="F2A24E"/>
+                </a:solidFill>
+                <a:latin typeface="Cambria" pitchFamily="34" charset="0"/>
+              </a:rPr>
+              <a:t>3</a:t>
+            </a:r>
+          </a:p>
+        </p:txBody>
+      </p:sp>
+      <p:sp>
+        <p:nvSpPr>
+          <p:cNvPr id="462" name="rule3"/>
+          <p:cNvSpPr/>
+          <p:nvPr/>
+        </p:nvSpPr>
+        <p:spPr>
+          <a:xfrm>
+            <a:off x="8483600" y="4254500"/>
+            <a:ext cx="584200" cy="25400"/>
+          </a:xfrm>
+          <a:prstGeom prst="rect">
+            <a:avLst/>
+          </a:prstGeom>
+          <a:solidFill>
+            <a:srgbClr val="F2A24E"/>
+          </a:solidFill>
+          <a:ln>
+            <a:noFill/>
+          </a:ln>
+        </p:spPr>
+        <p:txBody>
+          <a:bodyPr/>
+          <a:lstStyle/>
+          <a:p>
+            <a:endParaRPr/>
+          </a:p>
+        </p:txBody>
+      </p:sp>
     </p:spTree>
     <p:extLst>
       <p:ext uri="{BB962C8B-B14F-4D97-AF65-F5344CB8AC3E}">
-        <p14:creationId xmlns:p14="http://schemas.microsoft.com/office/powerpoint/2010/main" val="4144892426"/>
+        <p14:creationId xmlns:p14="http://schemas.microsoft.com/office/powerpoint/2010/main" val="684586775"/>
       </p:ext>
     </p:extLst>
   </p:cSld>
@@ -3241,7 +4965,7 @@
 </p:sld>
 </file>
 
-<file path=ppt/slides/slide11.xml><?xml version="1.0" encoding="utf-8"?>
+<file path=ppt/slides/slide13.xml><?xml version="1.0" encoding="utf-8"?>
 <p:sld xmlns:a="http://schemas.openxmlformats.org/drawingml/2006/main" xmlns:r="http://schemas.openxmlformats.org/officeDocument/2006/relationships" xmlns:p="http://schemas.openxmlformats.org/presentationml/2006/main">
   <p:cSld name="Slide 11">
     <p:bg>
@@ -3299,7 +5023,18 @@
                 <a:ea typeface="Cambria" pitchFamily="34" charset="-122"/>
                 <a:cs typeface="Cambria" pitchFamily="34" charset="-120"/>
               </a:rPr>
-              <a:t>Pour la discussion</a:t>
+              <a:t>Pour la </a:t>
+            </a:r>
+            <a:r>
+              <a:rPr lang="en-US" sz="3200" b="1" i="1" dirty="0">
+                <a:solidFill>
+                  <a:srgbClr val="F5EFE4"/>
+                </a:solidFill>
+                <a:latin typeface="Cambria" pitchFamily="34" charset="0"/>
+                <a:ea typeface="Cambria" pitchFamily="34" charset="-122"/>
+                <a:cs typeface="Cambria" pitchFamily="34" charset="-120"/>
+              </a:rPr>
+              <a:t>discussion</a:t>
             </a:r>
             <a:endParaRPr lang="en-US" sz="3200" dirty="0"/>
           </a:p>
@@ -3348,41 +5083,14 @@
       </p:sp>
       <p:sp>
         <p:nvSpPr>
-          <p:cNvPr id="4" name="Shape 2"/>
-          <p:cNvSpPr/>
-          <p:nvPr/>
-        </p:nvSpPr>
-        <p:spPr>
-          <a:xfrm>
-            <a:off x="868680" y="1810512"/>
-            <a:ext cx="566928" cy="566928"/>
-          </a:xfrm>
-          <a:prstGeom prst="ellipse">
-            <a:avLst/>
-          </a:prstGeom>
-          <a:solidFill>
-            <a:srgbClr val="E8821E"/>
-          </a:solidFill>
-          <a:ln/>
-        </p:spPr>
-        <p:txBody>
-          <a:bodyPr/>
-          <a:lstStyle/>
-          <a:p>
-            <a:endParaRPr lang="fr-CA"/>
-          </a:p>
-        </p:txBody>
-      </p:sp>
-      <p:sp>
-        <p:nvSpPr>
           <p:cNvPr id="5" name="Text 3"/>
           <p:cNvSpPr/>
           <p:nvPr/>
         </p:nvSpPr>
         <p:spPr>
           <a:xfrm>
-            <a:off x="868680" y="1810512"/>
-            <a:ext cx="566928" cy="566928"/>
+            <a:off x="762000" y="1752600"/>
+            <a:ext cx="736600" cy="685800"/>
           </a:xfrm>
           <a:prstGeom prst="rect">
             <a:avLst/>
@@ -3394,21 +5102,18 @@
           <a:bodyPr wrap="square" rtlCol="0" anchor="ctr"/>
           <a:lstStyle/>
           <a:p>
-            <a:pPr marL="0" indent="0" algn="ctr">
-              <a:buNone/>
-            </a:pPr>
-            <a:r>
-              <a:rPr lang="en-US" sz="2200" b="1" dirty="0">
-                <a:solidFill>
-                  <a:srgbClr val="121212"/>
-                </a:solidFill>
-                <a:latin typeface="Cambria" pitchFamily="34" charset="0"/>
-                <a:ea typeface="Cambria" pitchFamily="34" charset="-122"/>
-                <a:cs typeface="Cambria" pitchFamily="34" charset="-120"/>
+            <a:pPr algn="ctr">
+              <a:buNone/>
+            </a:pPr>
+            <a:r>
+              <a:rPr lang="fr-CA" sz="3600" b="1" dirty="0">
+                <a:solidFill>
+                  <a:srgbClr val="F2A24E"/>
+                </a:solidFill>
+                <a:latin typeface="Cambria" pitchFamily="34" charset="0"/>
               </a:rPr>
               <a:t>1</a:t>
             </a:r>
-            <a:endParaRPr lang="en-US" sz="2200" dirty="0"/>
           </a:p>
         </p:txBody>
       </p:sp>
@@ -3497,41 +5202,14 @@
       </p:sp>
       <p:sp>
         <p:nvSpPr>
-          <p:cNvPr id="8" name="Shape 6"/>
-          <p:cNvSpPr/>
-          <p:nvPr/>
-        </p:nvSpPr>
-        <p:spPr>
-          <a:xfrm>
-            <a:off x="868680" y="3054096"/>
-            <a:ext cx="566928" cy="566928"/>
-          </a:xfrm>
-          <a:prstGeom prst="ellipse">
-            <a:avLst/>
-          </a:prstGeom>
-          <a:solidFill>
-            <a:srgbClr val="E8821E"/>
-          </a:solidFill>
-          <a:ln/>
-        </p:spPr>
-        <p:txBody>
-          <a:bodyPr/>
-          <a:lstStyle/>
-          <a:p>
-            <a:endParaRPr lang="fr-CA"/>
-          </a:p>
-        </p:txBody>
-      </p:sp>
-      <p:sp>
-        <p:nvSpPr>
           <p:cNvPr id="9" name="Text 7"/>
           <p:cNvSpPr/>
           <p:nvPr/>
         </p:nvSpPr>
         <p:spPr>
           <a:xfrm>
-            <a:off x="868680" y="3054096"/>
-            <a:ext cx="566928" cy="566928"/>
+            <a:off x="762000" y="2997200"/>
+            <a:ext cx="736600" cy="685800"/>
           </a:xfrm>
           <a:prstGeom prst="rect">
             <a:avLst/>
@@ -3543,21 +5221,18 @@
           <a:bodyPr wrap="square" rtlCol="0" anchor="ctr"/>
           <a:lstStyle/>
           <a:p>
-            <a:pPr marL="0" indent="0" algn="ctr">
-              <a:buNone/>
-            </a:pPr>
-            <a:r>
-              <a:rPr lang="en-US" sz="2200" b="1" dirty="0">
-                <a:solidFill>
-                  <a:srgbClr val="121212"/>
-                </a:solidFill>
-                <a:latin typeface="Cambria" pitchFamily="34" charset="0"/>
-                <a:ea typeface="Cambria" pitchFamily="34" charset="-122"/>
-                <a:cs typeface="Cambria" pitchFamily="34" charset="-120"/>
+            <a:pPr algn="ctr">
+              <a:buNone/>
+            </a:pPr>
+            <a:r>
+              <a:rPr lang="fr-CA" sz="3600" b="1" dirty="0">
+                <a:solidFill>
+                  <a:srgbClr val="F2A24E"/>
+                </a:solidFill>
+                <a:latin typeface="Cambria" pitchFamily="34" charset="0"/>
               </a:rPr>
               <a:t>2</a:t>
             </a:r>
-            <a:endParaRPr lang="en-US" sz="2200" dirty="0"/>
           </a:p>
         </p:txBody>
       </p:sp>
@@ -3646,41 +5321,14 @@
       </p:sp>
       <p:sp>
         <p:nvSpPr>
-          <p:cNvPr id="12" name="Shape 10"/>
-          <p:cNvSpPr/>
-          <p:nvPr/>
-        </p:nvSpPr>
-        <p:spPr>
-          <a:xfrm>
-            <a:off x="868680" y="4297680"/>
-            <a:ext cx="566928" cy="566928"/>
-          </a:xfrm>
-          <a:prstGeom prst="ellipse">
-            <a:avLst/>
-          </a:prstGeom>
-          <a:solidFill>
-            <a:srgbClr val="E8821E"/>
-          </a:solidFill>
-          <a:ln/>
-        </p:spPr>
-        <p:txBody>
-          <a:bodyPr/>
-          <a:lstStyle/>
-          <a:p>
-            <a:endParaRPr lang="fr-CA"/>
-          </a:p>
-        </p:txBody>
-      </p:sp>
-      <p:sp>
-        <p:nvSpPr>
           <p:cNvPr id="13" name="Text 11"/>
           <p:cNvSpPr/>
           <p:nvPr/>
         </p:nvSpPr>
         <p:spPr>
           <a:xfrm>
-            <a:off x="868680" y="4297680"/>
-            <a:ext cx="566928" cy="566928"/>
+            <a:off x="762000" y="4241800"/>
+            <a:ext cx="736600" cy="685800"/>
           </a:xfrm>
           <a:prstGeom prst="rect">
             <a:avLst/>
@@ -3692,21 +5340,18 @@
           <a:bodyPr wrap="square" rtlCol="0" anchor="ctr"/>
           <a:lstStyle/>
           <a:p>
-            <a:pPr marL="0" indent="0" algn="ctr">
-              <a:buNone/>
-            </a:pPr>
-            <a:r>
-              <a:rPr lang="en-US" sz="2200" b="1" dirty="0">
-                <a:solidFill>
-                  <a:srgbClr val="121212"/>
-                </a:solidFill>
-                <a:latin typeface="Cambria" pitchFamily="34" charset="0"/>
-                <a:ea typeface="Cambria" pitchFamily="34" charset="-122"/>
-                <a:cs typeface="Cambria" pitchFamily="34" charset="-120"/>
+            <a:pPr algn="ctr">
+              <a:buNone/>
+            </a:pPr>
+            <a:r>
+              <a:rPr lang="fr-CA" sz="3600" b="1" dirty="0">
+                <a:solidFill>
+                  <a:srgbClr val="F2A24E"/>
+                </a:solidFill>
+                <a:latin typeface="Cambria" pitchFamily="34" charset="0"/>
               </a:rPr>
               <a:t>3</a:t>
             </a:r>
-            <a:endParaRPr lang="en-US" sz="2200" dirty="0"/>
           </a:p>
         </p:txBody>
       </p:sp>
@@ -3932,10 +5577,74 @@
           </a:p>
         </p:txBody>
       </p:sp>
+      <p:sp>
+        <p:nvSpPr>
+          <p:cNvPr id="400" name="accentBar"/>
+          <p:cNvSpPr/>
+          <p:nvPr/>
+        </p:nvSpPr>
+        <p:spPr>
+          <a:xfrm>
+            <a:off x="457200" y="203200"/>
+            <a:ext cx="50800" cy="787400"/>
+          </a:xfrm>
+          <a:prstGeom prst="rect">
+            <a:avLst/>
+          </a:prstGeom>
+          <a:solidFill>
+            <a:srgbClr val="F2A24E"/>
+          </a:solidFill>
+          <a:ln>
+            <a:noFill/>
+          </a:ln>
+        </p:spPr>
+        <p:txBody>
+          <a:bodyPr/>
+          <a:lstStyle/>
+          <a:p>
+            <a:endParaRPr/>
+          </a:p>
+        </p:txBody>
+      </p:sp>
+      <p:sp>
+        <p:nvSpPr>
+          <p:cNvPr id="401" name="eyebrow"/>
+          <p:cNvSpPr txBox="1"/>
+          <p:nvPr/>
+        </p:nvSpPr>
+        <p:spPr>
+          <a:xfrm>
+            <a:off x="546100" y="165100"/>
+            <a:ext cx="8890000" cy="228600"/>
+          </a:xfrm>
+          <a:prstGeom prst="rect">
+            <a:avLst/>
+          </a:prstGeom>
+          <a:noFill/>
+        </p:spPr>
+        <p:txBody>
+          <a:bodyPr wrap="none" lIns="0" tIns="0" rIns="0" bIns="0" anchor="t"/>
+          <a:lstStyle/>
+          <a:p>
+            <a:pPr algn="l">
+              <a:buNone/>
+            </a:pPr>
+            <a:r>
+              <a:rPr lang="fr-CA" sz="1400" b="1" spc="320" dirty="0">
+                <a:solidFill>
+                  <a:srgbClr val="F2A24E"/>
+                </a:solidFill>
+                <a:latin typeface="Cambria" pitchFamily="34" charset="0"/>
+              </a:rPr>
+              <a:t>13 · POUR LA DISCUSSION</a:t>
+            </a:r>
+          </a:p>
+        </p:txBody>
+      </p:sp>
     </p:spTree>
     <p:extLst>
       <p:ext uri="{BB962C8B-B14F-4D97-AF65-F5344CB8AC3E}">
-        <p14:creationId xmlns:p14="http://schemas.microsoft.com/office/powerpoint/2010/main" val="4122083313"/>
+        <p14:creationId xmlns:p14="http://schemas.microsoft.com/office/powerpoint/2010/main" val="1614462470"/>
       </p:ext>
     </p:extLst>
   </p:cSld>
@@ -3945,7 +5654,7 @@
 </p:sld>
 </file>
 
-<file path=ppt/slides/slide12.xml><?xml version="1.0" encoding="utf-8"?>
+<file path=ppt/slides/slide14.xml><?xml version="1.0" encoding="utf-8"?>
 <p:sld xmlns:a="http://schemas.openxmlformats.org/drawingml/2006/main" xmlns:r="http://schemas.openxmlformats.org/officeDocument/2006/relationships" xmlns:p="http://schemas.openxmlformats.org/presentationml/2006/main">
   <p:cSld name="Slide 12">
     <p:bg>
@@ -4243,15 +5952,15 @@
               <a:buNone/>
             </a:pPr>
             <a:r>
-              <a:rPr lang="en-US" sz="3200" b="1" dirty="0">
-                <a:solidFill>
-                  <a:srgbClr val="F5EFE4"/>
-                </a:solidFill>
-                <a:latin typeface="Cambria" pitchFamily="34" charset="0"/>
-                <a:ea typeface="Cambria" pitchFamily="34" charset="-122"/>
-                <a:cs typeface="Cambria" pitchFamily="34" charset="-120"/>
-              </a:rPr>
-              <a:t>Parcours de l'étude</a:t>
+              <a:rPr lang="en-US" sz="3200" b="1" i="1" dirty="0" err="1">
+                <a:solidFill>
+                  <a:srgbClr val="F5EFE4"/>
+                </a:solidFill>
+                <a:latin typeface="Cambria" pitchFamily="34" charset="0"/>
+                <a:ea typeface="Cambria" pitchFamily="34" charset="-122"/>
+                <a:cs typeface="Cambria" pitchFamily="34" charset="-120"/>
+              </a:rPr>
+              <a:t>Parcours</a:t>
             </a:r>
             <a:endParaRPr lang="en-US" sz="3200" dirty="0"/>
           </a:p>
@@ -4413,17 +6122,6 @@
               <a:buNone/>
             </a:pPr>
             <a:r>
-              <a:rPr lang="en-US" sz="2100" b="1" dirty="0">
-                <a:solidFill>
-                  <a:srgbClr val="F2A24E"/>
-                </a:solidFill>
-                <a:latin typeface="Cambria" pitchFamily="34" charset="0"/>
-                <a:ea typeface="Cambria" pitchFamily="34" charset="-122"/>
-                <a:cs typeface="Cambria" pitchFamily="34" charset="-120"/>
-              </a:rPr>
-              <a:t>Les </a:t>
-            </a:r>
-            <a:r>
               <a:rPr lang="en-US" sz="2100" b="1" dirty="0" err="1">
                 <a:solidFill>
                   <a:srgbClr val="F2A24E"/>
@@ -4474,7 +6172,47 @@
                 <a:ea typeface="Cambria" pitchFamily="34" charset="-122"/>
                 <a:cs typeface="Cambria" pitchFamily="34" charset="-120"/>
               </a:rPr>
-              <a:t>Qui sont-ils ? Trois repères historiques et théologiques.</a:t>
+              <a:t>Qui sont-ils ? Trois repères historiques et </a:t>
+            </a:r>
+            <a:r>
+              <a:rPr lang="en-US" sz="1400" dirty="0" err="1">
+                <a:solidFill>
+                  <a:srgbClr val="F5EFE4"/>
+                </a:solidFill>
+                <a:latin typeface="Cambria" pitchFamily="34" charset="0"/>
+                <a:ea typeface="Cambria" pitchFamily="34" charset="-122"/>
+                <a:cs typeface="Cambria" pitchFamily="34" charset="-120"/>
+              </a:rPr>
+              <a:t>théologiques</a:t>
+            </a:r>
+            <a:r>
+              <a:rPr lang="en-US" sz="1400" dirty="0">
+                <a:solidFill>
+                  <a:srgbClr val="F5EFE4"/>
+                </a:solidFill>
+                <a:latin typeface="Cambria" pitchFamily="34" charset="0"/>
+                <a:ea typeface="Cambria" pitchFamily="34" charset="-122"/>
+                <a:cs typeface="Cambria" pitchFamily="34" charset="-120"/>
+              </a:rPr>
+              <a:t>.</a:t>
+            </a:r>
+          </a:p>
+          <a:p>
+            <a:pPr marL="0" indent="0">
+              <a:lnSpc>
+                <a:spcPts val="1900"/>
+              </a:lnSpc>
+              <a:buNone/>
+            </a:pPr>
+            <a:r>
+              <a:rPr lang="en-US" sz="1400" dirty="0">
+                <a:solidFill>
+                  <a:srgbClr val="F5EFE4"/>
+                </a:solidFill>
+                <a:latin typeface="Cambria" pitchFamily="34" charset="0"/>
+                <a:ea typeface="Cambria" pitchFamily="34" charset="-122"/>
+              </a:rPr>
+              <a:t>5 Solas et 5 points TULIP</a:t>
             </a:r>
             <a:endParaRPr lang="en-US" sz="1400" dirty="0"/>
           </a:p>
@@ -4636,6 +6374,17 @@
               <a:buNone/>
             </a:pPr>
             <a:r>
+              <a:rPr lang="en-US" sz="2100" b="1" dirty="0" err="1">
+                <a:solidFill>
+                  <a:srgbClr val="F2A24E"/>
+                </a:solidFill>
+                <a:latin typeface="Cambria" pitchFamily="34" charset="0"/>
+                <a:ea typeface="Cambria" pitchFamily="34" charset="-122"/>
+                <a:cs typeface="Cambria" pitchFamily="34" charset="-120"/>
+              </a:rPr>
+              <a:t>Prières</a:t>
+            </a:r>
+            <a:r>
               <a:rPr lang="en-US" sz="2100" b="1" dirty="0">
                 <a:solidFill>
                   <a:srgbClr val="F2A24E"/>
@@ -4644,7 +6393,7 @@
                 <a:ea typeface="Cambria" pitchFamily="34" charset="-122"/>
                 <a:cs typeface="Cambria" pitchFamily="34" charset="-120"/>
               </a:rPr>
-              <a:t>Le </a:t>
+              <a:t> </a:t>
             </a:r>
             <a:r>
               <a:rPr lang="en-US" sz="2100" b="1" dirty="0" err="1">
@@ -4655,7 +6404,7 @@
                 <a:ea typeface="Cambria" pitchFamily="34" charset="-122"/>
                 <a:cs typeface="Cambria" pitchFamily="34" charset="-120"/>
               </a:rPr>
-              <a:t>Receuil</a:t>
+              <a:t>puritaines</a:t>
             </a:r>
             <a:endParaRPr lang="en-US" sz="2100" dirty="0"/>
           </a:p>
@@ -5015,10 +6764,74 @@
           </a:p>
         </p:txBody>
       </p:sp>
+      <p:sp>
+        <p:nvSpPr>
+          <p:cNvPr id="400" name="accentBar"/>
+          <p:cNvSpPr/>
+          <p:nvPr/>
+        </p:nvSpPr>
+        <p:spPr>
+          <a:xfrm>
+            <a:off x="457200" y="203200"/>
+            <a:ext cx="50800" cy="787400"/>
+          </a:xfrm>
+          <a:prstGeom prst="rect">
+            <a:avLst/>
+          </a:prstGeom>
+          <a:solidFill>
+            <a:srgbClr val="F2A24E"/>
+          </a:solidFill>
+          <a:ln>
+            <a:noFill/>
+          </a:ln>
+        </p:spPr>
+        <p:txBody>
+          <a:bodyPr/>
+          <a:lstStyle/>
+          <a:p>
+            <a:endParaRPr/>
+          </a:p>
+        </p:txBody>
+      </p:sp>
+      <p:sp>
+        <p:nvSpPr>
+          <p:cNvPr id="401" name="eyebrow"/>
+          <p:cNvSpPr txBox="1"/>
+          <p:nvPr/>
+        </p:nvSpPr>
+        <p:spPr>
+          <a:xfrm>
+            <a:off x="546100" y="165100"/>
+            <a:ext cx="8890000" cy="228600"/>
+          </a:xfrm>
+          <a:prstGeom prst="rect">
+            <a:avLst/>
+          </a:prstGeom>
+          <a:noFill/>
+        </p:spPr>
+        <p:txBody>
+          <a:bodyPr wrap="none" lIns="0" tIns="0" rIns="0" bIns="0" anchor="t"/>
+          <a:lstStyle/>
+          <a:p>
+            <a:pPr algn="l">
+              <a:buNone/>
+            </a:pPr>
+            <a:r>
+              <a:rPr lang="fr-CA" sz="1400" b="1" spc="320" dirty="0">
+                <a:solidFill>
+                  <a:srgbClr val="F2A24E"/>
+                </a:solidFill>
+                <a:latin typeface="Cambria" pitchFamily="34" charset="0"/>
+              </a:rPr>
+              <a:t>02 · AU PROGRAMME</a:t>
+            </a:r>
+          </a:p>
+        </p:txBody>
+      </p:sp>
     </p:spTree>
     <p:extLst>
       <p:ext uri="{BB962C8B-B14F-4D97-AF65-F5344CB8AC3E}">
-        <p14:creationId xmlns:p14="http://schemas.microsoft.com/office/powerpoint/2010/main" val="394863053"/>
+        <p14:creationId xmlns:p14="http://schemas.microsoft.com/office/powerpoint/2010/main" val="1750828263"/>
       </p:ext>
     </p:extLst>
   </p:cSld>
@@ -5061,8 +6874,8 @@
         </p:nvSpPr>
         <p:spPr>
           <a:xfrm>
-            <a:off x="548640" y="411480"/>
-            <a:ext cx="11064240" cy="640080"/>
+            <a:off x="711200" y="609600"/>
+            <a:ext cx="9779000" cy="685800"/>
           </a:xfrm>
           <a:prstGeom prst="rect">
             <a:avLst/>
@@ -5078,17 +6891,38 @@
               <a:buNone/>
             </a:pPr>
             <a:r>
-              <a:rPr lang="en-US" sz="3200" b="1" dirty="0">
-                <a:solidFill>
-                  <a:srgbClr val="F5EFE4"/>
-                </a:solidFill>
-                <a:latin typeface="Cambria" pitchFamily="34" charset="0"/>
-                <a:ea typeface="Cambria" pitchFamily="34" charset="-122"/>
-                <a:cs typeface="Cambria" pitchFamily="34" charset="-120"/>
-              </a:rPr>
-              <a:t>Qui sont les puritains ?</a:t>
-            </a:r>
-            <a:endParaRPr lang="en-US" sz="3200" dirty="0"/>
+              <a:rPr lang="fr-CA" sz="3200" b="1" dirty="0">
+                <a:solidFill>
+                  <a:srgbClr val="F5EFE4"/>
+                </a:solidFill>
+                <a:latin typeface="Cambria" pitchFamily="34" charset="0"/>
+                <a:ea typeface="Cambria" pitchFamily="34" charset="-122"/>
+                <a:cs typeface="Cambria" pitchFamily="34" charset="-120"/>
+              </a:rPr>
+              <a:t>Qui sont les </a:t>
+            </a:r>
+            <a:r>
+              <a:rPr lang="fr-CA" sz="3200" b="1" i="1" dirty="0">
+                <a:solidFill>
+                  <a:srgbClr val="F5EFE4"/>
+                </a:solidFill>
+                <a:latin typeface="Cambria" pitchFamily="34" charset="0"/>
+                <a:ea typeface="Cambria" pitchFamily="34" charset="-122"/>
+                <a:cs typeface="Cambria" pitchFamily="34" charset="-120"/>
+              </a:rPr>
+              <a:t>puritains</a:t>
+            </a:r>
+            <a:r>
+              <a:rPr lang="fr-CA" sz="3200" b="1" dirty="0">
+                <a:solidFill>
+                  <a:srgbClr val="F5EFE4"/>
+                </a:solidFill>
+                <a:latin typeface="Cambria" pitchFamily="34" charset="0"/>
+                <a:ea typeface="Cambria" pitchFamily="34" charset="-122"/>
+                <a:cs typeface="Cambria" pitchFamily="34" charset="-120"/>
+              </a:rPr>
+              <a:t> ?</a:t>
+            </a:r>
           </a:p>
         </p:txBody>
       </p:sp>
@@ -5100,8 +6934,8 @@
         </p:nvSpPr>
         <p:spPr>
           <a:xfrm>
-            <a:off x="566928" y="1060704"/>
-            <a:ext cx="10972800" cy="320040"/>
+            <a:off x="736600" y="1346200"/>
+            <a:ext cx="10414000" cy="279400"/>
           </a:xfrm>
           <a:prstGeom prst="rect">
             <a:avLst/>
@@ -5117,17 +6951,16 @@
               <a:buNone/>
             </a:pPr>
             <a:r>
-              <a:rPr lang="en-US" sz="1400" i="1" dirty="0">
-                <a:solidFill>
-                  <a:srgbClr val="F2A24E"/>
-                </a:solidFill>
-                <a:latin typeface="Cambria" pitchFamily="34" charset="0"/>
-                <a:ea typeface="Cambria" pitchFamily="34" charset="-122"/>
-                <a:cs typeface="Cambria" pitchFamily="34" charset="-120"/>
-              </a:rPr>
-              <a:t>Trois repères</a:t>
-            </a:r>
-            <a:endParaRPr lang="en-US" sz="1400" dirty="0"/>
+              <a:rPr lang="fr-CA" sz="1400" dirty="0">
+                <a:solidFill>
+                  <a:srgbClr val="C9B79A"/>
+                </a:solidFill>
+                <a:latin typeface="Cambria" pitchFamily="34" charset="0"/>
+                <a:ea typeface="Cambria" pitchFamily="34" charset="-122"/>
+                <a:cs typeface="Cambria" pitchFamily="34" charset="-120"/>
+              </a:rPr>
+              <a:t>Réforme anglaise · pureté de l'Église · théologie du cœur</a:t>
+            </a:r>
           </a:p>
         </p:txBody>
       </p:sp>
@@ -5139,8 +6972,8 @@
         </p:nvSpPr>
         <p:spPr>
           <a:xfrm>
-            <a:off x="548640" y="1600200"/>
-            <a:ext cx="3483864" cy="4526280"/>
+            <a:off x="546100" y="1778000"/>
+            <a:ext cx="3479800" cy="4394200"/>
           </a:xfrm>
           <a:prstGeom prst="roundRect">
             <a:avLst>
@@ -5174,65 +7007,14 @@
       </p:sp>
       <p:sp>
         <p:nvSpPr>
-          <p:cNvPr id="5" name="Shape 3"/>
-          <p:cNvSpPr/>
-          <p:nvPr/>
-        </p:nvSpPr>
-        <p:spPr>
-          <a:xfrm>
-            <a:off x="868680" y="1965960"/>
-            <a:ext cx="731520" cy="731520"/>
-          </a:xfrm>
-          <a:prstGeom prst="ellipse">
-            <a:avLst/>
-          </a:prstGeom>
-          <a:solidFill>
-            <a:srgbClr val="E8821E"/>
-          </a:solidFill>
-          <a:ln/>
-        </p:spPr>
-        <p:txBody>
-          <a:bodyPr/>
-          <a:lstStyle/>
-          <a:p>
-            <a:endParaRPr lang="fr-CA"/>
-          </a:p>
-        </p:txBody>
-      </p:sp>
-      <p:pic>
-        <p:nvPicPr>
-          <p:cNvPr id="6" name="Image 0" descr="preencoded.png"/>
-          <p:cNvPicPr>
-            <a:picLocks noChangeAspect="1"/>
-          </p:cNvPicPr>
-          <p:nvPr/>
-        </p:nvPicPr>
-        <p:blipFill>
-          <a:blip r:embed="rId3"/>
-          <a:stretch>
-            <a:fillRect/>
-          </a:stretch>
-        </p:blipFill>
-        <p:spPr>
-          <a:xfrm>
-            <a:off x="1066190" y="2163470"/>
-            <a:ext cx="336499" cy="336499"/>
-          </a:xfrm>
-          <a:prstGeom prst="rect">
-            <a:avLst/>
-          </a:prstGeom>
-        </p:spPr>
-      </p:pic>
-      <p:sp>
-        <p:nvSpPr>
           <p:cNvPr id="7" name="Text 4"/>
           <p:cNvSpPr/>
           <p:nvPr/>
         </p:nvSpPr>
         <p:spPr>
           <a:xfrm>
-            <a:off x="2935224" y="1920240"/>
-            <a:ext cx="777240" cy="777240"/>
+            <a:off x="800100" y="1905000"/>
+            <a:ext cx="1651000" cy="762000"/>
           </a:xfrm>
           <a:prstGeom prst="rect">
             <a:avLst/>
@@ -5244,13 +7026,13 @@
           <a:bodyPr wrap="square" rtlCol="0" anchor="ctr"/>
           <a:lstStyle/>
           <a:p>
-            <a:pPr marL="0" indent="0" algn="r">
-              <a:buNone/>
-            </a:pPr>
-            <a:r>
-              <a:rPr lang="en-US" sz="3800" b="1" dirty="0">
-                <a:solidFill>
-                  <a:srgbClr val="3A332A"/>
+            <a:pPr marL="0" indent="0" algn="l">
+              <a:buNone/>
+            </a:pPr>
+            <a:r>
+              <a:rPr lang="fr-CA" sz="4600" b="1" dirty="0">
+                <a:solidFill>
+                  <a:srgbClr val="F2A24E"/>
                 </a:solidFill>
                 <a:latin typeface="Cambria" pitchFamily="34" charset="0"/>
                 <a:ea typeface="Cambria" pitchFamily="34" charset="-122"/>
@@ -5258,7 +7040,6 @@
               </a:rPr>
               <a:t>1</a:t>
             </a:r>
-            <a:endParaRPr lang="en-US" sz="3800" dirty="0"/>
           </a:p>
         </p:txBody>
       </p:sp>
@@ -5270,8 +7051,8 @@
         </p:nvSpPr>
         <p:spPr>
           <a:xfrm>
-            <a:off x="812800" y="2834640"/>
-            <a:ext cx="2899664" cy="777240"/>
+            <a:off x="800100" y="2667000"/>
+            <a:ext cx="3041650" cy="558800"/>
           </a:xfrm>
           <a:prstGeom prst="rect">
             <a:avLst/>
@@ -5283,35 +7064,23 @@
           <a:bodyPr wrap="square" rtlCol="0" anchor="t"/>
           <a:lstStyle/>
           <a:p>
-            <a:pPr marL="0" indent="0" algn="ctr">
+            <a:pPr marL="0" indent="0" algn="l">
               <a:lnSpc>
-                <a:spcPts val="2100"/>
+                <a:spcPts val="2000"/>
               </a:lnSpc>
               <a:buNone/>
             </a:pPr>
             <a:r>
-              <a:rPr lang="en-US" sz="1700" b="1" dirty="0" err="1">
-                <a:solidFill>
-                  <a:srgbClr val="F2A24E"/>
-                </a:solidFill>
-                <a:latin typeface="Cambria" pitchFamily="34" charset="0"/>
-                <a:ea typeface="Cambria" pitchFamily="34" charset="-122"/>
-                <a:cs typeface="Cambria" pitchFamily="34" charset="-120"/>
-              </a:rPr>
-              <a:t>Mouvement</a:t>
-            </a:r>
-            <a:r>
-              <a:rPr lang="en-US" sz="1700" b="1" dirty="0">
-                <a:solidFill>
-                  <a:srgbClr val="F2A24E"/>
-                </a:solidFill>
-                <a:latin typeface="Cambria" pitchFamily="34" charset="0"/>
-                <a:ea typeface="Cambria" pitchFamily="34" charset="-122"/>
-                <a:cs typeface="Cambria" pitchFamily="34" charset="-120"/>
-              </a:rPr>
-              <a:t> de purification</a:t>
-            </a:r>
-            <a:endParaRPr lang="en-US" sz="1700" dirty="0"/>
+              <a:rPr lang="fr-CA" sz="1800" b="1" dirty="0">
+                <a:solidFill>
+                  <a:srgbClr val="F5EFE4"/>
+                </a:solidFill>
+                <a:latin typeface="Cambria" pitchFamily="34" charset="0"/>
+                <a:ea typeface="Cambria" pitchFamily="34" charset="-122"/>
+                <a:cs typeface="Cambria" pitchFamily="34" charset="-120"/>
+              </a:rPr>
+              <a:t>Mouvement de purification</a:t>
+            </a:r>
           </a:p>
         </p:txBody>
       </p:sp>
@@ -5323,8 +7092,8 @@
         </p:nvSpPr>
         <p:spPr>
           <a:xfrm>
-            <a:off x="868680" y="3657600"/>
-            <a:ext cx="2843784" cy="2331720"/>
+            <a:off x="800100" y="3403600"/>
+            <a:ext cx="2971800" cy="2260600"/>
           </a:xfrm>
           <a:prstGeom prst="rect">
             <a:avLst/>
@@ -5336,7 +7105,7 @@
           <a:bodyPr wrap="square" rtlCol="0" anchor="t"/>
           <a:lstStyle/>
           <a:p>
-            <a:pPr marL="0" indent="0" algn="ctr">
+            <a:pPr marL="0" indent="0" algn="l">
               <a:lnSpc>
                 <a:spcPts val="1650"/>
               </a:lnSpc>
@@ -5351,16 +7120,76 @@
                 <a:ea typeface="Cambria" pitchFamily="34" charset="-122"/>
                 <a:cs typeface="Cambria" pitchFamily="34" charset="-120"/>
               </a:rPr>
-              <a:t>Réveil au sein du protestantisme anglais (de la fin du XVIe au XVIIe siècle) cherchant à « purifier » l'Église d'Angleterre de tout résidu non fondé sur l'Écriture. </a:t>
-            </a:r>
-          </a:p>
-          <a:p>
-            <a:pPr marL="0" indent="0" algn="ctr">
+              <a:t>Réveil au sein du </a:t>
+            </a:r>
+            <a:r>
+              <a:rPr lang="en-US" sz="1400" dirty="0" err="1">
+                <a:solidFill>
+                  <a:srgbClr val="F5EFE4"/>
+                </a:solidFill>
+                <a:latin typeface="Cambria" pitchFamily="34" charset="0"/>
+                <a:ea typeface="Cambria" pitchFamily="34" charset="-122"/>
+                <a:cs typeface="Cambria" pitchFamily="34" charset="-120"/>
+              </a:rPr>
+              <a:t>protestantisme</a:t>
+            </a:r>
+            <a:r>
+              <a:rPr lang="en-US" sz="1400" dirty="0">
+                <a:solidFill>
+                  <a:srgbClr val="F5EFE4"/>
+                </a:solidFill>
+                <a:latin typeface="Cambria" pitchFamily="34" charset="0"/>
+                <a:ea typeface="Cambria" pitchFamily="34" charset="-122"/>
+                <a:cs typeface="Cambria" pitchFamily="34" charset="-120"/>
+              </a:rPr>
+              <a:t> anglais, fin du XVIe au </a:t>
+            </a:r>
+            <a:r>
+              <a:rPr lang="en-US" sz="1400" dirty="0" err="1">
+                <a:solidFill>
+                  <a:srgbClr val="F5EFE4"/>
+                </a:solidFill>
+                <a:latin typeface="Cambria" pitchFamily="34" charset="0"/>
+                <a:ea typeface="Cambria" pitchFamily="34" charset="-122"/>
+                <a:cs typeface="Cambria" pitchFamily="34" charset="-120"/>
+              </a:rPr>
+              <a:t>XVIIe</a:t>
+            </a:r>
+            <a:r>
+              <a:rPr lang="en-US" sz="1400" dirty="0">
+                <a:solidFill>
+                  <a:srgbClr val="F5EFE4"/>
+                </a:solidFill>
+                <a:latin typeface="Cambria" pitchFamily="34" charset="0"/>
+                <a:ea typeface="Cambria" pitchFamily="34" charset="-122"/>
+                <a:cs typeface="Cambria" pitchFamily="34" charset="-120"/>
+              </a:rPr>
+              <a:t> siècle, cherchant à « purifier » l'Église d'Angleterre de tout résidu non fondé sur l'Écriture. </a:t>
+            </a:r>
+          </a:p>
+          <a:p>
+            <a:pPr marL="0" indent="0" algn="l">
               <a:lnSpc>
                 <a:spcPts val="1650"/>
               </a:lnSpc>
               <a:buNone/>
             </a:pPr>
+            <a:endParaRPr lang="en-US" sz="1400" dirty="0">
+              <a:solidFill>
+                <a:srgbClr val="F5EFE4"/>
+              </a:solidFill>
+              <a:latin typeface="Cambria" pitchFamily="34" charset="0"/>
+              <a:ea typeface="Cambria" pitchFamily="34" charset="-122"/>
+              <a:cs typeface="Cambria" pitchFamily="34" charset="-120"/>
+            </a:endParaRPr>
+          </a:p>
+          <a:p>
+            <a:pPr marL="0" indent="0" algn="l">
+              <a:lnSpc>
+                <a:spcPts val="1650"/>
+              </a:lnSpc>
+              <a:buNone/>
+            </a:pPr>
             <a:r>
               <a:rPr lang="en-US" sz="1400" dirty="0" err="1">
                 <a:solidFill>
@@ -5381,7 +7210,29 @@
                 <a:ea typeface="Cambria" pitchFamily="34" charset="-122"/>
                 <a:cs typeface="Cambria" pitchFamily="34" charset="-120"/>
               </a:rPr>
-              <a:t> directs de la Réforme : Sola Scriptura, l'Église réformée toujours à réformer.</a:t>
+              <a:t> directs de la </a:t>
+            </a:r>
+            <a:r>
+              <a:rPr lang="en-US" sz="1400" dirty="0" err="1">
+                <a:solidFill>
+                  <a:srgbClr val="F5EFE4"/>
+                </a:solidFill>
+                <a:latin typeface="Cambria" pitchFamily="34" charset="0"/>
+                <a:ea typeface="Cambria" pitchFamily="34" charset="-122"/>
+                <a:cs typeface="Cambria" pitchFamily="34" charset="-120"/>
+              </a:rPr>
+              <a:t>Réforme</a:t>
+            </a:r>
+            <a:r>
+              <a:rPr lang="en-US" sz="1400" dirty="0">
+                <a:solidFill>
+                  <a:srgbClr val="F5EFE4"/>
+                </a:solidFill>
+                <a:latin typeface="Cambria" pitchFamily="34" charset="0"/>
+                <a:ea typeface="Cambria" pitchFamily="34" charset="-122"/>
+                <a:cs typeface="Cambria" pitchFamily="34" charset="-120"/>
+              </a:rPr>
+              <a:t>.</a:t>
             </a:r>
             <a:endParaRPr lang="en-US" sz="1400" dirty="0"/>
           </a:p>
@@ -5395,8 +7246,8 @@
         </p:nvSpPr>
         <p:spPr>
           <a:xfrm>
-            <a:off x="4352544" y="1600200"/>
-            <a:ext cx="3483864" cy="4526280"/>
+            <a:off x="4356100" y="1778000"/>
+            <a:ext cx="3479800" cy="4394200"/>
           </a:xfrm>
           <a:prstGeom prst="roundRect">
             <a:avLst>
@@ -5430,65 +7281,14 @@
       </p:sp>
       <p:sp>
         <p:nvSpPr>
-          <p:cNvPr id="11" name="Shape 8"/>
-          <p:cNvSpPr/>
-          <p:nvPr/>
-        </p:nvSpPr>
-        <p:spPr>
-          <a:xfrm>
-            <a:off x="4672584" y="1965960"/>
-            <a:ext cx="731520" cy="731520"/>
-          </a:xfrm>
-          <a:prstGeom prst="ellipse">
-            <a:avLst/>
-          </a:prstGeom>
-          <a:solidFill>
-            <a:srgbClr val="E8821E"/>
-          </a:solidFill>
-          <a:ln/>
-        </p:spPr>
-        <p:txBody>
-          <a:bodyPr/>
-          <a:lstStyle/>
-          <a:p>
-            <a:endParaRPr lang="fr-CA"/>
-          </a:p>
-        </p:txBody>
-      </p:sp>
-      <p:pic>
-        <p:nvPicPr>
-          <p:cNvPr id="12" name="Image 1" descr="preencoded.png"/>
-          <p:cNvPicPr>
-            <a:picLocks noChangeAspect="1"/>
-          </p:cNvPicPr>
-          <p:nvPr/>
-        </p:nvPicPr>
-        <p:blipFill>
-          <a:blip r:embed="rId4"/>
-          <a:stretch>
-            <a:fillRect/>
-          </a:stretch>
-        </p:blipFill>
-        <p:spPr>
-          <a:xfrm>
-            <a:off x="4870094" y="2163470"/>
-            <a:ext cx="336499" cy="336499"/>
-          </a:xfrm>
-          <a:prstGeom prst="rect">
-            <a:avLst/>
-          </a:prstGeom>
-        </p:spPr>
-      </p:pic>
-      <p:sp>
-        <p:nvSpPr>
           <p:cNvPr id="13" name="Text 9"/>
           <p:cNvSpPr/>
           <p:nvPr/>
         </p:nvSpPr>
         <p:spPr>
           <a:xfrm>
-            <a:off x="6739128" y="1920240"/>
-            <a:ext cx="777240" cy="777240"/>
+            <a:off x="4610100" y="1905000"/>
+            <a:ext cx="1651000" cy="762000"/>
           </a:xfrm>
           <a:prstGeom prst="rect">
             <a:avLst/>
@@ -5500,13 +7300,13 @@
           <a:bodyPr wrap="square" rtlCol="0" anchor="ctr"/>
           <a:lstStyle/>
           <a:p>
-            <a:pPr marL="0" indent="0" algn="r">
-              <a:buNone/>
-            </a:pPr>
-            <a:r>
-              <a:rPr lang="en-US" sz="3800" b="1" dirty="0">
-                <a:solidFill>
-                  <a:srgbClr val="3A332A"/>
+            <a:pPr marL="0" indent="0" algn="l">
+              <a:buNone/>
+            </a:pPr>
+            <a:r>
+              <a:rPr lang="fr-CA" sz="4600" b="1" dirty="0">
+                <a:solidFill>
+                  <a:srgbClr val="F2A24E"/>
                 </a:solidFill>
                 <a:latin typeface="Cambria" pitchFamily="34" charset="0"/>
                 <a:ea typeface="Cambria" pitchFamily="34" charset="-122"/>
@@ -5514,7 +7314,6 @@
               </a:rPr>
               <a:t>2</a:t>
             </a:r>
-            <a:endParaRPr lang="en-US" sz="3800" dirty="0"/>
           </a:p>
         </p:txBody>
       </p:sp>
@@ -5526,8 +7325,8 @@
         </p:nvSpPr>
         <p:spPr>
           <a:xfrm>
-            <a:off x="4672584" y="2834640"/>
-            <a:ext cx="2843784" cy="777240"/>
+            <a:off x="4610100" y="2667000"/>
+            <a:ext cx="2971800" cy="558800"/>
           </a:xfrm>
           <a:prstGeom prst="rect">
             <a:avLst/>
@@ -5539,35 +7338,23 @@
           <a:bodyPr wrap="square" rtlCol="0" anchor="t"/>
           <a:lstStyle/>
           <a:p>
-            <a:pPr marL="0" indent="0" algn="ctr">
+            <a:pPr marL="0" indent="0" algn="l">
               <a:lnSpc>
-                <a:spcPts val="2100"/>
+                <a:spcPts val="2000"/>
               </a:lnSpc>
               <a:buNone/>
             </a:pPr>
             <a:r>
-              <a:rPr lang="en-US" sz="1700" b="1" dirty="0" err="1">
-                <a:solidFill>
-                  <a:srgbClr val="F2A24E"/>
-                </a:solidFill>
-                <a:latin typeface="Cambria" pitchFamily="34" charset="0"/>
-                <a:ea typeface="Cambria" pitchFamily="34" charset="-122"/>
-                <a:cs typeface="Cambria" pitchFamily="34" charset="-120"/>
-              </a:rPr>
-              <a:t>Théologie</a:t>
-            </a:r>
-            <a:r>
-              <a:rPr lang="en-US" sz="1700" b="1" dirty="0">
-                <a:solidFill>
-                  <a:srgbClr val="F2A24E"/>
-                </a:solidFill>
-                <a:latin typeface="Cambria" pitchFamily="34" charset="0"/>
-                <a:ea typeface="Cambria" pitchFamily="34" charset="-122"/>
-                <a:cs typeface="Cambria" pitchFamily="34" charset="-120"/>
-              </a:rPr>
-              <a:t>  du cœur</a:t>
-            </a:r>
-            <a:endParaRPr lang="en-US" sz="1700" dirty="0"/>
+              <a:rPr lang="fr-CA" sz="1800" b="1" dirty="0">
+                <a:solidFill>
+                  <a:srgbClr val="F5EFE4"/>
+                </a:solidFill>
+                <a:latin typeface="Cambria" pitchFamily="34" charset="0"/>
+                <a:ea typeface="Cambria" pitchFamily="34" charset="-122"/>
+                <a:cs typeface="Cambria" pitchFamily="34" charset="-120"/>
+              </a:rPr>
+              <a:t>Théologie du cœur</a:t>
+            </a:r>
           </a:p>
         </p:txBody>
       </p:sp>
@@ -5579,8 +7366,8 @@
         </p:nvSpPr>
         <p:spPr>
           <a:xfrm>
-            <a:off x="4672584" y="3657600"/>
-            <a:ext cx="2843784" cy="2331720"/>
+            <a:off x="4610100" y="3403600"/>
+            <a:ext cx="2971800" cy="2260600"/>
           </a:xfrm>
           <a:prstGeom prst="rect">
             <a:avLst/>
@@ -5592,104 +7379,51 @@
           <a:bodyPr wrap="square" rtlCol="0" anchor="t"/>
           <a:lstStyle/>
           <a:p>
-            <a:pPr marL="0" indent="0" algn="ctr">
+            <a:pPr marL="0" indent="0" algn="l">
               <a:lnSpc>
                 <a:spcPts val="1650"/>
               </a:lnSpc>
               <a:buNone/>
             </a:pPr>
             <a:r>
-              <a:rPr lang="en-US" sz="1400" dirty="0" err="1">
-                <a:solidFill>
-                  <a:srgbClr val="F5EFE4"/>
-                </a:solidFill>
-                <a:latin typeface="Cambria" pitchFamily="34" charset="0"/>
-                <a:ea typeface="Cambria" pitchFamily="34" charset="-122"/>
-                <a:cs typeface="Cambria" pitchFamily="34" charset="-120"/>
-              </a:rPr>
-              <a:t>Calvinistes</a:t>
-            </a:r>
-            <a:r>
-              <a:rPr lang="en-US" sz="1400" dirty="0">
-                <a:solidFill>
-                  <a:srgbClr val="F5EFE4"/>
-                </a:solidFill>
-                <a:latin typeface="Cambria" pitchFamily="34" charset="0"/>
-                <a:ea typeface="Cambria" pitchFamily="34" charset="-122"/>
-                <a:cs typeface="Cambria" pitchFamily="34" charset="-120"/>
-              </a:rPr>
-              <a:t> : souveraineté de la Trinité, grâce souveraine, suffisance de l'Écriture. </a:t>
-            </a:r>
-            <a:br>
-              <a:rPr lang="en-US" sz="1400" dirty="0">
-                <a:solidFill>
-                  <a:srgbClr val="F5EFE4"/>
-                </a:solidFill>
-                <a:latin typeface="Cambria" pitchFamily="34" charset="0"/>
-                <a:ea typeface="Cambria" pitchFamily="34" charset="-122"/>
-                <a:cs typeface="Cambria" pitchFamily="34" charset="-120"/>
-              </a:rPr>
-            </a:br>
-            <a:endParaRPr lang="en-US" sz="1400" dirty="0">
-              <a:solidFill>
-                <a:srgbClr val="F5EFE4"/>
-              </a:solidFill>
-              <a:latin typeface="Cambria" pitchFamily="34" charset="0"/>
-              <a:ea typeface="Cambria" pitchFamily="34" charset="-122"/>
-              <a:cs typeface="Cambria" pitchFamily="34" charset="-120"/>
-            </a:endParaRPr>
-          </a:p>
-          <a:p>
-            <a:pPr marL="0" indent="0" algn="ctr">
+              <a:rPr lang="fr-CA" sz="1400" dirty="0">
+                <a:solidFill>
+                  <a:srgbClr val="F5EFE4"/>
+                </a:solidFill>
+                <a:latin typeface="Cambria" pitchFamily="34" charset="0"/>
+                <a:ea typeface="Cambria" pitchFamily="34" charset="-122"/>
+                <a:cs typeface="Cambria" pitchFamily="34" charset="-120"/>
+              </a:rPr>
+              <a:t>Saine doctrine de la Trinité doit saisir le cœur et gouverner toute la vie du chrétien en communauté.</a:t>
+            </a:r>
+          </a:p>
+          <a:p>
+            <a:pPr algn="l">
+              <a:lnSpc>
+                <a:spcPts val="800"/>
+              </a:lnSpc>
+              <a:buNone/>
+            </a:pPr>
+            <a:endParaRPr lang="fr-CA" sz="1400"/>
+          </a:p>
+          <a:p>
+            <a:pPr marL="0" indent="0" algn="l">
               <a:lnSpc>
                 <a:spcPts val="1650"/>
               </a:lnSpc>
               <a:buNone/>
             </a:pPr>
             <a:r>
-              <a:rPr lang="en-US" sz="1400" dirty="0" err="1">
-                <a:solidFill>
-                  <a:srgbClr val="F5EFE4"/>
-                </a:solidFill>
-                <a:latin typeface="Cambria" pitchFamily="34" charset="0"/>
-                <a:ea typeface="Cambria" pitchFamily="34" charset="-122"/>
-                <a:cs typeface="Cambria" pitchFamily="34" charset="-120"/>
-              </a:rPr>
-              <a:t>Piété</a:t>
-            </a:r>
-            <a:r>
-              <a:rPr lang="en-US" sz="1400" dirty="0">
-                <a:solidFill>
-                  <a:srgbClr val="F5EFE4"/>
-                </a:solidFill>
-                <a:latin typeface="Cambria" pitchFamily="34" charset="0"/>
-                <a:ea typeface="Cambria" pitchFamily="34" charset="-122"/>
-                <a:cs typeface="Cambria" pitchFamily="34" charset="-120"/>
-              </a:rPr>
-              <a:t> expérientielle : la saine doctrine doit saisir le cœur et gouverner toute la vie. </a:t>
-            </a:r>
-            <a:br>
-              <a:rPr lang="en-US" sz="1400" dirty="0">
-                <a:solidFill>
-                  <a:srgbClr val="F5EFE4"/>
-                </a:solidFill>
-                <a:latin typeface="Cambria" pitchFamily="34" charset="0"/>
-                <a:ea typeface="Cambria" pitchFamily="34" charset="-122"/>
-                <a:cs typeface="Cambria" pitchFamily="34" charset="-120"/>
-              </a:rPr>
-            </a:br>
-            <a:r>
-              <a:rPr lang="en-US" sz="1400" dirty="0">
-                <a:solidFill>
-                  <a:srgbClr val="F5EFE4"/>
-                </a:solidFill>
-                <a:latin typeface="Cambria" pitchFamily="34" charset="0"/>
-                <a:ea typeface="Cambria" pitchFamily="34" charset="-122"/>
-                <a:cs typeface="Cambria" pitchFamily="34" charset="-120"/>
-              </a:rPr>
-              <a:t>Figures : Owen, Baxter, Goodwin Watson, Bunyan, Brooks, Charnock, Flavel….</a:t>
-            </a:r>
-            <a:endParaRPr lang="en-US" sz="1400" dirty="0"/>
+              <a:rPr lang="fr-CA" sz="1400" dirty="0">
+                <a:solidFill>
+                  <a:srgbClr val="F5EFE4"/>
+                </a:solidFill>
+                <a:latin typeface="Cambria" pitchFamily="34" charset="0"/>
+                <a:ea typeface="Cambria" pitchFamily="34" charset="-122"/>
+                <a:cs typeface="Cambria" pitchFamily="34" charset="-120"/>
+              </a:rPr>
+              <a:t>W. Perkins, W. Ames, R. Sibbes, J. Preston, J. Owen, T. Goodwin, R. Baxter, J. Burroughs, T. Manton, A. Burges, E. Reynolds, W. Bridge, J. Bunyan, T. Watson, J. Flavel, S. Charnock, T. Brooks, M. Henry.</a:t>
+            </a:r>
           </a:p>
         </p:txBody>
       </p:sp>
@@ -5701,8 +7435,8 @@
         </p:nvSpPr>
         <p:spPr>
           <a:xfrm>
-            <a:off x="8156448" y="1600200"/>
-            <a:ext cx="3483864" cy="4526280"/>
+            <a:off x="8153400" y="1778000"/>
+            <a:ext cx="3479800" cy="4394200"/>
           </a:xfrm>
           <a:prstGeom prst="roundRect">
             <a:avLst>
@@ -5736,65 +7470,14 @@
       </p:sp>
       <p:sp>
         <p:nvSpPr>
-          <p:cNvPr id="17" name="Shape 13"/>
-          <p:cNvSpPr/>
-          <p:nvPr/>
-        </p:nvSpPr>
-        <p:spPr>
-          <a:xfrm>
-            <a:off x="8476488" y="1965960"/>
-            <a:ext cx="731520" cy="731520"/>
-          </a:xfrm>
-          <a:prstGeom prst="ellipse">
-            <a:avLst/>
-          </a:prstGeom>
-          <a:solidFill>
-            <a:srgbClr val="E8821E"/>
-          </a:solidFill>
-          <a:ln/>
-        </p:spPr>
-        <p:txBody>
-          <a:bodyPr/>
-          <a:lstStyle/>
-          <a:p>
-            <a:endParaRPr lang="fr-CA"/>
-          </a:p>
-        </p:txBody>
-      </p:sp>
-      <p:pic>
-        <p:nvPicPr>
-          <p:cNvPr id="18" name="Image 2" descr="preencoded.png"/>
-          <p:cNvPicPr>
-            <a:picLocks noChangeAspect="1"/>
-          </p:cNvPicPr>
-          <p:nvPr/>
-        </p:nvPicPr>
-        <p:blipFill>
-          <a:blip r:embed="rId5"/>
-          <a:stretch>
-            <a:fillRect/>
-          </a:stretch>
-        </p:blipFill>
-        <p:spPr>
-          <a:xfrm>
-            <a:off x="8673998" y="2163470"/>
-            <a:ext cx="336499" cy="336499"/>
-          </a:xfrm>
-          <a:prstGeom prst="rect">
-            <a:avLst/>
-          </a:prstGeom>
-        </p:spPr>
-      </p:pic>
-      <p:sp>
-        <p:nvSpPr>
           <p:cNvPr id="19" name="Text 14"/>
           <p:cNvSpPr/>
           <p:nvPr/>
         </p:nvSpPr>
         <p:spPr>
           <a:xfrm>
-            <a:off x="10543032" y="1920240"/>
-            <a:ext cx="777240" cy="777240"/>
+            <a:off x="8407400" y="1905000"/>
+            <a:ext cx="1651000" cy="762000"/>
           </a:xfrm>
           <a:prstGeom prst="rect">
             <a:avLst/>
@@ -5806,13 +7489,13 @@
           <a:bodyPr wrap="square" rtlCol="0" anchor="ctr"/>
           <a:lstStyle/>
           <a:p>
-            <a:pPr marL="0" indent="0" algn="r">
-              <a:buNone/>
-            </a:pPr>
-            <a:r>
-              <a:rPr lang="en-US" sz="3800" b="1" dirty="0">
-                <a:solidFill>
-                  <a:srgbClr val="3A332A"/>
+            <a:pPr marL="0" indent="0" algn="l">
+              <a:buNone/>
+            </a:pPr>
+            <a:r>
+              <a:rPr lang="fr-CA" sz="4600" b="1" dirty="0">
+                <a:solidFill>
+                  <a:srgbClr val="F2A24E"/>
                 </a:solidFill>
                 <a:latin typeface="Cambria" pitchFamily="34" charset="0"/>
                 <a:ea typeface="Cambria" pitchFamily="34" charset="-122"/>
@@ -5820,7 +7503,6 @@
               </a:rPr>
               <a:t>3</a:t>
             </a:r>
-            <a:endParaRPr lang="en-US" sz="3800" dirty="0"/>
           </a:p>
         </p:txBody>
       </p:sp>
@@ -5832,8 +7514,8 @@
         </p:nvSpPr>
         <p:spPr>
           <a:xfrm>
-            <a:off x="8476488" y="2834640"/>
-            <a:ext cx="2843784" cy="777240"/>
+            <a:off x="8407400" y="2667000"/>
+            <a:ext cx="2971800" cy="558800"/>
           </a:xfrm>
           <a:prstGeom prst="rect">
             <a:avLst/>
@@ -5845,35 +7527,23 @@
           <a:bodyPr wrap="square" rtlCol="0" anchor="t"/>
           <a:lstStyle/>
           <a:p>
-            <a:pPr marL="0" indent="0" algn="ctr">
+            <a:pPr marL="0" indent="0" algn="l">
               <a:lnSpc>
-                <a:spcPts val="2100"/>
+                <a:spcPts val="2000"/>
               </a:lnSpc>
               <a:buNone/>
             </a:pPr>
             <a:r>
-              <a:rPr lang="en-US" sz="1700" b="1" dirty="0" err="1">
-                <a:solidFill>
-                  <a:srgbClr val="F2A24E"/>
-                </a:solidFill>
-                <a:latin typeface="Cambria" pitchFamily="34" charset="0"/>
-                <a:ea typeface="Cambria" pitchFamily="34" charset="-122"/>
-                <a:cs typeface="Cambria" pitchFamily="34" charset="-120"/>
-              </a:rPr>
-              <a:t>Héritage</a:t>
-            </a:r>
-            <a:r>
-              <a:rPr lang="en-US" sz="1700" b="1" dirty="0">
-                <a:solidFill>
-                  <a:srgbClr val="F2A24E"/>
-                </a:solidFill>
-                <a:latin typeface="Cambria" pitchFamily="34" charset="0"/>
-                <a:ea typeface="Cambria" pitchFamily="34" charset="-122"/>
-                <a:cs typeface="Cambria" pitchFamily="34" charset="-120"/>
-              </a:rPr>
-              <a:t> vivant</a:t>
-            </a:r>
-            <a:endParaRPr lang="en-US" sz="1700" dirty="0"/>
+              <a:rPr lang="fr-CA" sz="1800" b="1" dirty="0">
+                <a:solidFill>
+                  <a:srgbClr val="F5EFE4"/>
+                </a:solidFill>
+                <a:latin typeface="Cambria" pitchFamily="34" charset="0"/>
+                <a:ea typeface="Cambria" pitchFamily="34" charset="-122"/>
+                <a:cs typeface="Cambria" pitchFamily="34" charset="-120"/>
+              </a:rPr>
+              <a:t>Héritage vivant</a:t>
+            </a:r>
           </a:p>
         </p:txBody>
       </p:sp>
@@ -5885,8 +7555,8 @@
         </p:nvSpPr>
         <p:spPr>
           <a:xfrm>
-            <a:off x="8476488" y="3657600"/>
-            <a:ext cx="2843784" cy="2331720"/>
+            <a:off x="8407400" y="3403600"/>
+            <a:ext cx="2971800" cy="2260600"/>
           </a:xfrm>
           <a:prstGeom prst="rect">
             <a:avLst/>
@@ -5898,95 +7568,51 @@
           <a:bodyPr wrap="square" rtlCol="0" anchor="t"/>
           <a:lstStyle/>
           <a:p>
-            <a:pPr marL="0" indent="0" algn="ctr">
+            <a:pPr marL="0" indent="0" algn="l">
               <a:lnSpc>
                 <a:spcPts val="1650"/>
               </a:lnSpc>
               <a:buNone/>
             </a:pPr>
-            <a:endParaRPr lang="en-US" sz="1400" dirty="0">
-              <a:solidFill>
-                <a:srgbClr val="F5EFE4"/>
-              </a:solidFill>
-              <a:latin typeface="Cambria" pitchFamily="34" charset="0"/>
-              <a:ea typeface="Cambria" pitchFamily="34" charset="-122"/>
-              <a:cs typeface="Cambria" pitchFamily="34" charset="-120"/>
-            </a:endParaRPr>
-          </a:p>
-          <a:p>
-            <a:pPr marL="0" indent="0" algn="ctr">
+            <a:r>
+              <a:rPr lang="fr-CA" sz="1400" dirty="0">
+                <a:solidFill>
+                  <a:srgbClr val="F5EFE4"/>
+                </a:solidFill>
+                <a:latin typeface="Cambria" pitchFamily="34" charset="0"/>
+                <a:ea typeface="Cambria" pitchFamily="34" charset="-122"/>
+                <a:cs typeface="Cambria" pitchFamily="34" charset="-120"/>
+              </a:rPr>
+              <a:t>Prédication expositive, Piété expérientielle, Mortification du péché, Examen de soi et méditation, Lecture de la providence, Assurance du Salut, Foyer comme petite église.</a:t>
+            </a:r>
+          </a:p>
+          <a:p>
+            <a:pPr algn="l">
+              <a:lnSpc>
+                <a:spcPts val="800"/>
+              </a:lnSpc>
+              <a:buNone/>
+            </a:pPr>
+            <a:endParaRPr lang="fr-CA" sz="1400"/>
+          </a:p>
+          <a:p>
+            <a:pPr marL="0" indent="0" algn="l">
               <a:lnSpc>
                 <a:spcPts val="1650"/>
               </a:lnSpc>
               <a:buNone/>
             </a:pPr>
             <a:r>
-              <a:rPr lang="en-US" sz="1400" dirty="0" err="1">
-                <a:solidFill>
-                  <a:srgbClr val="F5EFE4"/>
-                </a:solidFill>
-                <a:latin typeface="Cambria" pitchFamily="34" charset="0"/>
-                <a:ea typeface="Cambria" pitchFamily="34" charset="-122"/>
-                <a:cs typeface="Cambria" pitchFamily="34" charset="-120"/>
-              </a:rPr>
-              <a:t>Prédication</a:t>
-            </a:r>
-            <a:r>
-              <a:rPr lang="en-US" sz="1400" dirty="0">
-                <a:solidFill>
-                  <a:srgbClr val="F5EFE4"/>
-                </a:solidFill>
-                <a:latin typeface="Cambria" pitchFamily="34" charset="0"/>
-                <a:ea typeface="Cambria" pitchFamily="34" charset="-122"/>
-                <a:cs typeface="Cambria" pitchFamily="34" charset="-120"/>
-              </a:rPr>
-              <a:t> expositive, sainteté pratique, prière nourrie de la Parole ; </a:t>
-            </a:r>
-            <a:r>
-              <a:rPr lang="en-US" sz="1400" dirty="0" err="1">
-                <a:solidFill>
-                  <a:srgbClr val="F5EFE4"/>
-                </a:solidFill>
-                <a:latin typeface="Cambria" pitchFamily="34" charset="0"/>
-                <a:ea typeface="Cambria" pitchFamily="34" charset="-122"/>
-                <a:cs typeface="Cambria" pitchFamily="34" charset="-120"/>
-              </a:rPr>
-              <a:t>héritage</a:t>
-            </a:r>
-            <a:r>
-              <a:rPr lang="en-US" sz="1400" dirty="0">
-                <a:solidFill>
-                  <a:srgbClr val="F5EFE4"/>
-                </a:solidFill>
-                <a:latin typeface="Cambria" pitchFamily="34" charset="0"/>
-                <a:ea typeface="Cambria" pitchFamily="34" charset="-122"/>
-                <a:cs typeface="Cambria" pitchFamily="34" charset="-120"/>
-              </a:rPr>
-              <a:t> </a:t>
-            </a:r>
-            <a:r>
-              <a:rPr lang="en-US" sz="1400" dirty="0" err="1">
-                <a:solidFill>
-                  <a:srgbClr val="F5EFE4"/>
-                </a:solidFill>
-                <a:latin typeface="Cambria" pitchFamily="34" charset="0"/>
-                <a:ea typeface="Cambria" pitchFamily="34" charset="-122"/>
-                <a:cs typeface="Cambria" pitchFamily="34" charset="-120"/>
-              </a:rPr>
-              <a:t>revendiqué</a:t>
-            </a:r>
-            <a:r>
-              <a:rPr lang="en-US" sz="1400" dirty="0">
-                <a:solidFill>
-                  <a:srgbClr val="F5EFE4"/>
-                </a:solidFill>
-                <a:latin typeface="Cambria" pitchFamily="34" charset="0"/>
-                <a:ea typeface="Cambria" pitchFamily="34" charset="-122"/>
-                <a:cs typeface="Cambria" pitchFamily="34" charset="-120"/>
-              </a:rPr>
-              <a:t> par John MacArthur et H.B. Charles Jr.</a:t>
-            </a:r>
-            <a:endParaRPr lang="en-US" sz="1400" dirty="0"/>
+              <a:rPr lang="fr-CA" sz="1400" dirty="0">
+                <a:solidFill>
+                  <a:srgbClr val="F5EFE4"/>
+                </a:solidFill>
+                <a:latin typeface="Cambria" pitchFamily="34" charset="0"/>
+                <a:ea typeface="Cambria" pitchFamily="34" charset="-122"/>
+                <a:cs typeface="Cambria" pitchFamily="34" charset="-120"/>
+              </a:rPr>
+              <a:t>Charles H. Spurgeon, D. M. Lloyd-Jones, Joel R. Beeke, R. C. Sproul, John MacArthur et H. B. Charles Jr.</a:t>
+            </a:r>
           </a:p>
         </p:txBody>
       </p:sp>
@@ -6076,13 +7702,306 @@
               <a:t>3</a:t>
             </a:r>
             <a:endParaRPr lang="en-US" sz="1000" dirty="0"/>
+          </a:p>
+        </p:txBody>
+      </p:sp>
+      <p:sp>
+        <p:nvSpPr>
+          <p:cNvPr id="400" name="accentBar"/>
+          <p:cNvSpPr/>
+          <p:nvPr/>
+        </p:nvSpPr>
+        <p:spPr>
+          <a:xfrm>
+            <a:off x="546100" y="330200"/>
+            <a:ext cx="63500" cy="1092200"/>
+          </a:xfrm>
+          <a:prstGeom prst="rect">
+            <a:avLst/>
+          </a:prstGeom>
+          <a:solidFill>
+            <a:srgbClr val="F2A24E"/>
+          </a:solidFill>
+          <a:ln>
+            <a:noFill/>
+          </a:ln>
+        </p:spPr>
+        <p:txBody>
+          <a:bodyPr/>
+          <a:lstStyle/>
+          <a:p>
+            <a:endParaRPr/>
+          </a:p>
+        </p:txBody>
+      </p:sp>
+      <p:sp>
+        <p:nvSpPr>
+          <p:cNvPr id="401" name="eyebrow"/>
+          <p:cNvSpPr txBox="1"/>
+          <p:nvPr/>
+        </p:nvSpPr>
+        <p:spPr>
+          <a:xfrm>
+            <a:off x="736600" y="355600"/>
+            <a:ext cx="6350000" cy="279400"/>
+          </a:xfrm>
+          <a:prstGeom prst="rect">
+            <a:avLst/>
+          </a:prstGeom>
+          <a:noFill/>
+        </p:spPr>
+        <p:txBody>
+          <a:bodyPr wrap="none" lIns="0" tIns="0" rIns="0" bIns="0" anchor="t"/>
+          <a:lstStyle/>
+          <a:p>
+            <a:pPr algn="l">
+              <a:buNone/>
+            </a:pPr>
+            <a:r>
+              <a:rPr lang="fr-CA" sz="1400" b="1" spc="320" dirty="0">
+                <a:solidFill>
+                  <a:srgbClr val="F2A24E"/>
+                </a:solidFill>
+                <a:latin typeface="Cambria" pitchFamily="34" charset="0"/>
+                <a:ea typeface="Cambria" pitchFamily="34" charset="-122"/>
+                <a:cs typeface="Cambria" pitchFamily="34" charset="-120"/>
+              </a:rPr>
+              <a:t>03 · LES PURITAINS</a:t>
+            </a:r>
+          </a:p>
+        </p:txBody>
+      </p:sp>
+      <p:sp>
+        <p:nvSpPr>
+          <p:cNvPr id="402" name="headerRule"/>
+          <p:cNvSpPr/>
+          <p:nvPr/>
+        </p:nvSpPr>
+        <p:spPr>
+          <a:xfrm>
+            <a:off x="546100" y="1651000"/>
+            <a:ext cx="11087100" cy="15240"/>
+          </a:xfrm>
+          <a:prstGeom prst="rect">
+            <a:avLst/>
+          </a:prstGeom>
+          <a:solidFill>
+            <a:srgbClr val="6E5A3C"/>
+          </a:solidFill>
+          <a:ln>
+            <a:noFill/>
+          </a:ln>
+        </p:spPr>
+        <p:txBody>
+          <a:bodyPr/>
+          <a:lstStyle/>
+          <a:p>
+            <a:endParaRPr/>
+          </a:p>
+        </p:txBody>
+      </p:sp>
+      <p:sp>
+        <p:nvSpPr>
+          <p:cNvPr id="410" name="cardrule"/>
+          <p:cNvSpPr/>
+          <p:nvPr/>
+        </p:nvSpPr>
+        <p:spPr>
+          <a:xfrm>
+            <a:off x="825500" y="3276600"/>
+            <a:ext cx="660400" cy="25400"/>
+          </a:xfrm>
+          <a:prstGeom prst="rect">
+            <a:avLst/>
+          </a:prstGeom>
+          <a:solidFill>
+            <a:srgbClr val="F2A24E"/>
+          </a:solidFill>
+          <a:ln>
+            <a:noFill/>
+          </a:ln>
+        </p:spPr>
+        <p:txBody>
+          <a:bodyPr/>
+          <a:lstStyle/>
+          <a:p>
+            <a:endParaRPr/>
+          </a:p>
+        </p:txBody>
+      </p:sp>
+      <p:sp>
+        <p:nvSpPr>
+          <p:cNvPr id="411" name="cardtag"/>
+          <p:cNvSpPr txBox="1"/>
+          <p:nvPr/>
+        </p:nvSpPr>
+        <p:spPr>
+          <a:xfrm>
+            <a:off x="800100" y="5740400"/>
+            <a:ext cx="2971800" cy="304800"/>
+          </a:xfrm>
+          <a:prstGeom prst="rect">
+            <a:avLst/>
+          </a:prstGeom>
+          <a:noFill/>
+        </p:spPr>
+        <p:txBody>
+          <a:bodyPr wrap="square" lIns="0" tIns="0" rIns="0" bIns="0" anchor="t"/>
+          <a:lstStyle/>
+          <a:p>
+            <a:pPr algn="l">
+              <a:buNone/>
+            </a:pPr>
+            <a:r>
+              <a:rPr lang="fr-CA" sz="1400" i="1" dirty="0">
+                <a:solidFill>
+                  <a:srgbClr val="F2A24E"/>
+                </a:solidFill>
+                <a:latin typeface="Cambria" pitchFamily="34" charset="0"/>
+                <a:ea typeface="Cambria" pitchFamily="34" charset="-122"/>
+                <a:cs typeface="Cambria" pitchFamily="34" charset="-120"/>
+              </a:rPr>
+              <a:t>héritiers de la Réforme</a:t>
+            </a:r>
+          </a:p>
+        </p:txBody>
+      </p:sp>
+      <p:sp>
+        <p:nvSpPr>
+          <p:cNvPr id="412" name="cardrule"/>
+          <p:cNvSpPr/>
+          <p:nvPr/>
+        </p:nvSpPr>
+        <p:spPr>
+          <a:xfrm>
+            <a:off x="4635500" y="3276600"/>
+            <a:ext cx="660400" cy="25400"/>
+          </a:xfrm>
+          <a:prstGeom prst="rect">
+            <a:avLst/>
+          </a:prstGeom>
+          <a:solidFill>
+            <a:srgbClr val="F2A24E"/>
+          </a:solidFill>
+          <a:ln>
+            <a:noFill/>
+          </a:ln>
+        </p:spPr>
+        <p:txBody>
+          <a:bodyPr/>
+          <a:lstStyle/>
+          <a:p>
+            <a:endParaRPr/>
+          </a:p>
+        </p:txBody>
+      </p:sp>
+      <p:sp>
+        <p:nvSpPr>
+          <p:cNvPr id="413" name="cardtag"/>
+          <p:cNvSpPr txBox="1"/>
+          <p:nvPr/>
+        </p:nvSpPr>
+        <p:spPr>
+          <a:xfrm>
+            <a:off x="4610100" y="5740400"/>
+            <a:ext cx="2971800" cy="304800"/>
+          </a:xfrm>
+          <a:prstGeom prst="rect">
+            <a:avLst/>
+          </a:prstGeom>
+          <a:noFill/>
+        </p:spPr>
+        <p:txBody>
+          <a:bodyPr wrap="square" lIns="0" tIns="0" rIns="0" bIns="0" anchor="t"/>
+          <a:lstStyle/>
+          <a:p>
+            <a:pPr algn="l">
+              <a:buNone/>
+            </a:pPr>
+            <a:r>
+              <a:rPr lang="fr-CA" sz="1400" i="1" dirty="0">
+                <a:solidFill>
+                  <a:srgbClr val="F2A24E"/>
+                </a:solidFill>
+                <a:latin typeface="Cambria" pitchFamily="34" charset="0"/>
+                <a:ea typeface="Cambria" pitchFamily="34" charset="-122"/>
+                <a:cs typeface="Cambria" pitchFamily="34" charset="-120"/>
+              </a:rPr>
+              <a:t>la tête et le cœur</a:t>
+            </a:r>
+          </a:p>
+        </p:txBody>
+      </p:sp>
+      <p:sp>
+        <p:nvSpPr>
+          <p:cNvPr id="414" name="cardrule"/>
+          <p:cNvSpPr/>
+          <p:nvPr/>
+        </p:nvSpPr>
+        <p:spPr>
+          <a:xfrm>
+            <a:off x="8432800" y="3276600"/>
+            <a:ext cx="660400" cy="25400"/>
+          </a:xfrm>
+          <a:prstGeom prst="rect">
+            <a:avLst/>
+          </a:prstGeom>
+          <a:solidFill>
+            <a:srgbClr val="F2A24E"/>
+          </a:solidFill>
+          <a:ln>
+            <a:noFill/>
+          </a:ln>
+        </p:spPr>
+        <p:txBody>
+          <a:bodyPr/>
+          <a:lstStyle/>
+          <a:p>
+            <a:endParaRPr/>
+          </a:p>
+        </p:txBody>
+      </p:sp>
+      <p:sp>
+        <p:nvSpPr>
+          <p:cNvPr id="415" name="cardtag"/>
+          <p:cNvSpPr txBox="1"/>
+          <p:nvPr/>
+        </p:nvSpPr>
+        <p:spPr>
+          <a:xfrm>
+            <a:off x="8407400" y="5740400"/>
+            <a:ext cx="2971800" cy="304800"/>
+          </a:xfrm>
+          <a:prstGeom prst="rect">
+            <a:avLst/>
+          </a:prstGeom>
+          <a:noFill/>
+        </p:spPr>
+        <p:txBody>
+          <a:bodyPr wrap="square" lIns="0" tIns="0" rIns="0" bIns="0" anchor="t"/>
+          <a:lstStyle/>
+          <a:p>
+            <a:pPr algn="l">
+              <a:buNone/>
+            </a:pPr>
+            <a:r>
+              <a:rPr lang="fr-CA" sz="1400" i="1" dirty="0">
+                <a:solidFill>
+                  <a:srgbClr val="F2A24E"/>
+                </a:solidFill>
+                <a:latin typeface="Cambria" pitchFamily="34" charset="0"/>
+                <a:ea typeface="Cambria" pitchFamily="34" charset="-122"/>
+                <a:cs typeface="Cambria" pitchFamily="34" charset="-120"/>
+              </a:rPr>
+              <a:t>une piété qui se vit</a:t>
+            </a:r>
           </a:p>
         </p:txBody>
       </p:sp>
     </p:spTree>
     <p:extLst>
       <p:ext uri="{BB962C8B-B14F-4D97-AF65-F5344CB8AC3E}">
-        <p14:creationId xmlns:p14="http://schemas.microsoft.com/office/powerpoint/2010/main" val="1014915409"/>
+        <p14:creationId xmlns:p14="http://schemas.microsoft.com/office/powerpoint/2010/main" val="1865463153"/>
       </p:ext>
     </p:extLst>
   </p:cSld>
@@ -6093,6 +8012,2713 @@
 </file>
 
 <file path=ppt/slides/slide4.xml><?xml version="1.0" encoding="utf-8"?>
+<p:sld xmlns:a="http://schemas.openxmlformats.org/drawingml/2006/main" xmlns:r="http://schemas.openxmlformats.org/officeDocument/2006/relationships" xmlns:p="http://schemas.openxmlformats.org/presentationml/2006/main">
+  <p:cSld name="Slide 3">
+    <p:bg>
+      <p:bgPr>
+        <a:solidFill>
+          <a:srgbClr val="121212"/>
+        </a:solidFill>
+        <a:effectLst/>
+      </p:bgPr>
+    </p:bg>
+    <p:spTree>
+      <p:nvGrpSpPr>
+        <p:cNvPr id="1" name=""/>
+        <p:cNvGrpSpPr/>
+        <p:nvPr/>
+      </p:nvGrpSpPr>
+      <p:grpSpPr>
+        <a:xfrm>
+          <a:off x="0" y="0"/>
+          <a:ext cx="0" cy="0"/>
+          <a:chOff x="0" y="0"/>
+          <a:chExt cx="0" cy="0"/>
+        </a:xfrm>
+      </p:grpSpPr>
+      <p:sp>
+        <p:nvSpPr>
+          <p:cNvPr id="2" name="Text 0"/>
+          <p:cNvSpPr/>
+          <p:nvPr/>
+        </p:nvSpPr>
+        <p:spPr>
+          <a:xfrm>
+            <a:off x="548640" y="411480"/>
+            <a:ext cx="11064240" cy="640080"/>
+          </a:xfrm>
+          <a:prstGeom prst="rect">
+            <a:avLst/>
+          </a:prstGeom>
+          <a:noFill/>
+          <a:ln/>
+        </p:spPr>
+        <p:txBody>
+          <a:bodyPr wrap="square" lIns="0" tIns="0" rIns="0" bIns="0" rtlCol="0" anchor="ctr"/>
+          <a:lstStyle/>
+          <a:p>
+            <a:pPr marL="0" indent="0" algn="l">
+              <a:buNone/>
+            </a:pPr>
+            <a:r>
+              <a:rPr lang="fr-CA" sz="3200" b="1" dirty="0">
+                <a:solidFill>
+                  <a:srgbClr val="F5EFE4"/>
+                </a:solidFill>
+                <a:latin typeface="Cambria" pitchFamily="34" charset="0"/>
+                <a:ea typeface="Cambria"/>
+                <a:cs typeface="Cambria"/>
+              </a:rPr>
+              <a:t>Les 5 Solas : le socle doctrinal des </a:t>
+            </a:r>
+            <a:r>
+              <a:rPr lang="fr-CA" sz="3200" b="1" i="1" dirty="0">
+                <a:solidFill>
+                  <a:srgbClr val="F5EFE4"/>
+                </a:solidFill>
+                <a:latin typeface="Cambria" pitchFamily="34" charset="0"/>
+                <a:ea typeface="Cambria"/>
+                <a:cs typeface="Cambria"/>
+              </a:rPr>
+              <a:t>puritains</a:t>
+            </a:r>
+          </a:p>
+        </p:txBody>
+      </p:sp>
+      <p:sp>
+        <p:nvSpPr>
+          <p:cNvPr id="3" name="Text 1"/>
+          <p:cNvSpPr/>
+          <p:nvPr/>
+        </p:nvSpPr>
+        <p:spPr>
+          <a:xfrm>
+            <a:off x="566928" y="1060704"/>
+            <a:ext cx="10972800" cy="320040"/>
+          </a:xfrm>
+          <a:prstGeom prst="rect">
+            <a:avLst/>
+          </a:prstGeom>
+          <a:noFill/>
+          <a:ln/>
+        </p:spPr>
+        <p:txBody>
+          <a:bodyPr wrap="square" lIns="0" tIns="0" rIns="0" bIns="0" rtlCol="0" anchor="ctr"/>
+          <a:lstStyle/>
+          <a:p>
+            <a:pPr marL="0" indent="0" algn="l">
+              <a:buNone/>
+            </a:pPr>
+            <a:r>
+              <a:rPr lang="fr-CA" sz="1400" dirty="0">
+                <a:solidFill>
+                  <a:srgbClr val="C9B79A"/>
+                </a:solidFill>
+                <a:latin typeface="Cambria" pitchFamily="34" charset="0"/>
+              </a:rPr>
+              <a:t>Écriture · grâce · foi · Christ · gloire de Dieu</a:t>
+            </a:r>
+          </a:p>
+        </p:txBody>
+      </p:sp>
+      <p:sp>
+        <p:nvSpPr>
+          <p:cNvPr id="22" name="Text 17"/>
+          <p:cNvSpPr/>
+          <p:nvPr/>
+        </p:nvSpPr>
+        <p:spPr>
+          <a:xfrm>
+            <a:off x="548640" y="6437376"/>
+            <a:ext cx="10515600" cy="274320"/>
+          </a:xfrm>
+          <a:prstGeom prst="rect">
+            <a:avLst/>
+          </a:prstGeom>
+          <a:noFill/>
+          <a:ln/>
+        </p:spPr>
+        <p:txBody>
+          <a:bodyPr wrap="square" lIns="0" tIns="0" rIns="0" bIns="0" rtlCol="0" anchor="ctr"/>
+          <a:lstStyle/>
+          <a:p>
+            <a:pPr marL="0" indent="0" algn="l">
+              <a:buNone/>
+            </a:pPr>
+            <a:r>
+              <a:rPr lang="en-US" sz="900" dirty="0">
+                <a:solidFill>
+                  <a:srgbClr val="A89F90"/>
+                </a:solidFill>
+                <a:latin typeface="Cambria" pitchFamily="34" charset="0"/>
+                <a:ea typeface="Cambria" pitchFamily="34" charset="-122"/>
+                <a:cs typeface="Cambria" pitchFamily="34" charset="-120"/>
+              </a:rPr>
+              <a:t>Église Baptiste de Charlesbourg</a:t>
+            </a:r>
+            <a:r>
+              <a:rPr lang="en-US" sz="900" dirty="0">
+                <a:solidFill>
+                  <a:srgbClr val="6E665A"/>
+                </a:solidFill>
+                <a:latin typeface="Cambria" pitchFamily="34" charset="0"/>
+                <a:ea typeface="Cambria" pitchFamily="34" charset="-122"/>
+                <a:cs typeface="Cambria" pitchFamily="34" charset="-120"/>
+              </a:rPr>
+              <a:t>   ·   Pasteur Simon Ouellette   ·   EBC   ·   NEG 1979</a:t>
+            </a:r>
+            <a:endParaRPr lang="en-US" sz="900" dirty="0"/>
+          </a:p>
+        </p:txBody>
+      </p:sp>
+      <p:sp>
+        <p:nvSpPr>
+          <p:cNvPr id="23" name="Text 18"/>
+          <p:cNvSpPr/>
+          <p:nvPr/>
+        </p:nvSpPr>
+        <p:spPr>
+          <a:xfrm>
+            <a:off x="11430000" y="6400800"/>
+            <a:ext cx="502920" cy="292608"/>
+          </a:xfrm>
+          <a:prstGeom prst="rect">
+            <a:avLst/>
+          </a:prstGeom>
+          <a:noFill/>
+          <a:ln/>
+        </p:spPr>
+        <p:txBody>
+          <a:bodyPr wrap="square" rtlCol="0" anchor="ctr"/>
+          <a:lstStyle/>
+          <a:p>
+            <a:pPr marL="0" indent="0" algn="r">
+              <a:buNone/>
+            </a:pPr>
+            <a:r>
+              <a:rPr lang="en-US" sz="1000" dirty="0">
+                <a:solidFill>
+                  <a:srgbClr val="A89F90"/>
+                </a:solidFill>
+                <a:latin typeface="Cambria" pitchFamily="34" charset="0"/>
+                <a:ea typeface="Cambria" pitchFamily="34" charset="-122"/>
+                <a:cs typeface="Cambria" pitchFamily="34" charset="-120"/>
+              </a:rPr>
+              <a:t>3</a:t>
+            </a:r>
+            <a:endParaRPr lang="en-US" sz="1000" dirty="0"/>
+          </a:p>
+        </p:txBody>
+      </p:sp>
+      <p:sp>
+        <p:nvSpPr>
+          <p:cNvPr id="200" name="card0"/>
+          <p:cNvSpPr/>
+          <p:nvPr/>
+        </p:nvSpPr>
+        <p:spPr>
+          <a:xfrm>
+            <a:off x="546100" y="1600200"/>
+            <a:ext cx="2095500" cy="4521200"/>
+          </a:xfrm>
+          <a:prstGeom prst="roundRect">
+            <a:avLst>
+              <a:gd name="adj" fmla="val 5000"/>
+            </a:avLst>
+          </a:prstGeom>
+          <a:solidFill>
+            <a:srgbClr val="1E1A14"/>
+          </a:solidFill>
+          <a:ln w="12700">
+            <a:solidFill>
+              <a:srgbClr val="332C22"/>
+            </a:solidFill>
+          </a:ln>
+        </p:spPr>
+        <p:txBody>
+          <a:bodyPr/>
+          <a:lstStyle/>
+          <a:p>
+            <a:endParaRPr/>
+          </a:p>
+        </p:txBody>
+      </p:sp>
+      <p:sp>
+        <p:nvSpPr>
+          <p:cNvPr id="201" name="num0"/>
+          <p:cNvSpPr/>
+          <p:nvPr/>
+        </p:nvSpPr>
+        <p:spPr>
+          <a:xfrm>
+            <a:off x="1289050" y="1905000"/>
+            <a:ext cx="609600" cy="609600"/>
+          </a:xfrm>
+          <a:prstGeom prst="ellipse">
+            <a:avLst/>
+          </a:prstGeom>
+          <a:solidFill>
+            <a:srgbClr val="E8821E"/>
+          </a:solidFill>
+          <a:ln>
+            <a:noFill/>
+          </a:ln>
+        </p:spPr>
+        <p:txBody>
+          <a:bodyPr lIns="0" tIns="0" rIns="0" bIns="0" anchor="ctr"/>
+          <a:lstStyle/>
+          <a:p>
+            <a:pPr algn="ctr">
+              <a:buNone/>
+            </a:pPr>
+            <a:r>
+              <a:rPr lang="fr-CA" sz="2200" b="1" dirty="0">
+                <a:solidFill>
+                  <a:srgbClr val="FFFFFF"/>
+                </a:solidFill>
+                <a:latin typeface="Cambria"/>
+              </a:rPr>
+              <a:t>1</a:t>
+            </a:r>
+          </a:p>
+        </p:txBody>
+      </p:sp>
+      <p:sp>
+        <p:nvSpPr>
+          <p:cNvPr id="202" name="lat0"/>
+          <p:cNvSpPr txBox="1"/>
+          <p:nvPr/>
+        </p:nvSpPr>
+        <p:spPr>
+          <a:xfrm>
+            <a:off x="647700" y="2692400"/>
+            <a:ext cx="1892300" cy="457200"/>
+          </a:xfrm>
+          <a:prstGeom prst="rect">
+            <a:avLst/>
+          </a:prstGeom>
+          <a:noFill/>
+        </p:spPr>
+        <p:txBody>
+          <a:bodyPr wrap="square" lIns="0" tIns="0" rIns="0" bIns="0" anchor="t"/>
+          <a:lstStyle/>
+          <a:p>
+            <a:pPr algn="ctr">
+              <a:buNone/>
+            </a:pPr>
+            <a:r>
+              <a:rPr lang="fr-CA" sz="1600" b="1" dirty="0">
+                <a:solidFill>
+                  <a:srgbClr val="F2A24E"/>
+                </a:solidFill>
+                <a:latin typeface="Cambria"/>
+                <a:ea typeface="Cambria"/>
+                <a:cs typeface="Cambria"/>
+              </a:rPr>
+              <a:t>Sola Scriptura</a:t>
+            </a:r>
+          </a:p>
+        </p:txBody>
+      </p:sp>
+      <p:sp>
+        <p:nvSpPr>
+          <p:cNvPr id="203" name="fr0"/>
+          <p:cNvSpPr txBox="1"/>
+          <p:nvPr/>
+        </p:nvSpPr>
+        <p:spPr>
+          <a:xfrm>
+            <a:off x="647700" y="3175000"/>
+            <a:ext cx="1892300" cy="304800"/>
+          </a:xfrm>
+          <a:prstGeom prst="rect">
+            <a:avLst/>
+          </a:prstGeom>
+          <a:noFill/>
+        </p:spPr>
+        <p:txBody>
+          <a:bodyPr wrap="square" lIns="0" tIns="0" rIns="0" bIns="0" anchor="t"/>
+          <a:lstStyle/>
+          <a:p>
+            <a:pPr algn="ctr">
+              <a:buNone/>
+            </a:pPr>
+            <a:r>
+              <a:rPr lang="fr-CA" sz="1400" i="1" dirty="0">
+                <a:solidFill>
+                  <a:srgbClr val="F5EFE4"/>
+                </a:solidFill>
+                <a:latin typeface="Cambria"/>
+                <a:ea typeface="Cambria"/>
+                <a:cs typeface="Cambria"/>
+              </a:rPr>
+              <a:t>L'Écriture seule</a:t>
+            </a:r>
+          </a:p>
+        </p:txBody>
+      </p:sp>
+      <p:sp>
+        <p:nvSpPr>
+          <p:cNvPr id="204" name="desc0"/>
+          <p:cNvSpPr txBox="1"/>
+          <p:nvPr/>
+        </p:nvSpPr>
+        <p:spPr>
+          <a:xfrm>
+            <a:off x="647700" y="3606800"/>
+            <a:ext cx="1892300" cy="2413000"/>
+          </a:xfrm>
+          <a:prstGeom prst="rect">
+            <a:avLst/>
+          </a:prstGeom>
+          <a:noFill/>
+        </p:spPr>
+        <p:txBody>
+          <a:bodyPr wrap="square" lIns="0" tIns="0" rIns="0" bIns="0" anchor="t"/>
+          <a:lstStyle/>
+          <a:p>
+            <a:pPr algn="ctr">
+              <a:lnSpc>
+                <a:spcPts val="1700"/>
+              </a:lnSpc>
+              <a:buNone/>
+            </a:pPr>
+            <a:r>
+              <a:rPr lang="fr-CA" sz="1400" dirty="0">
+                <a:solidFill>
+                  <a:srgbClr val="F5EFE4"/>
+                </a:solidFill>
+                <a:latin typeface="Cambria"/>
+                <a:ea typeface="Cambria"/>
+                <a:cs typeface="Cambria"/>
+              </a:rPr>
+              <a:t>La Bible seule est l'autorité suprême et infaillible pour la foi et la vie chrétienne</a:t>
+            </a:r>
+            <a:br>
+              <a:rPr lang="fr-CA" sz="1400" dirty="0">
+                <a:solidFill>
+                  <a:srgbClr val="F5EFE4"/>
+                </a:solidFill>
+                <a:latin typeface="Cambria"/>
+                <a:ea typeface="Cambria"/>
+                <a:cs typeface="Cambria"/>
+              </a:rPr>
+            </a:br>
+            <a:r>
+              <a:rPr lang="fr-CA" sz="1400" dirty="0">
+                <a:solidFill>
+                  <a:srgbClr val="F5EFE4"/>
+                </a:solidFill>
+                <a:latin typeface="Cambria"/>
+                <a:ea typeface="Cambria"/>
+                <a:cs typeface="Cambria"/>
+              </a:rPr>
+              <a:t>2 Timothée 3.16-17</a:t>
+            </a:r>
+          </a:p>
+        </p:txBody>
+      </p:sp>
+      <p:sp>
+        <p:nvSpPr>
+          <p:cNvPr id="205" name="card1"/>
+          <p:cNvSpPr/>
+          <p:nvPr/>
+        </p:nvSpPr>
+        <p:spPr>
+          <a:xfrm>
+            <a:off x="2781300" y="1600200"/>
+            <a:ext cx="2095500" cy="4521200"/>
+          </a:xfrm>
+          <a:prstGeom prst="roundRect">
+            <a:avLst>
+              <a:gd name="adj" fmla="val 5000"/>
+            </a:avLst>
+          </a:prstGeom>
+          <a:solidFill>
+            <a:srgbClr val="1E1A14"/>
+          </a:solidFill>
+          <a:ln w="12700">
+            <a:solidFill>
+              <a:srgbClr val="332C22"/>
+            </a:solidFill>
+          </a:ln>
+        </p:spPr>
+        <p:txBody>
+          <a:bodyPr/>
+          <a:lstStyle/>
+          <a:p>
+            <a:endParaRPr/>
+          </a:p>
+        </p:txBody>
+      </p:sp>
+      <p:sp>
+        <p:nvSpPr>
+          <p:cNvPr id="206" name="num1"/>
+          <p:cNvSpPr/>
+          <p:nvPr/>
+        </p:nvSpPr>
+        <p:spPr>
+          <a:xfrm>
+            <a:off x="3524250" y="1905000"/>
+            <a:ext cx="609600" cy="609600"/>
+          </a:xfrm>
+          <a:prstGeom prst="ellipse">
+            <a:avLst/>
+          </a:prstGeom>
+          <a:solidFill>
+            <a:srgbClr val="E8821E"/>
+          </a:solidFill>
+          <a:ln>
+            <a:noFill/>
+          </a:ln>
+        </p:spPr>
+        <p:txBody>
+          <a:bodyPr lIns="0" tIns="0" rIns="0" bIns="0" anchor="ctr"/>
+          <a:lstStyle/>
+          <a:p>
+            <a:pPr algn="ctr">
+              <a:buNone/>
+            </a:pPr>
+            <a:r>
+              <a:rPr lang="fr-CA" sz="2200" b="1" dirty="0">
+                <a:solidFill>
+                  <a:srgbClr val="FFFFFF"/>
+                </a:solidFill>
+                <a:latin typeface="Cambria"/>
+              </a:rPr>
+              <a:t>2</a:t>
+            </a:r>
+          </a:p>
+        </p:txBody>
+      </p:sp>
+      <p:sp>
+        <p:nvSpPr>
+          <p:cNvPr id="207" name="lat1"/>
+          <p:cNvSpPr txBox="1"/>
+          <p:nvPr/>
+        </p:nvSpPr>
+        <p:spPr>
+          <a:xfrm>
+            <a:off x="2882900" y="2692400"/>
+            <a:ext cx="1892300" cy="457200"/>
+          </a:xfrm>
+          <a:prstGeom prst="rect">
+            <a:avLst/>
+          </a:prstGeom>
+          <a:noFill/>
+        </p:spPr>
+        <p:txBody>
+          <a:bodyPr wrap="square" lIns="0" tIns="0" rIns="0" bIns="0" anchor="t"/>
+          <a:lstStyle/>
+          <a:p>
+            <a:pPr algn="ctr">
+              <a:buNone/>
+            </a:pPr>
+            <a:r>
+              <a:rPr lang="fr-CA" sz="1600" b="1" dirty="0">
+                <a:solidFill>
+                  <a:srgbClr val="F2A24E"/>
+                </a:solidFill>
+                <a:latin typeface="Cambria"/>
+                <a:ea typeface="Cambria"/>
+                <a:cs typeface="Cambria"/>
+              </a:rPr>
+              <a:t>Sola Gratia</a:t>
+            </a:r>
+          </a:p>
+        </p:txBody>
+      </p:sp>
+      <p:sp>
+        <p:nvSpPr>
+          <p:cNvPr id="208" name="fr1"/>
+          <p:cNvSpPr txBox="1"/>
+          <p:nvPr/>
+        </p:nvSpPr>
+        <p:spPr>
+          <a:xfrm>
+            <a:off x="2882900" y="3175000"/>
+            <a:ext cx="1892300" cy="304800"/>
+          </a:xfrm>
+          <a:prstGeom prst="rect">
+            <a:avLst/>
+          </a:prstGeom>
+          <a:noFill/>
+        </p:spPr>
+        <p:txBody>
+          <a:bodyPr wrap="square" lIns="0" tIns="0" rIns="0" bIns="0" anchor="t"/>
+          <a:lstStyle/>
+          <a:p>
+            <a:pPr algn="ctr">
+              <a:buNone/>
+            </a:pPr>
+            <a:r>
+              <a:rPr lang="fr-CA" sz="1400" i="1" dirty="0">
+                <a:solidFill>
+                  <a:srgbClr val="F5EFE4"/>
+                </a:solidFill>
+                <a:latin typeface="Cambria"/>
+                <a:ea typeface="Cambria"/>
+                <a:cs typeface="Cambria"/>
+              </a:rPr>
+              <a:t>La grâce seule</a:t>
+            </a:r>
+          </a:p>
+        </p:txBody>
+      </p:sp>
+      <p:sp>
+        <p:nvSpPr>
+          <p:cNvPr id="209" name="desc1"/>
+          <p:cNvSpPr txBox="1"/>
+          <p:nvPr/>
+        </p:nvSpPr>
+        <p:spPr>
+          <a:xfrm>
+            <a:off x="2882900" y="3606800"/>
+            <a:ext cx="1892300" cy="2413000"/>
+          </a:xfrm>
+          <a:prstGeom prst="rect">
+            <a:avLst/>
+          </a:prstGeom>
+          <a:noFill/>
+        </p:spPr>
+        <p:txBody>
+          <a:bodyPr wrap="square" lIns="0" tIns="0" rIns="0" bIns="0" anchor="t"/>
+          <a:lstStyle/>
+          <a:p>
+            <a:pPr algn="ctr">
+              <a:lnSpc>
+                <a:spcPts val="1700"/>
+              </a:lnSpc>
+              <a:buNone/>
+            </a:pPr>
+            <a:r>
+              <a:rPr lang="fr-CA" sz="1400" dirty="0">
+                <a:solidFill>
+                  <a:srgbClr val="F5EFE4"/>
+                </a:solidFill>
+                <a:latin typeface="Cambria"/>
+                <a:ea typeface="Cambria"/>
+                <a:cs typeface="Cambria"/>
+              </a:rPr>
+              <a:t>Le salut est un don gratuit de Dieu, sans aucun mérite de l’homme</a:t>
+            </a:r>
+            <a:br>
+              <a:rPr lang="fr-CA" sz="1400" dirty="0">
+                <a:solidFill>
+                  <a:srgbClr val="F5EFE4"/>
+                </a:solidFill>
+                <a:latin typeface="Cambria"/>
+                <a:ea typeface="Cambria"/>
+                <a:cs typeface="Cambria"/>
+              </a:rPr>
+            </a:br>
+            <a:r>
+              <a:rPr lang="fr-CA" sz="1400" dirty="0">
+                <a:solidFill>
+                  <a:srgbClr val="F5EFE4"/>
+                </a:solidFill>
+                <a:latin typeface="Cambria"/>
+                <a:ea typeface="Cambria"/>
+                <a:cs typeface="Cambria"/>
+              </a:rPr>
+              <a:t>Éphésiens 2.8-9</a:t>
+            </a:r>
+          </a:p>
+        </p:txBody>
+      </p:sp>
+      <p:sp>
+        <p:nvSpPr>
+          <p:cNvPr id="210" name="card2"/>
+          <p:cNvSpPr/>
+          <p:nvPr/>
+        </p:nvSpPr>
+        <p:spPr>
+          <a:xfrm>
+            <a:off x="5016500" y="1600200"/>
+            <a:ext cx="2095500" cy="4521200"/>
+          </a:xfrm>
+          <a:prstGeom prst="roundRect">
+            <a:avLst>
+              <a:gd name="adj" fmla="val 5000"/>
+            </a:avLst>
+          </a:prstGeom>
+          <a:solidFill>
+            <a:srgbClr val="1E1A14"/>
+          </a:solidFill>
+          <a:ln w="12700">
+            <a:solidFill>
+              <a:srgbClr val="332C22"/>
+            </a:solidFill>
+          </a:ln>
+        </p:spPr>
+        <p:txBody>
+          <a:bodyPr/>
+          <a:lstStyle/>
+          <a:p>
+            <a:endParaRPr/>
+          </a:p>
+        </p:txBody>
+      </p:sp>
+      <p:sp>
+        <p:nvSpPr>
+          <p:cNvPr id="211" name="num2"/>
+          <p:cNvSpPr/>
+          <p:nvPr/>
+        </p:nvSpPr>
+        <p:spPr>
+          <a:xfrm>
+            <a:off x="5759450" y="1905000"/>
+            <a:ext cx="609600" cy="609600"/>
+          </a:xfrm>
+          <a:prstGeom prst="ellipse">
+            <a:avLst/>
+          </a:prstGeom>
+          <a:solidFill>
+            <a:srgbClr val="E8821E"/>
+          </a:solidFill>
+          <a:ln>
+            <a:noFill/>
+          </a:ln>
+        </p:spPr>
+        <p:txBody>
+          <a:bodyPr lIns="0" tIns="0" rIns="0" bIns="0" anchor="ctr"/>
+          <a:lstStyle/>
+          <a:p>
+            <a:pPr algn="ctr">
+              <a:buNone/>
+            </a:pPr>
+            <a:r>
+              <a:rPr lang="fr-CA" sz="2200" b="1" dirty="0">
+                <a:solidFill>
+                  <a:srgbClr val="FFFFFF"/>
+                </a:solidFill>
+                <a:latin typeface="Cambria"/>
+              </a:rPr>
+              <a:t>3</a:t>
+            </a:r>
+          </a:p>
+        </p:txBody>
+      </p:sp>
+      <p:sp>
+        <p:nvSpPr>
+          <p:cNvPr id="212" name="lat2"/>
+          <p:cNvSpPr txBox="1"/>
+          <p:nvPr/>
+        </p:nvSpPr>
+        <p:spPr>
+          <a:xfrm>
+            <a:off x="5118100" y="2692400"/>
+            <a:ext cx="1892300" cy="457200"/>
+          </a:xfrm>
+          <a:prstGeom prst="rect">
+            <a:avLst/>
+          </a:prstGeom>
+          <a:noFill/>
+        </p:spPr>
+        <p:txBody>
+          <a:bodyPr wrap="square" lIns="0" tIns="0" rIns="0" bIns="0" anchor="t"/>
+          <a:lstStyle/>
+          <a:p>
+            <a:pPr algn="ctr">
+              <a:buNone/>
+            </a:pPr>
+            <a:r>
+              <a:rPr lang="fr-CA" sz="1600" b="1" dirty="0">
+                <a:solidFill>
+                  <a:srgbClr val="F2A24E"/>
+                </a:solidFill>
+                <a:latin typeface="Cambria"/>
+                <a:ea typeface="Cambria"/>
+                <a:cs typeface="Cambria"/>
+              </a:rPr>
+              <a:t>Sola Fide</a:t>
+            </a:r>
+          </a:p>
+        </p:txBody>
+      </p:sp>
+      <p:sp>
+        <p:nvSpPr>
+          <p:cNvPr id="213" name="fr2"/>
+          <p:cNvSpPr txBox="1"/>
+          <p:nvPr/>
+        </p:nvSpPr>
+        <p:spPr>
+          <a:xfrm>
+            <a:off x="5118100" y="3175000"/>
+            <a:ext cx="1892300" cy="304800"/>
+          </a:xfrm>
+          <a:prstGeom prst="rect">
+            <a:avLst/>
+          </a:prstGeom>
+          <a:noFill/>
+        </p:spPr>
+        <p:txBody>
+          <a:bodyPr wrap="square" lIns="0" tIns="0" rIns="0" bIns="0" anchor="t"/>
+          <a:lstStyle/>
+          <a:p>
+            <a:pPr algn="ctr">
+              <a:buNone/>
+            </a:pPr>
+            <a:r>
+              <a:rPr lang="fr-CA" sz="1400" i="1" dirty="0">
+                <a:solidFill>
+                  <a:srgbClr val="F5EFE4"/>
+                </a:solidFill>
+                <a:latin typeface="Cambria"/>
+                <a:ea typeface="Cambria"/>
+                <a:cs typeface="Cambria"/>
+              </a:rPr>
+              <a:t>La foi seule</a:t>
+            </a:r>
+          </a:p>
+        </p:txBody>
+      </p:sp>
+      <p:sp>
+        <p:nvSpPr>
+          <p:cNvPr id="214" name="desc2"/>
+          <p:cNvSpPr txBox="1"/>
+          <p:nvPr/>
+        </p:nvSpPr>
+        <p:spPr>
+          <a:xfrm>
+            <a:off x="5118100" y="3606800"/>
+            <a:ext cx="1892300" cy="2413000"/>
+          </a:xfrm>
+          <a:prstGeom prst="rect">
+            <a:avLst/>
+          </a:prstGeom>
+          <a:noFill/>
+        </p:spPr>
+        <p:txBody>
+          <a:bodyPr wrap="square" lIns="0" tIns="0" rIns="0" bIns="0" anchor="t"/>
+          <a:lstStyle/>
+          <a:p>
+            <a:pPr algn="ctr">
+              <a:lnSpc>
+                <a:spcPts val="1700"/>
+              </a:lnSpc>
+              <a:buNone/>
+            </a:pPr>
+            <a:r>
+              <a:rPr lang="fr-CA" sz="1400" dirty="0">
+                <a:solidFill>
+                  <a:srgbClr val="F5EFE4"/>
+                </a:solidFill>
+                <a:latin typeface="Cambria"/>
+                <a:ea typeface="Cambria"/>
+                <a:cs typeface="Cambria"/>
+              </a:rPr>
+              <a:t>Nous sommes justifiés par la seule foi en Christ, et non par les œuvres.</a:t>
+            </a:r>
+          </a:p>
+          <a:p>
+            <a:pPr algn="ctr">
+              <a:lnSpc>
+                <a:spcPts val="1700"/>
+              </a:lnSpc>
+              <a:buNone/>
+            </a:pPr>
+            <a:r>
+              <a:rPr lang="fr-CA" sz="1400" dirty="0">
+                <a:solidFill>
+                  <a:srgbClr val="F5EFE4"/>
+                </a:solidFill>
+                <a:latin typeface="Cambria"/>
+                <a:ea typeface="Cambria"/>
+                <a:cs typeface="Cambria"/>
+              </a:rPr>
+              <a:t>Romains 3.28</a:t>
+            </a:r>
+          </a:p>
+        </p:txBody>
+      </p:sp>
+      <p:sp>
+        <p:nvSpPr>
+          <p:cNvPr id="215" name="card3"/>
+          <p:cNvSpPr/>
+          <p:nvPr/>
+        </p:nvSpPr>
+        <p:spPr>
+          <a:xfrm>
+            <a:off x="7251700" y="1600200"/>
+            <a:ext cx="2095500" cy="4521200"/>
+          </a:xfrm>
+          <a:prstGeom prst="roundRect">
+            <a:avLst>
+              <a:gd name="adj" fmla="val 5000"/>
+            </a:avLst>
+          </a:prstGeom>
+          <a:solidFill>
+            <a:srgbClr val="1E1A14"/>
+          </a:solidFill>
+          <a:ln w="12700">
+            <a:solidFill>
+              <a:srgbClr val="332C22"/>
+            </a:solidFill>
+          </a:ln>
+        </p:spPr>
+        <p:txBody>
+          <a:bodyPr/>
+          <a:lstStyle/>
+          <a:p>
+            <a:endParaRPr/>
+          </a:p>
+        </p:txBody>
+      </p:sp>
+      <p:sp>
+        <p:nvSpPr>
+          <p:cNvPr id="216" name="num3"/>
+          <p:cNvSpPr/>
+          <p:nvPr/>
+        </p:nvSpPr>
+        <p:spPr>
+          <a:xfrm>
+            <a:off x="7994650" y="1905000"/>
+            <a:ext cx="609600" cy="609600"/>
+          </a:xfrm>
+          <a:prstGeom prst="ellipse">
+            <a:avLst/>
+          </a:prstGeom>
+          <a:solidFill>
+            <a:srgbClr val="E8821E"/>
+          </a:solidFill>
+          <a:ln>
+            <a:noFill/>
+          </a:ln>
+        </p:spPr>
+        <p:txBody>
+          <a:bodyPr lIns="0" tIns="0" rIns="0" bIns="0" anchor="ctr"/>
+          <a:lstStyle/>
+          <a:p>
+            <a:pPr algn="ctr">
+              <a:buNone/>
+            </a:pPr>
+            <a:r>
+              <a:rPr lang="fr-CA" sz="2200" b="1" dirty="0">
+                <a:solidFill>
+                  <a:srgbClr val="FFFFFF"/>
+                </a:solidFill>
+                <a:latin typeface="Cambria"/>
+              </a:rPr>
+              <a:t>4</a:t>
+            </a:r>
+          </a:p>
+        </p:txBody>
+      </p:sp>
+      <p:sp>
+        <p:nvSpPr>
+          <p:cNvPr id="217" name="lat3"/>
+          <p:cNvSpPr txBox="1"/>
+          <p:nvPr/>
+        </p:nvSpPr>
+        <p:spPr>
+          <a:xfrm>
+            <a:off x="7353300" y="2692400"/>
+            <a:ext cx="1892300" cy="457200"/>
+          </a:xfrm>
+          <a:prstGeom prst="rect">
+            <a:avLst/>
+          </a:prstGeom>
+          <a:noFill/>
+        </p:spPr>
+        <p:txBody>
+          <a:bodyPr wrap="square" lIns="0" tIns="0" rIns="0" bIns="0" anchor="t"/>
+          <a:lstStyle/>
+          <a:p>
+            <a:pPr algn="ctr">
+              <a:buNone/>
+            </a:pPr>
+            <a:r>
+              <a:rPr lang="fr-CA" sz="1600" b="1" dirty="0">
+                <a:solidFill>
+                  <a:srgbClr val="F2A24E"/>
+                </a:solidFill>
+                <a:latin typeface="Cambria"/>
+                <a:ea typeface="Cambria"/>
+                <a:cs typeface="Cambria"/>
+              </a:rPr>
+              <a:t>Solus Christus</a:t>
+            </a:r>
+          </a:p>
+        </p:txBody>
+      </p:sp>
+      <p:sp>
+        <p:nvSpPr>
+          <p:cNvPr id="218" name="fr3"/>
+          <p:cNvSpPr txBox="1"/>
+          <p:nvPr/>
+        </p:nvSpPr>
+        <p:spPr>
+          <a:xfrm>
+            <a:off x="7353300" y="3175000"/>
+            <a:ext cx="1892300" cy="304800"/>
+          </a:xfrm>
+          <a:prstGeom prst="rect">
+            <a:avLst/>
+          </a:prstGeom>
+          <a:noFill/>
+        </p:spPr>
+        <p:txBody>
+          <a:bodyPr wrap="square" lIns="0" tIns="0" rIns="0" bIns="0" anchor="t"/>
+          <a:lstStyle/>
+          <a:p>
+            <a:pPr algn="ctr">
+              <a:buNone/>
+            </a:pPr>
+            <a:r>
+              <a:rPr lang="fr-CA" sz="1400" i="1" dirty="0">
+                <a:solidFill>
+                  <a:srgbClr val="F5EFE4"/>
+                </a:solidFill>
+                <a:latin typeface="Cambria"/>
+                <a:ea typeface="Cambria"/>
+                <a:cs typeface="Cambria"/>
+              </a:rPr>
+              <a:t>Christ seul</a:t>
+            </a:r>
+          </a:p>
+        </p:txBody>
+      </p:sp>
+      <p:sp>
+        <p:nvSpPr>
+          <p:cNvPr id="219" name="desc3"/>
+          <p:cNvSpPr txBox="1"/>
+          <p:nvPr/>
+        </p:nvSpPr>
+        <p:spPr>
+          <a:xfrm>
+            <a:off x="7353300" y="3606800"/>
+            <a:ext cx="1892300" cy="2413000"/>
+          </a:xfrm>
+          <a:prstGeom prst="rect">
+            <a:avLst/>
+          </a:prstGeom>
+          <a:noFill/>
+        </p:spPr>
+        <p:txBody>
+          <a:bodyPr wrap="square" lIns="0" tIns="0" rIns="0" bIns="0" anchor="t"/>
+          <a:lstStyle/>
+          <a:p>
+            <a:pPr algn="ctr">
+              <a:lnSpc>
+                <a:spcPts val="1700"/>
+              </a:lnSpc>
+              <a:buNone/>
+            </a:pPr>
+            <a:r>
+              <a:rPr lang="fr-CA" sz="1400" dirty="0">
+                <a:solidFill>
+                  <a:srgbClr val="F5EFE4"/>
+                </a:solidFill>
+                <a:latin typeface="Cambria"/>
+                <a:ea typeface="Cambria"/>
+                <a:cs typeface="Cambria"/>
+              </a:rPr>
+              <a:t>Jésus-Christ est l'unique médiateur entre Dieu et les hommes.</a:t>
+            </a:r>
+          </a:p>
+          <a:p>
+            <a:pPr algn="ctr">
+              <a:lnSpc>
+                <a:spcPts val="1700"/>
+              </a:lnSpc>
+              <a:buNone/>
+            </a:pPr>
+            <a:r>
+              <a:rPr lang="fr-CA" sz="1400" dirty="0">
+                <a:solidFill>
+                  <a:srgbClr val="F5EFE4"/>
+                </a:solidFill>
+                <a:latin typeface="Cambria"/>
+                <a:ea typeface="Cambria"/>
+                <a:cs typeface="Cambria"/>
+              </a:rPr>
+              <a:t>Jean 14.6</a:t>
+            </a:r>
+          </a:p>
+        </p:txBody>
+      </p:sp>
+      <p:sp>
+        <p:nvSpPr>
+          <p:cNvPr id="220" name="card4"/>
+          <p:cNvSpPr/>
+          <p:nvPr/>
+        </p:nvSpPr>
+        <p:spPr>
+          <a:xfrm>
+            <a:off x="9486900" y="1600200"/>
+            <a:ext cx="2095500" cy="4521200"/>
+          </a:xfrm>
+          <a:prstGeom prst="roundRect">
+            <a:avLst>
+              <a:gd name="adj" fmla="val 5000"/>
+            </a:avLst>
+          </a:prstGeom>
+          <a:solidFill>
+            <a:srgbClr val="1E1A14"/>
+          </a:solidFill>
+          <a:ln w="12700">
+            <a:solidFill>
+              <a:srgbClr val="332C22"/>
+            </a:solidFill>
+          </a:ln>
+        </p:spPr>
+        <p:txBody>
+          <a:bodyPr/>
+          <a:lstStyle/>
+          <a:p>
+            <a:endParaRPr/>
+          </a:p>
+        </p:txBody>
+      </p:sp>
+      <p:sp>
+        <p:nvSpPr>
+          <p:cNvPr id="221" name="num4"/>
+          <p:cNvSpPr/>
+          <p:nvPr/>
+        </p:nvSpPr>
+        <p:spPr>
+          <a:xfrm>
+            <a:off x="10229850" y="1905000"/>
+            <a:ext cx="609600" cy="609600"/>
+          </a:xfrm>
+          <a:prstGeom prst="ellipse">
+            <a:avLst/>
+          </a:prstGeom>
+          <a:solidFill>
+            <a:srgbClr val="E8821E"/>
+          </a:solidFill>
+          <a:ln>
+            <a:noFill/>
+          </a:ln>
+        </p:spPr>
+        <p:txBody>
+          <a:bodyPr lIns="0" tIns="0" rIns="0" bIns="0" anchor="ctr"/>
+          <a:lstStyle/>
+          <a:p>
+            <a:pPr algn="ctr">
+              <a:buNone/>
+            </a:pPr>
+            <a:r>
+              <a:rPr lang="fr-CA" sz="2200" b="1" dirty="0">
+                <a:solidFill>
+                  <a:srgbClr val="FFFFFF"/>
+                </a:solidFill>
+                <a:latin typeface="Cambria"/>
+              </a:rPr>
+              <a:t>5</a:t>
+            </a:r>
+          </a:p>
+        </p:txBody>
+      </p:sp>
+      <p:sp>
+        <p:nvSpPr>
+          <p:cNvPr id="222" name="lat4"/>
+          <p:cNvSpPr txBox="1"/>
+          <p:nvPr/>
+        </p:nvSpPr>
+        <p:spPr>
+          <a:xfrm>
+            <a:off x="9588500" y="2692400"/>
+            <a:ext cx="1892300" cy="457200"/>
+          </a:xfrm>
+          <a:prstGeom prst="rect">
+            <a:avLst/>
+          </a:prstGeom>
+          <a:noFill/>
+        </p:spPr>
+        <p:txBody>
+          <a:bodyPr wrap="square" lIns="0" tIns="0" rIns="0" bIns="0" anchor="t"/>
+          <a:lstStyle/>
+          <a:p>
+            <a:pPr algn="ctr">
+              <a:buNone/>
+            </a:pPr>
+            <a:r>
+              <a:rPr lang="fr-CA" sz="1600" b="1" dirty="0">
+                <a:solidFill>
+                  <a:srgbClr val="F2A24E"/>
+                </a:solidFill>
+                <a:latin typeface="Cambria"/>
+                <a:ea typeface="Cambria"/>
+                <a:cs typeface="Cambria"/>
+              </a:rPr>
+              <a:t>Soli Deo Gloria</a:t>
+            </a:r>
+          </a:p>
+        </p:txBody>
+      </p:sp>
+      <p:sp>
+        <p:nvSpPr>
+          <p:cNvPr id="223" name="fr4"/>
+          <p:cNvSpPr txBox="1"/>
+          <p:nvPr/>
+        </p:nvSpPr>
+        <p:spPr>
+          <a:xfrm>
+            <a:off x="9588500" y="3175000"/>
+            <a:ext cx="1892300" cy="304800"/>
+          </a:xfrm>
+          <a:prstGeom prst="rect">
+            <a:avLst/>
+          </a:prstGeom>
+          <a:noFill/>
+        </p:spPr>
+        <p:txBody>
+          <a:bodyPr wrap="square" lIns="0" tIns="0" rIns="0" bIns="0" anchor="t"/>
+          <a:lstStyle/>
+          <a:p>
+            <a:pPr algn="ctr">
+              <a:buNone/>
+            </a:pPr>
+            <a:r>
+              <a:rPr lang="fr-CA" sz="1400" i="1" dirty="0">
+                <a:solidFill>
+                  <a:srgbClr val="F5EFE4"/>
+                </a:solidFill>
+                <a:latin typeface="Cambria"/>
+                <a:ea typeface="Cambria"/>
+                <a:cs typeface="Cambria"/>
+              </a:rPr>
+              <a:t>À Dieu seul la gloire</a:t>
+            </a:r>
+          </a:p>
+        </p:txBody>
+      </p:sp>
+      <p:sp>
+        <p:nvSpPr>
+          <p:cNvPr id="224" name="desc4"/>
+          <p:cNvSpPr txBox="1"/>
+          <p:nvPr/>
+        </p:nvSpPr>
+        <p:spPr>
+          <a:xfrm>
+            <a:off x="9588500" y="3606800"/>
+            <a:ext cx="1892300" cy="2413000"/>
+          </a:xfrm>
+          <a:prstGeom prst="rect">
+            <a:avLst/>
+          </a:prstGeom>
+          <a:noFill/>
+        </p:spPr>
+        <p:txBody>
+          <a:bodyPr wrap="square" lIns="0" tIns="0" rIns="0" bIns="0" anchor="t"/>
+          <a:lstStyle/>
+          <a:p>
+            <a:pPr algn="ctr">
+              <a:lnSpc>
+                <a:spcPts val="1700"/>
+              </a:lnSpc>
+              <a:buNone/>
+            </a:pPr>
+            <a:r>
+              <a:rPr lang="fr-CA" sz="1400" dirty="0">
+                <a:solidFill>
+                  <a:srgbClr val="F5EFE4"/>
+                </a:solidFill>
+                <a:latin typeface="Cambria"/>
+                <a:ea typeface="Cambria"/>
+                <a:cs typeface="Cambria"/>
+              </a:rPr>
+              <a:t>Toute l'œuvre du salut vise la gloire de Dieu, seul digne d'adoration.</a:t>
+            </a:r>
+          </a:p>
+          <a:p>
+            <a:pPr algn="ctr">
+              <a:lnSpc>
+                <a:spcPts val="1700"/>
+              </a:lnSpc>
+              <a:buNone/>
+            </a:pPr>
+            <a:r>
+              <a:rPr lang="fr-CA" sz="1400" dirty="0">
+                <a:solidFill>
+                  <a:srgbClr val="F5EFE4"/>
+                </a:solidFill>
+                <a:latin typeface="Cambria"/>
+                <a:ea typeface="Cambria"/>
+                <a:cs typeface="Cambria"/>
+              </a:rPr>
+              <a:t>Romains 11.36</a:t>
+            </a:r>
+          </a:p>
+        </p:txBody>
+      </p:sp>
+      <p:sp>
+        <p:nvSpPr>
+          <p:cNvPr id="400" name="accentBar"/>
+          <p:cNvSpPr/>
+          <p:nvPr/>
+        </p:nvSpPr>
+        <p:spPr>
+          <a:xfrm>
+            <a:off x="457200" y="203200"/>
+            <a:ext cx="50800" cy="787400"/>
+          </a:xfrm>
+          <a:prstGeom prst="rect">
+            <a:avLst/>
+          </a:prstGeom>
+          <a:solidFill>
+            <a:srgbClr val="F2A24E"/>
+          </a:solidFill>
+          <a:ln>
+            <a:noFill/>
+          </a:ln>
+        </p:spPr>
+        <p:txBody>
+          <a:bodyPr/>
+          <a:lstStyle/>
+          <a:p>
+            <a:endParaRPr/>
+          </a:p>
+        </p:txBody>
+      </p:sp>
+      <p:sp>
+        <p:nvSpPr>
+          <p:cNvPr id="401" name="eyebrow"/>
+          <p:cNvSpPr txBox="1"/>
+          <p:nvPr/>
+        </p:nvSpPr>
+        <p:spPr>
+          <a:xfrm>
+            <a:off x="546100" y="165100"/>
+            <a:ext cx="8890000" cy="228600"/>
+          </a:xfrm>
+          <a:prstGeom prst="rect">
+            <a:avLst/>
+          </a:prstGeom>
+          <a:noFill/>
+        </p:spPr>
+        <p:txBody>
+          <a:bodyPr wrap="none" lIns="0" tIns="0" rIns="0" bIns="0" anchor="t"/>
+          <a:lstStyle/>
+          <a:p>
+            <a:pPr algn="l">
+              <a:buNone/>
+            </a:pPr>
+            <a:r>
+              <a:rPr lang="fr-CA" sz="1400" b="1" spc="320" dirty="0">
+                <a:solidFill>
+                  <a:srgbClr val="F2A24E"/>
+                </a:solidFill>
+                <a:latin typeface="Cambria" pitchFamily="34" charset="0"/>
+              </a:rPr>
+              <a:t>04 · LES 5 SOLAS</a:t>
+            </a:r>
+          </a:p>
+        </p:txBody>
+      </p:sp>
+    </p:spTree>
+    <p:extLst>
+      <p:ext uri="{BB962C8B-B14F-4D97-AF65-F5344CB8AC3E}">
+        <p14:creationId xmlns:p14="http://schemas.microsoft.com/office/powerpoint/2010/main" val="4009307610"/>
+      </p:ext>
+    </p:extLst>
+  </p:cSld>
+  <p:clrMapOvr>
+    <a:masterClrMapping/>
+  </p:clrMapOvr>
+</p:sld>
+</file>
+
+<file path=ppt/slides/slide5.xml><?xml version="1.0" encoding="utf-8"?>
+<p:sld xmlns:a="http://schemas.openxmlformats.org/drawingml/2006/main" xmlns:r="http://schemas.openxmlformats.org/officeDocument/2006/relationships" xmlns:p="http://schemas.openxmlformats.org/presentationml/2006/main">
+  <p:cSld name="Slide 3">
+    <p:bg>
+      <p:bgPr>
+        <a:solidFill>
+          <a:srgbClr val="121212"/>
+        </a:solidFill>
+        <a:effectLst/>
+      </p:bgPr>
+    </p:bg>
+    <p:spTree>
+      <p:nvGrpSpPr>
+        <p:cNvPr id="1" name=""/>
+        <p:cNvGrpSpPr/>
+        <p:nvPr/>
+      </p:nvGrpSpPr>
+      <p:grpSpPr>
+        <a:xfrm>
+          <a:off x="0" y="0"/>
+          <a:ext cx="0" cy="0"/>
+          <a:chOff x="0" y="0"/>
+          <a:chExt cx="0" cy="0"/>
+        </a:xfrm>
+      </p:grpSpPr>
+      <p:sp>
+        <p:nvSpPr>
+          <p:cNvPr id="2" name="Text 0"/>
+          <p:cNvSpPr/>
+          <p:nvPr/>
+        </p:nvSpPr>
+        <p:spPr>
+          <a:xfrm>
+            <a:off x="548640" y="411480"/>
+            <a:ext cx="11064240" cy="640080"/>
+          </a:xfrm>
+          <a:prstGeom prst="rect">
+            <a:avLst/>
+          </a:prstGeom>
+          <a:noFill/>
+          <a:ln/>
+        </p:spPr>
+        <p:txBody>
+          <a:bodyPr wrap="square" lIns="0" tIns="0" rIns="0" bIns="0" rtlCol="0" anchor="ctr"/>
+          <a:lstStyle/>
+          <a:p>
+            <a:pPr marL="0" indent="0" algn="l">
+              <a:buNone/>
+            </a:pPr>
+            <a:r>
+              <a:rPr lang="fr-CA" sz="3200" b="1" dirty="0">
+                <a:solidFill>
+                  <a:srgbClr val="F5EFE4"/>
+                </a:solidFill>
+                <a:latin typeface="Cambria" pitchFamily="34" charset="0"/>
+                <a:ea typeface="Cambria"/>
+                <a:cs typeface="Cambria"/>
+              </a:rPr>
+              <a:t>TULIP : les doctrines de la </a:t>
+            </a:r>
+            <a:r>
+              <a:rPr lang="fr-CA" sz="3200" b="1" i="1" dirty="0">
+                <a:solidFill>
+                  <a:srgbClr val="F5EFE4"/>
+                </a:solidFill>
+                <a:latin typeface="Cambria" pitchFamily="34" charset="0"/>
+                <a:ea typeface="Cambria"/>
+                <a:cs typeface="Cambria"/>
+              </a:rPr>
+              <a:t>grâce</a:t>
+            </a:r>
+            <a:r>
+              <a:rPr lang="fr-CA" sz="3200" b="1" dirty="0">
+                <a:solidFill>
+                  <a:srgbClr val="F5EFE4"/>
+                </a:solidFill>
+                <a:latin typeface="Cambria" pitchFamily="34" charset="0"/>
+                <a:ea typeface="Cambria"/>
+                <a:cs typeface="Cambria"/>
+              </a:rPr>
+              <a:t> chères aux puritains</a:t>
+            </a:r>
+          </a:p>
+        </p:txBody>
+      </p:sp>
+      <p:sp>
+        <p:nvSpPr>
+          <p:cNvPr id="3" name="Text 1"/>
+          <p:cNvSpPr/>
+          <p:nvPr/>
+        </p:nvSpPr>
+        <p:spPr>
+          <a:xfrm>
+            <a:off x="566928" y="1060704"/>
+            <a:ext cx="10972800" cy="320040"/>
+          </a:xfrm>
+          <a:prstGeom prst="rect">
+            <a:avLst/>
+          </a:prstGeom>
+          <a:noFill/>
+          <a:ln/>
+        </p:spPr>
+        <p:txBody>
+          <a:bodyPr wrap="square" lIns="0" tIns="0" rIns="0" bIns="0" rtlCol="0" anchor="ctr"/>
+          <a:lstStyle/>
+          <a:p>
+            <a:pPr marL="0" indent="0" algn="l">
+              <a:buNone/>
+            </a:pPr>
+            <a:r>
+              <a:rPr lang="fr-CA" sz="1400" dirty="0">
+                <a:solidFill>
+                  <a:srgbClr val="C9B79A"/>
+                </a:solidFill>
+                <a:latin typeface="Cambria" pitchFamily="34" charset="0"/>
+              </a:rPr>
+              <a:t>dépravation · élection · rédemption · grâce · persévérance</a:t>
+            </a:r>
+          </a:p>
+        </p:txBody>
+      </p:sp>
+      <p:sp>
+        <p:nvSpPr>
+          <p:cNvPr id="22" name="Text 17"/>
+          <p:cNvSpPr/>
+          <p:nvPr/>
+        </p:nvSpPr>
+        <p:spPr>
+          <a:xfrm>
+            <a:off x="548640" y="6437376"/>
+            <a:ext cx="10515600" cy="274320"/>
+          </a:xfrm>
+          <a:prstGeom prst="rect">
+            <a:avLst/>
+          </a:prstGeom>
+          <a:noFill/>
+          <a:ln/>
+        </p:spPr>
+        <p:txBody>
+          <a:bodyPr wrap="square" lIns="0" tIns="0" rIns="0" bIns="0" rtlCol="0" anchor="ctr"/>
+          <a:lstStyle/>
+          <a:p>
+            <a:pPr marL="0" indent="0" algn="l">
+              <a:buNone/>
+            </a:pPr>
+            <a:r>
+              <a:rPr lang="en-US" sz="900" dirty="0">
+                <a:solidFill>
+                  <a:srgbClr val="A89F90"/>
+                </a:solidFill>
+                <a:latin typeface="Cambria" pitchFamily="34" charset="0"/>
+                <a:ea typeface="Cambria" pitchFamily="34" charset="-122"/>
+                <a:cs typeface="Cambria" pitchFamily="34" charset="-120"/>
+              </a:rPr>
+              <a:t>Église Baptiste de Charlesbourg</a:t>
+            </a:r>
+            <a:r>
+              <a:rPr lang="en-US" sz="900" dirty="0">
+                <a:solidFill>
+                  <a:srgbClr val="6E665A"/>
+                </a:solidFill>
+                <a:latin typeface="Cambria" pitchFamily="34" charset="0"/>
+                <a:ea typeface="Cambria" pitchFamily="34" charset="-122"/>
+                <a:cs typeface="Cambria" pitchFamily="34" charset="-120"/>
+              </a:rPr>
+              <a:t>   ·   Pasteur Simon Ouellette   ·   EBC   ·   NEG 1979</a:t>
+            </a:r>
+            <a:endParaRPr lang="en-US" sz="900" dirty="0"/>
+          </a:p>
+        </p:txBody>
+      </p:sp>
+      <p:sp>
+        <p:nvSpPr>
+          <p:cNvPr id="23" name="Text 18"/>
+          <p:cNvSpPr/>
+          <p:nvPr/>
+        </p:nvSpPr>
+        <p:spPr>
+          <a:xfrm>
+            <a:off x="11430000" y="6400800"/>
+            <a:ext cx="502920" cy="292608"/>
+          </a:xfrm>
+          <a:prstGeom prst="rect">
+            <a:avLst/>
+          </a:prstGeom>
+          <a:noFill/>
+          <a:ln/>
+        </p:spPr>
+        <p:txBody>
+          <a:bodyPr wrap="square" rtlCol="0" anchor="ctr"/>
+          <a:lstStyle/>
+          <a:p>
+            <a:pPr marL="0" indent="0" algn="r">
+              <a:buNone/>
+            </a:pPr>
+            <a:r>
+              <a:rPr lang="en-US" sz="1000" dirty="0">
+                <a:solidFill>
+                  <a:srgbClr val="A89F90"/>
+                </a:solidFill>
+                <a:latin typeface="Cambria" pitchFamily="34" charset="0"/>
+                <a:ea typeface="Cambria" pitchFamily="34" charset="-122"/>
+                <a:cs typeface="Cambria" pitchFamily="34" charset="-120"/>
+              </a:rPr>
+              <a:t>3</a:t>
+            </a:r>
+            <a:endParaRPr lang="en-US" sz="1000" dirty="0"/>
+          </a:p>
+        </p:txBody>
+      </p:sp>
+      <p:sp>
+        <p:nvSpPr>
+          <p:cNvPr id="200" name="card0"/>
+          <p:cNvSpPr/>
+          <p:nvPr/>
+        </p:nvSpPr>
+        <p:spPr>
+          <a:xfrm>
+            <a:off x="546100" y="1600200"/>
+            <a:ext cx="2095500" cy="4521200"/>
+          </a:xfrm>
+          <a:prstGeom prst="roundRect">
+            <a:avLst>
+              <a:gd name="adj" fmla="val 5000"/>
+            </a:avLst>
+          </a:prstGeom>
+          <a:solidFill>
+            <a:srgbClr val="1E1A14"/>
+          </a:solidFill>
+          <a:ln w="12700">
+            <a:solidFill>
+              <a:srgbClr val="332C22"/>
+            </a:solidFill>
+          </a:ln>
+        </p:spPr>
+        <p:txBody>
+          <a:bodyPr/>
+          <a:lstStyle/>
+          <a:p>
+            <a:endParaRPr/>
+          </a:p>
+        </p:txBody>
+      </p:sp>
+      <p:sp>
+        <p:nvSpPr>
+          <p:cNvPr id="201" name="num0"/>
+          <p:cNvSpPr/>
+          <p:nvPr/>
+        </p:nvSpPr>
+        <p:spPr>
+          <a:xfrm>
+            <a:off x="1289050" y="1905000"/>
+            <a:ext cx="609600" cy="609600"/>
+          </a:xfrm>
+          <a:prstGeom prst="ellipse">
+            <a:avLst/>
+          </a:prstGeom>
+          <a:solidFill>
+            <a:srgbClr val="E8821E"/>
+          </a:solidFill>
+          <a:ln>
+            <a:noFill/>
+          </a:ln>
+        </p:spPr>
+        <p:txBody>
+          <a:bodyPr lIns="0" tIns="0" rIns="0" bIns="0" anchor="ctr"/>
+          <a:lstStyle/>
+          <a:p>
+            <a:pPr algn="ctr">
+              <a:buNone/>
+            </a:pPr>
+            <a:r>
+              <a:rPr lang="fr-CA" sz="2000" b="1" dirty="0">
+                <a:solidFill>
+                  <a:srgbClr val="FFFFFF"/>
+                </a:solidFill>
+                <a:latin typeface="Cambria"/>
+              </a:rPr>
+              <a:t>T</a:t>
+            </a:r>
+          </a:p>
+        </p:txBody>
+      </p:sp>
+      <p:sp>
+        <p:nvSpPr>
+          <p:cNvPr id="202" name="lat0"/>
+          <p:cNvSpPr txBox="1"/>
+          <p:nvPr/>
+        </p:nvSpPr>
+        <p:spPr>
+          <a:xfrm>
+            <a:off x="647700" y="2692400"/>
+            <a:ext cx="1892300" cy="457200"/>
+          </a:xfrm>
+          <a:prstGeom prst="rect">
+            <a:avLst/>
+          </a:prstGeom>
+          <a:noFill/>
+        </p:spPr>
+        <p:txBody>
+          <a:bodyPr wrap="square" lIns="0" tIns="0" rIns="0" bIns="0" anchor="t"/>
+          <a:lstStyle/>
+          <a:p>
+            <a:pPr algn="ctr">
+              <a:buNone/>
+            </a:pPr>
+            <a:r>
+              <a:rPr lang="fr-CA" sz="1500" b="1" dirty="0">
+                <a:solidFill>
+                  <a:srgbClr val="F2A24E"/>
+                </a:solidFill>
+                <a:latin typeface="Cambria"/>
+                <a:ea typeface="Cambria"/>
+                <a:cs typeface="Cambria"/>
+              </a:rPr>
+              <a:t>Dépravation totale</a:t>
+            </a:r>
+          </a:p>
+        </p:txBody>
+      </p:sp>
+      <p:sp>
+        <p:nvSpPr>
+          <p:cNvPr id="203" name="fr0"/>
+          <p:cNvSpPr txBox="1"/>
+          <p:nvPr/>
+        </p:nvSpPr>
+        <p:spPr>
+          <a:xfrm>
+            <a:off x="647700" y="3175000"/>
+            <a:ext cx="1892300" cy="304800"/>
+          </a:xfrm>
+          <a:prstGeom prst="rect">
+            <a:avLst/>
+          </a:prstGeom>
+          <a:noFill/>
+        </p:spPr>
+        <p:txBody>
+          <a:bodyPr wrap="square" lIns="0" tIns="0" rIns="0" bIns="0" anchor="t"/>
+          <a:lstStyle/>
+          <a:p>
+            <a:pPr algn="ctr">
+              <a:buNone/>
+            </a:pPr>
+            <a:r>
+              <a:rPr lang="fr-CA" sz="1400" i="1" dirty="0">
+                <a:solidFill>
+                  <a:srgbClr val="F5EFE4"/>
+                </a:solidFill>
+                <a:latin typeface="Cambria"/>
+                <a:ea typeface="Cambria"/>
+                <a:cs typeface="Cambria"/>
+              </a:rPr>
+              <a:t>Incapacité totale</a:t>
+            </a:r>
+          </a:p>
+        </p:txBody>
+      </p:sp>
+      <p:sp>
+        <p:nvSpPr>
+          <p:cNvPr id="204" name="desc0"/>
+          <p:cNvSpPr txBox="1"/>
+          <p:nvPr/>
+        </p:nvSpPr>
+        <p:spPr>
+          <a:xfrm>
+            <a:off x="647700" y="3606800"/>
+            <a:ext cx="1892300" cy="2413000"/>
+          </a:xfrm>
+          <a:prstGeom prst="rect">
+            <a:avLst/>
+          </a:prstGeom>
+          <a:noFill/>
+        </p:spPr>
+        <p:txBody>
+          <a:bodyPr wrap="square" lIns="0" tIns="0" rIns="0" bIns="0" anchor="t"/>
+          <a:lstStyle/>
+          <a:p>
+            <a:pPr algn="ctr">
+              <a:lnSpc>
+                <a:spcPts val="1700"/>
+              </a:lnSpc>
+              <a:buNone/>
+            </a:pPr>
+            <a:r>
+              <a:rPr lang="fr-CA" sz="1400" dirty="0">
+                <a:solidFill>
+                  <a:srgbClr val="F5EFE4"/>
+                </a:solidFill>
+                <a:latin typeface="Cambria"/>
+                <a:ea typeface="Cambria"/>
+                <a:cs typeface="Cambria"/>
+              </a:rPr>
+              <a:t>L'homme est entièrement corrompu par le péché et incapable de se sauver lui-même.</a:t>
+            </a:r>
+          </a:p>
+          <a:p>
+            <a:pPr algn="ctr">
+              <a:lnSpc>
+                <a:spcPts val="1700"/>
+              </a:lnSpc>
+              <a:buNone/>
+            </a:pPr>
+            <a:endParaRPr lang="fr-CA" sz="1400" dirty="0">
+              <a:solidFill>
+                <a:srgbClr val="F5EFE4"/>
+              </a:solidFill>
+              <a:latin typeface="Cambria"/>
+              <a:ea typeface="Cambria"/>
+              <a:cs typeface="Cambria"/>
+            </a:endParaRPr>
+          </a:p>
+          <a:p>
+            <a:pPr algn="ctr">
+              <a:lnSpc>
+                <a:spcPts val="1700"/>
+              </a:lnSpc>
+              <a:buNone/>
+            </a:pPr>
+            <a:r>
+              <a:rPr lang="fr-CA" sz="1400" dirty="0">
+                <a:solidFill>
+                  <a:srgbClr val="F5EFE4"/>
+                </a:solidFill>
+                <a:latin typeface="Cambria"/>
+                <a:ea typeface="Cambria"/>
+                <a:cs typeface="Cambria"/>
+              </a:rPr>
+              <a:t>Romain 3.10-12</a:t>
+            </a:r>
+          </a:p>
+        </p:txBody>
+      </p:sp>
+      <p:sp>
+        <p:nvSpPr>
+          <p:cNvPr id="205" name="card1"/>
+          <p:cNvSpPr/>
+          <p:nvPr/>
+        </p:nvSpPr>
+        <p:spPr>
+          <a:xfrm>
+            <a:off x="2781300" y="1600200"/>
+            <a:ext cx="2095500" cy="4521200"/>
+          </a:xfrm>
+          <a:prstGeom prst="roundRect">
+            <a:avLst>
+              <a:gd name="adj" fmla="val 5000"/>
+            </a:avLst>
+          </a:prstGeom>
+          <a:solidFill>
+            <a:srgbClr val="1E1A14"/>
+          </a:solidFill>
+          <a:ln w="12700">
+            <a:solidFill>
+              <a:srgbClr val="332C22"/>
+            </a:solidFill>
+          </a:ln>
+        </p:spPr>
+        <p:txBody>
+          <a:bodyPr/>
+          <a:lstStyle/>
+          <a:p>
+            <a:endParaRPr/>
+          </a:p>
+        </p:txBody>
+      </p:sp>
+      <p:sp>
+        <p:nvSpPr>
+          <p:cNvPr id="206" name="num1"/>
+          <p:cNvSpPr/>
+          <p:nvPr/>
+        </p:nvSpPr>
+        <p:spPr>
+          <a:xfrm>
+            <a:off x="3524250" y="1905000"/>
+            <a:ext cx="609600" cy="609600"/>
+          </a:xfrm>
+          <a:prstGeom prst="ellipse">
+            <a:avLst/>
+          </a:prstGeom>
+          <a:solidFill>
+            <a:srgbClr val="E8821E"/>
+          </a:solidFill>
+          <a:ln>
+            <a:noFill/>
+          </a:ln>
+        </p:spPr>
+        <p:txBody>
+          <a:bodyPr lIns="0" tIns="0" rIns="0" bIns="0" anchor="ctr"/>
+          <a:lstStyle/>
+          <a:p>
+            <a:pPr algn="ctr">
+              <a:buNone/>
+            </a:pPr>
+            <a:r>
+              <a:rPr lang="fr-CA" sz="2000" b="1" dirty="0">
+                <a:solidFill>
+                  <a:srgbClr val="FFFFFF"/>
+                </a:solidFill>
+                <a:latin typeface="Cambria"/>
+              </a:rPr>
+              <a:t>U</a:t>
+            </a:r>
+          </a:p>
+        </p:txBody>
+      </p:sp>
+      <p:sp>
+        <p:nvSpPr>
+          <p:cNvPr id="207" name="lat1"/>
+          <p:cNvSpPr txBox="1"/>
+          <p:nvPr/>
+        </p:nvSpPr>
+        <p:spPr>
+          <a:xfrm>
+            <a:off x="2882900" y="2692400"/>
+            <a:ext cx="1892300" cy="457200"/>
+          </a:xfrm>
+          <a:prstGeom prst="rect">
+            <a:avLst/>
+          </a:prstGeom>
+          <a:noFill/>
+        </p:spPr>
+        <p:txBody>
+          <a:bodyPr wrap="square" lIns="0" tIns="0" rIns="0" bIns="0" anchor="t"/>
+          <a:lstStyle/>
+          <a:p>
+            <a:pPr algn="ctr">
+              <a:buNone/>
+            </a:pPr>
+            <a:r>
+              <a:rPr lang="fr-CA" sz="1500" b="1" dirty="0">
+                <a:solidFill>
+                  <a:srgbClr val="F2A24E"/>
+                </a:solidFill>
+                <a:latin typeface="Cambria"/>
+                <a:ea typeface="Cambria"/>
+                <a:cs typeface="Cambria"/>
+              </a:rPr>
+              <a:t>Élection inconditionnelle</a:t>
+            </a:r>
+          </a:p>
+        </p:txBody>
+      </p:sp>
+      <p:sp>
+        <p:nvSpPr>
+          <p:cNvPr id="208" name="fr1"/>
+          <p:cNvSpPr txBox="1"/>
+          <p:nvPr/>
+        </p:nvSpPr>
+        <p:spPr>
+          <a:xfrm>
+            <a:off x="2882900" y="3175000"/>
+            <a:ext cx="1892300" cy="304800"/>
+          </a:xfrm>
+          <a:prstGeom prst="rect">
+            <a:avLst/>
+          </a:prstGeom>
+          <a:noFill/>
+        </p:spPr>
+        <p:txBody>
+          <a:bodyPr wrap="square" lIns="0" tIns="0" rIns="0" bIns="0" anchor="t"/>
+          <a:lstStyle/>
+          <a:p>
+            <a:pPr algn="ctr">
+              <a:buNone/>
+            </a:pPr>
+            <a:r>
+              <a:rPr lang="fr-CA" sz="1400" i="1" dirty="0">
+                <a:solidFill>
+                  <a:srgbClr val="F5EFE4"/>
+                </a:solidFill>
+                <a:latin typeface="Cambria"/>
+                <a:ea typeface="Cambria"/>
+                <a:cs typeface="Cambria"/>
+              </a:rPr>
+              <a:t>Choix souverain de Dieu</a:t>
+            </a:r>
+          </a:p>
+        </p:txBody>
+      </p:sp>
+      <p:sp>
+        <p:nvSpPr>
+          <p:cNvPr id="209" name="desc1"/>
+          <p:cNvSpPr txBox="1"/>
+          <p:nvPr/>
+        </p:nvSpPr>
+        <p:spPr>
+          <a:xfrm>
+            <a:off x="2882900" y="3606800"/>
+            <a:ext cx="1892300" cy="2413000"/>
+          </a:xfrm>
+          <a:prstGeom prst="rect">
+            <a:avLst/>
+          </a:prstGeom>
+          <a:noFill/>
+        </p:spPr>
+        <p:txBody>
+          <a:bodyPr wrap="square" lIns="0" tIns="0" rIns="0" bIns="0" anchor="t"/>
+          <a:lstStyle/>
+          <a:p>
+            <a:pPr algn="ctr">
+              <a:lnSpc>
+                <a:spcPts val="1700"/>
+              </a:lnSpc>
+              <a:buNone/>
+            </a:pPr>
+            <a:r>
+              <a:rPr lang="fr-CA" sz="1400" dirty="0">
+                <a:solidFill>
+                  <a:srgbClr val="F5EFE4"/>
+                </a:solidFill>
+                <a:latin typeface="Cambria"/>
+                <a:ea typeface="Cambria"/>
+                <a:cs typeface="Cambria"/>
+              </a:rPr>
+              <a:t>Dieu choisit ceux qu'il sauve par pure grâce, sans aucun mérite de leur part.</a:t>
+            </a:r>
+          </a:p>
+          <a:p>
+            <a:pPr algn="ctr">
+              <a:lnSpc>
+                <a:spcPts val="1700"/>
+              </a:lnSpc>
+              <a:buNone/>
+            </a:pPr>
+            <a:endParaRPr lang="fr-CA" sz="1400" dirty="0">
+              <a:solidFill>
+                <a:srgbClr val="F5EFE4"/>
+              </a:solidFill>
+              <a:latin typeface="Cambria"/>
+              <a:ea typeface="Cambria"/>
+              <a:cs typeface="Cambria"/>
+            </a:endParaRPr>
+          </a:p>
+          <a:p>
+            <a:pPr algn="ctr">
+              <a:lnSpc>
+                <a:spcPts val="1700"/>
+              </a:lnSpc>
+              <a:buNone/>
+            </a:pPr>
+            <a:r>
+              <a:rPr lang="fr-CA" sz="1400" dirty="0">
+                <a:solidFill>
+                  <a:srgbClr val="F5EFE4"/>
+                </a:solidFill>
+                <a:latin typeface="Cambria"/>
+                <a:ea typeface="Cambria"/>
+                <a:cs typeface="Cambria"/>
+              </a:rPr>
+              <a:t>Éphésiens 1.4-5</a:t>
+            </a:r>
+          </a:p>
+        </p:txBody>
+      </p:sp>
+      <p:sp>
+        <p:nvSpPr>
+          <p:cNvPr id="210" name="card2"/>
+          <p:cNvSpPr/>
+          <p:nvPr/>
+        </p:nvSpPr>
+        <p:spPr>
+          <a:xfrm>
+            <a:off x="5016500" y="1600200"/>
+            <a:ext cx="2095500" cy="4521200"/>
+          </a:xfrm>
+          <a:prstGeom prst="roundRect">
+            <a:avLst>
+              <a:gd name="adj" fmla="val 5000"/>
+            </a:avLst>
+          </a:prstGeom>
+          <a:solidFill>
+            <a:srgbClr val="1E1A14"/>
+          </a:solidFill>
+          <a:ln w="12700">
+            <a:solidFill>
+              <a:srgbClr val="332C22"/>
+            </a:solidFill>
+          </a:ln>
+        </p:spPr>
+        <p:txBody>
+          <a:bodyPr/>
+          <a:lstStyle/>
+          <a:p>
+            <a:endParaRPr/>
+          </a:p>
+        </p:txBody>
+      </p:sp>
+      <p:sp>
+        <p:nvSpPr>
+          <p:cNvPr id="211" name="num2"/>
+          <p:cNvSpPr/>
+          <p:nvPr/>
+        </p:nvSpPr>
+        <p:spPr>
+          <a:xfrm>
+            <a:off x="5759450" y="1905000"/>
+            <a:ext cx="609600" cy="609600"/>
+          </a:xfrm>
+          <a:prstGeom prst="ellipse">
+            <a:avLst/>
+          </a:prstGeom>
+          <a:solidFill>
+            <a:srgbClr val="E8821E"/>
+          </a:solidFill>
+          <a:ln>
+            <a:noFill/>
+          </a:ln>
+        </p:spPr>
+        <p:txBody>
+          <a:bodyPr lIns="0" tIns="0" rIns="0" bIns="0" anchor="ctr"/>
+          <a:lstStyle/>
+          <a:p>
+            <a:pPr algn="ctr">
+              <a:buNone/>
+            </a:pPr>
+            <a:r>
+              <a:rPr lang="fr-CA" sz="2000" b="1" dirty="0">
+                <a:solidFill>
+                  <a:srgbClr val="FFFFFF"/>
+                </a:solidFill>
+                <a:latin typeface="Cambria"/>
+              </a:rPr>
+              <a:t>L</a:t>
+            </a:r>
+          </a:p>
+        </p:txBody>
+      </p:sp>
+      <p:sp>
+        <p:nvSpPr>
+          <p:cNvPr id="212" name="lat2"/>
+          <p:cNvSpPr txBox="1"/>
+          <p:nvPr/>
+        </p:nvSpPr>
+        <p:spPr>
+          <a:xfrm>
+            <a:off x="5118100" y="2692400"/>
+            <a:ext cx="1892300" cy="457200"/>
+          </a:xfrm>
+          <a:prstGeom prst="rect">
+            <a:avLst/>
+          </a:prstGeom>
+          <a:noFill/>
+        </p:spPr>
+        <p:txBody>
+          <a:bodyPr wrap="square" lIns="0" tIns="0" rIns="0" bIns="0" anchor="t"/>
+          <a:lstStyle/>
+          <a:p>
+            <a:pPr algn="ctr">
+              <a:buNone/>
+            </a:pPr>
+            <a:r>
+              <a:rPr lang="fr-CA" sz="1500" b="1" dirty="0">
+                <a:solidFill>
+                  <a:srgbClr val="F2A24E"/>
+                </a:solidFill>
+                <a:latin typeface="Cambria"/>
+                <a:ea typeface="Cambria"/>
+                <a:cs typeface="Cambria"/>
+              </a:rPr>
+              <a:t>Rédemption particulière</a:t>
+            </a:r>
+          </a:p>
+        </p:txBody>
+      </p:sp>
+      <p:sp>
+        <p:nvSpPr>
+          <p:cNvPr id="213" name="fr2"/>
+          <p:cNvSpPr txBox="1"/>
+          <p:nvPr/>
+        </p:nvSpPr>
+        <p:spPr>
+          <a:xfrm>
+            <a:off x="5118100" y="3175000"/>
+            <a:ext cx="1892300" cy="304800"/>
+          </a:xfrm>
+          <a:prstGeom prst="rect">
+            <a:avLst/>
+          </a:prstGeom>
+          <a:noFill/>
+        </p:spPr>
+        <p:txBody>
+          <a:bodyPr wrap="square" lIns="0" tIns="0" rIns="0" bIns="0" anchor="t"/>
+          <a:lstStyle/>
+          <a:p>
+            <a:pPr algn="ctr">
+              <a:buNone/>
+            </a:pPr>
+            <a:r>
+              <a:rPr lang="fr-CA" sz="1400" i="1" dirty="0">
+                <a:solidFill>
+                  <a:srgbClr val="F5EFE4"/>
+                </a:solidFill>
+                <a:latin typeface="Cambria"/>
+                <a:ea typeface="Cambria"/>
+                <a:cs typeface="Cambria"/>
+              </a:rPr>
+              <a:t>Expiation limitée</a:t>
+            </a:r>
+          </a:p>
+        </p:txBody>
+      </p:sp>
+      <p:sp>
+        <p:nvSpPr>
+          <p:cNvPr id="214" name="desc2"/>
+          <p:cNvSpPr txBox="1"/>
+          <p:nvPr/>
+        </p:nvSpPr>
+        <p:spPr>
+          <a:xfrm>
+            <a:off x="5118100" y="3606800"/>
+            <a:ext cx="1892300" cy="2413000"/>
+          </a:xfrm>
+          <a:prstGeom prst="rect">
+            <a:avLst/>
+          </a:prstGeom>
+          <a:noFill/>
+        </p:spPr>
+        <p:txBody>
+          <a:bodyPr wrap="square" lIns="0" tIns="0" rIns="0" bIns="0" anchor="t"/>
+          <a:lstStyle/>
+          <a:p>
+            <a:pPr algn="ctr">
+              <a:lnSpc>
+                <a:spcPts val="1700"/>
+              </a:lnSpc>
+              <a:buNone/>
+            </a:pPr>
+            <a:r>
+              <a:rPr lang="fr-CA" sz="1400" dirty="0">
+                <a:solidFill>
+                  <a:srgbClr val="F5EFE4"/>
+                </a:solidFill>
+                <a:latin typeface="Cambria"/>
+                <a:ea typeface="Cambria"/>
+                <a:cs typeface="Cambria"/>
+              </a:rPr>
+              <a:t>Le sacrifice de Christ sauve pleinement et efficacement tous les élus.</a:t>
+            </a:r>
+          </a:p>
+          <a:p>
+            <a:pPr algn="ctr">
+              <a:lnSpc>
+                <a:spcPts val="1700"/>
+              </a:lnSpc>
+              <a:buNone/>
+            </a:pPr>
+            <a:endParaRPr lang="fr-CA" sz="1400" dirty="0">
+              <a:solidFill>
+                <a:srgbClr val="F5EFE4"/>
+              </a:solidFill>
+              <a:latin typeface="Cambria"/>
+              <a:ea typeface="Cambria"/>
+              <a:cs typeface="Cambria"/>
+            </a:endParaRPr>
+          </a:p>
+          <a:p>
+            <a:pPr algn="ctr">
+              <a:lnSpc>
+                <a:spcPts val="1700"/>
+              </a:lnSpc>
+              <a:buNone/>
+            </a:pPr>
+            <a:r>
+              <a:rPr lang="fr-CA" sz="1400" dirty="0">
+                <a:solidFill>
+                  <a:srgbClr val="F5EFE4"/>
+                </a:solidFill>
+                <a:latin typeface="Cambria"/>
+                <a:ea typeface="Cambria"/>
+                <a:cs typeface="Cambria"/>
+              </a:rPr>
+              <a:t>Jean 10.11-15</a:t>
+            </a:r>
+          </a:p>
+        </p:txBody>
+      </p:sp>
+      <p:sp>
+        <p:nvSpPr>
+          <p:cNvPr id="215" name="card3"/>
+          <p:cNvSpPr/>
+          <p:nvPr/>
+        </p:nvSpPr>
+        <p:spPr>
+          <a:xfrm>
+            <a:off x="7251700" y="1600200"/>
+            <a:ext cx="2095500" cy="4521200"/>
+          </a:xfrm>
+          <a:prstGeom prst="roundRect">
+            <a:avLst>
+              <a:gd name="adj" fmla="val 5000"/>
+            </a:avLst>
+          </a:prstGeom>
+          <a:solidFill>
+            <a:srgbClr val="1E1A14"/>
+          </a:solidFill>
+          <a:ln w="12700">
+            <a:solidFill>
+              <a:srgbClr val="332C22"/>
+            </a:solidFill>
+          </a:ln>
+        </p:spPr>
+        <p:txBody>
+          <a:bodyPr/>
+          <a:lstStyle/>
+          <a:p>
+            <a:endParaRPr/>
+          </a:p>
+        </p:txBody>
+      </p:sp>
+      <p:sp>
+        <p:nvSpPr>
+          <p:cNvPr id="216" name="num3"/>
+          <p:cNvSpPr/>
+          <p:nvPr/>
+        </p:nvSpPr>
+        <p:spPr>
+          <a:xfrm>
+            <a:off x="7994650" y="1905000"/>
+            <a:ext cx="609600" cy="609600"/>
+          </a:xfrm>
+          <a:prstGeom prst="ellipse">
+            <a:avLst/>
+          </a:prstGeom>
+          <a:solidFill>
+            <a:srgbClr val="E8821E"/>
+          </a:solidFill>
+          <a:ln>
+            <a:noFill/>
+          </a:ln>
+        </p:spPr>
+        <p:txBody>
+          <a:bodyPr lIns="0" tIns="0" rIns="0" bIns="0" anchor="ctr"/>
+          <a:lstStyle/>
+          <a:p>
+            <a:pPr algn="ctr">
+              <a:buNone/>
+            </a:pPr>
+            <a:r>
+              <a:rPr lang="fr-CA" sz="2000" b="1" dirty="0">
+                <a:solidFill>
+                  <a:srgbClr val="FFFFFF"/>
+                </a:solidFill>
+                <a:latin typeface="Cambria"/>
+              </a:rPr>
+              <a:t>I</a:t>
+            </a:r>
+          </a:p>
+        </p:txBody>
+      </p:sp>
+      <p:sp>
+        <p:nvSpPr>
+          <p:cNvPr id="217" name="lat3"/>
+          <p:cNvSpPr txBox="1"/>
+          <p:nvPr/>
+        </p:nvSpPr>
+        <p:spPr>
+          <a:xfrm>
+            <a:off x="7353300" y="2692400"/>
+            <a:ext cx="1892300" cy="457200"/>
+          </a:xfrm>
+          <a:prstGeom prst="rect">
+            <a:avLst/>
+          </a:prstGeom>
+          <a:noFill/>
+        </p:spPr>
+        <p:txBody>
+          <a:bodyPr wrap="square" lIns="0" tIns="0" rIns="0" bIns="0" anchor="t"/>
+          <a:lstStyle/>
+          <a:p>
+            <a:pPr algn="ctr">
+              <a:buNone/>
+            </a:pPr>
+            <a:r>
+              <a:rPr lang="fr-CA" sz="1500" b="1" dirty="0">
+                <a:solidFill>
+                  <a:srgbClr val="F2A24E"/>
+                </a:solidFill>
+                <a:latin typeface="Cambria"/>
+                <a:ea typeface="Cambria"/>
+                <a:cs typeface="Cambria"/>
+              </a:rPr>
+              <a:t>Grâce irrésistible</a:t>
+            </a:r>
+          </a:p>
+        </p:txBody>
+      </p:sp>
+      <p:sp>
+        <p:nvSpPr>
+          <p:cNvPr id="218" name="fr3"/>
+          <p:cNvSpPr txBox="1"/>
+          <p:nvPr/>
+        </p:nvSpPr>
+        <p:spPr>
+          <a:xfrm>
+            <a:off x="7353300" y="3175000"/>
+            <a:ext cx="1892300" cy="304800"/>
+          </a:xfrm>
+          <a:prstGeom prst="rect">
+            <a:avLst/>
+          </a:prstGeom>
+          <a:noFill/>
+        </p:spPr>
+        <p:txBody>
+          <a:bodyPr wrap="square" lIns="0" tIns="0" rIns="0" bIns="0" anchor="t"/>
+          <a:lstStyle/>
+          <a:p>
+            <a:pPr algn="ctr">
+              <a:buNone/>
+            </a:pPr>
+            <a:r>
+              <a:rPr lang="fr-CA" sz="1400" i="1" dirty="0">
+                <a:solidFill>
+                  <a:srgbClr val="F5EFE4"/>
+                </a:solidFill>
+                <a:latin typeface="Cambria"/>
+                <a:ea typeface="Cambria"/>
+                <a:cs typeface="Cambria"/>
+              </a:rPr>
+              <a:t>Appel efficace</a:t>
+            </a:r>
+          </a:p>
+        </p:txBody>
+      </p:sp>
+      <p:sp>
+        <p:nvSpPr>
+          <p:cNvPr id="219" name="desc3"/>
+          <p:cNvSpPr txBox="1"/>
+          <p:nvPr/>
+        </p:nvSpPr>
+        <p:spPr>
+          <a:xfrm>
+            <a:off x="7353300" y="3606800"/>
+            <a:ext cx="1892300" cy="2413000"/>
+          </a:xfrm>
+          <a:prstGeom prst="rect">
+            <a:avLst/>
+          </a:prstGeom>
+          <a:noFill/>
+        </p:spPr>
+        <p:txBody>
+          <a:bodyPr wrap="square" lIns="0" tIns="0" rIns="0" bIns="0" anchor="t"/>
+          <a:lstStyle/>
+          <a:p>
+            <a:pPr algn="ctr">
+              <a:lnSpc>
+                <a:spcPts val="1700"/>
+              </a:lnSpc>
+              <a:buNone/>
+            </a:pPr>
+            <a:r>
+              <a:rPr lang="fr-CA" sz="1400" dirty="0">
+                <a:solidFill>
+                  <a:srgbClr val="F5EFE4"/>
+                </a:solidFill>
+                <a:latin typeface="Cambria"/>
+                <a:ea typeface="Cambria"/>
+                <a:cs typeface="Cambria"/>
+              </a:rPr>
+              <a:t>L'appel de Dieu attire infailliblement les élus à la foi en Christ.</a:t>
+            </a:r>
+          </a:p>
+          <a:p>
+            <a:pPr algn="ctr">
+              <a:lnSpc>
+                <a:spcPts val="1700"/>
+              </a:lnSpc>
+              <a:buNone/>
+            </a:pPr>
+            <a:endParaRPr lang="fr-CA" sz="1400" dirty="0">
+              <a:solidFill>
+                <a:srgbClr val="F5EFE4"/>
+              </a:solidFill>
+              <a:latin typeface="Cambria"/>
+              <a:ea typeface="Cambria"/>
+              <a:cs typeface="Cambria"/>
+            </a:endParaRPr>
+          </a:p>
+          <a:p>
+            <a:pPr algn="ctr">
+              <a:lnSpc>
+                <a:spcPts val="1700"/>
+              </a:lnSpc>
+              <a:buNone/>
+            </a:pPr>
+            <a:r>
+              <a:rPr lang="fr-CA" sz="1400" dirty="0">
+                <a:solidFill>
+                  <a:srgbClr val="F5EFE4"/>
+                </a:solidFill>
+                <a:latin typeface="Cambria"/>
+                <a:ea typeface="Cambria"/>
+                <a:cs typeface="Cambria"/>
+              </a:rPr>
+              <a:t>Jean 6.37-39</a:t>
+            </a:r>
+          </a:p>
+        </p:txBody>
+      </p:sp>
+      <p:sp>
+        <p:nvSpPr>
+          <p:cNvPr id="220" name="card4"/>
+          <p:cNvSpPr/>
+          <p:nvPr/>
+        </p:nvSpPr>
+        <p:spPr>
+          <a:xfrm>
+            <a:off x="9486900" y="1600200"/>
+            <a:ext cx="2095500" cy="4521200"/>
+          </a:xfrm>
+          <a:prstGeom prst="roundRect">
+            <a:avLst>
+              <a:gd name="adj" fmla="val 5000"/>
+            </a:avLst>
+          </a:prstGeom>
+          <a:solidFill>
+            <a:srgbClr val="1E1A14"/>
+          </a:solidFill>
+          <a:ln w="12700">
+            <a:solidFill>
+              <a:srgbClr val="332C22"/>
+            </a:solidFill>
+          </a:ln>
+        </p:spPr>
+        <p:txBody>
+          <a:bodyPr/>
+          <a:lstStyle/>
+          <a:p>
+            <a:endParaRPr/>
+          </a:p>
+        </p:txBody>
+      </p:sp>
+      <p:sp>
+        <p:nvSpPr>
+          <p:cNvPr id="221" name="num4"/>
+          <p:cNvSpPr/>
+          <p:nvPr/>
+        </p:nvSpPr>
+        <p:spPr>
+          <a:xfrm>
+            <a:off x="10229850" y="1905000"/>
+            <a:ext cx="609600" cy="609600"/>
+          </a:xfrm>
+          <a:prstGeom prst="ellipse">
+            <a:avLst/>
+          </a:prstGeom>
+          <a:solidFill>
+            <a:srgbClr val="E8821E"/>
+          </a:solidFill>
+          <a:ln>
+            <a:noFill/>
+          </a:ln>
+        </p:spPr>
+        <p:txBody>
+          <a:bodyPr lIns="0" tIns="0" rIns="0" bIns="0" anchor="ctr"/>
+          <a:lstStyle/>
+          <a:p>
+            <a:pPr algn="ctr">
+              <a:buNone/>
+            </a:pPr>
+            <a:r>
+              <a:rPr lang="fr-CA" sz="2000" b="1" dirty="0">
+                <a:solidFill>
+                  <a:srgbClr val="FFFFFF"/>
+                </a:solidFill>
+                <a:latin typeface="Cambria"/>
+              </a:rPr>
+              <a:t>P</a:t>
+            </a:r>
+          </a:p>
+        </p:txBody>
+      </p:sp>
+      <p:sp>
+        <p:nvSpPr>
+          <p:cNvPr id="222" name="lat4"/>
+          <p:cNvSpPr txBox="1"/>
+          <p:nvPr/>
+        </p:nvSpPr>
+        <p:spPr>
+          <a:xfrm>
+            <a:off x="9588500" y="2692400"/>
+            <a:ext cx="1892300" cy="457200"/>
+          </a:xfrm>
+          <a:prstGeom prst="rect">
+            <a:avLst/>
+          </a:prstGeom>
+          <a:noFill/>
+        </p:spPr>
+        <p:txBody>
+          <a:bodyPr wrap="square" lIns="0" tIns="0" rIns="0" bIns="0" anchor="t"/>
+          <a:lstStyle/>
+          <a:p>
+            <a:pPr algn="ctr">
+              <a:buNone/>
+            </a:pPr>
+            <a:r>
+              <a:rPr lang="fr-CA" sz="1500" b="1" dirty="0">
+                <a:solidFill>
+                  <a:srgbClr val="F2A24E"/>
+                </a:solidFill>
+                <a:latin typeface="Cambria"/>
+                <a:ea typeface="Cambria"/>
+                <a:cs typeface="Cambria"/>
+              </a:rPr>
+              <a:t>Persévérance des saints</a:t>
+            </a:r>
+          </a:p>
+        </p:txBody>
+      </p:sp>
+      <p:sp>
+        <p:nvSpPr>
+          <p:cNvPr id="223" name="fr4"/>
+          <p:cNvSpPr txBox="1"/>
+          <p:nvPr/>
+        </p:nvSpPr>
+        <p:spPr>
+          <a:xfrm>
+            <a:off x="9588500" y="3175000"/>
+            <a:ext cx="1892300" cy="304800"/>
+          </a:xfrm>
+          <a:prstGeom prst="rect">
+            <a:avLst/>
+          </a:prstGeom>
+          <a:noFill/>
+        </p:spPr>
+        <p:txBody>
+          <a:bodyPr wrap="square" lIns="0" tIns="0" rIns="0" bIns="0" anchor="t"/>
+          <a:lstStyle/>
+          <a:p>
+            <a:pPr algn="ctr">
+              <a:buNone/>
+            </a:pPr>
+            <a:r>
+              <a:rPr lang="fr-CA" sz="1400" i="1" dirty="0">
+                <a:solidFill>
+                  <a:srgbClr val="F5EFE4"/>
+                </a:solidFill>
+                <a:latin typeface="Cambria"/>
+                <a:ea typeface="Cambria"/>
+                <a:cs typeface="Cambria"/>
+              </a:rPr>
+              <a:t>Préservés jusqu'à la fin</a:t>
+            </a:r>
+          </a:p>
+        </p:txBody>
+      </p:sp>
+      <p:sp>
+        <p:nvSpPr>
+          <p:cNvPr id="224" name="desc4"/>
+          <p:cNvSpPr txBox="1"/>
+          <p:nvPr/>
+        </p:nvSpPr>
+        <p:spPr>
+          <a:xfrm>
+            <a:off x="9588500" y="3606800"/>
+            <a:ext cx="1892300" cy="2413000"/>
+          </a:xfrm>
+          <a:prstGeom prst="rect">
+            <a:avLst/>
+          </a:prstGeom>
+          <a:noFill/>
+        </p:spPr>
+        <p:txBody>
+          <a:bodyPr wrap="square" lIns="0" tIns="0" rIns="0" bIns="0" anchor="t"/>
+          <a:lstStyle/>
+          <a:p>
+            <a:pPr algn="ctr">
+              <a:lnSpc>
+                <a:spcPts val="1700"/>
+              </a:lnSpc>
+              <a:buNone/>
+            </a:pPr>
+            <a:r>
+              <a:rPr lang="fr-CA" sz="1400" dirty="0">
+                <a:solidFill>
+                  <a:srgbClr val="F5EFE4"/>
+                </a:solidFill>
+                <a:latin typeface="Cambria"/>
+                <a:ea typeface="Cambria"/>
+                <a:cs typeface="Cambria"/>
+              </a:rPr>
+              <a:t>Ceux que Dieu sauve persévèrent dans la foi et ne se perdront jamais.</a:t>
+            </a:r>
+          </a:p>
+          <a:p>
+            <a:pPr algn="ctr">
+              <a:lnSpc>
+                <a:spcPts val="1700"/>
+              </a:lnSpc>
+              <a:buNone/>
+            </a:pPr>
+            <a:endParaRPr lang="fr-CA" sz="1400" dirty="0">
+              <a:solidFill>
+                <a:srgbClr val="F5EFE4"/>
+              </a:solidFill>
+              <a:latin typeface="Cambria"/>
+              <a:ea typeface="Cambria"/>
+              <a:cs typeface="Cambria"/>
+            </a:endParaRPr>
+          </a:p>
+          <a:p>
+            <a:pPr algn="ctr">
+              <a:lnSpc>
+                <a:spcPts val="1700"/>
+              </a:lnSpc>
+              <a:buNone/>
+            </a:pPr>
+            <a:r>
+              <a:rPr lang="fr-CA" sz="1400" dirty="0">
+                <a:solidFill>
+                  <a:srgbClr val="F5EFE4"/>
+                </a:solidFill>
+                <a:latin typeface="Cambria"/>
+                <a:ea typeface="Cambria"/>
+                <a:cs typeface="Cambria"/>
+              </a:rPr>
+              <a:t>Philippiens 1.6</a:t>
+            </a:r>
+          </a:p>
+        </p:txBody>
+      </p:sp>
+      <p:sp>
+        <p:nvSpPr>
+          <p:cNvPr id="400" name="accentBar"/>
+          <p:cNvSpPr/>
+          <p:nvPr/>
+        </p:nvSpPr>
+        <p:spPr>
+          <a:xfrm>
+            <a:off x="457200" y="203200"/>
+            <a:ext cx="50800" cy="787400"/>
+          </a:xfrm>
+          <a:prstGeom prst="rect">
+            <a:avLst/>
+          </a:prstGeom>
+          <a:solidFill>
+            <a:srgbClr val="F2A24E"/>
+          </a:solidFill>
+          <a:ln>
+            <a:noFill/>
+          </a:ln>
+        </p:spPr>
+        <p:txBody>
+          <a:bodyPr/>
+          <a:lstStyle/>
+          <a:p>
+            <a:endParaRPr/>
+          </a:p>
+        </p:txBody>
+      </p:sp>
+      <p:sp>
+        <p:nvSpPr>
+          <p:cNvPr id="401" name="eyebrow"/>
+          <p:cNvSpPr txBox="1"/>
+          <p:nvPr/>
+        </p:nvSpPr>
+        <p:spPr>
+          <a:xfrm>
+            <a:off x="546100" y="165100"/>
+            <a:ext cx="8890000" cy="228600"/>
+          </a:xfrm>
+          <a:prstGeom prst="rect">
+            <a:avLst/>
+          </a:prstGeom>
+          <a:noFill/>
+        </p:spPr>
+        <p:txBody>
+          <a:bodyPr wrap="none" lIns="0" tIns="0" rIns="0" bIns="0" anchor="t"/>
+          <a:lstStyle/>
+          <a:p>
+            <a:pPr algn="l">
+              <a:buNone/>
+            </a:pPr>
+            <a:r>
+              <a:rPr lang="fr-CA" sz="1400" b="1" spc="320" dirty="0">
+                <a:solidFill>
+                  <a:srgbClr val="F2A24E"/>
+                </a:solidFill>
+                <a:latin typeface="Cambria" pitchFamily="34" charset="0"/>
+              </a:rPr>
+              <a:t>05 · TULIP</a:t>
+            </a:r>
+          </a:p>
+        </p:txBody>
+      </p:sp>
+    </p:spTree>
+    <p:extLst>
+      <p:ext uri="{BB962C8B-B14F-4D97-AF65-F5344CB8AC3E}">
+        <p14:creationId xmlns:p14="http://schemas.microsoft.com/office/powerpoint/2010/main" val="3082900950"/>
+      </p:ext>
+    </p:extLst>
+  </p:cSld>
+  <p:clrMapOvr>
+    <a:masterClrMapping/>
+  </p:clrMapOvr>
+</p:sld>
+</file>
+
+<file path=ppt/slides/slide6.xml><?xml version="1.0" encoding="utf-8"?>
 <p:sld xmlns:a="http://schemas.openxmlformats.org/drawingml/2006/main" xmlns:r="http://schemas.openxmlformats.org/officeDocument/2006/relationships" xmlns:p="http://schemas.openxmlformats.org/presentationml/2006/main">
   <p:cSld name="Slide 4">
     <p:bg>
@@ -6153,7 +10779,7 @@
               <a:t>La Vallée de la Vision — le </a:t>
             </a:r>
             <a:r>
-              <a:rPr lang="en-US" sz="3200" b="1" dirty="0" err="1">
+              <a:rPr lang="en-US" sz="3200" b="1" i="1" dirty="0" err="1">
                 <a:solidFill>
                   <a:srgbClr val="F5EFE4"/>
                 </a:solidFill>
@@ -6192,17 +10818,14 @@
               <a:buNone/>
             </a:pPr>
             <a:r>
-              <a:rPr lang="en-US" sz="1400" i="1" dirty="0">
-                <a:solidFill>
-                  <a:srgbClr val="F2A24E"/>
-                </a:solidFill>
-                <a:latin typeface="Cambria" pitchFamily="34" charset="0"/>
-                <a:ea typeface="Cambria" pitchFamily="34" charset="-122"/>
-                <a:cs typeface="Cambria" pitchFamily="34" charset="-120"/>
-              </a:rPr>
-              <a:t>Deux repères</a:t>
-            </a:r>
-            <a:endParaRPr lang="en-US" sz="1400" dirty="0"/>
+              <a:rPr lang="fr-CA" sz="1400" dirty="0">
+                <a:solidFill>
+                  <a:srgbClr val="C9B79A"/>
+                </a:solidFill>
+                <a:latin typeface="Cambria" pitchFamily="34" charset="0"/>
+              </a:rPr>
+              <a:t>origine · contenu · usage</a:t>
+            </a:r>
           </a:p>
         </p:txBody>
       </p:sp>
@@ -6249,65 +10872,14 @@
       </p:sp>
       <p:sp>
         <p:nvSpPr>
-          <p:cNvPr id="5" name="Shape 3"/>
-          <p:cNvSpPr/>
-          <p:nvPr/>
-        </p:nvSpPr>
-        <p:spPr>
-          <a:xfrm>
-            <a:off x="914400" y="2011680"/>
-            <a:ext cx="822960" cy="822960"/>
-          </a:xfrm>
-          <a:prstGeom prst="ellipse">
-            <a:avLst/>
-          </a:prstGeom>
-          <a:solidFill>
-            <a:srgbClr val="E8821E"/>
-          </a:solidFill>
-          <a:ln/>
-        </p:spPr>
-        <p:txBody>
-          <a:bodyPr/>
-          <a:lstStyle/>
-          <a:p>
-            <a:endParaRPr lang="fr-CA"/>
-          </a:p>
-        </p:txBody>
-      </p:sp>
-      <p:pic>
-        <p:nvPicPr>
-          <p:cNvPr id="6" name="Image 0" descr="preencoded.png"/>
-          <p:cNvPicPr>
-            <a:picLocks noChangeAspect="1"/>
-          </p:cNvPicPr>
-          <p:nvPr/>
-        </p:nvPicPr>
-        <p:blipFill>
-          <a:blip r:embed="rId3"/>
-          <a:stretch>
-            <a:fillRect/>
-          </a:stretch>
-        </p:blipFill>
-        <p:spPr>
-          <a:xfrm>
-            <a:off x="1136599" y="2233879"/>
-            <a:ext cx="378562" cy="378562"/>
-          </a:xfrm>
-          <a:prstGeom prst="rect">
-            <a:avLst/>
-          </a:prstGeom>
-        </p:spPr>
-      </p:pic>
-      <p:sp>
-        <p:nvSpPr>
           <p:cNvPr id="7" name="Text 4"/>
           <p:cNvSpPr/>
           <p:nvPr/>
         </p:nvSpPr>
         <p:spPr>
           <a:xfrm>
-            <a:off x="1965960" y="2011680"/>
-            <a:ext cx="3579876" cy="822960"/>
+            <a:off x="850900" y="2743200"/>
+            <a:ext cx="4572000" cy="431800"/>
           </a:xfrm>
           <a:prstGeom prst="rect">
             <a:avLst/>
@@ -6319,21 +10891,18 @@
           <a:bodyPr wrap="square" rtlCol="0" anchor="ctr"/>
           <a:lstStyle/>
           <a:p>
-            <a:pPr marL="0" indent="0">
-              <a:buNone/>
-            </a:pPr>
-            <a:r>
-              <a:rPr lang="en-US" sz="2200" b="1" dirty="0">
-                <a:solidFill>
-                  <a:srgbClr val="F2A24E"/>
-                </a:solidFill>
-                <a:latin typeface="Cambria" pitchFamily="34" charset="0"/>
-                <a:ea typeface="Cambria" pitchFamily="34" charset="-122"/>
-                <a:cs typeface="Cambria" pitchFamily="34" charset="-120"/>
+            <a:pPr marL="0" indent="0" algn="l">
+              <a:buNone/>
+            </a:pPr>
+            <a:r>
+              <a:rPr lang="fr-CA" sz="1800" b="1" dirty="0">
+                <a:solidFill>
+                  <a:srgbClr val="F5EFE4"/>
+                </a:solidFill>
+                <a:latin typeface="Cambria" pitchFamily="34" charset="0"/>
               </a:rPr>
               <a:t>Origine et nature</a:t>
             </a:r>
-            <a:endParaRPr lang="en-US" sz="2200" dirty="0"/>
           </a:p>
         </p:txBody>
       </p:sp>
@@ -6345,8 +10914,8 @@
         </p:nvSpPr>
         <p:spPr>
           <a:xfrm>
-            <a:off x="914400" y="3154680"/>
-            <a:ext cx="4585716" cy="2743200"/>
+            <a:off x="850900" y="3454400"/>
+            <a:ext cx="4610100" cy="2362200"/>
           </a:xfrm>
           <a:prstGeom prst="rect">
             <a:avLst/>
@@ -6358,7 +10927,7 @@
           <a:bodyPr wrap="square" rtlCol="0" anchor="t"/>
           <a:lstStyle/>
           <a:p>
-            <a:pPr marL="0" indent="0" algn="ctr">
+            <a:pPr marL="0" indent="0" algn="l">
               <a:lnSpc>
                 <a:spcPts val="2000"/>
               </a:lnSpc>
@@ -6399,7 +10968,7 @@
             <a:endParaRPr lang="en-US" sz="1450" dirty="0"/>
           </a:p>
           <a:p>
-            <a:pPr marL="0" indent="0">
+            <a:pPr marL="0" indent="0" algn="l">
               <a:lnSpc>
                 <a:spcPts val="2000"/>
               </a:lnSpc>
@@ -6408,7 +10977,7 @@
             <a:endParaRPr lang="en-US" sz="1450" dirty="0"/>
           </a:p>
           <a:p>
-            <a:pPr marL="0" indent="0" algn="ctr">
+            <a:pPr marL="0" indent="0" algn="l">
               <a:lnSpc>
                 <a:spcPts val="2000"/>
               </a:lnSpc>
@@ -6472,65 +11041,14 @@
       </p:sp>
       <p:sp>
         <p:nvSpPr>
-          <p:cNvPr id="10" name="Shape 7"/>
-          <p:cNvSpPr/>
-          <p:nvPr/>
-        </p:nvSpPr>
-        <p:spPr>
-          <a:xfrm>
-            <a:off x="6688836" y="2011680"/>
-            <a:ext cx="822960" cy="822960"/>
-          </a:xfrm>
-          <a:prstGeom prst="ellipse">
-            <a:avLst/>
-          </a:prstGeom>
-          <a:solidFill>
-            <a:srgbClr val="E8821E"/>
-          </a:solidFill>
-          <a:ln/>
-        </p:spPr>
-        <p:txBody>
-          <a:bodyPr/>
-          <a:lstStyle/>
-          <a:p>
-            <a:endParaRPr lang="fr-CA"/>
-          </a:p>
-        </p:txBody>
-      </p:sp>
-      <p:pic>
-        <p:nvPicPr>
-          <p:cNvPr id="11" name="Image 1" descr="preencoded.png"/>
-          <p:cNvPicPr>
-            <a:picLocks noChangeAspect="1"/>
-          </p:cNvPicPr>
-          <p:nvPr/>
-        </p:nvPicPr>
-        <p:blipFill>
-          <a:blip r:embed="rId4"/>
-          <a:stretch>
-            <a:fillRect/>
-          </a:stretch>
-        </p:blipFill>
-        <p:spPr>
-          <a:xfrm>
-            <a:off x="6911035" y="2233879"/>
-            <a:ext cx="378562" cy="378562"/>
-          </a:xfrm>
-          <a:prstGeom prst="rect">
-            <a:avLst/>
-          </a:prstGeom>
-        </p:spPr>
-      </p:pic>
-      <p:sp>
-        <p:nvSpPr>
           <p:cNvPr id="12" name="Text 8"/>
           <p:cNvSpPr/>
           <p:nvPr/>
         </p:nvSpPr>
         <p:spPr>
           <a:xfrm>
-            <a:off x="7740396" y="2011680"/>
-            <a:ext cx="3579876" cy="822960"/>
+            <a:off x="6629400" y="2743200"/>
+            <a:ext cx="4572000" cy="431800"/>
           </a:xfrm>
           <a:prstGeom prst="rect">
             <a:avLst/>
@@ -6542,21 +11060,18 @@
           <a:bodyPr wrap="square" rtlCol="0" anchor="ctr"/>
           <a:lstStyle/>
           <a:p>
-            <a:pPr marL="0" indent="0">
-              <a:buNone/>
-            </a:pPr>
-            <a:r>
-              <a:rPr lang="en-US" sz="2200" b="1" dirty="0">
-                <a:solidFill>
-                  <a:srgbClr val="F2A24E"/>
-                </a:solidFill>
-                <a:latin typeface="Cambria" pitchFamily="34" charset="0"/>
-                <a:ea typeface="Cambria" pitchFamily="34" charset="-122"/>
-                <a:cs typeface="Cambria" pitchFamily="34" charset="-120"/>
+            <a:pPr marL="0" indent="0" algn="l">
+              <a:buNone/>
+            </a:pPr>
+            <a:r>
+              <a:rPr lang="fr-CA" sz="1800" b="1" dirty="0">
+                <a:solidFill>
+                  <a:srgbClr val="F5EFE4"/>
+                </a:solidFill>
+                <a:latin typeface="Cambria" pitchFamily="34" charset="0"/>
               </a:rPr>
               <a:t>Contenu et usage</a:t>
             </a:r>
-            <a:endParaRPr lang="en-US" sz="2200" dirty="0"/>
           </a:p>
         </p:txBody>
       </p:sp>
@@ -6568,8 +11083,8 @@
         </p:nvSpPr>
         <p:spPr>
           <a:xfrm>
-            <a:off x="6688836" y="3154680"/>
-            <a:ext cx="4585716" cy="2743200"/>
+            <a:off x="6629400" y="3454400"/>
+            <a:ext cx="4610100" cy="2362200"/>
           </a:xfrm>
           <a:prstGeom prst="rect">
             <a:avLst/>
@@ -6581,7 +11096,7 @@
           <a:bodyPr wrap="square" rtlCol="0" anchor="t"/>
           <a:lstStyle/>
           <a:p>
-            <a:pPr marL="0" indent="0" algn="ctr">
+            <a:pPr marL="0" indent="0" algn="l">
               <a:lnSpc>
                 <a:spcPts val="2000"/>
               </a:lnSpc>
@@ -6601,7 +11116,7 @@
             <a:endParaRPr lang="en-US" sz="1450" dirty="0"/>
           </a:p>
           <a:p>
-            <a:pPr marL="0" indent="0">
+            <a:pPr marL="0" indent="0" algn="l">
               <a:lnSpc>
                 <a:spcPts val="2000"/>
               </a:lnSpc>
@@ -6610,7 +11125,7 @@
             <a:endParaRPr lang="en-US" sz="1450" dirty="0"/>
           </a:p>
           <a:p>
-            <a:pPr marL="0" indent="0" algn="ctr">
+            <a:pPr marL="0" indent="0" algn="l">
               <a:lnSpc>
                 <a:spcPts val="2000"/>
               </a:lnSpc>
@@ -6629,7 +11144,7 @@
             </a:r>
           </a:p>
           <a:p>
-            <a:pPr marL="0" indent="0" algn="ctr">
+            <a:pPr marL="0" indent="0" algn="l">
               <a:lnSpc>
                 <a:spcPts val="2000"/>
               </a:lnSpc>
@@ -6648,7 +11163,7 @@
             </a:r>
           </a:p>
           <a:p>
-            <a:pPr marL="0" indent="0" algn="ctr">
+            <a:pPr marL="0" indent="0" algn="l">
               <a:lnSpc>
                 <a:spcPts val="2000"/>
               </a:lnSpc>
@@ -6758,10 +11273,202 @@
           </a:p>
         </p:txBody>
       </p:sp>
+      <p:sp>
+        <p:nvSpPr>
+          <p:cNvPr id="400" name="accentBar"/>
+          <p:cNvSpPr/>
+          <p:nvPr/>
+        </p:nvSpPr>
+        <p:spPr>
+          <a:xfrm>
+            <a:off x="457200" y="203200"/>
+            <a:ext cx="50800" cy="787400"/>
+          </a:xfrm>
+          <a:prstGeom prst="rect">
+            <a:avLst/>
+          </a:prstGeom>
+          <a:solidFill>
+            <a:srgbClr val="F2A24E"/>
+          </a:solidFill>
+          <a:ln>
+            <a:noFill/>
+          </a:ln>
+        </p:spPr>
+        <p:txBody>
+          <a:bodyPr/>
+          <a:lstStyle/>
+          <a:p>
+            <a:endParaRPr/>
+          </a:p>
+        </p:txBody>
+      </p:sp>
+      <p:sp>
+        <p:nvSpPr>
+          <p:cNvPr id="401" name="eyebrow"/>
+          <p:cNvSpPr txBox="1"/>
+          <p:nvPr/>
+        </p:nvSpPr>
+        <p:spPr>
+          <a:xfrm>
+            <a:off x="546100" y="165100"/>
+            <a:ext cx="8890000" cy="228600"/>
+          </a:xfrm>
+          <a:prstGeom prst="rect">
+            <a:avLst/>
+          </a:prstGeom>
+          <a:noFill/>
+        </p:spPr>
+        <p:txBody>
+          <a:bodyPr wrap="none" lIns="0" tIns="0" rIns="0" bIns="0" anchor="t"/>
+          <a:lstStyle/>
+          <a:p>
+            <a:pPr algn="l">
+              <a:buNone/>
+            </a:pPr>
+            <a:r>
+              <a:rPr lang="fr-CA" sz="1400" b="1" spc="320" dirty="0">
+                <a:solidFill>
+                  <a:srgbClr val="F2A24E"/>
+                </a:solidFill>
+                <a:latin typeface="Cambria" pitchFamily="34" charset="0"/>
+              </a:rPr>
+              <a:t>06 · LE RECUEIL</a:t>
+            </a:r>
+          </a:p>
+        </p:txBody>
+      </p:sp>
+      <p:sp>
+        <p:nvSpPr>
+          <p:cNvPr id="420" name="num1"/>
+          <p:cNvSpPr txBox="1"/>
+          <p:nvPr/>
+        </p:nvSpPr>
+        <p:spPr>
+          <a:xfrm>
+            <a:off x="850900" y="1905000"/>
+            <a:ext cx="1143000" cy="787400"/>
+          </a:xfrm>
+          <a:prstGeom prst="rect">
+            <a:avLst/>
+          </a:prstGeom>
+          <a:noFill/>
+        </p:spPr>
+        <p:txBody>
+          <a:bodyPr wrap="square" lIns="0" tIns="0" rIns="0" bIns="0" anchor="t"/>
+          <a:lstStyle/>
+          <a:p>
+            <a:pPr algn="l">
+              <a:buNone/>
+            </a:pPr>
+            <a:r>
+              <a:rPr lang="fr-CA" sz="4600" b="1" dirty="0">
+                <a:solidFill>
+                  <a:srgbClr val="F2A24E"/>
+                </a:solidFill>
+                <a:latin typeface="Cambria" pitchFamily="34" charset="0"/>
+              </a:rPr>
+              <a:t>1</a:t>
+            </a:r>
+          </a:p>
+        </p:txBody>
+      </p:sp>
+      <p:sp>
+        <p:nvSpPr>
+          <p:cNvPr id="430" name="rule1"/>
+          <p:cNvSpPr/>
+          <p:nvPr/>
+        </p:nvSpPr>
+        <p:spPr>
+          <a:xfrm>
+            <a:off x="876300" y="3276600"/>
+            <a:ext cx="711200" cy="25400"/>
+          </a:xfrm>
+          <a:prstGeom prst="rect">
+            <a:avLst/>
+          </a:prstGeom>
+          <a:solidFill>
+            <a:srgbClr val="F2A24E"/>
+          </a:solidFill>
+          <a:ln>
+            <a:noFill/>
+          </a:ln>
+        </p:spPr>
+        <p:txBody>
+          <a:bodyPr/>
+          <a:lstStyle/>
+          <a:p>
+            <a:endParaRPr/>
+          </a:p>
+        </p:txBody>
+      </p:sp>
+      <p:sp>
+        <p:nvSpPr>
+          <p:cNvPr id="421" name="num2"/>
+          <p:cNvSpPr txBox="1"/>
+          <p:nvPr/>
+        </p:nvSpPr>
+        <p:spPr>
+          <a:xfrm>
+            <a:off x="6629400" y="1905000"/>
+            <a:ext cx="1143000" cy="787400"/>
+          </a:xfrm>
+          <a:prstGeom prst="rect">
+            <a:avLst/>
+          </a:prstGeom>
+          <a:noFill/>
+        </p:spPr>
+        <p:txBody>
+          <a:bodyPr wrap="square" lIns="0" tIns="0" rIns="0" bIns="0" anchor="t"/>
+          <a:lstStyle/>
+          <a:p>
+            <a:pPr algn="l">
+              <a:buNone/>
+            </a:pPr>
+            <a:r>
+              <a:rPr lang="fr-CA" sz="4600" b="1" dirty="0">
+                <a:solidFill>
+                  <a:srgbClr val="F2A24E"/>
+                </a:solidFill>
+                <a:latin typeface="Cambria" pitchFamily="34" charset="0"/>
+              </a:rPr>
+              <a:t>2</a:t>
+            </a:r>
+          </a:p>
+        </p:txBody>
+      </p:sp>
+      <p:sp>
+        <p:nvSpPr>
+          <p:cNvPr id="431" name="rule2"/>
+          <p:cNvSpPr/>
+          <p:nvPr/>
+        </p:nvSpPr>
+        <p:spPr>
+          <a:xfrm>
+            <a:off x="6654800" y="3276600"/>
+            <a:ext cx="711200" cy="25400"/>
+          </a:xfrm>
+          <a:prstGeom prst="rect">
+            <a:avLst/>
+          </a:prstGeom>
+          <a:solidFill>
+            <a:srgbClr val="F2A24E"/>
+          </a:solidFill>
+          <a:ln>
+            <a:noFill/>
+          </a:ln>
+        </p:spPr>
+        <p:txBody>
+          <a:bodyPr/>
+          <a:lstStyle/>
+          <a:p>
+            <a:endParaRPr/>
+          </a:p>
+        </p:txBody>
+      </p:sp>
     </p:spTree>
     <p:extLst>
       <p:ext uri="{BB962C8B-B14F-4D97-AF65-F5344CB8AC3E}">
-        <p14:creationId xmlns:p14="http://schemas.microsoft.com/office/powerpoint/2010/main" val="3304258000"/>
+        <p14:creationId xmlns:p14="http://schemas.microsoft.com/office/powerpoint/2010/main" val="3476847461"/>
       </p:ext>
     </p:extLst>
   </p:cSld>
@@ -6771,7 +11478,7 @@
 </p:sld>
 </file>
 
-<file path=ppt/slides/slide5.xml><?xml version="1.0" encoding="utf-8"?>
+<file path=ppt/slides/slide7.xml><?xml version="1.0" encoding="utf-8"?>
 <p:sld xmlns:a="http://schemas.openxmlformats.org/drawingml/2006/main" xmlns:r="http://schemas.openxmlformats.org/officeDocument/2006/relationships" xmlns:p="http://schemas.openxmlformats.org/presentationml/2006/main">
   <p:cSld name="Slide 5">
     <p:bg>
@@ -6829,7 +11536,18 @@
                 <a:ea typeface="Cambria" pitchFamily="34" charset="-122"/>
                 <a:cs typeface="Cambria" pitchFamily="34" charset="-120"/>
               </a:rPr>
-              <a:t>La prière : l'invocation</a:t>
+              <a:t>La prière : l'</a:t>
+            </a:r>
+            <a:r>
+              <a:rPr lang="en-US" sz="3200" b="1" i="1" dirty="0">
+                <a:solidFill>
+                  <a:srgbClr val="F5EFE4"/>
+                </a:solidFill>
+                <a:latin typeface="Cambria" pitchFamily="34" charset="0"/>
+                <a:ea typeface="Cambria" pitchFamily="34" charset="-122"/>
+                <a:cs typeface="Cambria" pitchFamily="34" charset="-120"/>
+              </a:rPr>
+              <a:t>invocation</a:t>
             </a:r>
             <a:endParaRPr lang="en-US" sz="3200" dirty="0"/>
           </a:p>
@@ -7480,10 +12198,74 @@
           </a:p>
         </p:txBody>
       </p:sp>
+      <p:sp>
+        <p:nvSpPr>
+          <p:cNvPr id="400" name="accentBar"/>
+          <p:cNvSpPr/>
+          <p:nvPr/>
+        </p:nvSpPr>
+        <p:spPr>
+          <a:xfrm>
+            <a:off x="457200" y="203200"/>
+            <a:ext cx="50800" cy="787400"/>
+          </a:xfrm>
+          <a:prstGeom prst="rect">
+            <a:avLst/>
+          </a:prstGeom>
+          <a:solidFill>
+            <a:srgbClr val="F2A24E"/>
+          </a:solidFill>
+          <a:ln>
+            <a:noFill/>
+          </a:ln>
+        </p:spPr>
+        <p:txBody>
+          <a:bodyPr/>
+          <a:lstStyle/>
+          <a:p>
+            <a:endParaRPr/>
+          </a:p>
+        </p:txBody>
+      </p:sp>
+      <p:sp>
+        <p:nvSpPr>
+          <p:cNvPr id="401" name="eyebrow"/>
+          <p:cNvSpPr txBox="1"/>
+          <p:nvPr/>
+        </p:nvSpPr>
+        <p:spPr>
+          <a:xfrm>
+            <a:off x="546100" y="165100"/>
+            <a:ext cx="8890000" cy="228600"/>
+          </a:xfrm>
+          <a:prstGeom prst="rect">
+            <a:avLst/>
+          </a:prstGeom>
+          <a:noFill/>
+        </p:spPr>
+        <p:txBody>
+          <a:bodyPr wrap="none" lIns="0" tIns="0" rIns="0" bIns="0" anchor="t"/>
+          <a:lstStyle/>
+          <a:p>
+            <a:pPr algn="l">
+              <a:buNone/>
+            </a:pPr>
+            <a:r>
+              <a:rPr lang="fr-CA" sz="1400" b="1" spc="320" dirty="0">
+                <a:solidFill>
+                  <a:srgbClr val="F2A24E"/>
+                </a:solidFill>
+                <a:latin typeface="Cambria" pitchFamily="34" charset="0"/>
+              </a:rPr>
+              <a:t>07 · LA PRIÈRE</a:t>
+            </a:r>
+          </a:p>
+        </p:txBody>
+      </p:sp>
     </p:spTree>
     <p:extLst>
       <p:ext uri="{BB962C8B-B14F-4D97-AF65-F5344CB8AC3E}">
-        <p14:creationId xmlns:p14="http://schemas.microsoft.com/office/powerpoint/2010/main" val="2732842191"/>
+        <p14:creationId xmlns:p14="http://schemas.microsoft.com/office/powerpoint/2010/main" val="2377755880"/>
       </p:ext>
     </p:extLst>
   </p:cSld>
@@ -7493,7 +12275,7 @@
 </p:sld>
 </file>
 
-<file path=ppt/slides/slide6.xml><?xml version="1.0" encoding="utf-8"?>
+<file path=ppt/slides/slide8.xml><?xml version="1.0" encoding="utf-8"?>
 <p:sld xmlns:a="http://schemas.openxmlformats.org/drawingml/2006/main" xmlns:r="http://schemas.openxmlformats.org/officeDocument/2006/relationships" xmlns:p="http://schemas.openxmlformats.org/presentationml/2006/main">
   <p:cSld name="Slide 6">
     <p:bg>
@@ -8177,10 +12959,45 @@
           </a:p>
         </p:txBody>
       </p:sp>
+      <p:sp>
+        <p:nvSpPr>
+          <p:cNvPr id="401" name="eyebrow"/>
+          <p:cNvSpPr txBox="1"/>
+          <p:nvPr/>
+        </p:nvSpPr>
+        <p:spPr>
+          <a:xfrm>
+            <a:off x="1422400" y="127000"/>
+            <a:ext cx="8890000" cy="228600"/>
+          </a:xfrm>
+          <a:prstGeom prst="rect">
+            <a:avLst/>
+          </a:prstGeom>
+          <a:noFill/>
+        </p:spPr>
+        <p:txBody>
+          <a:bodyPr wrap="none" lIns="0" tIns="0" rIns="0" bIns="0" anchor="t"/>
+          <a:lstStyle/>
+          <a:p>
+            <a:pPr algn="l">
+              <a:buNone/>
+            </a:pPr>
+            <a:r>
+              <a:rPr lang="fr-CA" sz="1400" b="1" spc="320" dirty="0">
+                <a:solidFill>
+                  <a:srgbClr val="F2A24E"/>
+                </a:solidFill>
+                <a:latin typeface="Cambria" pitchFamily="34" charset="0"/>
+              </a:rPr>
+              <a:t>08 · MOUVEMENT I</a:t>
+            </a:r>
+          </a:p>
+        </p:txBody>
+      </p:sp>
     </p:spTree>
     <p:extLst>
       <p:ext uri="{BB962C8B-B14F-4D97-AF65-F5344CB8AC3E}">
-        <p14:creationId xmlns:p14="http://schemas.microsoft.com/office/powerpoint/2010/main" val="3373682352"/>
+        <p14:creationId xmlns:p14="http://schemas.microsoft.com/office/powerpoint/2010/main" val="1566204714"/>
       </p:ext>
     </p:extLst>
   </p:cSld>
@@ -8190,7 +13007,7 @@
 </p:sld>
 </file>
 
-<file path=ppt/slides/slide7.xml><?xml version="1.0" encoding="utf-8"?>
+<file path=ppt/slides/slide9.xml><?xml version="1.0" encoding="utf-8"?>
 <p:sld xmlns:a="http://schemas.openxmlformats.org/drawingml/2006/main" xmlns:r="http://schemas.openxmlformats.org/officeDocument/2006/relationships" xmlns:p="http://schemas.openxmlformats.org/presentationml/2006/main">
   <p:cSld name="Slide 7">
     <p:bg>
@@ -10131,1236 +14948,45 @@
           </a:p>
         </p:txBody>
       </p:sp>
+      <p:sp>
+        <p:nvSpPr>
+          <p:cNvPr id="401" name="eyebrow"/>
+          <p:cNvSpPr txBox="1"/>
+          <p:nvPr/>
+        </p:nvSpPr>
+        <p:spPr>
+          <a:xfrm>
+            <a:off x="1422400" y="127000"/>
+            <a:ext cx="8890000" cy="228600"/>
+          </a:xfrm>
+          <a:prstGeom prst="rect">
+            <a:avLst/>
+          </a:prstGeom>
+          <a:noFill/>
+        </p:spPr>
+        <p:txBody>
+          <a:bodyPr wrap="none" lIns="0" tIns="0" rIns="0" bIns="0" anchor="t"/>
+          <a:lstStyle/>
+          <a:p>
+            <a:pPr algn="l">
+              <a:buNone/>
+            </a:pPr>
+            <a:r>
+              <a:rPr lang="fr-CA" sz="1400" b="1" spc="320" dirty="0">
+                <a:solidFill>
+                  <a:srgbClr val="F2A24E"/>
+                </a:solidFill>
+                <a:latin typeface="Cambria" pitchFamily="34" charset="0"/>
+              </a:rPr>
+              <a:t>09 · MOUVEMENT II</a:t>
+            </a:r>
+          </a:p>
+        </p:txBody>
+      </p:sp>
     </p:spTree>
     <p:extLst>
       <p:ext uri="{BB962C8B-B14F-4D97-AF65-F5344CB8AC3E}">
-        <p14:creationId xmlns:p14="http://schemas.microsoft.com/office/powerpoint/2010/main" val="70202141"/>
-      </p:ext>
-    </p:extLst>
-  </p:cSld>
-  <p:clrMapOvr>
-    <a:masterClrMapping/>
-  </p:clrMapOvr>
-</p:sld>
-</file>
-
-<file path=ppt/slides/slide8.xml><?xml version="1.0" encoding="utf-8"?>
-<p:sld xmlns:a="http://schemas.openxmlformats.org/drawingml/2006/main" xmlns:r="http://schemas.openxmlformats.org/officeDocument/2006/relationships" xmlns:p="http://schemas.openxmlformats.org/presentationml/2006/main">
-  <p:cSld name="Slide 8">
-    <p:bg>
-      <p:bgPr>
-        <a:solidFill>
-          <a:srgbClr val="121212"/>
-        </a:solidFill>
-        <a:effectLst/>
-      </p:bgPr>
-    </p:bg>
-    <p:spTree>
-      <p:nvGrpSpPr>
-        <p:cNvPr id="1" name=""/>
-        <p:cNvGrpSpPr/>
-        <p:nvPr/>
-      </p:nvGrpSpPr>
-      <p:grpSpPr>
-        <a:xfrm>
-          <a:off x="0" y="0"/>
-          <a:ext cx="0" cy="0"/>
-          <a:chOff x="0" y="0"/>
-          <a:chExt cx="0" cy="0"/>
-        </a:xfrm>
-      </p:grpSpPr>
-      <p:sp>
-        <p:nvSpPr>
-          <p:cNvPr id="2" name="Shape 0"/>
-          <p:cNvSpPr/>
-          <p:nvPr/>
-        </p:nvSpPr>
-        <p:spPr>
-          <a:xfrm>
-            <a:off x="548640" y="411480"/>
-            <a:ext cx="713232" cy="713232"/>
-          </a:xfrm>
-          <a:prstGeom prst="ellipse">
-            <a:avLst/>
-          </a:prstGeom>
-          <a:solidFill>
-            <a:srgbClr val="E8821E"/>
-          </a:solidFill>
-          <a:ln/>
-        </p:spPr>
-        <p:txBody>
-          <a:bodyPr/>
-          <a:lstStyle/>
-          <a:p>
-            <a:endParaRPr lang="fr-CA"/>
-          </a:p>
-        </p:txBody>
-      </p:sp>
-      <p:pic>
-        <p:nvPicPr>
-          <p:cNvPr id="3" name="Image 0" descr="preencoded.png"/>
-          <p:cNvPicPr>
-            <a:picLocks noChangeAspect="1"/>
-          </p:cNvPicPr>
-          <p:nvPr/>
-        </p:nvPicPr>
-        <p:blipFill>
-          <a:blip r:embed="rId3"/>
-          <a:stretch>
-            <a:fillRect/>
-          </a:stretch>
-        </p:blipFill>
-        <p:spPr>
-          <a:xfrm>
-            <a:off x="741213" y="604053"/>
-            <a:ext cx="328087" cy="328087"/>
-          </a:xfrm>
-          <a:prstGeom prst="rect">
-            <a:avLst/>
-          </a:prstGeom>
-        </p:spPr>
-      </p:pic>
-      <p:sp>
-        <p:nvSpPr>
-          <p:cNvPr id="4" name="Text 1"/>
-          <p:cNvSpPr/>
-          <p:nvPr/>
-        </p:nvSpPr>
-        <p:spPr>
-          <a:xfrm>
-            <a:off x="1417320" y="411480"/>
-            <a:ext cx="10149840" cy="713232"/>
-          </a:xfrm>
-          <a:prstGeom prst="rect">
-            <a:avLst/>
-          </a:prstGeom>
-          <a:noFill/>
-          <a:ln/>
-        </p:spPr>
-        <p:txBody>
-          <a:bodyPr wrap="square" lIns="0" tIns="0" rIns="0" bIns="0" rtlCol="0" anchor="ctr"/>
-          <a:lstStyle/>
-          <a:p>
-            <a:pPr marL="0" indent="0">
-              <a:buNone/>
-            </a:pPr>
-            <a:r>
-              <a:rPr lang="en-US" sz="2700" b="1" dirty="0">
-                <a:solidFill>
-                  <a:srgbClr val="F5EFE4"/>
-                </a:solidFill>
-                <a:latin typeface="Cambria" pitchFamily="34" charset="0"/>
-                <a:ea typeface="Cambria" pitchFamily="34" charset="-122"/>
-                <a:cs typeface="Cambria" pitchFamily="34" charset="-120"/>
-              </a:rPr>
-              <a:t>3.  « Les étoiles, du fond du puits »</a:t>
-            </a:r>
-            <a:endParaRPr lang="en-US" sz="2700" dirty="0"/>
-          </a:p>
-        </p:txBody>
-      </p:sp>
-      <p:sp>
-        <p:nvSpPr>
-          <p:cNvPr id="5" name="Shape 2"/>
-          <p:cNvSpPr/>
-          <p:nvPr/>
-        </p:nvSpPr>
-        <p:spPr>
-          <a:xfrm>
-            <a:off x="548640" y="1417320"/>
-            <a:ext cx="5943600" cy="4617720"/>
-          </a:xfrm>
-          <a:prstGeom prst="roundRect">
-            <a:avLst>
-              <a:gd name="adj" fmla="val 1782"/>
-            </a:avLst>
-          </a:prstGeom>
-          <a:solidFill>
-            <a:srgbClr val="2A2419"/>
-          </a:solidFill>
-          <a:ln w="12700">
-            <a:solidFill>
-              <a:srgbClr val="332C22"/>
-            </a:solidFill>
-            <a:prstDash val="solid"/>
-          </a:ln>
-          <a:effectLst>
-            <a:outerShdw blurRad="114300" dist="38100" dir="5400000" algn="bl" rotWithShape="0">
-              <a:srgbClr val="000000">
-                <a:alpha val="40000"/>
-              </a:srgbClr>
-            </a:outerShdw>
-          </a:effectLst>
-        </p:spPr>
-        <p:txBody>
-          <a:bodyPr/>
-          <a:lstStyle/>
-          <a:p>
-            <a:endParaRPr lang="fr-CA"/>
-          </a:p>
-        </p:txBody>
-      </p:sp>
-      <p:sp>
-        <p:nvSpPr>
-          <p:cNvPr id="6" name="Text 3"/>
-          <p:cNvSpPr/>
-          <p:nvPr/>
-        </p:nvSpPr>
-        <p:spPr>
-          <a:xfrm>
-            <a:off x="868680" y="1783080"/>
-            <a:ext cx="5349240" cy="4114800"/>
-          </a:xfrm>
-          <a:prstGeom prst="rect">
-            <a:avLst/>
-          </a:prstGeom>
-          <a:noFill/>
-          <a:ln/>
-        </p:spPr>
-        <p:txBody>
-          <a:bodyPr wrap="square" rtlCol="0" anchor="t"/>
-          <a:lstStyle/>
-          <a:p>
-            <a:pPr marL="0" indent="0" algn="l">
-              <a:lnSpc>
-                <a:spcPts val="2278"/>
-              </a:lnSpc>
-              <a:spcAft>
-                <a:spcPts val="500"/>
-              </a:spcAft>
-              <a:buNone/>
-            </a:pPr>
-            <a:r>
-              <a:rPr lang="en-US" sz="1700" i="1" dirty="0">
-                <a:solidFill>
-                  <a:srgbClr val="F5EFE4"/>
-                </a:solidFill>
-                <a:latin typeface="Cambria" pitchFamily="34" charset="0"/>
-                <a:ea typeface="Cambria" pitchFamily="34" charset="-122"/>
-                <a:cs typeface="Cambria" pitchFamily="34" charset="-120"/>
-              </a:rPr>
-              <a:t>Seigneur, pendant le jour,</a:t>
-            </a:r>
-            <a:endParaRPr lang="en-US" sz="1700" dirty="0"/>
-          </a:p>
-          <a:p>
-            <a:pPr marL="0" indent="0" algn="l">
-              <a:lnSpc>
-                <a:spcPts val="2278"/>
-              </a:lnSpc>
-              <a:spcAft>
-                <a:spcPts val="500"/>
-              </a:spcAft>
-              <a:buNone/>
-            </a:pPr>
-            <a:r>
-              <a:rPr lang="en-US" sz="1700" i="1" dirty="0">
-                <a:solidFill>
-                  <a:srgbClr val="F5EFE4"/>
-                </a:solidFill>
-                <a:latin typeface="Cambria" pitchFamily="34" charset="0"/>
-                <a:ea typeface="Cambria" pitchFamily="34" charset="-122"/>
-                <a:cs typeface="Cambria" pitchFamily="34" charset="-120"/>
-              </a:rPr>
-              <a:t>les étoiles sont visibles</a:t>
-            </a:r>
-            <a:endParaRPr lang="en-US" sz="1700" dirty="0"/>
-          </a:p>
-          <a:p>
-            <a:pPr marL="0" indent="0" algn="l">
-              <a:lnSpc>
-                <a:spcPts val="2278"/>
-              </a:lnSpc>
-              <a:spcAft>
-                <a:spcPts val="500"/>
-              </a:spcAft>
-              <a:buNone/>
-            </a:pPr>
-            <a:r>
-              <a:rPr lang="en-US" sz="1700" i="1" dirty="0">
-                <a:solidFill>
-                  <a:srgbClr val="F5EFE4"/>
-                </a:solidFill>
-                <a:latin typeface="Cambria" pitchFamily="34" charset="0"/>
-                <a:ea typeface="Cambria" pitchFamily="34" charset="-122"/>
-                <a:cs typeface="Cambria" pitchFamily="34" charset="-120"/>
-              </a:rPr>
-              <a:t>des puits les plus profonds,</a:t>
-            </a:r>
-            <a:endParaRPr lang="en-US" sz="1700" dirty="0"/>
-          </a:p>
-          <a:p>
-            <a:pPr marL="0" indent="0" algn="l">
-              <a:lnSpc>
-                <a:spcPts val="2278"/>
-              </a:lnSpc>
-              <a:spcAft>
-                <a:spcPts val="500"/>
-              </a:spcAft>
-              <a:buNone/>
-            </a:pPr>
-            <a:r>
-              <a:rPr lang="en-US" sz="1700" i="1" dirty="0">
-                <a:solidFill>
-                  <a:srgbClr val="F5EFE4"/>
-                </a:solidFill>
-                <a:latin typeface="Cambria" pitchFamily="34" charset="0"/>
-                <a:ea typeface="Cambria" pitchFamily="34" charset="-122"/>
-                <a:cs typeface="Cambria" pitchFamily="34" charset="-120"/>
-              </a:rPr>
-              <a:t>et plus profond est le puits,</a:t>
-            </a:r>
-            <a:endParaRPr lang="en-US" sz="1700" dirty="0"/>
-          </a:p>
-          <a:p>
-            <a:pPr marL="0" indent="0" algn="l">
-              <a:lnSpc>
-                <a:spcPts val="2278"/>
-              </a:lnSpc>
-              <a:spcAft>
-                <a:spcPts val="500"/>
-              </a:spcAft>
-              <a:buNone/>
-            </a:pPr>
-            <a:r>
-              <a:rPr lang="en-US" sz="1700" i="1" dirty="0">
-                <a:solidFill>
-                  <a:srgbClr val="F5EFE4"/>
-                </a:solidFill>
-                <a:latin typeface="Cambria" pitchFamily="34" charset="0"/>
-                <a:ea typeface="Cambria" pitchFamily="34" charset="-122"/>
-                <a:cs typeface="Cambria" pitchFamily="34" charset="-120"/>
-              </a:rPr>
-              <a:t>plus resplendissent tes étoiles.</a:t>
-            </a:r>
-            <a:endParaRPr lang="en-US" sz="1700" dirty="0"/>
-          </a:p>
-        </p:txBody>
-      </p:sp>
-      <p:sp>
-        <p:nvSpPr>
-          <p:cNvPr id="7" name="Shape 4"/>
-          <p:cNvSpPr/>
-          <p:nvPr/>
-        </p:nvSpPr>
-        <p:spPr>
-          <a:xfrm>
-            <a:off x="6720840" y="1417320"/>
-            <a:ext cx="4919472" cy="4617720"/>
-          </a:xfrm>
-          <a:prstGeom prst="roundRect">
-            <a:avLst>
-              <a:gd name="adj" fmla="val 1782"/>
-            </a:avLst>
-          </a:prstGeom>
-          <a:solidFill>
-            <a:srgbClr val="1E1A14"/>
-          </a:solidFill>
-          <a:ln w="12700">
-            <a:solidFill>
-              <a:srgbClr val="332C22"/>
-            </a:solidFill>
-            <a:prstDash val="solid"/>
-          </a:ln>
-          <a:effectLst>
-            <a:outerShdw blurRad="114300" dist="38100" dir="5400000" algn="bl" rotWithShape="0">
-              <a:srgbClr val="000000">
-                <a:alpha val="40000"/>
-              </a:srgbClr>
-            </a:outerShdw>
-          </a:effectLst>
-        </p:spPr>
-        <p:txBody>
-          <a:bodyPr/>
-          <a:lstStyle/>
-          <a:p>
-            <a:endParaRPr lang="fr-CA"/>
-          </a:p>
-        </p:txBody>
-      </p:sp>
-      <p:sp>
-        <p:nvSpPr>
-          <p:cNvPr id="8" name="Text 5"/>
-          <p:cNvSpPr/>
-          <p:nvPr/>
-        </p:nvSpPr>
-        <p:spPr>
-          <a:xfrm>
-            <a:off x="6995160" y="1600200"/>
-            <a:ext cx="4389120" cy="411480"/>
-          </a:xfrm>
-          <a:prstGeom prst="rect">
-            <a:avLst/>
-          </a:prstGeom>
-          <a:noFill/>
-          <a:ln/>
-        </p:spPr>
-        <p:txBody>
-          <a:bodyPr wrap="square" rtlCol="0" anchor="ctr"/>
-          <a:lstStyle/>
-          <a:p>
-            <a:pPr marL="0" indent="0">
-              <a:buNone/>
-            </a:pPr>
-            <a:r>
-              <a:rPr lang="en-US" sz="1600" b="1" dirty="0">
-                <a:solidFill>
-                  <a:srgbClr val="E8821E"/>
-                </a:solidFill>
-                <a:latin typeface="Cambria" pitchFamily="34" charset="0"/>
-                <a:ea typeface="Cambria" pitchFamily="34" charset="-122"/>
-                <a:cs typeface="Cambria" pitchFamily="34" charset="-120"/>
-              </a:rPr>
-              <a:t>Éclairage</a:t>
-            </a:r>
-            <a:endParaRPr lang="en-US" sz="1600" dirty="0"/>
-          </a:p>
-        </p:txBody>
-      </p:sp>
-      <p:sp>
-        <p:nvSpPr>
-          <p:cNvPr id="9" name="Text 6"/>
-          <p:cNvSpPr/>
-          <p:nvPr/>
-        </p:nvSpPr>
-        <p:spPr>
-          <a:xfrm>
-            <a:off x="6995160" y="2148840"/>
-            <a:ext cx="4389120" cy="3703320"/>
-          </a:xfrm>
-          <a:prstGeom prst="rect">
-            <a:avLst/>
-          </a:prstGeom>
-          <a:noFill/>
-          <a:ln/>
-        </p:spPr>
-        <p:txBody>
-          <a:bodyPr wrap="square" rtlCol="0" anchor="t"/>
-          <a:lstStyle/>
-          <a:p>
-            <a:pPr marL="0" indent="0" algn="ctr">
-              <a:lnSpc>
-                <a:spcPts val="1848"/>
-              </a:lnSpc>
-              <a:buNone/>
-            </a:pPr>
-            <a:r>
-              <a:rPr lang="en-US" sz="1400" b="1" dirty="0">
-                <a:solidFill>
-                  <a:srgbClr val="E8821E"/>
-                </a:solidFill>
-                <a:latin typeface="Cambria" pitchFamily="34" charset="0"/>
-                <a:ea typeface="Cambria" pitchFamily="34" charset="-122"/>
-                <a:cs typeface="Cambria" pitchFamily="34" charset="-120"/>
-              </a:rPr>
-              <a:t>Sens — </a:t>
-            </a:r>
-            <a:r>
-              <a:rPr lang="en-US" sz="1400" dirty="0">
-                <a:solidFill>
-                  <a:srgbClr val="F5EFE4"/>
-                </a:solidFill>
-                <a:latin typeface="Cambria" pitchFamily="34" charset="0"/>
-                <a:ea typeface="Cambria" pitchFamily="34" charset="-122"/>
-                <a:cs typeface="Cambria" pitchFamily="34" charset="-120"/>
-              </a:rPr>
-              <a:t>image ancienne : du fond d'un puits, on aperçoit les étoiles en plein jour. Plus l'épreuve est profonde, plus la grâce de Dieu resplendit.</a:t>
-            </a:r>
-            <a:endParaRPr lang="en-US" sz="1400" dirty="0"/>
-          </a:p>
-          <a:p>
-            <a:pPr marL="0" indent="0" algn="ctr">
-              <a:lnSpc>
-                <a:spcPts val="1848"/>
-              </a:lnSpc>
-              <a:buNone/>
-            </a:pPr>
-            <a:r>
-              <a:rPr lang="en-US" sz="1400" b="1" dirty="0">
-                <a:solidFill>
-                  <a:srgbClr val="E8821E"/>
-                </a:solidFill>
-                <a:latin typeface="Cambria" pitchFamily="34" charset="0"/>
-                <a:ea typeface="Cambria" pitchFamily="34" charset="-122"/>
-                <a:cs typeface="Cambria" pitchFamily="34" charset="-120"/>
-              </a:rPr>
-              <a:t>Locus — </a:t>
-            </a:r>
-            <a:r>
-              <a:rPr lang="en-US" sz="1400" dirty="0">
-                <a:solidFill>
-                  <a:srgbClr val="F5EFE4"/>
-                </a:solidFill>
-                <a:latin typeface="Cambria" pitchFamily="34" charset="0"/>
-                <a:ea typeface="Cambria" pitchFamily="34" charset="-122"/>
-                <a:cs typeface="Cambria" pitchFamily="34" charset="-120"/>
-              </a:rPr>
-              <a:t>le trésor est porté dans des vases d'argile, afin que la puissance soit de Dieu et non de nous (2 Co 4.6-11).</a:t>
-            </a:r>
-            <a:endParaRPr lang="en-US" sz="1400" dirty="0"/>
-          </a:p>
-          <a:p>
-            <a:pPr marL="0" indent="0" algn="ctr">
-              <a:lnSpc>
-                <a:spcPts val="1848"/>
-              </a:lnSpc>
-              <a:buNone/>
-            </a:pPr>
-            <a:r>
-              <a:rPr lang="en-US" sz="1400" b="1" dirty="0">
-                <a:solidFill>
-                  <a:srgbClr val="E8821E"/>
-                </a:solidFill>
-                <a:latin typeface="Cambria" pitchFamily="34" charset="0"/>
-                <a:ea typeface="Cambria" pitchFamily="34" charset="-122"/>
-                <a:cs typeface="Cambria" pitchFamily="34" charset="-120"/>
-              </a:rPr>
-              <a:t>Pour l'assemblée — </a:t>
-            </a:r>
-            <a:r>
-              <a:rPr lang="en-US" sz="1400" dirty="0">
-                <a:solidFill>
-                  <a:srgbClr val="F5EFE4"/>
-                </a:solidFill>
-                <a:latin typeface="Cambria" pitchFamily="34" charset="0"/>
-                <a:ea typeface="Cambria" pitchFamily="34" charset="-122"/>
-                <a:cs typeface="Cambria" pitchFamily="34" charset="-120"/>
-              </a:rPr>
-              <a:t>la profondeur de la détresse n'éteint pas la vision : elle la révèle. Sa grâce suffit (2 Co 12.9-10).</a:t>
-            </a:r>
-            <a:endParaRPr lang="en-US" sz="1400" dirty="0"/>
-          </a:p>
-        </p:txBody>
-      </p:sp>
-      <p:sp>
-        <p:nvSpPr>
-          <p:cNvPr id="10" name="Text 7"/>
-          <p:cNvSpPr/>
-          <p:nvPr/>
-        </p:nvSpPr>
-        <p:spPr>
-          <a:xfrm>
-            <a:off x="548640" y="6437376"/>
-            <a:ext cx="10515600" cy="274320"/>
-          </a:xfrm>
-          <a:prstGeom prst="rect">
-            <a:avLst/>
-          </a:prstGeom>
-          <a:noFill/>
-          <a:ln/>
-        </p:spPr>
-        <p:txBody>
-          <a:bodyPr wrap="square" lIns="0" tIns="0" rIns="0" bIns="0" rtlCol="0" anchor="ctr"/>
-          <a:lstStyle/>
-          <a:p>
-            <a:pPr marL="0" indent="0" algn="l">
-              <a:buNone/>
-            </a:pPr>
-            <a:r>
-              <a:rPr lang="en-US" sz="900" dirty="0">
-                <a:solidFill>
-                  <a:srgbClr val="A89F90"/>
-                </a:solidFill>
-                <a:latin typeface="Cambria" pitchFamily="34" charset="0"/>
-                <a:ea typeface="Cambria" pitchFamily="34" charset="-122"/>
-                <a:cs typeface="Cambria" pitchFamily="34" charset="-120"/>
-              </a:rPr>
-              <a:t>Église Baptiste de Charlesbourg</a:t>
-            </a:r>
-            <a:r>
-              <a:rPr lang="en-US" sz="900" dirty="0">
-                <a:solidFill>
-                  <a:srgbClr val="6E665A"/>
-                </a:solidFill>
-                <a:latin typeface="Cambria" pitchFamily="34" charset="0"/>
-                <a:ea typeface="Cambria" pitchFamily="34" charset="-122"/>
-                <a:cs typeface="Cambria" pitchFamily="34" charset="-120"/>
-              </a:rPr>
-              <a:t>   ·   Pasteur Simon Ouellette   ·   EBC   ·   NEG 1979</a:t>
-            </a:r>
-            <a:endParaRPr lang="en-US" sz="900" dirty="0"/>
-          </a:p>
-        </p:txBody>
-      </p:sp>
-      <p:sp>
-        <p:nvSpPr>
-          <p:cNvPr id="11" name="Text 8"/>
-          <p:cNvSpPr/>
-          <p:nvPr/>
-        </p:nvSpPr>
-        <p:spPr>
-          <a:xfrm>
-            <a:off x="11430000" y="6400800"/>
-            <a:ext cx="502920" cy="292608"/>
-          </a:xfrm>
-          <a:prstGeom prst="rect">
-            <a:avLst/>
-          </a:prstGeom>
-          <a:noFill/>
-          <a:ln/>
-        </p:spPr>
-        <p:txBody>
-          <a:bodyPr wrap="square" rtlCol="0" anchor="ctr"/>
-          <a:lstStyle/>
-          <a:p>
-            <a:pPr marL="0" indent="0" algn="r">
-              <a:buNone/>
-            </a:pPr>
-            <a:r>
-              <a:rPr lang="en-US" sz="1000" dirty="0">
-                <a:solidFill>
-                  <a:srgbClr val="A89F90"/>
-                </a:solidFill>
-                <a:latin typeface="Cambria" pitchFamily="34" charset="0"/>
-                <a:ea typeface="Cambria" pitchFamily="34" charset="-122"/>
-                <a:cs typeface="Cambria" pitchFamily="34" charset="-120"/>
-              </a:rPr>
-              <a:t>8</a:t>
-            </a:r>
-            <a:endParaRPr lang="en-US" sz="1000" dirty="0"/>
-          </a:p>
-        </p:txBody>
-      </p:sp>
-    </p:spTree>
-    <p:extLst>
-      <p:ext uri="{BB962C8B-B14F-4D97-AF65-F5344CB8AC3E}">
-        <p14:creationId xmlns:p14="http://schemas.microsoft.com/office/powerpoint/2010/main" val="362923616"/>
-      </p:ext>
-    </p:extLst>
-  </p:cSld>
-  <p:clrMapOvr>
-    <a:masterClrMapping/>
-  </p:clrMapOvr>
-</p:sld>
-</file>
-
-<file path=ppt/slides/slide9.xml><?xml version="1.0" encoding="utf-8"?>
-<p:sld xmlns:a="http://schemas.openxmlformats.org/drawingml/2006/main" xmlns:r="http://schemas.openxmlformats.org/officeDocument/2006/relationships" xmlns:p="http://schemas.openxmlformats.org/presentationml/2006/main">
-  <p:cSld name="Slide 9">
-    <p:bg>
-      <p:bgPr>
-        <a:solidFill>
-          <a:srgbClr val="121212"/>
-        </a:solidFill>
-        <a:effectLst/>
-      </p:bgPr>
-    </p:bg>
-    <p:spTree>
-      <p:nvGrpSpPr>
-        <p:cNvPr id="1" name=""/>
-        <p:cNvGrpSpPr/>
-        <p:nvPr/>
-      </p:nvGrpSpPr>
-      <p:grpSpPr>
-        <a:xfrm>
-          <a:off x="0" y="0"/>
-          <a:ext cx="0" cy="0"/>
-          <a:chOff x="0" y="0"/>
-          <a:chExt cx="0" cy="0"/>
-        </a:xfrm>
-      </p:grpSpPr>
-      <p:sp>
-        <p:nvSpPr>
-          <p:cNvPr id="2" name="Shape 0"/>
-          <p:cNvSpPr/>
-          <p:nvPr/>
-        </p:nvSpPr>
-        <p:spPr>
-          <a:xfrm>
-            <a:off x="548640" y="411480"/>
-            <a:ext cx="713232" cy="713232"/>
-          </a:xfrm>
-          <a:prstGeom prst="ellipse">
-            <a:avLst/>
-          </a:prstGeom>
-          <a:solidFill>
-            <a:srgbClr val="E8821E"/>
-          </a:solidFill>
-          <a:ln/>
-        </p:spPr>
-        <p:txBody>
-          <a:bodyPr/>
-          <a:lstStyle/>
-          <a:p>
-            <a:endParaRPr lang="fr-CA"/>
-          </a:p>
-        </p:txBody>
-      </p:sp>
-      <p:pic>
-        <p:nvPicPr>
-          <p:cNvPr id="3" name="Image 0" descr="preencoded.png"/>
-          <p:cNvPicPr>
-            <a:picLocks noChangeAspect="1"/>
-          </p:cNvPicPr>
-          <p:nvPr/>
-        </p:nvPicPr>
-        <p:blipFill>
-          <a:blip r:embed="rId3"/>
-          <a:stretch>
-            <a:fillRect/>
-          </a:stretch>
-        </p:blipFill>
-        <p:spPr>
-          <a:xfrm>
-            <a:off x="741213" y="604053"/>
-            <a:ext cx="328087" cy="328087"/>
-          </a:xfrm>
-          <a:prstGeom prst="rect">
-            <a:avLst/>
-          </a:prstGeom>
-        </p:spPr>
-      </p:pic>
-      <p:sp>
-        <p:nvSpPr>
-          <p:cNvPr id="4" name="Text 1"/>
-          <p:cNvSpPr/>
-          <p:nvPr/>
-        </p:nvSpPr>
-        <p:spPr>
-          <a:xfrm>
-            <a:off x="1417320" y="411480"/>
-            <a:ext cx="10149840" cy="713232"/>
-          </a:xfrm>
-          <a:prstGeom prst="rect">
-            <a:avLst/>
-          </a:prstGeom>
-          <a:noFill/>
-          <a:ln/>
-        </p:spPr>
-        <p:txBody>
-          <a:bodyPr wrap="square" lIns="0" tIns="0" rIns="0" bIns="0" rtlCol="0" anchor="ctr"/>
-          <a:lstStyle/>
-          <a:p>
-            <a:pPr marL="0" indent="0">
-              <a:buNone/>
-            </a:pPr>
-            <a:r>
-              <a:rPr lang="en-US" sz="2700" b="1" dirty="0">
-                <a:solidFill>
-                  <a:srgbClr val="F5EFE4"/>
-                </a:solidFill>
-                <a:latin typeface="Cambria" pitchFamily="34" charset="0"/>
-                <a:ea typeface="Cambria" pitchFamily="34" charset="-122"/>
-                <a:cs typeface="Cambria" pitchFamily="34" charset="-120"/>
-              </a:rPr>
-              <a:t>4.  « Donne-moi de trouver »</a:t>
-            </a:r>
-            <a:endParaRPr lang="en-US" sz="2700" dirty="0"/>
-          </a:p>
-        </p:txBody>
-      </p:sp>
-      <p:sp>
-        <p:nvSpPr>
-          <p:cNvPr id="5" name="Shape 2"/>
-          <p:cNvSpPr/>
-          <p:nvPr/>
-        </p:nvSpPr>
-        <p:spPr>
-          <a:xfrm>
-            <a:off x="548640" y="1417320"/>
-            <a:ext cx="5943600" cy="4617720"/>
-          </a:xfrm>
-          <a:prstGeom prst="roundRect">
-            <a:avLst>
-              <a:gd name="adj" fmla="val 1782"/>
-            </a:avLst>
-          </a:prstGeom>
-          <a:solidFill>
-            <a:srgbClr val="2A2419"/>
-          </a:solidFill>
-          <a:ln w="12700">
-            <a:solidFill>
-              <a:srgbClr val="332C22"/>
-            </a:solidFill>
-            <a:prstDash val="solid"/>
-          </a:ln>
-          <a:effectLst>
-            <a:outerShdw blurRad="114300" dist="38100" dir="5400000" algn="bl" rotWithShape="0">
-              <a:srgbClr val="000000">
-                <a:alpha val="40000"/>
-              </a:srgbClr>
-            </a:outerShdw>
-          </a:effectLst>
-        </p:spPr>
-        <p:txBody>
-          <a:bodyPr/>
-          <a:lstStyle/>
-          <a:p>
-            <a:endParaRPr lang="fr-CA"/>
-          </a:p>
-        </p:txBody>
-      </p:sp>
-      <p:sp>
-        <p:nvSpPr>
-          <p:cNvPr id="6" name="Text 3"/>
-          <p:cNvSpPr/>
-          <p:nvPr/>
-        </p:nvSpPr>
-        <p:spPr>
-          <a:xfrm>
-            <a:off x="868680" y="1783080"/>
-            <a:ext cx="5349240" cy="4114800"/>
-          </a:xfrm>
-          <a:prstGeom prst="rect">
-            <a:avLst/>
-          </a:prstGeom>
-          <a:noFill/>
-          <a:ln/>
-        </p:spPr>
-        <p:txBody>
-          <a:bodyPr wrap="square" rtlCol="0" anchor="t"/>
-          <a:lstStyle/>
-          <a:p>
-            <a:pPr marL="0" indent="0" algn="l">
-              <a:lnSpc>
-                <a:spcPts val="2144"/>
-              </a:lnSpc>
-              <a:spcAft>
-                <a:spcPts val="500"/>
-              </a:spcAft>
-              <a:buNone/>
-            </a:pPr>
-            <a:r>
-              <a:rPr lang="en-US" sz="1600" i="1" dirty="0">
-                <a:solidFill>
-                  <a:srgbClr val="F5EFE4"/>
-                </a:solidFill>
-                <a:latin typeface="Cambria" pitchFamily="34" charset="0"/>
-                <a:ea typeface="Cambria" pitchFamily="34" charset="-122"/>
-                <a:cs typeface="Cambria" pitchFamily="34" charset="-120"/>
-              </a:rPr>
-              <a:t>Donne-moi de trouver</a:t>
-            </a:r>
-            <a:endParaRPr lang="en-US" sz="1600" dirty="0"/>
-          </a:p>
-          <a:p>
-            <a:pPr marL="0" indent="0" algn="l">
-              <a:lnSpc>
-                <a:spcPts val="2144"/>
-              </a:lnSpc>
-              <a:spcAft>
-                <a:spcPts val="500"/>
-              </a:spcAft>
-              <a:buNone/>
-            </a:pPr>
-            <a:r>
-              <a:rPr lang="en-US" sz="1600" i="1" dirty="0">
-                <a:solidFill>
-                  <a:srgbClr val="F5EFE4"/>
-                </a:solidFill>
-                <a:latin typeface="Cambria" pitchFamily="34" charset="0"/>
-                <a:ea typeface="Cambria" pitchFamily="34" charset="-122"/>
-                <a:cs typeface="Cambria" pitchFamily="34" charset="-120"/>
-              </a:rPr>
-              <a:t>ta lumière dans mes ténèbres,</a:t>
-            </a:r>
-            <a:endParaRPr lang="en-US" sz="1600" dirty="0"/>
-          </a:p>
-          <a:p>
-            <a:pPr marL="0" indent="0" algn="l">
-              <a:lnSpc>
-                <a:spcPts val="2144"/>
-              </a:lnSpc>
-              <a:spcAft>
-                <a:spcPts val="500"/>
-              </a:spcAft>
-              <a:buNone/>
-            </a:pPr>
-            <a:r>
-              <a:rPr lang="en-US" sz="1600" i="1" dirty="0">
-                <a:solidFill>
-                  <a:srgbClr val="F5EFE4"/>
-                </a:solidFill>
-                <a:latin typeface="Cambria" pitchFamily="34" charset="0"/>
-                <a:ea typeface="Cambria" pitchFamily="34" charset="-122"/>
-                <a:cs typeface="Cambria" pitchFamily="34" charset="-120"/>
-              </a:rPr>
-              <a:t>ta vie dans ma mort,</a:t>
-            </a:r>
-            <a:endParaRPr lang="en-US" sz="1600" dirty="0"/>
-          </a:p>
-          <a:p>
-            <a:pPr marL="0" indent="0" algn="l">
-              <a:lnSpc>
-                <a:spcPts val="2144"/>
-              </a:lnSpc>
-              <a:spcAft>
-                <a:spcPts val="500"/>
-              </a:spcAft>
-              <a:buNone/>
-            </a:pPr>
-            <a:r>
-              <a:rPr lang="en-US" sz="1600" i="1" dirty="0">
-                <a:solidFill>
-                  <a:srgbClr val="F5EFE4"/>
-                </a:solidFill>
-                <a:latin typeface="Cambria" pitchFamily="34" charset="0"/>
-                <a:ea typeface="Cambria" pitchFamily="34" charset="-122"/>
-                <a:cs typeface="Cambria" pitchFamily="34" charset="-120"/>
-              </a:rPr>
-              <a:t>ta joie dans mes peines,</a:t>
-            </a:r>
-            <a:endParaRPr lang="en-US" sz="1600" dirty="0"/>
-          </a:p>
-          <a:p>
-            <a:pPr marL="0" indent="0" algn="l">
-              <a:lnSpc>
-                <a:spcPts val="2144"/>
-              </a:lnSpc>
-              <a:spcAft>
-                <a:spcPts val="500"/>
-              </a:spcAft>
-              <a:buNone/>
-            </a:pPr>
-            <a:r>
-              <a:rPr lang="en-US" sz="1600" i="1" dirty="0">
-                <a:solidFill>
-                  <a:srgbClr val="F5EFE4"/>
-                </a:solidFill>
-                <a:latin typeface="Cambria" pitchFamily="34" charset="0"/>
-                <a:ea typeface="Cambria" pitchFamily="34" charset="-122"/>
-                <a:cs typeface="Cambria" pitchFamily="34" charset="-120"/>
-              </a:rPr>
-              <a:t>ta grâce dans mon péché,</a:t>
-            </a:r>
-            <a:endParaRPr lang="en-US" sz="1600" dirty="0"/>
-          </a:p>
-          <a:p>
-            <a:pPr marL="0" indent="0" algn="l">
-              <a:lnSpc>
-                <a:spcPts val="2144"/>
-              </a:lnSpc>
-              <a:spcAft>
-                <a:spcPts val="500"/>
-              </a:spcAft>
-              <a:buNone/>
-            </a:pPr>
-            <a:r>
-              <a:rPr lang="en-US" sz="1600" i="1" dirty="0">
-                <a:solidFill>
-                  <a:srgbClr val="F5EFE4"/>
-                </a:solidFill>
-                <a:latin typeface="Cambria" pitchFamily="34" charset="0"/>
-                <a:ea typeface="Cambria" pitchFamily="34" charset="-122"/>
-                <a:cs typeface="Cambria" pitchFamily="34" charset="-120"/>
-              </a:rPr>
-              <a:t>tes richesses dans ma pauvreté,</a:t>
-            </a:r>
-            <a:endParaRPr lang="en-US" sz="1600" dirty="0"/>
-          </a:p>
-          <a:p>
-            <a:pPr marL="0" indent="0" algn="l">
-              <a:lnSpc>
-                <a:spcPts val="2144"/>
-              </a:lnSpc>
-              <a:spcAft>
-                <a:spcPts val="500"/>
-              </a:spcAft>
-              <a:buNone/>
-            </a:pPr>
-            <a:r>
-              <a:rPr lang="en-US" sz="1600" i="1" dirty="0">
-                <a:solidFill>
-                  <a:srgbClr val="F5EFE4"/>
-                </a:solidFill>
-                <a:latin typeface="Cambria" pitchFamily="34" charset="0"/>
-                <a:ea typeface="Cambria" pitchFamily="34" charset="-122"/>
-                <a:cs typeface="Cambria" pitchFamily="34" charset="-120"/>
-              </a:rPr>
-              <a:t>ta gloire dans ma vallée.</a:t>
-            </a:r>
-            <a:endParaRPr lang="en-US" sz="1600" dirty="0"/>
-          </a:p>
-        </p:txBody>
-      </p:sp>
-      <p:sp>
-        <p:nvSpPr>
-          <p:cNvPr id="7" name="Shape 4"/>
-          <p:cNvSpPr/>
-          <p:nvPr/>
-        </p:nvSpPr>
-        <p:spPr>
-          <a:xfrm>
-            <a:off x="6720840" y="1417320"/>
-            <a:ext cx="4919472" cy="4617720"/>
-          </a:xfrm>
-          <a:prstGeom prst="roundRect">
-            <a:avLst>
-              <a:gd name="adj" fmla="val 1782"/>
-            </a:avLst>
-          </a:prstGeom>
-          <a:solidFill>
-            <a:srgbClr val="1E1A14"/>
-          </a:solidFill>
-          <a:ln w="12700">
-            <a:solidFill>
-              <a:srgbClr val="332C22"/>
-            </a:solidFill>
-            <a:prstDash val="solid"/>
-          </a:ln>
-          <a:effectLst>
-            <a:outerShdw blurRad="114300" dist="38100" dir="5400000" algn="bl" rotWithShape="0">
-              <a:srgbClr val="000000">
-                <a:alpha val="40000"/>
-              </a:srgbClr>
-            </a:outerShdw>
-          </a:effectLst>
-        </p:spPr>
-        <p:txBody>
-          <a:bodyPr/>
-          <a:lstStyle/>
-          <a:p>
-            <a:endParaRPr lang="fr-CA"/>
-          </a:p>
-        </p:txBody>
-      </p:sp>
-      <p:sp>
-        <p:nvSpPr>
-          <p:cNvPr id="8" name="Text 5"/>
-          <p:cNvSpPr/>
-          <p:nvPr/>
-        </p:nvSpPr>
-        <p:spPr>
-          <a:xfrm>
-            <a:off x="6995160" y="1600200"/>
-            <a:ext cx="4389120" cy="411480"/>
-          </a:xfrm>
-          <a:prstGeom prst="rect">
-            <a:avLst/>
-          </a:prstGeom>
-          <a:noFill/>
-          <a:ln/>
-        </p:spPr>
-        <p:txBody>
-          <a:bodyPr wrap="square" rtlCol="0" anchor="ctr"/>
-          <a:lstStyle/>
-          <a:p>
-            <a:pPr marL="0" indent="0">
-              <a:buNone/>
-            </a:pPr>
-            <a:r>
-              <a:rPr lang="en-US" sz="1600" b="1" dirty="0">
-                <a:solidFill>
-                  <a:srgbClr val="E8821E"/>
-                </a:solidFill>
-                <a:latin typeface="Cambria" pitchFamily="34" charset="0"/>
-                <a:ea typeface="Cambria" pitchFamily="34" charset="-122"/>
-                <a:cs typeface="Cambria" pitchFamily="34" charset="-120"/>
-              </a:rPr>
-              <a:t>Éclairage</a:t>
-            </a:r>
-            <a:endParaRPr lang="en-US" sz="1600" dirty="0"/>
-          </a:p>
-        </p:txBody>
-      </p:sp>
-      <p:sp>
-        <p:nvSpPr>
-          <p:cNvPr id="9" name="Text 6"/>
-          <p:cNvSpPr/>
-          <p:nvPr/>
-        </p:nvSpPr>
-        <p:spPr>
-          <a:xfrm>
-            <a:off x="6995160" y="2148840"/>
-            <a:ext cx="4389120" cy="3703320"/>
-          </a:xfrm>
-          <a:prstGeom prst="rect">
-            <a:avLst/>
-          </a:prstGeom>
-          <a:noFill/>
-          <a:ln/>
-        </p:spPr>
-        <p:txBody>
-          <a:bodyPr wrap="square" rtlCol="0" anchor="t"/>
-          <a:lstStyle/>
-          <a:p>
-            <a:pPr marL="0" indent="0" algn="ctr">
-              <a:lnSpc>
-                <a:spcPts val="1848"/>
-              </a:lnSpc>
-              <a:buNone/>
-            </a:pPr>
-            <a:r>
-              <a:rPr lang="en-US" sz="1400" b="1" dirty="0">
-                <a:solidFill>
-                  <a:srgbClr val="E8821E"/>
-                </a:solidFill>
-                <a:latin typeface="Cambria" pitchFamily="34" charset="0"/>
-                <a:ea typeface="Cambria" pitchFamily="34" charset="-122"/>
-                <a:cs typeface="Cambria" pitchFamily="34" charset="-120"/>
-              </a:rPr>
-              <a:t>Sens — </a:t>
-            </a:r>
-            <a:r>
-              <a:rPr lang="en-US" sz="1400" dirty="0">
-                <a:solidFill>
-                  <a:srgbClr val="F5EFE4"/>
-                </a:solidFill>
-                <a:latin typeface="Cambria" pitchFamily="34" charset="0"/>
-                <a:ea typeface="Cambria" pitchFamily="34" charset="-122"/>
-                <a:cs typeface="Cambria" pitchFamily="34" charset="-120"/>
-              </a:rPr>
-              <a:t>six antithèses qui résument l'échange de la grâce : de riche qu'il était, Christ s'est fait pauvre afin de nous enrichir (2 Co 8.9).</a:t>
-            </a:r>
-            <a:endParaRPr lang="en-US" sz="1400" dirty="0"/>
-          </a:p>
-          <a:p>
-            <a:pPr marL="0" indent="0" algn="ctr">
-              <a:lnSpc>
-                <a:spcPts val="1848"/>
-              </a:lnSpc>
-              <a:buNone/>
-            </a:pPr>
-            <a:r>
-              <a:rPr lang="en-US" sz="1400" b="1" dirty="0">
-                <a:solidFill>
-                  <a:srgbClr val="E8821E"/>
-                </a:solidFill>
-                <a:latin typeface="Cambria" pitchFamily="34" charset="0"/>
-                <a:ea typeface="Cambria" pitchFamily="34" charset="-122"/>
-                <a:cs typeface="Cambria" pitchFamily="34" charset="-120"/>
-              </a:rPr>
-              <a:t>« Donne-moi » — </a:t>
-            </a:r>
-            <a:r>
-              <a:rPr lang="en-US" sz="1400" dirty="0">
-                <a:solidFill>
-                  <a:srgbClr val="F5EFE4"/>
-                </a:solidFill>
-                <a:latin typeface="Cambria" pitchFamily="34" charset="0"/>
-                <a:ea typeface="Cambria" pitchFamily="34" charset="-122"/>
-                <a:cs typeface="Cambria" pitchFamily="34" charset="-120"/>
-              </a:rPr>
-              <a:t>tout est don. La grâce ne se mérite pas, elle se reçoit (Ép 2.8). C'est le monergisme de la grâce.</a:t>
-            </a:r>
-            <a:endParaRPr lang="en-US" sz="1400" dirty="0"/>
-          </a:p>
-          <a:p>
-            <a:pPr marL="0" indent="0" algn="ctr">
-              <a:lnSpc>
-                <a:spcPts val="1848"/>
-              </a:lnSpc>
-              <a:buNone/>
-            </a:pPr>
-            <a:r>
-              <a:rPr lang="en-US" sz="1400" b="1" dirty="0">
-                <a:solidFill>
-                  <a:srgbClr val="E8821E"/>
-                </a:solidFill>
-                <a:latin typeface="Cambria" pitchFamily="34" charset="0"/>
-                <a:ea typeface="Cambria" pitchFamily="34" charset="-122"/>
-                <a:cs typeface="Cambria" pitchFamily="34" charset="-120"/>
-              </a:rPr>
-              <a:t>« Dans mon péché » — </a:t>
-            </a:r>
-            <a:r>
-              <a:rPr lang="en-US" sz="1400" dirty="0">
-                <a:solidFill>
-                  <a:srgbClr val="F5EFE4"/>
-                </a:solidFill>
-                <a:latin typeface="Cambria" pitchFamily="34" charset="0"/>
-                <a:ea typeface="Cambria" pitchFamily="34" charset="-122"/>
-                <a:cs typeface="Cambria" pitchFamily="34" charset="-120"/>
-              </a:rPr>
-              <a:t>non pas malgré, mais dans : là où le péché a abondé, la grâce a surabondé (Rm 5.20). Jamais une licence pour pécher.</a:t>
-            </a:r>
-            <a:endParaRPr lang="en-US" sz="1400" dirty="0"/>
-          </a:p>
-        </p:txBody>
-      </p:sp>
-      <p:sp>
-        <p:nvSpPr>
-          <p:cNvPr id="10" name="Text 7"/>
-          <p:cNvSpPr/>
-          <p:nvPr/>
-        </p:nvSpPr>
-        <p:spPr>
-          <a:xfrm>
-            <a:off x="548640" y="6437376"/>
-            <a:ext cx="10515600" cy="274320"/>
-          </a:xfrm>
-          <a:prstGeom prst="rect">
-            <a:avLst/>
-          </a:prstGeom>
-          <a:noFill/>
-          <a:ln/>
-        </p:spPr>
-        <p:txBody>
-          <a:bodyPr wrap="square" lIns="0" tIns="0" rIns="0" bIns="0" rtlCol="0" anchor="ctr"/>
-          <a:lstStyle/>
-          <a:p>
-            <a:pPr marL="0" indent="0" algn="l">
-              <a:buNone/>
-            </a:pPr>
-            <a:r>
-              <a:rPr lang="en-US" sz="900" dirty="0">
-                <a:solidFill>
-                  <a:srgbClr val="A89F90"/>
-                </a:solidFill>
-                <a:latin typeface="Cambria" pitchFamily="34" charset="0"/>
-                <a:ea typeface="Cambria" pitchFamily="34" charset="-122"/>
-                <a:cs typeface="Cambria" pitchFamily="34" charset="-120"/>
-              </a:rPr>
-              <a:t>Église Baptiste de Charlesbourg</a:t>
-            </a:r>
-            <a:r>
-              <a:rPr lang="en-US" sz="900" dirty="0">
-                <a:solidFill>
-                  <a:srgbClr val="6E665A"/>
-                </a:solidFill>
-                <a:latin typeface="Cambria" pitchFamily="34" charset="0"/>
-                <a:ea typeface="Cambria" pitchFamily="34" charset="-122"/>
-                <a:cs typeface="Cambria" pitchFamily="34" charset="-120"/>
-              </a:rPr>
-              <a:t>   ·   Pasteur Simon Ouellette   ·   EBC   ·   NEG 1979</a:t>
-            </a:r>
-            <a:endParaRPr lang="en-US" sz="900" dirty="0"/>
-          </a:p>
-        </p:txBody>
-      </p:sp>
-      <p:sp>
-        <p:nvSpPr>
-          <p:cNvPr id="11" name="Text 8"/>
-          <p:cNvSpPr/>
-          <p:nvPr/>
-        </p:nvSpPr>
-        <p:spPr>
-          <a:xfrm>
-            <a:off x="11430000" y="6400800"/>
-            <a:ext cx="502920" cy="292608"/>
-          </a:xfrm>
-          <a:prstGeom prst="rect">
-            <a:avLst/>
-          </a:prstGeom>
-          <a:noFill/>
-          <a:ln/>
-        </p:spPr>
-        <p:txBody>
-          <a:bodyPr wrap="square" rtlCol="0" anchor="ctr"/>
-          <a:lstStyle/>
-          <a:p>
-            <a:pPr marL="0" indent="0" algn="r">
-              <a:buNone/>
-            </a:pPr>
-            <a:r>
-              <a:rPr lang="en-US" sz="1000" dirty="0">
-                <a:solidFill>
-                  <a:srgbClr val="A89F90"/>
-                </a:solidFill>
-                <a:latin typeface="Cambria" pitchFamily="34" charset="0"/>
-                <a:ea typeface="Cambria" pitchFamily="34" charset="-122"/>
-                <a:cs typeface="Cambria" pitchFamily="34" charset="-120"/>
-              </a:rPr>
-              <a:t>9</a:t>
-            </a:r>
-            <a:endParaRPr lang="en-US" sz="1000" dirty="0"/>
-          </a:p>
-        </p:txBody>
-      </p:sp>
-    </p:spTree>
-    <p:extLst>
-      <p:ext uri="{BB962C8B-B14F-4D97-AF65-F5344CB8AC3E}">
-        <p14:creationId xmlns:p14="http://schemas.microsoft.com/office/powerpoint/2010/main" val="2082676983"/>
+        <p14:creationId xmlns:p14="http://schemas.microsoft.com/office/powerpoint/2010/main" val="3837644013"/>
       </p:ext>
     </p:extLst>
   </p:cSld>
@@ -11982,7 +15608,7 @@
 
 <file path=ppt/webextensions/taskpanes.xml><?xml version="1.0" encoding="utf-8"?>
 <wetp:taskpanes xmlns:wetp="http://schemas.microsoft.com/office/webextensions/taskpanes/2010/11">
-  <wetp:taskpane dockstate="right" visibility="0" width="438" row="1">
+  <wetp:taskpane dockstate="right" visibility="0" width="438" row="0">
     <wetp:webextensionref xmlns:r="http://schemas.openxmlformats.org/officeDocument/2006/relationships" r:id="rId1"/>
   </wetp:taskpane>
 </wetp:taskpanes>
